--- a/presentation/Презентация.pptx
+++ b/presentation/Презентация.pptx
@@ -1,6 +1,6 @@
 
 <file path=ppt/presentation.xml><?xml version="1.0" encoding="utf-8"?>
-<p:presentation xmlns:a="http://schemas.openxmlformats.org/drawingml/2006/main" xmlns:r="http://schemas.openxmlformats.org/officeDocument/2006/relationships" xmlns:p="http://schemas.openxmlformats.org/presentationml/2006/main" showSpecialPlsOnTitleSld="0" strictFirstAndLastChars="0" embedTrueTypeFonts="0" saveSubsetFonts="0" autoCompressPictures="0">
+<p:presentation xmlns:a="http://schemas.openxmlformats.org/drawingml/2006/main" xmlns:r="http://schemas.openxmlformats.org/officeDocument/2006/relationships" xmlns:p="http://schemas.openxmlformats.org/presentationml/2006/main" showSpecialPlsOnTitleSld="0" strictFirstAndLastChars="0" autoCompressPictures="0">
   <p:sldMasterIdLst>
     <p:sldMasterId id="2147483648" r:id="rId1"/>
   </p:sldMasterIdLst>
@@ -1287,9 +1287,10 @@
               <a:rPr lang="ru-RU">
                 <a:latin typeface="Arial" panose="020B0604020202020204" pitchFamily="34" charset="0"/>
               </a:rPr>
-              <a:t>Композит сочетает матрицу и наполнитель. Матрица – это связующее, которое удерживает компоненты. Наполнитель – второй компонент, например усиливающие волокна. В самой таблице конкретные типы материалов не указаны, поэтому я не приписываю их наблюдениям.
-В работе оцениваются две конечные характеристики. Модуль упругости при растяжении характеризует жёсткость: чем он выше, тем меньше материал удлиняется при том же напряжении в области обратимой деформации. После снятия нагрузки форма возвращается. Прочность при растяжении – предельное напряжение перед разрушением. Напряжение здесь означает нагрузку на единицу площади поперечного сечения.
-Источники: РПЗ, таблица 1.</a:t>
+              <a:t>Свойства готового материала зависят от сочетания компонентов и условий изготовления. Задача работы – прогнозировать эти свойства по имеющимся характеристикам.
+Связующее, или матрица, соединяет компоненты в единый материал и передаёт нагрузку. Наполнитель влияет на свойства материала и может выполнять армирующую функцию, то есть усиливать материал.
+В работе оцениваются две конечные характеристики. Модуль упругости при растяжении показывает сопротивление обратимому растяжению: после снятия нагрузки форма восстанавливается. Прочность при растяжении – предельное напряжение перед разрушением. Напряжение здесь означает нагрузку на единицу площади поперечного сечения.
+Источники: РПЗ, введение, с. 3.</a:t>
             </a:r>
             <a:endParaRPr>
               <a:latin typeface="Arial" panose="020B0604020202020204" pitchFamily="34" charset="0"/>
@@ -1358,8 +1359,8 @@
               <a:rPr lang="ru-RU">
                 <a:latin typeface="Arial" panose="020B0604020202020204" pitchFamily="34" charset="0"/>
               </a:rPr>
-              <a:t>Исходные данные находились в двух таблицах Excel. Применён INNER JOIN: после объединения оставлены только строки, которые присутствуют в обеих таблицах. Их сопоставили по исходному индексу по правилу «одна строка к одной». Получено 1023 наблюдения и 13 полей. Семнадцать строк второй таблицы не имели пары и не вошли в итоговый набор. Пропусков и полных дубликатов нет.
-При этом происхождение образцов, группы, партии и часть единиц измерения в материалах не описаны. Это ограничивает интерпретацию и возможность проверки переноса результата на новые материалы.
+              <a:t>Исходные данные находились в двух таблицах Excel, которые дополняют друг друга. Применён INNER JOIN: таблицы сопоставили по исходному индексу и оставили только строки, присутствующие в обеих таблицах. Получено 1023 наблюдения с 13 показателями; 17 строк второй таблицы без пары не вошли в итоговый набор. Пропусков и полных дубликатов нет.
+После объединения каждая строка содержит характеристики и известные конечные свойства. Такая строка служит примером, на котором можно обучать и проверять модель. Происхождение образцов, группы, партии и часть единиц измерения не описаны; это ограничение учитывается при интерпретации результатов.
 Источники: РПЗ, таблица 4; docs/data_dictionary.md.</a:t>
             </a:r>
             <a:endParaRPr>
@@ -1429,9 +1430,10 @@
               <a:rPr lang="ru-RU">
                 <a:latin typeface="Arial" panose="020B0604020202020204" pitchFamily="34" charset="0"/>
               </a:rPr>
-              <a:t>Для двух прямых задач использовались 11 входных параметров состава и технологии. Первая цель – модуль упругости при растяжении, вторая – прочность при растяжении. Обе конечные характеристики исключены из входов, поэтому модель не получает готовый ответ.
-Отдельная задача – восстановление соотношения матрица–наполнитель. Для неё используются 12 остальных полей, включая уже известные модуль и прочность. Это оценка наблюдаемого отношения по известному профилю. Она не оптимизирует рецептуру и не предлагает новый состав.
-Источники: РПЗ, таблица 1; docs/data_dictionary.md.</a:t>
+              <a:t>Для прямого прогнозирования используются 11 характеристик состава и технологии. Из 1023 строк 716 образуют обучающую выборку, а 307 – независимую тестовую выборку. На обучающей части модель учится связывать 11 входных характеристик с известными конечными свойствами, а тестовая часть показывает качество на данных, которые не использовались при обучении.
+Для нового набора из 11 характеристик модель выдаёт две оценки: модуль упругости при растяжении в гигапаскалях и прочность при растяжении в мегапаскалях. Сами конечные свойства в эти 11 входов не входят.
+Отдельно решается дополнительная задача: по 12 другим известным показателям, включая известные модуль и прочность, оценивается соотношение матрица–наполнитель. Эта задача отделена от двух прямых прогнозов и в приложение не включена.
+Источники: РПЗ, раздел 1.1, с. 4–5; docs/data_dictionary.md.</a:t>
             </a:r>
             <a:endParaRPr>
               <a:latin typeface="Arial" panose="020B0604020202020204" pitchFamily="34" charset="0"/>
@@ -14947,16 +14949,14 @@
                 <a:solidFill>
                   <a:srgbClr val="F1BE29"/>
                 </a:solidFill>
-                <a:latin typeface="Arial" panose="020B0604020202020204" pitchFamily="34" charset="0"/>
                 <a:cs typeface="Arial"/>
               </a:rPr>
-              <a:t>Композит сочетает матрицу и наполнитель</a:t>
+              <a:t>Свойства зависят от сочетания компонентов и условий изготовления</a:t>
             </a:r>
             <a:endParaRPr sz="2200" b="1" i="0">
               <a:solidFill>
                 <a:srgbClr val="F1BE29"/>
               </a:solidFill>
-              <a:latin typeface="Arial" panose="020B0604020202020204" pitchFamily="34" charset="0"/>
               <a:cs typeface="Arial"/>
             </a:endParaRPr>
           </a:p>
@@ -15040,7 +15040,7 @@
                   <a:latin typeface="Arial" panose="020B0604020202020204" pitchFamily="34" charset="0"/>
                   <a:cs typeface="Arial" pitchFamily="2" charset="0"/>
                 </a:rPr>
-                <a:t>Постановка задачи и основные понятия</a:t>
+                <a:t>Композиционный материал и прогнозируемые свойства</a:t>
               </a:r>
               <a:endParaRPr lang="ru-RU" sz="2600" b="1" spc="0" dirty="0">
                 <a:solidFill>
@@ -15463,8 +15463,25 @@
                 <a:latin typeface="Arial" panose="020B0604020202020204" pitchFamily="34" charset="0"/>
                 <a:cs typeface="Arial"/>
               </a:rPr>
-              <a:t>Матрица
-связующее, которое удерживает компоненты</a:t>
+              <a:t>Связующее (матрица)</a:t>
+            </a:r>
+          </a:p>
+          <a:p>
+            <a:pPr marL="0" indent="0" algn="l">
+              <a:lnSpc>
+                <a:spcPct val="100000"/>
+              </a:lnSpc>
+              <a:buNone/>
+            </a:pPr>
+            <a:r>
+              <a:rPr lang="ru-RU" sz="1900" i="0">
+                <a:solidFill>
+                  <a:srgbClr val="595959"/>
+                </a:solidFill>
+                <a:latin typeface="Arial" panose="020B0604020202020204" pitchFamily="34" charset="0"/>
+                <a:cs typeface="Arial"/>
+              </a:rPr>
+              <a:t>соединяет компоненты и передаёт нагрузку</a:t>
             </a:r>
             <a:endParaRPr sz="1900" i="0">
               <a:solidFill>
@@ -15609,8 +15626,25 @@
                 <a:latin typeface="Arial" panose="020B0604020202020204" pitchFamily="34" charset="0"/>
                 <a:cs typeface="Arial"/>
               </a:rPr>
-              <a:t>Наполнитель
-второй компонент, например усиливающие волокна</a:t>
+              <a:t>Наполнитель</a:t>
+            </a:r>
+          </a:p>
+          <a:p>
+            <a:pPr marL="0" indent="0" algn="l">
+              <a:lnSpc>
+                <a:spcPct val="100000"/>
+              </a:lnSpc>
+              <a:buNone/>
+            </a:pPr>
+            <a:r>
+              <a:rPr lang="ru-RU" sz="1900" i="0">
+                <a:solidFill>
+                  <a:srgbClr val="595959"/>
+                </a:solidFill>
+                <a:latin typeface="Arial" panose="020B0604020202020204" pitchFamily="34" charset="0"/>
+                <a:cs typeface="Arial"/>
+              </a:rPr>
+              <a:t>влияет на свойства; может усиливать материал</a:t>
             </a:r>
             <a:endParaRPr sz="1900" i="0">
               <a:solidFill>
@@ -15755,8 +15789,25 @@
                 <a:latin typeface="Arial" panose="020B0604020202020204" pitchFamily="34" charset="0"/>
                 <a:cs typeface="Arial"/>
               </a:rPr>
-              <a:t>Две характеристики
-модуль упругости и прочность при растяжении</a:t>
+              <a:t>Задача работы</a:t>
+            </a:r>
+          </a:p>
+          <a:p>
+            <a:pPr marL="0" indent="0" algn="l">
+              <a:lnSpc>
+                <a:spcPct val="100000"/>
+              </a:lnSpc>
+              <a:buNone/>
+            </a:pPr>
+            <a:r>
+              <a:rPr lang="ru-RU" sz="1900" i="0">
+                <a:solidFill>
+                  <a:srgbClr val="595959"/>
+                </a:solidFill>
+                <a:latin typeface="Arial" panose="020B0604020202020204" pitchFamily="34" charset="0"/>
+                <a:cs typeface="Arial"/>
+              </a:rPr>
+              <a:t>прогнозировать свойства по имеющимся характеристикам</a:t>
             </a:r>
             <a:endParaRPr sz="1900" i="0">
               <a:solidFill>
@@ -15825,18 +15876,118 @@
               <a:buNone/>
             </a:pPr>
             <a:r>
-              <a:rPr lang="ru-RU" sz="1800" i="0">
+              <a:rPr lang="ru-RU" sz="1600" i="0">
                 <a:solidFill>
                   <a:srgbClr val="262626"/>
                 </a:solidFill>
                 <a:latin typeface="Arial" panose="020B0604020202020204" pitchFamily="34" charset="0"/>
                 <a:cs typeface="Arial"/>
               </a:rPr>
-              <a:t>Цель
-Проверить, можно ли по параметрам состава и технологии оценить конечные свойства
-Расчёт не заменяет физическое испытание</a:t>
+              <a:t>Что прогнозируем</a:t>
             </a:r>
-            <a:endParaRPr sz="1800" i="0">
+          </a:p>
+          <a:p>
+            <a:pPr marL="0" indent="0" algn="l">
+              <a:lnSpc>
+                <a:spcPct val="105000"/>
+              </a:lnSpc>
+              <a:buNone/>
+            </a:pPr>
+            <a:endParaRPr lang="ru-RU" sz="1600" i="0">
+              <a:solidFill>
+                <a:srgbClr val="262626"/>
+              </a:solidFill>
+              <a:latin typeface="Arial" panose="020B0604020202020204" pitchFamily="34" charset="0"/>
+              <a:cs typeface="Arial"/>
+            </a:endParaRPr>
+          </a:p>
+          <a:p>
+            <a:pPr marL="0" indent="0" algn="l">
+              <a:lnSpc>
+                <a:spcPct val="105000"/>
+              </a:lnSpc>
+              <a:buNone/>
+            </a:pPr>
+            <a:r>
+              <a:rPr lang="ru-RU" sz="1600" i="0">
+                <a:solidFill>
+                  <a:srgbClr val="262626"/>
+                </a:solidFill>
+                <a:latin typeface="Arial" panose="020B0604020202020204" pitchFamily="34" charset="0"/>
+                <a:cs typeface="Arial"/>
+              </a:rPr>
+              <a:t>Модуль упругости при растяжении</a:t>
+            </a:r>
+          </a:p>
+          <a:p>
+            <a:pPr marL="0" indent="0" algn="l">
+              <a:lnSpc>
+                <a:spcPct val="105000"/>
+              </a:lnSpc>
+              <a:buNone/>
+            </a:pPr>
+            <a:r>
+              <a:rPr lang="ru-RU" sz="1600" i="0">
+                <a:solidFill>
+                  <a:srgbClr val="262626"/>
+                </a:solidFill>
+                <a:latin typeface="Arial" panose="020B0604020202020204" pitchFamily="34" charset="0"/>
+                <a:cs typeface="Arial"/>
+              </a:rPr>
+              <a:t>сопротивление обратимому растяжению</a:t>
+            </a:r>
+          </a:p>
+          <a:p>
+            <a:pPr marL="0" indent="0" algn="l">
+              <a:lnSpc>
+                <a:spcPct val="105000"/>
+              </a:lnSpc>
+              <a:buNone/>
+            </a:pPr>
+            <a:endParaRPr lang="ru-RU" sz="1600" i="0">
+              <a:solidFill>
+                <a:srgbClr val="262626"/>
+              </a:solidFill>
+              <a:latin typeface="Arial" panose="020B0604020202020204" pitchFamily="34" charset="0"/>
+              <a:cs typeface="Arial"/>
+            </a:endParaRPr>
+          </a:p>
+          <a:p>
+            <a:pPr marL="0" indent="0" algn="l">
+              <a:lnSpc>
+                <a:spcPct val="105000"/>
+              </a:lnSpc>
+              <a:buNone/>
+            </a:pPr>
+            <a:r>
+              <a:rPr lang="ru-RU" sz="1600" i="0">
+                <a:solidFill>
+                  <a:srgbClr val="262626"/>
+                </a:solidFill>
+                <a:latin typeface="Arial" panose="020B0604020202020204" pitchFamily="34" charset="0"/>
+                <a:cs typeface="Arial"/>
+              </a:rPr>
+              <a:t>Прочность при растяжении</a:t>
+            </a:r>
+          </a:p>
+          <a:p>
+            <a:pPr marL="0" indent="0" algn="l">
+              <a:lnSpc>
+                <a:spcPct val="105000"/>
+              </a:lnSpc>
+              <a:buNone/>
+            </a:pPr>
+            <a:r>
+              <a:rPr lang="ru-RU" sz="1600" i="0">
+                <a:solidFill>
+                  <a:srgbClr val="262626"/>
+                </a:solidFill>
+                <a:latin typeface="Arial" panose="020B0604020202020204" pitchFamily="34" charset="0"/>
+                <a:cs typeface="Arial"/>
+              </a:rPr>
+              <a:t>предельное напряжение до разрушения</a:t>
+            </a:r>
+            <a:endParaRPr sz="1600" i="0">
               <a:solidFill>
                 <a:srgbClr val="262626"/>
               </a:solidFill>
@@ -15870,15 +16021,22 @@
               <a:buNone/>
             </a:pPr>
             <a:r>
-              <a:rPr sz="1600" b="0" i="0">
+              <a:rPr lang="ru-RU" sz="1600" b="0" i="0">
                 <a:solidFill>
                   <a:srgbClr val="595959"/>
                 </a:solidFill>
                 <a:latin typeface="Arial" panose="020B0604020202020204" pitchFamily="34" charset="0"/>
                 <a:cs typeface="Arial"/>
               </a:rPr>
-              <a:t>Источник: РПЗ, табл. 1, с. 4</a:t>
+              <a:t>Источник: РПЗ, введение, с. 3</a:t>
             </a:r>
+            <a:endParaRPr sz="1600" b="0" i="0">
+              <a:solidFill>
+                <a:srgbClr val="595959"/>
+              </a:solidFill>
+              <a:latin typeface="Arial" panose="020B0604020202020204" pitchFamily="34" charset="0"/>
+              <a:cs typeface="Arial"/>
+            </a:endParaRPr>
           </a:p>
         </p:txBody>
       </p:sp>
@@ -16029,7 +16187,7 @@
                   <a:latin typeface="Arial" panose="020B0604020202020204" pitchFamily="34" charset="0"/>
                   <a:cs typeface="Arial" pitchFamily="2" charset="0"/>
                 </a:rPr>
-                <a:t>Из двух таблиц получено 1023 наблюдения</a:t>
+                <a:t>Исходные данные из двух таблиц</a:t>
               </a:r>
               <a:endParaRPr lang="ru-RU" sz="2600" b="1" spc="0" dirty="0">
                 <a:solidFill>
@@ -16770,7 +16928,7 @@
         <p:spPr>
           <a:xfrm>
             <a:off x="557784" y="3977639"/>
-            <a:ext cx="6766560" cy="411480"/>
+            <a:ext cx="6766560" cy="635000"/>
           </a:xfrm>
           <a:prstGeom prst="rect">
             <a:avLst/>
@@ -16785,16 +16943,31 @@
               <a:buNone/>
             </a:pPr>
             <a:r>
-              <a:rPr lang="ru-RU" sz="1600" i="0">
+              <a:rPr lang="ru-RU" sz="1300" i="0">
                 <a:solidFill>
                   <a:srgbClr val="595959"/>
                 </a:solidFill>
                 <a:latin typeface="Arial" panose="020B0604020202020204" pitchFamily="34" charset="0"/>
                 <a:cs typeface="Arial"/>
               </a:rPr>
-              <a:t>INNER JOIN оставляет только строки, которые присутствуют в обеих таблицах; сопоставление выполнено по исходному индексу</a:t>
+              <a:t>INNER JOIN: оставлены строки, присутствующие в обеих таблицах.</a:t>
             </a:r>
-            <a:endParaRPr sz="1600" i="0">
+          </a:p>
+          <a:p>
+            <a:pPr marL="0" indent="0" algn="l">
+              <a:buNone/>
+            </a:pPr>
+            <a:r>
+              <a:rPr lang="ru-RU" sz="1300" i="0">
+                <a:solidFill>
+                  <a:srgbClr val="595959"/>
+                </a:solidFill>
+                <a:latin typeface="Arial" panose="020B0604020202020204" pitchFamily="34" charset="0"/>
+                <a:cs typeface="Arial"/>
+              </a:rPr>
+              <a:t>Каждая итоговая строка содержит характеристики и известные конечные свойства.</a:t>
+            </a:r>
+            <a:endParaRPr sz="1300" i="0">
               <a:solidFill>
                 <a:srgbClr val="595959"/>
               </a:solidFill>
@@ -16937,8 +17110,22 @@
                 <a:latin typeface="Arial" panose="020B0604020202020204" pitchFamily="34" charset="0"/>
                 <a:cs typeface="Arial"/>
               </a:rPr>
-              <a:t>строк второй таблицы без пары
-они исключены при объединении</a:t>
+              <a:t>строк второй таблицы без пары</a:t>
+            </a:r>
+          </a:p>
+          <a:p>
+            <a:pPr marL="0" indent="0" algn="l">
+              <a:buNone/>
+            </a:pPr>
+            <a:r>
+              <a:rPr lang="ru-RU" sz="1900" i="0">
+                <a:solidFill>
+                  <a:srgbClr val="262626"/>
+                </a:solidFill>
+                <a:latin typeface="Arial" panose="020B0604020202020204" pitchFamily="34" charset="0"/>
+                <a:cs typeface="Arial"/>
+              </a:rPr>
+              <a:t>не вошли в итоговый набор</a:t>
             </a:r>
             <a:endParaRPr sz="1900" i="0">
               <a:solidFill>
@@ -17404,21 +17591,91 @@
                 <a:solidFill>
                   <a:srgbClr val="065CAB"/>
                 </a:solidFill>
-                <a:latin typeface="Arial" panose="020B0604020202020204" pitchFamily="34" charset="0"/>
                 <a:cs typeface="Arial"/>
               </a:rPr>
-              <a:t>Состав и компоненты
-Соотношение матрица–наполнитель; плотность; модуль упругости; отвердитель; эпоксидные группы; температура вспышки
-Поверхностные и расходные параметры
-Поверхностная плотность; потребление смолы
-Параметры нашивки
-Угол; шаг; плотность нашивки</a:t>
+              <a:t>Характеристики состава</a:t>
+            </a:r>
+          </a:p>
+          <a:p>
+            <a:pPr marL="0" indent="0" algn="l">
+              <a:lnSpc>
+                <a:spcPct val="100000"/>
+              </a:lnSpc>
+              <a:spcBef>
+                <a:spcPts val="0"/>
+              </a:spcBef>
+              <a:buNone/>
+            </a:pPr>
+            <a:r>
+              <a:rPr lang="ru-RU" sz="1600" i="0">
+                <a:solidFill>
+                  <a:srgbClr val="065CAB"/>
+                </a:solidFill>
+                <a:cs typeface="Arial"/>
+              </a:rPr>
+              <a:t>Соотношение матрица–наполнитель; плотность; модуль упругости; отвердитель; эпоксидные группы; температура вспышки</a:t>
+            </a:r>
+          </a:p>
+          <a:p>
+            <a:pPr marL="0" indent="0" algn="l">
+              <a:lnSpc>
+                <a:spcPct val="100000"/>
+              </a:lnSpc>
+              <a:spcBef>
+                <a:spcPts val="0"/>
+              </a:spcBef>
+              <a:buNone/>
+            </a:pPr>
+            <a:endParaRPr lang="ru-RU" sz="1600" i="0">
+              <a:solidFill>
+                <a:srgbClr val="065CAB"/>
+              </a:solidFill>
+              <a:cs typeface="Arial"/>
+            </a:endParaRPr>
+          </a:p>
+          <a:p>
+            <a:pPr marL="0" indent="0" algn="l">
+              <a:lnSpc>
+                <a:spcPct val="100000"/>
+              </a:lnSpc>
+              <a:spcBef>
+                <a:spcPts val="0"/>
+              </a:spcBef>
+              <a:buNone/>
+            </a:pPr>
+            <a:r>
+              <a:rPr lang="ru-RU" sz="1600" i="0">
+                <a:solidFill>
+                  <a:srgbClr val="065CAB"/>
+                </a:solidFill>
+                <a:cs typeface="Arial"/>
+              </a:rPr>
+              <a:t>Характеристики изготовления</a:t>
+            </a:r>
+          </a:p>
+          <a:p>
+            <a:pPr marL="0" indent="0" algn="l">
+              <a:lnSpc>
+                <a:spcPct val="100000"/>
+              </a:lnSpc>
+              <a:spcBef>
+                <a:spcPts val="0"/>
+              </a:spcBef>
+              <a:buNone/>
+            </a:pPr>
+            <a:r>
+              <a:rPr lang="ru-RU" sz="1600" i="0">
+                <a:solidFill>
+                  <a:srgbClr val="065CAB"/>
+                </a:solidFill>
+                <a:cs typeface="Arial"/>
+              </a:rPr>
+              <a:t>Поверхностная плотность; потребление смолы; угол, шаг и плотность нашивки</a:t>
             </a:r>
             <a:endParaRPr sz="1600" i="0">
               <a:solidFill>
                 <a:srgbClr val="262626"/>
               </a:solidFill>
-              <a:latin typeface="Arial" panose="020B0604020202020204" pitchFamily="34" charset="0"/>
               <a:cs typeface="Arial"/>
             </a:endParaRPr>
           </a:p>
@@ -17448,15 +17705,20 @@
               <a:buNone/>
             </a:pPr>
             <a:r>
-              <a:rPr sz="2000" b="1" i="0">
+              <a:rPr lang="ru-RU" sz="2000" b="1" i="0">
                 <a:solidFill>
                   <a:srgbClr val="F1BE29"/>
                 </a:solidFill>
-                <a:latin typeface="Arial" panose="020B0604020202020204" pitchFamily="34" charset="0"/>
                 <a:cs typeface="Arial"/>
               </a:rPr>
-              <a:t>Цели</a:t>
+              <a:t>Обучение, проверка и результат</a:t>
             </a:r>
+            <a:endParaRPr sz="2000" b="1" i="0">
+              <a:solidFill>
+                <a:srgbClr val="F1BE29"/>
+              </a:solidFill>
+              <a:cs typeface="Arial"/>
+            </a:endParaRPr>
           </a:p>
         </p:txBody>
       </p:sp>
@@ -17490,16 +17752,14 @@
                 <a:solidFill>
                   <a:srgbClr val="F1BE29"/>
                 </a:solidFill>
-                <a:latin typeface="Arial" panose="020B0604020202020204" pitchFamily="34" charset="0"/>
                 <a:cs typeface="Arial"/>
               </a:rPr>
-              <a:t>Входы прямых задач: 11 исходных полей</a:t>
+              <a:t>Вход прямых моделей: 11 характеристик</a:t>
             </a:r>
             <a:endParaRPr sz="1800" b="1" i="0">
               <a:solidFill>
                 <a:srgbClr val="F1BE29"/>
               </a:solidFill>
-              <a:latin typeface="Arial" panose="020B0604020202020204" pitchFamily="34" charset="0"/>
               <a:cs typeface="Arial"/>
             </a:endParaRPr>
           </a:p>
@@ -17583,7 +17843,7 @@
                   <a:latin typeface="Arial" panose="020B0604020202020204" pitchFamily="34" charset="0"/>
                   <a:cs typeface="Arial" pitchFamily="2" charset="0"/>
                 </a:rPr>
-                <a:t>Входные данные и три задачи регрессии</a:t>
+                <a:t>Как модель получает прогноз</a:t>
               </a:r>
               <a:endParaRPr lang="ru-RU" sz="2600" b="1" spc="0" dirty="0">
                 <a:solidFill>
@@ -17930,18 +18190,103 @@
               <a:buNone/>
             </a:pPr>
             <a:r>
-              <a:rPr lang="ru-RU" sz="1600" i="0">
+              <a:rPr lang="ru-RU" sz="1500" i="0">
                 <a:solidFill>
                   <a:srgbClr val="595959"/>
                 </a:solidFill>
                 <a:latin typeface="Arial" panose="020B0604020202020204" pitchFamily="34" charset="0"/>
                 <a:cs typeface="Arial"/>
               </a:rPr>
-              <a:t>Две прямые задачи
-Модуль упругости при растяжении, ГПа – жёсткость при обратимом растяжении
-Прочность при растяжении, МПа – предельное напряжение перед разрушением</a:t>
+              <a:t>Обучение и проверка</a:t>
             </a:r>
-            <a:endParaRPr sz="1600" i="0">
+          </a:p>
+          <a:p>
+            <a:pPr marL="0" indent="0" algn="l">
+              <a:lnSpc>
+                <a:spcPct val="100000"/>
+              </a:lnSpc>
+              <a:buNone/>
+            </a:pPr>
+            <a:r>
+              <a:rPr lang="ru-RU" sz="1500" i="0">
+                <a:solidFill>
+                  <a:srgbClr val="595959"/>
+                </a:solidFill>
+                <a:latin typeface="Arial" panose="020B0604020202020204" pitchFamily="34" charset="0"/>
+                <a:cs typeface="Arial"/>
+              </a:rPr>
+              <a:t>716 строк – обучающая выборка</a:t>
+            </a:r>
+          </a:p>
+          <a:p>
+            <a:pPr marL="0" indent="0" algn="l">
+              <a:lnSpc>
+                <a:spcPct val="100000"/>
+              </a:lnSpc>
+              <a:buNone/>
+            </a:pPr>
+            <a:r>
+              <a:rPr lang="ru-RU" sz="1500" i="0">
+                <a:solidFill>
+                  <a:srgbClr val="595959"/>
+                </a:solidFill>
+                <a:latin typeface="Arial" panose="020B0604020202020204" pitchFamily="34" charset="0"/>
+                <a:cs typeface="Arial"/>
+              </a:rPr>
+              <a:t>307 строк – независимая тестовая выборка</a:t>
+            </a:r>
+          </a:p>
+          <a:p>
+            <a:pPr marL="0" indent="0" algn="l">
+              <a:lnSpc>
+                <a:spcPct val="100000"/>
+              </a:lnSpc>
+              <a:buNone/>
+            </a:pPr>
+            <a:endParaRPr lang="ru-RU" sz="1500" i="0">
+              <a:solidFill>
+                <a:srgbClr val="595959"/>
+              </a:solidFill>
+              <a:latin typeface="Arial" panose="020B0604020202020204" pitchFamily="34" charset="0"/>
+              <a:cs typeface="Arial"/>
+            </a:endParaRPr>
+          </a:p>
+          <a:p>
+            <a:pPr marL="0" indent="0" algn="l">
+              <a:lnSpc>
+                <a:spcPct val="100000"/>
+              </a:lnSpc>
+              <a:buNone/>
+            </a:pPr>
+            <a:r>
+              <a:rPr lang="ru-RU" sz="1500" i="0">
+                <a:solidFill>
+                  <a:srgbClr val="595959"/>
+                </a:solidFill>
+                <a:latin typeface="Arial" panose="020B0604020202020204" pitchFamily="34" charset="0"/>
+                <a:cs typeface="Arial"/>
+              </a:rPr>
+              <a:t>Новый набор из 11 характеристик →</a:t>
+            </a:r>
+          </a:p>
+          <a:p>
+            <a:pPr marL="0" indent="0" algn="l">
+              <a:lnSpc>
+                <a:spcPct val="100000"/>
+              </a:lnSpc>
+              <a:buNone/>
+            </a:pPr>
+            <a:r>
+              <a:rPr lang="ru-RU" sz="1500" i="0">
+                <a:solidFill>
+                  <a:srgbClr val="595959"/>
+                </a:solidFill>
+                <a:latin typeface="Arial" panose="020B0604020202020204" pitchFamily="34" charset="0"/>
+                <a:cs typeface="Arial"/>
+              </a:rPr>
+              <a:t>две оценки: модуль, ГПа, и прочность, МПа</a:t>
+            </a:r>
+            <a:endParaRPr sz="1500" i="0">
               <a:solidFill>
                 <a:srgbClr val="595959"/>
               </a:solidFill>
@@ -18008,18 +18353,70 @@
               <a:buNone/>
             </a:pPr>
             <a:r>
-              <a:rPr lang="ru-RU" sz="1600" i="0">
+              <a:rPr lang="ru-RU" i="0">
                 <a:solidFill>
                   <a:srgbClr val="595959"/>
                 </a:solidFill>
                 <a:latin typeface="Arial" panose="020B0604020202020204" pitchFamily="34" charset="0"/>
                 <a:cs typeface="Arial"/>
               </a:rPr>
-              <a:t>Отдельная задача отношения
-12 известных полей, включая известные модуль и прочность
-Результат: соотношение матрица–наполнитель</a:t>
+              <a:t>Дополнительная задача</a:t>
             </a:r>
-            <a:endParaRPr sz="1600" i="0">
+          </a:p>
+          <a:p>
+            <a:pPr marL="0" indent="0" algn="l">
+              <a:lnSpc>
+                <a:spcPct val="100000"/>
+              </a:lnSpc>
+              <a:buNone/>
+            </a:pPr>
+            <a:r>
+              <a:rPr lang="ru-RU" i="0">
+                <a:solidFill>
+                  <a:srgbClr val="595959"/>
+                </a:solidFill>
+                <a:latin typeface="Arial" panose="020B0604020202020204" pitchFamily="34" charset="0"/>
+                <a:cs typeface="Arial"/>
+              </a:rPr>
+              <a:t>12 известных показателей, включая известные модуль и прочность →</a:t>
+            </a:r>
+          </a:p>
+          <a:p>
+            <a:pPr marL="0" indent="0" algn="l">
+              <a:lnSpc>
+                <a:spcPct val="100000"/>
+              </a:lnSpc>
+              <a:buNone/>
+            </a:pPr>
+            <a:r>
+              <a:rPr lang="ru-RU" i="0">
+                <a:solidFill>
+                  <a:srgbClr val="595959"/>
+                </a:solidFill>
+                <a:latin typeface="Arial" panose="020B0604020202020204" pitchFamily="34" charset="0"/>
+                <a:cs typeface="Arial"/>
+              </a:rPr>
+              <a:t>соотношение матрица–наполнитель</a:t>
+            </a:r>
+          </a:p>
+          <a:p>
+            <a:pPr marL="0" indent="0" algn="l">
+              <a:lnSpc>
+                <a:spcPct val="100000"/>
+              </a:lnSpc>
+              <a:buNone/>
+            </a:pPr>
+            <a:r>
+              <a:rPr lang="ru-RU" i="0">
+                <a:solidFill>
+                  <a:srgbClr val="595959"/>
+                </a:solidFill>
+                <a:latin typeface="Arial" panose="020B0604020202020204" pitchFamily="34" charset="0"/>
+                <a:cs typeface="Arial"/>
+              </a:rPr>
+              <a:t>В приложение не включена</a:t>
+            </a:r>
+            <a:endParaRPr i="0">
               <a:solidFill>
                 <a:srgbClr val="065CAB"/>
               </a:solidFill>
@@ -18056,16 +18453,16 @@
               <a:buNone/>
             </a:pPr>
             <a:r>
-              <a:rPr lang="ru-RU" b="1" i="0">
+              <a:rPr lang="ru-RU" sz="1000" b="1" i="0">
                 <a:solidFill>
                   <a:srgbClr val="595959"/>
                 </a:solidFill>
                 <a:latin typeface="Arial" panose="020B0604020202020204" pitchFamily="34" charset="0"/>
                 <a:cs typeface="Arial"/>
               </a:rPr>
-              <a:t>Входной «модуль упругости» и целевой «модуль упругости при растяжении» – разные столбцы. Обе цели исключены из входов прямых моделей. Задача отношения не подбирает рецептуру.</a:t>
+              <a:t>Конечные свойства исключены из 11 входов прямых моделей. Входной «модуль упругости» и целевой «модуль упругости при растяжении» – разные столбцы.</a:t>
             </a:r>
-            <a:endParaRPr b="1" i="0">
+            <a:endParaRPr sz="1000" b="1" i="0">
               <a:solidFill>
                 <a:srgbClr val="595959"/>
               </a:solidFill>
@@ -18099,15 +18496,22 @@
               <a:buNone/>
             </a:pPr>
             <a:r>
-              <a:rPr sz="1600" b="0" i="0">
+              <a:rPr lang="ru-RU" sz="1600" b="0" i="0">
                 <a:solidFill>
                   <a:srgbClr val="595959"/>
                 </a:solidFill>
                 <a:latin typeface="Arial" panose="020B0604020202020204" pitchFamily="34" charset="0"/>
                 <a:cs typeface="Arial"/>
               </a:rPr>
-              <a:t>Источник: РПЗ, табл. 1, с. 4; словарь данных репозитория</a:t>
+              <a:t>Источник: РПЗ, разд. 1.1, с. 4–5; словарь данных репозитория</a:t>
             </a:r>
+            <a:endParaRPr sz="1600" b="0" i="0">
+              <a:solidFill>
+                <a:srgbClr val="595959"/>
+              </a:solidFill>
+              <a:latin typeface="Arial" panose="020B0604020202020204" pitchFamily="34" charset="0"/>
+              <a:cs typeface="Arial"/>
+            </a:endParaRPr>
           </a:p>
         </p:txBody>
       </p:sp>

--- a/presentation/Презентация.pptx
+++ b/presentation/Презентация.pptx
@@ -1290,7 +1290,7 @@
               <a:t>Свойства готового материала зависят от сочетания компонентов и условий изготовления. Задача работы – прогнозировать эти свойства по имеющимся характеристикам.
 Связующее, или матрица, соединяет компоненты в единый материал и передаёт нагрузку. Наполнитель влияет на свойства материала и может выполнять армирующую функцию, то есть усиливать материал.
 В работе оцениваются две конечные характеристики. Модуль упругости при растяжении показывает сопротивление обратимому растяжению: после снятия нагрузки форма восстанавливается. Прочность при растяжении – предельное напряжение перед разрушением. Напряжение здесь означает нагрузку на единицу площади поперечного сечения.
-Источники: РПЗ, введение, с. 3.</a:t>
+Источники: РПЗ, введение.</a:t>
             </a:r>
             <a:endParaRPr>
               <a:latin typeface="Arial" panose="020B0604020202020204" pitchFamily="34" charset="0"/>
@@ -1361,7 +1361,7 @@
               </a:rPr>
               <a:t>Исходные данные находились в двух таблицах Excel, которые дополняют друг друга. Применён INNER JOIN: таблицы сопоставили по исходному индексу и оставили только строки, присутствующие в обеих таблицах. Получено 1023 наблюдения с 13 показателями; 17 строк второй таблицы без пары не вошли в итоговый набор. Пропусков и полных дубликатов нет.
 После объединения каждая строка содержит характеристики и известные конечные свойства. Такая строка служит примером, на котором можно обучать и проверять модель. Происхождение образцов, группы, партии и часть единиц измерения не описаны; это ограничение учитывается при интерпретации результатов.
-Источники: РПЗ, таблица 4; docs/data_dictionary.md.</a:t>
+Источники: РПЗ, таблица 5; docs/data_dictionary.md.</a:t>
             </a:r>
             <a:endParaRPr>
               <a:latin typeface="Arial" panose="020B0604020202020204" pitchFamily="34" charset="0"/>
@@ -1433,7 +1433,7 @@
               <a:t>Для прямого прогнозирования используются 11 характеристик состава и технологии. Из 1023 строк 716 образуют обучающую выборку, а 307 – независимую тестовую выборку. На обучающей части модель учится связывать 11 входных характеристик с известными конечными свойствами, а тестовая часть показывает качество на данных, которые не использовались при обучении.
 Для нового набора из 11 характеристик модель выдаёт две оценки: модуль упругости при растяжении в гигапаскалях и прочность при растяжении в мегапаскалях. Сами конечные свойства в эти 11 входов не входят.
 Отдельно решается дополнительная задача: по 12 другим известным показателям, включая известные модуль и прочность, оценивается соотношение матрица–наполнитель. Эта задача отделена от двух прямых прогнозов и в приложение не включена.
-Источники: РПЗ, раздел 1.1, с. 4–5; docs/data_dictionary.md.</a:t>
+Источники: РПЗ, раздел 1.1; docs/data_dictionary.md.</a:t>
             </a:r>
             <a:endParaRPr>
               <a:latin typeface="Arial" panose="020B0604020202020204" pitchFamily="34" charset="0"/>
@@ -8900,15 +8900,32 @@
               <a:buNone/>
             </a:pPr>
             <a:r>
-              <a:rPr sz="1600" b="0" i="0">
+              <a:rPr lang="ru-RU" sz="1600" b="0" i="0">
                 <a:solidFill>
                   <a:srgbClr val="595959"/>
                 </a:solidFill>
                 <a:latin typeface="Arial" panose="020B0604020202020204" pitchFamily="34" charset="0"/>
                 <a:cs typeface="Arial"/>
               </a:rPr>
-              <a:t>Источник: РПЗ, рис. 8, с. 21; reports/evaluation/metrics.csv</a:t>
+              <a:t>Источник: РПЗ, рис. 8; </a:t>
             </a:r>
+            <a:r>
+              <a:rPr lang="en-US" sz="1600" b="0" i="0">
+                <a:solidFill>
+                  <a:srgbClr val="595959"/>
+                </a:solidFill>
+                <a:latin typeface="Arial" panose="020B0604020202020204" pitchFamily="34" charset="0"/>
+                <a:cs typeface="Arial"/>
+              </a:rPr>
+              <a:t>reports/evaluation/metrics.csv</a:t>
+            </a:r>
+            <a:endParaRPr sz="1600" b="0" i="0">
+              <a:solidFill>
+                <a:srgbClr val="595959"/>
+              </a:solidFill>
+              <a:latin typeface="Arial" panose="020B0604020202020204" pitchFamily="34" charset="0"/>
+              <a:cs typeface="Arial"/>
+            </a:endParaRPr>
           </a:p>
         </p:txBody>
       </p:sp>
@@ -10148,15 +10165,22 @@
               <a:buNone/>
             </a:pPr>
             <a:r>
-              <a:rPr sz="1600" b="0" i="0">
+              <a:rPr lang="ru-RU" sz="1600" b="0" i="0">
                 <a:solidFill>
                   <a:srgbClr val="595959"/>
                 </a:solidFill>
                 <a:latin typeface="Arial" panose="020B0604020202020204" pitchFamily="34" charset="0"/>
                 <a:cs typeface="Arial"/>
               </a:rPr>
-              <a:t>Источник: РПЗ, разд. 2.4, с. 24</a:t>
+              <a:t>Источник: РПЗ, разд. 2.4</a:t>
             </a:r>
+            <a:endParaRPr sz="1600" b="0" i="0">
+              <a:solidFill>
+                <a:srgbClr val="595959"/>
+              </a:solidFill>
+              <a:latin typeface="Arial" panose="020B0604020202020204" pitchFamily="34" charset="0"/>
+              <a:cs typeface="Arial"/>
+            </a:endParaRPr>
           </a:p>
         </p:txBody>
       </p:sp>
@@ -12413,15 +12437,22 @@
               <a:buNone/>
             </a:pPr>
             <a:r>
-              <a:rPr sz="1600" b="0" i="0">
+              <a:rPr lang="ru-RU" sz="1600" b="0" i="0">
                 <a:solidFill>
                   <a:srgbClr val="595959"/>
                 </a:solidFill>
                 <a:latin typeface="Arial" panose="020B0604020202020204" pitchFamily="34" charset="0"/>
                 <a:cs typeface="Arial"/>
               </a:rPr>
-              <a:t>Источник: РПЗ, рис. 10, с. 23</a:t>
+              <a:t>Источник: РПЗ, рис. 10</a:t>
             </a:r>
+            <a:endParaRPr sz="1600" b="0" i="0">
+              <a:solidFill>
+                <a:srgbClr val="595959"/>
+              </a:solidFill>
+              <a:latin typeface="Arial" panose="020B0604020202020204" pitchFamily="34" charset="0"/>
+              <a:cs typeface="Arial"/>
+            </a:endParaRPr>
           </a:p>
         </p:txBody>
       </p:sp>
@@ -13658,15 +13689,32 @@
               <a:buNone/>
             </a:pPr>
             <a:r>
-              <a:rPr sz="1600" b="0" i="0">
+              <a:rPr lang="ru-RU" sz="1600" b="0" i="0">
                 <a:solidFill>
                   <a:srgbClr val="595959"/>
                 </a:solidFill>
                 <a:latin typeface="Arial" panose="020B0604020202020204" pitchFamily="34" charset="0"/>
                 <a:cs typeface="Arial"/>
               </a:rPr>
-              <a:t>Источник: РПЗ, разд. 2.5, с. 25; docs/application.md</a:t>
+              <a:t>Источник: РПЗ, разд. 2.5; </a:t>
             </a:r>
+            <a:r>
+              <a:rPr lang="en-US" sz="1600" b="0" i="0">
+                <a:solidFill>
+                  <a:srgbClr val="595959"/>
+                </a:solidFill>
+                <a:latin typeface="Arial" panose="020B0604020202020204" pitchFamily="34" charset="0"/>
+                <a:cs typeface="Arial"/>
+              </a:rPr>
+              <a:t>docs/application.md</a:t>
+            </a:r>
+            <a:endParaRPr sz="1600" b="0" i="0">
+              <a:solidFill>
+                <a:srgbClr val="595959"/>
+              </a:solidFill>
+              <a:latin typeface="Arial" panose="020B0604020202020204" pitchFamily="34" charset="0"/>
+              <a:cs typeface="Arial"/>
+            </a:endParaRPr>
           </a:p>
         </p:txBody>
       </p:sp>
@@ -16028,7 +16076,7 @@
                 <a:latin typeface="Arial" panose="020B0604020202020204" pitchFamily="34" charset="0"/>
                 <a:cs typeface="Arial"/>
               </a:rPr>
-              <a:t>Источник: РПЗ, введение, с. 3</a:t>
+              <a:t>Источник: РПЗ, введение</a:t>
             </a:r>
             <a:endParaRPr sz="1600" b="0" i="0">
               <a:solidFill>
@@ -17474,15 +17522,22 @@
               <a:buNone/>
             </a:pPr>
             <a:r>
-              <a:rPr sz="1600" b="0" i="0">
+              <a:rPr lang="ru-RU" sz="1600" b="0" i="0">
                 <a:solidFill>
                   <a:srgbClr val="595959"/>
                 </a:solidFill>
                 <a:latin typeface="Arial" panose="020B0604020202020204" pitchFamily="34" charset="0"/>
                 <a:cs typeface="Arial"/>
               </a:rPr>
-              <a:t>Источник: РПЗ, табл. 4, с. 11; словарь данных репозитория</a:t>
+              <a:t>Источник: РПЗ, табл. 5; словарь данных репозитория</a:t>
             </a:r>
+            <a:endParaRPr sz="1600" b="0" i="0">
+              <a:solidFill>
+                <a:srgbClr val="595959"/>
+              </a:solidFill>
+              <a:latin typeface="Arial" panose="020B0604020202020204" pitchFamily="34" charset="0"/>
+              <a:cs typeface="Arial"/>
+            </a:endParaRPr>
           </a:p>
         </p:txBody>
       </p:sp>
@@ -18503,7 +18558,7 @@
                 <a:latin typeface="Arial" panose="020B0604020202020204" pitchFamily="34" charset="0"/>
                 <a:cs typeface="Arial"/>
               </a:rPr>
-              <a:t>Источник: РПЗ, разд. 1.1, с. 4–5; словарь данных репозитория</a:t>
+              <a:t>Источник: РПЗ, разд. 1.1; словарь данных репозитория</a:t>
             </a:r>
             <a:endParaRPr sz="1600" b="0" i="0">
               <a:solidFill>
@@ -19785,7 +19840,7 @@
                 <a:latin typeface="Arial" panose="020B0604020202020204" pitchFamily="34" charset="0"/>
                 <a:cs typeface="Arial"/>
               </a:rPr>
-              <a:t>Настройки и численное сравнение: РПЗ, таблица 6</a:t>
+              <a:t>Результаты сравнения: РПЗ, таблица 6</a:t>
             </a:r>
             <a:endParaRPr sz="1500" i="0">
               <a:solidFill>
@@ -19868,15 +19923,32 @@
               <a:buNone/>
             </a:pPr>
             <a:r>
-              <a:rPr sz="1600" b="0" i="0">
+              <a:rPr lang="ru-RU" sz="1600" b="0" i="0">
                 <a:solidFill>
                   <a:srgbClr val="595959"/>
                 </a:solidFill>
                 <a:latin typeface="Arial" panose="020B0604020202020204" pitchFamily="34" charset="0"/>
                 <a:cs typeface="Arial"/>
               </a:rPr>
-              <a:t>Источник: РПЗ, табл. 6, с. 19; reports/modeling/cv_summary.csv</a:t>
+              <a:t>Источник: РПЗ, табл. 6; </a:t>
             </a:r>
+            <a:r>
+              <a:rPr lang="en-US" sz="1600" b="0" i="0">
+                <a:solidFill>
+                  <a:srgbClr val="595959"/>
+                </a:solidFill>
+                <a:latin typeface="Arial" panose="020B0604020202020204" pitchFamily="34" charset="0"/>
+                <a:cs typeface="Arial"/>
+              </a:rPr>
+              <a:t>reports/modeling/cv_summary.csv</a:t>
+            </a:r>
+            <a:endParaRPr sz="1600" b="0" i="0">
+              <a:solidFill>
+                <a:srgbClr val="595959"/>
+              </a:solidFill>
+              <a:latin typeface="Arial" panose="020B0604020202020204" pitchFamily="34" charset="0"/>
+              <a:cs typeface="Arial"/>
+            </a:endParaRPr>
           </a:p>
         </p:txBody>
       </p:sp>
@@ -20752,15 +20824,22 @@
               <a:buNone/>
             </a:pPr>
             <a:r>
-              <a:rPr sz="1600" b="0" i="0">
+              <a:rPr lang="ru-RU" sz="1600" b="0" i="0">
                 <a:solidFill>
                   <a:srgbClr val="595959"/>
                 </a:solidFill>
                 <a:latin typeface="Arial" panose="020B0604020202020204" pitchFamily="34" charset="0"/>
                 <a:cs typeface="Arial"/>
               </a:rPr>
-              <a:t>Источник: РПЗ, рис. 1, с. 10</a:t>
+              <a:t>Источник: РПЗ, рис. 1</a:t>
             </a:r>
+            <a:endParaRPr sz="1600" b="0" i="0">
+              <a:solidFill>
+                <a:srgbClr val="595959"/>
+              </a:solidFill>
+              <a:latin typeface="Arial" panose="020B0604020202020204" pitchFamily="34" charset="0"/>
+              <a:cs typeface="Arial"/>
+            </a:endParaRPr>
           </a:p>
         </p:txBody>
       </p:sp>
@@ -21883,15 +21962,22 @@
               <a:buNone/>
             </a:pPr>
             <a:r>
-              <a:rPr sz="1600" b="0" i="0">
+              <a:rPr lang="ru-RU" sz="1600" b="0" i="0">
                 <a:solidFill>
                   <a:srgbClr val="595959"/>
                 </a:solidFill>
                 <a:latin typeface="Arial" panose="020B0604020202020204" pitchFamily="34" charset="0"/>
                 <a:cs typeface="Arial"/>
               </a:rPr>
-              <a:t>Источник: РПЗ, разд. 2.1.3, с. 17</a:t>
+              <a:t>Источник: РПЗ, разд. 2.1.3</a:t>
             </a:r>
+            <a:endParaRPr sz="1600" b="0" i="0">
+              <a:solidFill>
+                <a:srgbClr val="595959"/>
+              </a:solidFill>
+              <a:latin typeface="Arial" panose="020B0604020202020204" pitchFamily="34" charset="0"/>
+              <a:cs typeface="Arial"/>
+            </a:endParaRPr>
           </a:p>
         </p:txBody>
       </p:sp>
@@ -24189,15 +24275,32 @@
               <a:buNone/>
             </a:pPr>
             <a:r>
-              <a:rPr sz="1600" b="0" i="0">
+              <a:rPr lang="ru-RU" sz="1600" b="0" i="0">
                 <a:solidFill>
                   <a:srgbClr val="595959"/>
                 </a:solidFill>
                 <a:latin typeface="Arial" panose="020B0604020202020204" pitchFamily="34" charset="0"/>
                 <a:cs typeface="Arial"/>
               </a:rPr>
-              <a:t>Источник: РПЗ, рис. 8, с. 21; reports/evaluation/metrics.csv</a:t>
+              <a:t>Источник: РПЗ, рис. 8; </a:t>
             </a:r>
+            <a:r>
+              <a:rPr lang="en-US" sz="1600" b="0" i="0">
+                <a:solidFill>
+                  <a:srgbClr val="595959"/>
+                </a:solidFill>
+                <a:latin typeface="Arial" panose="020B0604020202020204" pitchFamily="34" charset="0"/>
+                <a:cs typeface="Arial"/>
+              </a:rPr>
+              <a:t>reports/evaluation/metrics.csv</a:t>
+            </a:r>
+            <a:endParaRPr sz="1600" b="0" i="0">
+              <a:solidFill>
+                <a:srgbClr val="595959"/>
+              </a:solidFill>
+              <a:latin typeface="Arial" panose="020B0604020202020204" pitchFamily="34" charset="0"/>
+              <a:cs typeface="Arial"/>
+            </a:endParaRPr>
           </a:p>
         </p:txBody>
       </p:sp>

--- a/presentation/Презентация.pptx
+++ b/presentation/Презентация.pptx
@@ -279,7 +279,7 @@
       <p15:notesGuideLst xmlns:p15="http://schemas.microsoft.com/office/powerpoint/2012/main"/>
     </p:ext>
     <p:ext uri="http://customooxmlschemas.google.com/">
-      <go:slidesCustomData xmlns="" xmlns:mc="http://schemas.openxmlformats.org/markup-compatibility/2006" xmlns:mv="urn:schemas-microsoft-com:mac:vml" xmlns:c="http://schemas.openxmlformats.org/drawingml/2006/chart" xmlns:dgm="http://schemas.openxmlformats.org/drawingml/2006/diagram" xmlns:o="urn:schemas-microsoft-com:office:office" xmlns:v="urn:schemas-microsoft-com:vml" xmlns:pvml="urn:schemas-microsoft-com:office:powerpoint" xmlns:com="http://schemas.openxmlformats.org/drawingml/2006/compatibility" xmlns:p14="http://schemas.microsoft.com/office/powerpoint/2010/main" xmlns:p15="http://schemas.microsoft.com/office/powerpoint/2012/main" xmlns:ahyp="http://schemas.microsoft.com/office/drawing/2018/hyperlinkcolor" xmlns:go="http://customooxmlschemas.google.com/" r:id="rId25" roundtripDataSignature="AMtx7mg2fLzW2NWhC2ejww7VA5lENbgL/Q=="/>
+      <go:slidesCustomData xmlns:go="http://customooxmlschemas.google.com/" xmlns:ahyp="http://schemas.microsoft.com/office/drawing/2018/hyperlinkcolor" xmlns:p15="http://schemas.microsoft.com/office/powerpoint/2012/main" xmlns:p14="http://schemas.microsoft.com/office/powerpoint/2010/main" xmlns:com="http://schemas.openxmlformats.org/drawingml/2006/compatibility" xmlns:pvml="urn:schemas-microsoft-com:office:powerpoint" xmlns:v="urn:schemas-microsoft-com:vml" xmlns:o="urn:schemas-microsoft-com:office:office" xmlns:dgm="http://schemas.openxmlformats.org/drawingml/2006/diagram" xmlns:c="http://schemas.openxmlformats.org/drawingml/2006/chart" xmlns:mv="urn:schemas-microsoft-com:mac:vml" xmlns:mc="http://schemas.openxmlformats.org/markup-compatibility/2006" xmlns="" r:id="rId25" roundtripDataSignature="AMtx7mg2fLzW2NWhC2ejww7VA5lENbgL/Q=="/>
     </p:ext>
   </p:extLst>
 </p:presentation>
@@ -791,7 +791,7 @@
               <a:rPr lang="ru-RU">
                 <a:latin typeface="Arial" panose="020B0604020202020204" pitchFamily="34" charset="0"/>
               </a:rPr>
-              <a:t>Здравствуйте. Тема моей работы – прогнозирование конечных свойств композиционных материалов. Я последовательно расскажу о постановке задачи, исходных данных, методах, обучении и проверке моделей, а затем покажу практический результат.
+              <a:t>Здравствуйте. Тема моей работы – прогнозирование конечных свойств композиционных материалов. Я покажу весь путь решения: что имеем, зачем выполняем каждый шаг, что узнаём и почему идём дальше – от цели и данных до приложения и выводов.
 Источники: РПЗ, введение.</a:t>
             </a:r>
             <a:endParaRPr>
@@ -861,9 +861,9 @@
               <a:rPr lang="ru-RU">
                 <a:latin typeface="Arial" panose="020B0604020202020204" pitchFamily="34" charset="0"/>
               </a:rPr>
-              <a:t>Для прочности при растяжении по перекрёстной проверке заранее выбрали градиентный бустинг. Он был лучше прогноза среднего только в четырёх из десяти блоков.
-На тестовой выборке RMSE бустинга равна 471,410 МПа, что лучше ориентира на 1,878 МПа. Однако MAE равна 380,152 МПа и хуже ориентира на 1,168 МПа. R² составляет 0,008, то есть объяснённая доля разброса почти нулевая. На графике точки далеко от диагонали и образуют почти горизонтальное облако. Поэтому практически значимое преимущество не подтверждено.
-Источники: РПЗ, рисунок 8; reports/evaluation/metrics.csv.</a:t>
+              <a:t>Для прочности выбран градиентный бустинг, хотя он был лучше прогноза среднего лишь в четырёх проверках из десяти.
+На 307 строках его RMSE равна 471,410 МПа против 473,288 МПа у среднего: выигрыш 1,878 МПа. Но MAE у бустинга хуже: 380,152 против 378,984 МПа. R² равен 0,008, то есть модель почти не объясняет различия между примерами. Точки на графике далеко от диагонали и сильно рассеяны, поэтому небольшое улучшение одной меры не подтверждает практически значимое преимущество. Далее – отдельная задача с нейросетью.
+Источники: РПЗ, рисунок с фактическими и прогнозными значениями; reports/evaluation/metrics.csv.</a:t>
             </a:r>
             <a:endParaRPr>
               <a:latin typeface="Arial" panose="020B0604020202020204" pitchFamily="34" charset="0"/>
@@ -932,9 +932,9 @@
               <a:rPr lang="ru-RU">
                 <a:latin typeface="Arial" panose="020B0604020202020204" pitchFamily="34" charset="0"/>
               </a:rPr>
-              <a:t>Отдельная нейросеть получает 12 известных показателей, включая известные модуль и прочность, и выдаёт оценку соотношения матрица–наполнитель. В ней два скрытых слоя на 32 и 16 нейронов. Они последовательно преобразуют входы и ищут сочетания признаков.
-Всего сеть содержит 961 настраиваемый параметр. Из 716 строк 644 использовались для обновления весов, а 72 контролировали раннюю остановку. Эпоха – это один проход по обучающим примерам. Обучение продолжалось 76 эпох, после чего восстановлены лучшие веса эпохи 35. Отдельного дообучения весов на всех 716 строках не было.
-Источники: РПЗ, раздел 2.4; docs/neural_network.md.</a:t>
+              <a:t>Нейросеть тоже относится к машинному обучению, но здесь решает отдельную задачу: оценивает соотношение матрица–наполнитель. Из 13 показателей исключён только прогнозируемый, поэтому остаётся 12 входов, включая известные модуль и прочность. Это восстановление одного столбца по другим характеристикам, а не подбор рецептуры. В приложение с двумя прямыми прогнозами сеть не входит.
+Архитектура 12–32–16–1 означает 12 входов, два внутренних слоя на 32 и 16 нейронов и один результат. Часть обучающих строк помогала вовремя остановить обучение. Внешние 307 строк до окончательной проверки оставались закрытыми. Теперь сравним сеть с простым ориентиром.
+Источники: РПЗ, раздел о нейросети.</a:t>
             </a:r>
             <a:endParaRPr>
               <a:latin typeface="Arial" panose="020B0604020202020204" pitchFamily="34" charset="0"/>
@@ -1003,9 +1003,9 @@
               <a:rPr lang="ru-RU">
                 <a:latin typeface="Arial" panose="020B0604020202020204" pitchFamily="34" charset="0"/>
               </a:rPr>
-              <a:t>На тестовой выборке нейросеть дала RMSE 0,944, MAE 0,777 и R² минус 0,040. Прогноз среднего имел меньшую RMSE 0,926. Следовательно, нейросеть не улучшила простой ориентир.
-На левой панели loss обучения уменьшается, а R² внутренней проверки после лучших весов начинает ухудшаться. Это и объясняет раннюю остановку. Справа показан разброс CV RMSE по трём заранее заданным значениям seed, а не R². Seed – это число, фиксирующее случайные действия для воспроизводимости. Основной вывод всё равно делается по независимой тестовой выборке.
-Источники: РПЗ, рисунок 11 и таблица 8; reports/evaluation/metrics.csv.</a:t>
+              <a:t>На итоговой проверке ошибка RMSE нейросети равна 0,944, а у прогноза среднего меньше – 0,926. Поэтому сеть проиграла простому ориентиру. Её MAE равна 0,777, а R² – минус 0,040.
+Сложный метод сам по себе не гарантирует лучший прогноз. При таком качестве важно объяснить, какие характеристики использует модель, и не принимать это за физический закон.
+Источники: РПЗ, таблица результатов нейросети; reports/evaluation/metrics.csv.</a:t>
             </a:r>
             <a:endParaRPr>
               <a:latin typeface="Arial" panose="020B0604020202020204" pitchFamily="34" charset="0"/>
@@ -1074,9 +1074,9 @@
               <a:rPr lang="ru-RU">
                 <a:latin typeface="Arial" panose="020B0604020202020204" pitchFamily="34" charset="0"/>
               </a:rPr>
-              <a:t>Пермутационная важность показывает, насколько увеличивается ошибка модели после случайного перемешивания одного признака. Если ошибка растёт, модель опиралась на этот признак. Полосы на графике показывают разброс десяти повторов.
-Эта важность описывает поведение модели, а не доказывает физическое влияние признака на материал. Для постоянного прогноза модуля значения равны нулю. Перенос на новые материалы и лабораторная проверка не выполнялись.
-Источники: РПЗ, рисунок 10; reports/evaluation/permutation_importance.csv.</a:t>
+              <a:t>Чтобы понять поведение модели прочности, один столбец случайно перемешивали, остальные оставляли без изменений и снова измеряли ошибку. Если она возрастала, модель опиралась на эту характеристику. По горизонтали показано изменение RMSE, линии отражают разброс десяти повторов.
+Этот опыт описывает поведение конкретной модели на этих данных, но не доказывает физическую причину и не определяет лучшую рецептуру. Для модели модуля значения равны нулю, поскольку она всегда выдаёт среднее. Технический путь показан в приложении.
+Источники: РПЗ, рисунок с важностью характеристик; reports/evaluation/permutation_importance.csv.</a:t>
             </a:r>
             <a:endParaRPr>
               <a:latin typeface="Arial" panose="020B0604020202020204" pitchFamily="34" charset="0"/>
@@ -1145,9 +1145,9 @@
               <a:rPr lang="ru-RU">
                 <a:latin typeface="Arial" panose="020B0604020202020204" pitchFamily="34" charset="0"/>
               </a:rPr>
-              <a:t>Практический результат – учебное приложение Streamlit. Оно принимает 11 входных параметров, проверяет введённые значения и выдаёт прогнозы модуля упругости и прочности при растяжении.
-Для демонстрационного профиля с медианными значениями и углом 90 градусов приложение показывает 73,2073 ГПа и 2502,06 МПа. Это расчёт модели, а не результат испытания нового образца. Репозиторий сохраняет данные, разбиение, модели, отчёты и notebook, поэтому вычисления можно воспроизвести.
-Источники: РПЗ, раздел 2.5; docs/application.md.</a:t>
+              <a:t>Учебное приложение принимает 11 известных характеристик нового примера. Оно проверяет формат и предупреждает о выходе за диапазон обучающих данных, затем передаёт значения двум сохранённым прямым моделям. Нейросеть для соотношения сюда не входит. Результат – прогноз модуля и прогноз прочности.
+Для демонстрационного профиля приложение показывает 73,2073 ГПа и 2502,06 МПа. Это расчёт моделей, а не лабораторное измерение. Репозиторий содержит данные, код, разделение и результаты, поэтому расчёт можно повторить. Теперь можно ответить на исходную цель.
+Источники: РПЗ, раздел о приложении и репозитории; docs/application.md.</a:t>
             </a:r>
             <a:endParaRPr>
               <a:latin typeface="Arial" panose="020B0604020202020204" pitchFamily="34" charset="0"/>
@@ -1216,8 +1216,8 @@
               <a:rPr lang="ru-RU">
                 <a:latin typeface="Arial" panose="020B0604020202020204" pitchFamily="34" charset="0"/>
               </a:rPr>
-              <a:t>Работа построила воспроизводимый процесс по последовательности методички: постановка задачи, данные, методы, разведочный анализ, предобработка, обучение, тестирование, приложение и выводы.
-Качество моделей слабое. Для модуля лучше оказался прогноз среднего. Для прочности качество бустинга близко к качеству прогноза среднего, хотя сами прогнозы различаются. Нейросеть для отношения оказалась хуже среднего. Эти модели не предназначены для промышленного прогнозирования или подбора рецептуры. Следующий шаг – описать происхождение данных, получить внешнюю выборку и провести лабораторную проверку. Спасибо за внимание.
+              <a:t>Построен воспроизводимый процесс от двух таблиц до итоговой проверки и приложения. Методы выбирались только на данных для обучения, а 307 строк использовались один раз в конце.
+Предсказательная способность оказалась слабой. Для модуля лучшим остался прогноз среднего. Для прочности бустинг почти не отличается от среднего. Нейросеть для соотношения хуже среднего. Процесс реализован, но промышленная точность и подбор рецептуры не подтверждены. Для продолжения нужны данные с известным происхождением, внешняя выборка и лабораторная проверка. Спасибо за внимание.
 Источники: reports/evaluation/metrics.csv; РПЗ, заключение.</a:t>
             </a:r>
             <a:endParaRPr>
@@ -1287,9 +1287,9 @@
               <a:rPr lang="ru-RU">
                 <a:latin typeface="Arial" panose="020B0604020202020204" pitchFamily="34" charset="0"/>
               </a:rPr>
-              <a:t>Свойства готового материала зависят от сочетания компонентов и условий изготовления. Задача работы – прогнозировать эти свойства по имеющимся характеристикам.
-Связующее, или матрица, соединяет компоненты в единый материал и передаёт нагрузку. Наполнитель влияет на свойства материала и может выполнять армирующую функцию, то есть усиливать материал.
-В работе оцениваются две конечные характеристики. Модуль упругости при растяжении показывает сопротивление обратимому растяжению: после снятия нагрузки форма восстанавливается. Прочность при растяжении – предельное напряжение перед разрушением. Напряжение здесь означает нагрузку на единицу площади поперечного сечения.
+              <a:t>Композиционный материал состоит из нескольких компонентов. Связующее, или матрица, удерживает их вместе и передаёт нагрузку. Наполнитель влияет на свойства материала и может его усиливать.
+В работе нужно оценить два свойства. Модуль упругости при растяжении характеризует жёсткость при растяжении, после которого материал возвращается к исходной форме. Прочность при растяжении – предельная нагрузка на единицу площади перед разрушением.
+Цель прогноза – заранее получить ориентировочную оценку по известным характеристикам состава и изготовления. Она помогает сравнивать варианты, но не заменяет физическое испытание. Для обучения нужны примеры с известными характеристиками и конечными свойствами. Происхождение этих значений в исходных файлах не описано.
 Источники: РПЗ, введение.</a:t>
             </a:r>
             <a:endParaRPr>
@@ -1359,9 +1359,9 @@
               <a:rPr lang="ru-RU">
                 <a:latin typeface="Arial" panose="020B0604020202020204" pitchFamily="34" charset="0"/>
               </a:rPr>
-              <a:t>Исходные данные находились в двух таблицах Excel, которые дополняют друг друга. Применён INNER JOIN: таблицы сопоставили по исходному индексу и оставили только строки, присутствующие в обеих таблицах. Получено 1023 наблюдения с 13 показателями; 17 строк второй таблицы без пары не вошли в итоговый набор. Пропусков и полных дубликатов нет.
-После объединения каждая строка содержит характеристики и известные конечные свойства. Такая строка служит примером, на котором можно обучать и проверять модель. Происхождение образцов, группы, партии и часть единиц измерения не описаны; это ограничение учитывается при интерпретации результатов.
-Источники: РПЗ, таблица 5; docs/data_dictionary.md.</a:t>
+              <a:t>Исходные примеры находились в двух таблицах Excel. Их сопоставили по исходному индексу и оставили строки, имеющиеся в обеих таблицах. После объединения получилось 1023 строки и 13 показателей. Семнадцать строк второй таблицы не имели пары. Пропусков и полных дубликатов нет.
+Одна строка описывает один материал или пример: его характеристики и известные конечные свойства. В исходных материалах не указаны происхождение строк, группы, партии и часть единиц измерения. Это ограничивает выводы и не позволяет называть каждую строку лабораторно проверенным образцом. Теперь можно зафиксировать весь дальнейший процесс.
+Источники: РПЗ, раздел 1.1 и таблица исходных данных; словарь данных репозитория.</a:t>
             </a:r>
             <a:endParaRPr>
               <a:latin typeface="Arial" panose="020B0604020202020204" pitchFamily="34" charset="0"/>
@@ -1430,10 +1430,9 @@
               <a:rPr lang="ru-RU">
                 <a:latin typeface="Arial" panose="020B0604020202020204" pitchFamily="34" charset="0"/>
               </a:rPr>
-              <a:t>Для прямого прогнозирования используются 11 характеристик состава и технологии. Из 1023 строк 716 образуют обучающую выборку, а 307 – независимую тестовую выборку. На обучающей части модель учится связывать 11 входных характеристик с известными конечными свойствами, а тестовая часть показывает качество на данных, которые не использовались при обучении.
-Для нового набора из 11 характеристик модель выдаёт две оценки: модуль упругости при растяжении в гигапаскалях и прочность при растяжении в мегапаскалях. Сами конечные свойства в эти 11 входов не входят.
-Отдельно решается дополнительная задача: по 12 другим известным показателям, включая известные модуль и прочность, оценивается соотношение матрица–наполнитель. Эта задача отделена от двух прямых прогнозов и в приложение не включена.
-Источники: РПЗ, раздел 1.1; docs/data_dictionary.md.</a:t>
+              <a:t>Работа выполнена в восемь шагов. Таблицы проверили и объединили. Затем отделили данные для обучения и итоговой проверки. Данные для обучения изучили и подготовили, на них методы обучили и сравнили в десяти проверках. Выбранные модели один раз проверили на отложенных строках, подключили к приложению, а данные, код и результаты сохранили в репозитории.
+Главное правило: данные для итоговой проверки не участвуют в изучении и выборе метода. Это защищает итог от подбора решения под заранее увиденные ответы. Далее разберу шаги по порядку.
+Источники: РПЗ, разделы 1.2 и 2.1–2.6.</a:t>
             </a:r>
             <a:endParaRPr>
               <a:latin typeface="Arial" panose="020B0604020202020204" pitchFamily="34" charset="0"/>
@@ -1502,9 +1501,9 @@
               <a:rPr lang="ru-RU">
                 <a:latin typeface="Arial" panose="020B0604020202020204" pitchFamily="34" charset="0"/>
               </a:rPr>
-              <a:t>Для прямых задач сравнивались пять подходов. Прогноз среднего задаёт простой ориентир: для любой строки он выдаёт среднее значение обучающей выборки. Ridge ищет линейную зависимость и ограничивает слишком большие коэффициенты. Случайный лес строит много деревьев решений и усредняет их ответы. Градиентный бустинг строит деревья последовательно, и каждое следующее исправляет часть прежних ошибок. Метод опорных векторов, или SVR, может описывать гладкую нелинейную зависимость.
-Все подходы сравнивались по одному протоколу. Подробные настройки приведены в таблице 6 РПЗ. Отдельную нейросеть для соотношения матрица–наполнитель я покажу позже.
-Источники: РПЗ, раздел 2.2 и таблица 6; reports/modeling/cv_summary.csv.</a:t>
+              <a:t>Из 1023 строк 716, или 70 процентов, использованы для обучения. Остальные 307 отложены для одной итоговой проверки на ранее не виденных примерах.
+В наборе 13 содержательных показателей. Для двух прямых прогнозов из входов исключены два конечных свойства, поэтому остаётся 11 характеристик: 13 минус 2 равно 11. По новому набору из 11 известных значений модель должна выдать две оценки – модуль и прочность. Прежде чем выбирать метод, нужно понять данные для обучения.
+Источники: РПЗ, разделы 1.1, 1.2 и 2.1.</a:t>
             </a:r>
             <a:endParaRPr>
               <a:latin typeface="Arial" panose="020B0604020202020204" pitchFamily="34" charset="0"/>
@@ -1573,9 +1572,9 @@
               <a:rPr lang="ru-RU">
                 <a:latin typeface="Arial" panose="020B0604020202020204" pitchFamily="34" charset="0"/>
               </a:rPr>
-              <a:t>Разведочный анализ данных выполнялся только на 716 строках обучающей выборки. Рассматривались распределения, диаграммы размаха и попарные связи. Наибольшая абсолютная линейная корреляция составила около 0,119. Это означает, что простые линейные связи между отдельными парами показателей слабы. Однако такой результат не исключает более сложных взаимодействий нескольких признаков.
-Угол нашивки в таблице принимает два значения: 0 и 90 градусов.
-Источники: РПЗ, рисунок 1; docs/eda.md.</a:t>
+              <a:t>Разведочный анализ выполнен только на 716 обучающих строках. Он показывает распределения, возможные необычные наблюдения и связи между показателями до обучения моделей.
+Наибольшая абсолютная парная корреляция составила около 0,119. Близкое к нулю значение означает слабую простую линейную связь отдельных пар, но не исключает совместного влияния нескольких характеристик или нелинейных зависимостей. Необычные значения здесь лишь отмечают для проверки, а не объявляют ошибками и не удаляют автоматически. Теперь данные можно подготовить.
+Источники: РПЗ, раздел разведочного анализа и рисунок с распределениями.</a:t>
             </a:r>
             <a:endParaRPr>
               <a:latin typeface="Arial" panose="020B0604020202020204" pitchFamily="34" charset="0"/>
@@ -1644,9 +1643,9 @@
               <a:rPr lang="ru-RU">
                 <a:latin typeface="Arial" panose="020B0604020202020204" pitchFamily="34" charset="0"/>
               </a:rPr>
-              <a:t>На этапе предобработки проверили квартильное правило для поиска крайних значений. Для прямых задач оно отметило 53 строки из 716, а для задачи отношения – 61 строку. Это кандидаты на выбросы, а не доказанные ошибки измерения.
-Перекрёстная проверка показала меньшую ошибку при сохранении всех строк, поэтому итоговые модели обучались без удаления. Угол 0 и 90 градусов закодировали числами 0 и 1. Для Ridge, SVR и нейросети признаки приводились к сопоставимому масштабу внутри каждого цикла проверки.
-Источники: РПЗ, раздел 2.1.3; reports/modeling/preprocessing_audit.json.</a:t>
+              <a:t>Пропусков нет, поэтому заполнять их не пришлось. Угол нашивки принимает два направления: 0 и 90 градусов. Их записали как 0 и 1, сохранив это различие. Для линейной модели, метода опорных векторов и нейросети числовые характеристики приводили к сопоставимому масштабу внутри каждой проверки.
+Отдельно проверили удаление необычных строк по квартильному правилу. Это был эксперимент только внутри обучающих данных. Десять проверок показали, что удаление не улучшает результат. Поэтому для итоговых моделей выбран вариант без удаления строк. Теперь методы можно сравнивать по одинаковым правилам.
+Источники: РПЗ, раздел предобработки; reports/modeling/preprocessing_audit.json.</a:t>
             </a:r>
             <a:endParaRPr>
               <a:latin typeface="Arial" panose="020B0604020202020204" pitchFamily="34" charset="0"/>
@@ -1715,9 +1714,9 @@
               <a:rPr lang="ru-RU">
                 <a:latin typeface="Arial" panose="020B0604020202020204" pitchFamily="34" charset="0"/>
               </a:rPr>
-              <a:t>Данные один раз разделили на обучающую и тестовую выборки в пропорции 70 на 30: 716 и 307 строк. На обучающей части выполнялся поиск гиперпараметров по сетке с перекрёстной проверкой. Данные делились на 10 блоков: девять использовались для обучения и один для проверки, затем проверочный блок менялся. Так каждая строка обучающей выборки участвовала в проверке.
-Модель выбиралась по средней RMSE. Это ошибка в единицах прогнозируемого свойства, которая сильнее учитывает крупные промахи. Для модуля минимум составил 3,087 ГПа у прогноза среднего. Для прочности градиентный бустинг получил 490,209 МПа против 490,500 МПа у прогноза среднего. Только после этого модели один раз оценили на тестовой выборке.
-Источники: РПЗ, рисунок 7 и таблица 6; docs/validation_protocol.md.</a:t>
+              <a:t>Машинное обучение ищет правило по примерам с известными ответами. Для двух свойств сравнивались пять подходов, а выбраны две прямые модели – по одной для каждого свойства. Прогноз среднего выдаёт одно среднее значение. Гребневая регрессия, или Ridge, складывает линейные вклады характеристик и ограничивает слишком большие коэффициенты. Случайный лес усредняет ответы многих деревьев. Градиентный бустинг строит деревья по очереди, исправляя прежние ошибки. Метод опорных векторов, или SVR, описывает гладкую нелинейную зависимость.
+Все методы сравнивали десять раз внутри обучающих данных: девять частей использовали для обучения, одну – для проверки. Масштабирование и модель каждый раз настраивались заново. Выбор делали по RMSE – среднеквадратичной ошибке в единицах свойства; большие промахи увеличивают её сильнее. Лишь после выбора открыли 307 строк.
+Источники: РПЗ, разделы о методах и проверке моделей; reports/modeling/cv_summary.csv.</a:t>
             </a:r>
             <a:endParaRPr>
               <a:latin typeface="Arial" panose="020B0604020202020204" pitchFamily="34" charset="0"/>
@@ -1786,9 +1785,9 @@
               <a:rPr lang="ru-RU">
                 <a:latin typeface="Arial" panose="020B0604020202020204" pitchFamily="34" charset="0"/>
               </a:rPr>
-              <a:t>Для модуля упругости при растяжении ни один испытанный метод не улучшил прогноз среднего. На тестовой выборке RMSE равна 3,178 ГПа, а MAE – 2,556 ГПа. MAE – средняя абсолютная ошибка. RMSE сильнее реагирует на крупные промахи. R² равно минус 0,016. R² сравнивает модель с прогнозом среднего и не является процентом точности.
-На графике по горизонтали показано фактическое значение, по вертикали – прогноз. Идеальные прогнозы лежали бы на диагонали. Горизонтальная полоса показывает, что модель выдаёт одно и то же среднее значение.
-Источники: РПЗ, рисунок 8; reports/evaluation/metrics.csv.</a:t>
+              <a:t>Ещё два показателя качества: MAE – средняя абсолютная ошибка, то есть средний размер промаха без учёта знака. R² показывает, насколько модель лучше или хуже прогноза среднего; это не процент точности.
+Для модуля ни один сложный метод не улучшил прогноз среднего. На итоговой проверке RMSE равна 3,178 ГПа, MAE – 2,556 ГПа, R² – минус 0,016. На графике по горизонтали находится фактическое значение, по вертикали – прогноз. Диагональ соответствует идеальному ответу: чем ближе к ней точка, тем меньше ошибка. Горизонтальная полоса означает одинаковое среднее значение для всех строк. Для прочности десять проверок выбрали более сложный метод.
+Источники: РПЗ, рисунок с фактическими и прогнозными значениями; reports/evaluation/metrics.csv.</a:t>
             </a:r>
             <a:endParaRPr>
               <a:latin typeface="Arial" panose="020B0604020202020204" pitchFamily="34" charset="0"/>
@@ -7436,7 +7435,6 @@
                 <a:solidFill>
                   <a:srgbClr val="FFFFFF"/>
                 </a:solidFill>
-                <a:latin typeface="Arial" panose="020B0604020202020204" pitchFamily="34" charset="0"/>
                 <a:cs typeface="Arial"/>
               </a:rPr>
               <a:t>Прогнозирование</a:t>
@@ -7446,7 +7444,6 @@
                 <a:solidFill>
                   <a:srgbClr val="FFFFFF"/>
                 </a:solidFill>
-                <a:latin typeface="Arial" panose="020B0604020202020204" pitchFamily="34" charset="0"/>
                 <a:cs typeface="Arial"/>
               </a:rPr>
               <a:t> </a:t>
@@ -7456,7 +7453,6 @@
                 <a:solidFill>
                   <a:srgbClr val="FFFFFF"/>
                 </a:solidFill>
-                <a:latin typeface="Arial" panose="020B0604020202020204" pitchFamily="34" charset="0"/>
                 <a:cs typeface="Arial"/>
               </a:rPr>
               <a:t>конечных</a:t>
@@ -7466,7 +7462,6 @@
                 <a:solidFill>
                   <a:srgbClr val="FFFFFF"/>
                 </a:solidFill>
-                <a:latin typeface="Arial" panose="020B0604020202020204" pitchFamily="34" charset="0"/>
                 <a:cs typeface="Arial"/>
               </a:rPr>
               <a:t> </a:t>
@@ -7476,7 +7471,6 @@
                 <a:solidFill>
                   <a:srgbClr val="FFFFFF"/>
                 </a:solidFill>
-                <a:latin typeface="Arial" panose="020B0604020202020204" pitchFamily="34" charset="0"/>
                 <a:cs typeface="Arial"/>
               </a:rPr>
               <a:t>свойств</a:t>
@@ -7486,7 +7480,6 @@
                 <a:solidFill>
                   <a:srgbClr val="FFFFFF"/>
                 </a:solidFill>
-                <a:latin typeface="Arial" panose="020B0604020202020204" pitchFamily="34" charset="0"/>
                 <a:cs typeface="Arial"/>
               </a:rPr>
               <a:t> </a:t>
@@ -7496,7 +7489,6 @@
                 <a:solidFill>
                   <a:srgbClr val="FFFFFF"/>
                 </a:solidFill>
-                <a:latin typeface="Arial" panose="020B0604020202020204" pitchFamily="34" charset="0"/>
                 <a:cs typeface="Arial"/>
               </a:rPr>
               <a:t>новых</a:t>
@@ -7506,7 +7498,6 @@
                 <a:solidFill>
                   <a:srgbClr val="FFFFFF"/>
                 </a:solidFill>
-                <a:latin typeface="Arial" panose="020B0604020202020204" pitchFamily="34" charset="0"/>
                 <a:cs typeface="Arial"/>
               </a:rPr>
               <a:t> </a:t>
@@ -7516,7 +7507,6 @@
                 <a:solidFill>
                   <a:srgbClr val="FFFFFF"/>
                 </a:solidFill>
-                <a:latin typeface="Arial" panose="020B0604020202020204" pitchFamily="34" charset="0"/>
                 <a:cs typeface="Arial"/>
               </a:rPr>
               <a:t>материалов</a:t>
@@ -7526,7 +7516,6 @@
                 <a:solidFill>
                   <a:srgbClr val="FFFFFF"/>
                 </a:solidFill>
-                <a:latin typeface="Arial" panose="020B0604020202020204" pitchFamily="34" charset="0"/>
                 <a:cs typeface="Arial"/>
               </a:rPr>
               <a:t> (</a:t>
@@ -7536,7 +7525,6 @@
                 <a:solidFill>
                   <a:srgbClr val="FFFFFF"/>
                 </a:solidFill>
-                <a:latin typeface="Arial" panose="020B0604020202020204" pitchFamily="34" charset="0"/>
                 <a:cs typeface="Arial"/>
               </a:rPr>
               <a:t>композиционных</a:t>
@@ -7546,7 +7534,6 @@
                 <a:solidFill>
                   <a:srgbClr val="FFFFFF"/>
                 </a:solidFill>
-                <a:latin typeface="Arial" panose="020B0604020202020204" pitchFamily="34" charset="0"/>
                 <a:cs typeface="Arial"/>
               </a:rPr>
               <a:t> </a:t>
@@ -7556,7 +7543,6 @@
                 <a:solidFill>
                   <a:srgbClr val="FFFFFF"/>
                 </a:solidFill>
-                <a:latin typeface="Arial" panose="020B0604020202020204" pitchFamily="34" charset="0"/>
                 <a:cs typeface="Arial"/>
               </a:rPr>
               <a:t>материалов</a:t>
@@ -7566,7 +7552,6 @@
                 <a:solidFill>
                   <a:srgbClr val="FFFFFF"/>
                 </a:solidFill>
-                <a:latin typeface="Arial" panose="020B0604020202020204" pitchFamily="34" charset="0"/>
                 <a:cs typeface="Arial"/>
               </a:rPr>
               <a:t>)</a:t>
@@ -7586,7 +7571,7 @@
         </p:nvSpPr>
         <p:spPr/>
         <p:txBody>
-          <a:bodyPr/>
+          <a:bodyPr wrap="square"/>
           <a:lstStyle/>
           <a:p>
             <a:pPr marL="0" indent="0" algn="l">
@@ -7597,7 +7582,6 @@
                 <a:solidFill>
                   <a:srgbClr val="FFFFFF"/>
                 </a:solidFill>
-                <a:latin typeface="Arial" panose="020B0604020202020204" pitchFamily="34" charset="0"/>
                 <a:cs typeface="Arial"/>
               </a:rPr>
               <a:t>Фролов П.В.</a:t>
@@ -7606,7 +7590,6 @@
               <a:solidFill>
                 <a:srgbClr val="FFFFFF"/>
               </a:solidFill>
-              <a:latin typeface="Arial" panose="020B0604020202020204" pitchFamily="34" charset="0"/>
               <a:cs typeface="Arial"/>
             </a:endParaRPr>
           </a:p>
@@ -7715,7 +7698,7 @@
                   <a:latin typeface="Arial" panose="020B0604020202020204" pitchFamily="34" charset="0"/>
                   <a:cs typeface="Arial" pitchFamily="2" charset="0"/>
                 </a:rPr>
-                <a:t>Тестирование прочности: улучшение не подтверждено</a:t>
+                <a:t>Прочность: выигрыш бустинга слишком мал</a:t>
               </a:r>
               <a:endParaRPr lang="ru-RU" sz="2600" b="1" spc="0" dirty="0">
                 <a:solidFill>
@@ -8043,7 +8026,7 @@
           <p:nvPr>
             <p:extLst>
               <p:ext uri="{D42A27DB-BD31-4B8C-83A1-F6EECF244321}">
-                <p14:modId xmlns:p14="http://schemas.microsoft.com/office/powerpoint/2010/main" val="84380366"/>
+                <p14:modId xmlns:p14="http://schemas.microsoft.com/office/powerpoint/2010/main" val="3772179708"/>
               </p:ext>
             </p:extLst>
           </p:nvPr>
@@ -8091,46 +8074,6 @@
                         <a:buNone/>
                       </a:pPr>
                       <a:r>
-                        <a:rPr sz="1700" b="1" i="0">
-                          <a:solidFill>
-                            <a:srgbClr val="FFFFFF"/>
-                          </a:solidFill>
-                          <a:latin typeface="Arial" panose="020B0604020202020204" pitchFamily="34" charset="0"/>
-                          <a:cs typeface="Arial"/>
-                        </a:rPr>
-                        <a:t>Gradient Boosting</a:t>
-                      </a:r>
-                    </a:p>
-                  </a:txBody>
-                  <a:tcPr marT="27432" marB="27432" anchor="ctr">
-                    <a:lnL w="0">
-                      <a:noFill/>
-                    </a:lnL>
-                    <a:lnR w="0">
-                      <a:noFill/>
-                    </a:lnR>
-                    <a:lnT w="0">
-                      <a:noFill/>
-                    </a:lnT>
-                    <a:lnB w="19050">
-                      <a:solidFill>
-                        <a:srgbClr val="065CAB"/>
-                      </a:solidFill>
-                    </a:lnB>
-                    <a:solidFill>
-                      <a:srgbClr val="065CAB"/>
-                    </a:solidFill>
-                  </a:tcPr>
-                </a:tc>
-                <a:tc>
-                  <a:txBody>
-                    <a:bodyPr/>
-                    <a:lstStyle/>
-                    <a:p>
-                      <a:pPr marL="0" indent="0" algn="r">
-                        <a:buNone/>
-                      </a:pPr>
-                      <a:r>
                         <a:rPr lang="ru-RU" sz="1300" b="1" i="0">
                           <a:solidFill>
                             <a:srgbClr val="FFFFFF"/>
@@ -8138,17 +8081,7 @@
                           <a:latin typeface="Arial" panose="020B0604020202020204" pitchFamily="34" charset="0"/>
                           <a:cs typeface="Arial"/>
                         </a:rPr>
-                        <a:t>обучение, </a:t>
-                      </a:r>
-                      <a:r>
-                        <a:rPr lang="en-US" sz="1300" b="1" i="0">
-                          <a:solidFill>
-                            <a:srgbClr val="FFFFFF"/>
-                          </a:solidFill>
-                          <a:latin typeface="Arial" panose="020B0604020202020204" pitchFamily="34" charset="0"/>
-                          <a:cs typeface="Arial"/>
-                        </a:rPr>
-                        <a:t>n = 716</a:t>
+                        <a:t>Градиентный бустинг</a:t>
                       </a:r>
                       <a:endParaRPr sz="1300" b="1" i="0">
                         <a:solidFill>
@@ -8175,7 +8108,7 @@
                       </a:solidFill>
                     </a:lnB>
                     <a:solidFill>
-                      <a:srgbClr val="065CAB"/>
+                      <a:srgbClr val="0E5DAB"/>
                     </a:solidFill>
                   </a:tcPr>
                 </a:tc>
@@ -8184,30 +8117,20 @@
                     <a:bodyPr/>
                     <a:lstStyle/>
                     <a:p>
-                      <a:pPr marL="0" indent="0" algn="r">
+                      <a:pPr marL="0" indent="0" algn="l">
                         <a:buNone/>
                       </a:pPr>
                       <a:r>
-                        <a:rPr lang="ru-RU" sz="1300" b="1" i="0">
+                        <a:rPr lang="ru-RU" sz="1200" b="1" i="0">
                           <a:solidFill>
                             <a:srgbClr val="FFFFFF"/>
                           </a:solidFill>
                           <a:latin typeface="Arial" panose="020B0604020202020204" pitchFamily="34" charset="0"/>
                           <a:cs typeface="Arial"/>
                         </a:rPr>
-                        <a:t>тест, </a:t>
+                        <a:t>716 строк</a:t>
                       </a:r>
-                      <a:r>
-                        <a:rPr lang="en-US" sz="1300" b="1" i="0">
-                          <a:solidFill>
-                            <a:srgbClr val="FFFFFF"/>
-                          </a:solidFill>
-                          <a:latin typeface="Arial" panose="020B0604020202020204" pitchFamily="34" charset="0"/>
-                          <a:cs typeface="Arial"/>
-                        </a:rPr>
-                        <a:t>n = 307</a:t>
-                      </a:r>
-                      <a:endParaRPr sz="1300" b="1" i="0">
+                      <a:endParaRPr sz="1200" b="1" i="0">
                         <a:solidFill>
                           <a:srgbClr val="FFFFFF"/>
                         </a:solidFill>
@@ -8232,7 +8155,54 @@
                       </a:solidFill>
                     </a:lnB>
                     <a:solidFill>
-                      <a:srgbClr val="065CAB"/>
+                      <a:srgbClr val="0E5DAB"/>
+                    </a:solidFill>
+                  </a:tcPr>
+                </a:tc>
+                <a:tc>
+                  <a:txBody>
+                    <a:bodyPr/>
+                    <a:lstStyle/>
+                    <a:p>
+                      <a:pPr marL="0" indent="0" algn="l">
+                        <a:buNone/>
+                      </a:pPr>
+                      <a:r>
+                        <a:rPr lang="ru-RU" sz="1200" b="1" i="0">
+                          <a:solidFill>
+                            <a:srgbClr val="FFFFFF"/>
+                          </a:solidFill>
+                          <a:latin typeface="Arial" panose="020B0604020202020204" pitchFamily="34" charset="0"/>
+                          <a:cs typeface="Arial"/>
+                        </a:rPr>
+                        <a:t>307 строк</a:t>
+                      </a:r>
+                      <a:endParaRPr sz="1200" b="1" i="0">
+                        <a:solidFill>
+                          <a:srgbClr val="FFFFFF"/>
+                        </a:solidFill>
+                        <a:latin typeface="Arial" panose="020B0604020202020204" pitchFamily="34" charset="0"/>
+                        <a:cs typeface="Arial"/>
+                      </a:endParaRPr>
+                    </a:p>
+                  </a:txBody>
+                  <a:tcPr marT="27432" marB="27432" anchor="ctr">
+                    <a:lnL w="0">
+                      <a:noFill/>
+                    </a:lnL>
+                    <a:lnR w="0">
+                      <a:noFill/>
+                    </a:lnR>
+                    <a:lnT w="0">
+                      <a:noFill/>
+                    </a:lnT>
+                    <a:lnB w="19050">
+                      <a:solidFill>
+                        <a:srgbClr val="065CAB"/>
+                      </a:solidFill>
+                    </a:lnB>
+                    <a:solidFill>
+                      <a:srgbClr val="0E5DAB"/>
                     </a:solidFill>
                   </a:tcPr>
                 </a:tc>
@@ -8541,7 +8511,7 @@
                 <a:latin typeface="Arial" panose="020B0604020202020204" pitchFamily="34" charset="0"/>
                 <a:cs typeface="Arial"/>
               </a:rPr>
-              <a:t>Выбор по перекрёстной проверке: бустинг, RMSE 490,209 МПа</a:t>
+              <a:t>Десять проверок выбрали градиентный бустинг; он лучше среднего в 4 случаях из 10</a:t>
             </a:r>
             <a:endParaRPr b="1" i="0">
               <a:solidFill>
@@ -8643,15 +8613,22 @@
               <a:buNone/>
             </a:pPr>
             <a:r>
-              <a:rPr sz="1800" b="1" i="0">
+              <a:rPr lang="ru-RU" sz="1300" i="0">
                 <a:solidFill>
                   <a:srgbClr val="262626"/>
                 </a:solidFill>
                 <a:latin typeface="Arial" panose="020B0604020202020204" pitchFamily="34" charset="0"/>
                 <a:cs typeface="Arial"/>
               </a:rPr>
-              <a:t>лучше на 1,878 МПа</a:t>
+              <a:t>ошибка меньше на 1,878 МПа</a:t>
             </a:r>
+            <a:endParaRPr sz="1300" i="0">
+              <a:solidFill>
+                <a:srgbClr val="262626"/>
+              </a:solidFill>
+              <a:latin typeface="Arial" panose="020B0604020202020204" pitchFamily="34" charset="0"/>
+              <a:cs typeface="Arial"/>
+            </a:endParaRPr>
           </a:p>
         </p:txBody>
       </p:sp>
@@ -8679,15 +8656,22 @@
               <a:buNone/>
             </a:pPr>
             <a:r>
-              <a:rPr sz="1500" b="0" i="0">
+              <a:rPr lang="ru-RU" sz="1300" i="0">
                 <a:solidFill>
                   <a:srgbClr val="595959"/>
                 </a:solidFill>
                 <a:latin typeface="Arial" panose="020B0604020202020204" pitchFamily="34" charset="0"/>
                 <a:cs typeface="Arial"/>
               </a:rPr>
-              <a:t>471,410 vs 473,288</a:t>
+              <a:t>471,410 и 473,288</a:t>
             </a:r>
+            <a:endParaRPr sz="1300" i="0">
+              <a:solidFill>
+                <a:srgbClr val="595959"/>
+              </a:solidFill>
+              <a:latin typeface="Arial" panose="020B0604020202020204" pitchFamily="34" charset="0"/>
+              <a:cs typeface="Arial"/>
+            </a:endParaRPr>
           </a:p>
         </p:txBody>
       </p:sp>
@@ -8781,15 +8765,22 @@
               <a:buNone/>
             </a:pPr>
             <a:r>
-              <a:rPr sz="1800" b="1" i="0">
+              <a:rPr lang="ru-RU" sz="1300" i="0">
                 <a:solidFill>
                   <a:srgbClr val="262626"/>
                 </a:solidFill>
                 <a:latin typeface="Arial" panose="020B0604020202020204" pitchFamily="34" charset="0"/>
                 <a:cs typeface="Arial"/>
               </a:rPr>
-              <a:t>хуже на 1,168 МПа</a:t>
+              <a:t>ошибка больше на 1,168 МПа</a:t>
             </a:r>
+            <a:endParaRPr sz="1300" i="0">
+              <a:solidFill>
+                <a:srgbClr val="262626"/>
+              </a:solidFill>
+              <a:latin typeface="Arial" panose="020B0604020202020204" pitchFamily="34" charset="0"/>
+              <a:cs typeface="Arial"/>
+            </a:endParaRPr>
           </a:p>
         </p:txBody>
       </p:sp>
@@ -8817,15 +8808,22 @@
               <a:buNone/>
             </a:pPr>
             <a:r>
-              <a:rPr sz="1500" b="0" i="0">
+              <a:rPr lang="ru-RU" sz="1300" i="0">
                 <a:solidFill>
                   <a:srgbClr val="595959"/>
                 </a:solidFill>
                 <a:latin typeface="Arial" panose="020B0604020202020204" pitchFamily="34" charset="0"/>
                 <a:cs typeface="Arial"/>
               </a:rPr>
-              <a:t>380,152 vs 378,984</a:t>
+              <a:t>380,152 и 378,984</a:t>
             </a:r>
+            <a:endParaRPr sz="1300" i="0">
+              <a:solidFill>
+                <a:srgbClr val="595959"/>
+              </a:solidFill>
+              <a:latin typeface="Arial" panose="020B0604020202020204" pitchFamily="34" charset="0"/>
+              <a:cs typeface="Arial"/>
+            </a:endParaRPr>
           </a:p>
         </p:txBody>
       </p:sp>
@@ -8856,17 +8854,17 @@
               <a:buNone/>
             </a:pPr>
             <a:r>
-              <a:rPr lang="ru-RU" sz="1600" b="1" i="0">
+              <a:rPr lang="ru-RU" sz="1500" b="1" i="0">
                 <a:solidFill>
                   <a:srgbClr val="262626"/>
                 </a:solidFill>
                 <a:latin typeface="Arial" panose="020B0604020202020204" pitchFamily="34" charset="0"/>
                 <a:cs typeface="Arial"/>
               </a:rPr>
-              <a:t>R² = 0,008: объяснённая доля разброса почти нулевая
-Практически значимое превосходство не установлено</a:t>
+              <a:t>R² = 0,008: различия между примерами почти не объяснены
+Практическая точность не подтверждена</a:t>
             </a:r>
-            <a:endParaRPr sz="1600" b="1" i="0">
+            <a:endParaRPr sz="1500" b="1" i="0">
               <a:solidFill>
                 <a:srgbClr val="595959"/>
               </a:solidFill>
@@ -8900,26 +8898,16 @@
               <a:buNone/>
             </a:pPr>
             <a:r>
-              <a:rPr lang="ru-RU" sz="1600" b="0" i="0">
+              <a:rPr lang="ru-RU" sz="1300" i="0">
                 <a:solidFill>
                   <a:srgbClr val="595959"/>
                 </a:solidFill>
                 <a:latin typeface="Arial" panose="020B0604020202020204" pitchFamily="34" charset="0"/>
                 <a:cs typeface="Arial"/>
               </a:rPr>
-              <a:t>Источник: РПЗ, рис. 8; </a:t>
+              <a:t>Источник: РПЗ, рисунок с фактическими и прогнозными значениями; reports/evaluation/metrics.csv</a:t>
             </a:r>
-            <a:r>
-              <a:rPr lang="en-US" sz="1600" b="0" i="0">
-                <a:solidFill>
-                  <a:srgbClr val="595959"/>
-                </a:solidFill>
-                <a:latin typeface="Arial" panose="020B0604020202020204" pitchFamily="34" charset="0"/>
-                <a:cs typeface="Arial"/>
-              </a:rPr>
-              <a:t>reports/evaluation/metrics.csv</a:t>
-            </a:r>
-            <a:endParaRPr sz="1600" b="0" i="0">
+            <a:endParaRPr sz="1300" i="0">
               <a:solidFill>
                 <a:srgbClr val="595959"/>
               </a:solidFill>
@@ -8961,15 +8949,76 @@
             </a:pPr>
             <a:fld id="{00000000-1234-1234-1234-123412341234}" type="slidenum">
               <a:rPr lang="ru-RU" smtClean="0">
-                <a:latin typeface="Arial" panose="020B0604020202020204" pitchFamily="34" charset="0"/>
                 <a:cs typeface="Arial"/>
               </a:rPr>
               <a:t>10</a:t>
             </a:fld>
             <a:endParaRPr lang="ru-RU" dirty="0">
-              <a:latin typeface="Arial" panose="020B0604020202020204" pitchFamily="34" charset="0"/>
               <a:cs typeface="Arial"/>
             </a:endParaRPr>
+          </a:p>
+        </p:txBody>
+      </p:sp>
+      <p:sp>
+        <p:nvSpPr>
+          <p:cNvPr id="2" name="StrengthLegendCover">
+            <a:extLst>
+              <a:ext uri="{FF2B5EF4-FFF2-40B4-BE49-F238E27FC236}">
+                <a16:creationId xmlns:a16="http://schemas.microsoft.com/office/drawing/2014/main" id="{AD8E38BD-7E90-41EB-A1BF-00CF2EABC494}"/>
+              </a:ext>
+            </a:extLst>
+          </p:cNvPr>
+          <p:cNvSpPr/>
+          <p:nvPr/>
+        </p:nvSpPr>
+        <p:spPr>
+          <a:xfrm>
+            <a:off x="6731000" y="1778000"/>
+            <a:ext cx="2159000" cy="787400"/>
+          </a:xfrm>
+          <a:prstGeom prst="roundRect">
+            <a:avLst/>
+          </a:prstGeom>
+          <a:solidFill>
+            <a:srgbClr val="FFFFFF"/>
+          </a:solidFill>
+          <a:ln w="17780">
+            <a:solidFill>
+              <a:srgbClr val="FFFFFF"/>
+            </a:solidFill>
+          </a:ln>
+        </p:spPr>
+        <p:style>
+          <a:lnRef idx="2">
+            <a:schemeClr val="accent1">
+              <a:shade val="50000"/>
+            </a:schemeClr>
+          </a:lnRef>
+          <a:fillRef idx="1">
+            <a:schemeClr val="accent1"/>
+          </a:fillRef>
+          <a:effectRef idx="0">
+            <a:schemeClr val="accent1"/>
+          </a:effectRef>
+          <a:fontRef idx="minor">
+            <a:schemeClr val="lt1"/>
+          </a:fontRef>
+        </p:style>
+        <p:txBody>
+          <a:bodyPr wrap="square" lIns="101600" tIns="76200" rIns="101600" bIns="76200" rtlCol="0" anchor="ctr"/>
+          <a:lstStyle/>
+          <a:p>
+            <a:pPr algn="ctr"/>
+            <a:r>
+              <a:rPr lang="ru-RU" sz="1000">
+                <a:solidFill>
+                  <a:srgbClr val="262626"/>
+                </a:solidFill>
+                <a:latin typeface="Arial" panose="020B0604020202020204" pitchFamily="34" charset="0"/>
+              </a:rPr>
+              <a:t>Синие точки – обучение, 716
+Оранжевые – итоговая проверка, 307</a:t>
+            </a:r>
           </a:p>
         </p:txBody>
       </p:sp>
@@ -9076,7 +9125,7 @@
                   <a:latin typeface="Arial" panose="020B0604020202020204" pitchFamily="34" charset="0"/>
                   <a:cs typeface="Arial" pitchFamily="2" charset="0"/>
                 </a:rPr>
-                <a:t>Нейросеть для соотношения матрица–наполнитель</a:t>
+                <a:t>Отдельная нейросеть для соотношения компонентов</a:t>
               </a:r>
               <a:endParaRPr lang="ru-RU" sz="2600" b="1" spc="0" dirty="0">
                 <a:solidFill>
@@ -9440,7 +9489,7 @@
                 <a:cs typeface="Arial"/>
               </a:rPr>
               <a:t>известных показателей
-включая модуль и прочность</a:t>
+13 − 1 = 12</a:t>
             </a:r>
             <a:endParaRPr sz="1500" i="0">
               <a:solidFill>
@@ -9547,8 +9596,8 @@
                 <a:latin typeface="Arial" panose="020B0604020202020204" pitchFamily="34" charset="0"/>
                 <a:cs typeface="Arial"/>
               </a:rPr>
-              <a:t>первый скрытый слой
-32 нейрона преобразуют входы</a:t>
+              <a:t>первый внутренний слой
+32 нейрона</a:t>
             </a:r>
             <a:endParaRPr i="0">
               <a:solidFill>
@@ -9655,8 +9704,8 @@
                 <a:latin typeface="Arial" panose="020B0604020202020204" pitchFamily="34" charset="0"/>
                 <a:cs typeface="Arial"/>
               </a:rPr>
-              <a:t>второй скрытый слой
-16 нейронов преобразуют выходы первого слоя</a:t>
+              <a:t>второй внутренний слой
+16 нейронов</a:t>
             </a:r>
             <a:endParaRPr i="0">
               <a:solidFill>
@@ -9763,8 +9812,8 @@
                 <a:latin typeface="Arial" panose="020B0604020202020204" pitchFamily="34" charset="0"/>
                 <a:cs typeface="Arial"/>
               </a:rPr>
-              <a:t>оценка отношения
-матрица–наполнитель</a:t>
+              <a:t>одна оценка
+соотношения компонентов</a:t>
             </a:r>
             <a:endParaRPr sz="1500" i="0">
               <a:solidFill>
@@ -9799,350 +9848,6 @@
       </p:cxnSp>
       <p:sp>
         <p:nvSpPr>
-          <p:cNvPr id="83" name="TextBox 82"/>
-          <p:cNvSpPr txBox="1"/>
-          <p:nvPr/>
-        </p:nvSpPr>
-        <p:spPr>
-          <a:xfrm>
-            <a:off x="557784" y="4297680"/>
-            <a:ext cx="2240280" cy="548640"/>
-          </a:xfrm>
-          <a:prstGeom prst="rect">
-            <a:avLst/>
-          </a:prstGeom>
-          <a:noFill/>
-        </p:spPr>
-        <p:txBody>
-          <a:bodyPr wrap="square" lIns="0" tIns="0" rIns="0" bIns="0" anchor="t"/>
-          <a:lstStyle/>
-          <a:p>
-            <a:pPr marL="0" indent="0" algn="l">
-              <a:buNone/>
-            </a:pPr>
-            <a:r>
-              <a:rPr lang="ru-RU" sz="1800" b="1" i="0">
-                <a:solidFill>
-                  <a:srgbClr val="262626"/>
-                </a:solidFill>
-                <a:latin typeface="Arial" panose="020B0604020202020204" pitchFamily="34" charset="0"/>
-                <a:cs typeface="Arial"/>
-              </a:rPr>
-              <a:t>Обновление весов</a:t>
-            </a:r>
-            <a:endParaRPr sz="1800" b="1" i="0">
-              <a:solidFill>
-                <a:srgbClr val="262626"/>
-              </a:solidFill>
-              <a:latin typeface="Arial" panose="020B0604020202020204" pitchFamily="34" charset="0"/>
-              <a:cs typeface="Arial"/>
-            </a:endParaRPr>
-          </a:p>
-        </p:txBody>
-      </p:sp>
-      <p:sp>
-        <p:nvSpPr>
-          <p:cNvPr id="84" name="TextBox 83"/>
-          <p:cNvSpPr txBox="1"/>
-          <p:nvPr/>
-        </p:nvSpPr>
-        <p:spPr>
-          <a:xfrm>
-            <a:off x="557784" y="4846320"/>
-            <a:ext cx="2240280" cy="822960"/>
-          </a:xfrm>
-          <a:prstGeom prst="rect">
-            <a:avLst/>
-          </a:prstGeom>
-          <a:noFill/>
-        </p:spPr>
-        <p:txBody>
-          <a:bodyPr wrap="square" lIns="0" tIns="0" rIns="0" bIns="0" anchor="t"/>
-          <a:lstStyle/>
-          <a:p>
-            <a:pPr marL="0" indent="0" algn="l">
-              <a:lnSpc>
-                <a:spcPct val="100000"/>
-              </a:lnSpc>
-              <a:buNone/>
-            </a:pPr>
-            <a:r>
-              <a:rPr lang="ru-RU" i="0">
-                <a:solidFill>
-                  <a:srgbClr val="595959"/>
-                </a:solidFill>
-                <a:latin typeface="Arial" panose="020B0604020202020204" pitchFamily="34" charset="0"/>
-                <a:cs typeface="Arial"/>
-              </a:rPr>
-              <a:t>644 строки</a:t>
-            </a:r>
-            <a:endParaRPr i="0">
-              <a:solidFill>
-                <a:srgbClr val="595959"/>
-              </a:solidFill>
-              <a:latin typeface="Arial" panose="020B0604020202020204" pitchFamily="34" charset="0"/>
-              <a:cs typeface="Arial"/>
-            </a:endParaRPr>
-          </a:p>
-        </p:txBody>
-      </p:sp>
-      <p:sp>
-        <p:nvSpPr>
-          <p:cNvPr id="85" name="TextBox 84"/>
-          <p:cNvSpPr txBox="1"/>
-          <p:nvPr/>
-        </p:nvSpPr>
-        <p:spPr>
-          <a:xfrm>
-            <a:off x="2889503" y="4297680"/>
-            <a:ext cx="2240280" cy="548640"/>
-          </a:xfrm>
-          <a:prstGeom prst="rect">
-            <a:avLst/>
-          </a:prstGeom>
-          <a:noFill/>
-        </p:spPr>
-        <p:txBody>
-          <a:bodyPr wrap="square" lIns="0" tIns="0" rIns="0" bIns="0" anchor="t"/>
-          <a:lstStyle/>
-          <a:p>
-            <a:pPr marL="0" indent="0" algn="l">
-              <a:buNone/>
-            </a:pPr>
-            <a:r>
-              <a:rPr lang="ru-RU" sz="1800" b="1" i="0">
-                <a:solidFill>
-                  <a:srgbClr val="262626"/>
-                </a:solidFill>
-                <a:latin typeface="Arial" panose="020B0604020202020204" pitchFamily="34" charset="0"/>
-                <a:cs typeface="Arial"/>
-              </a:rPr>
-              <a:t>Ранняя остановка</a:t>
-            </a:r>
-            <a:endParaRPr sz="1800" b="1" i="0">
-              <a:solidFill>
-                <a:srgbClr val="262626"/>
-              </a:solidFill>
-              <a:latin typeface="Arial" panose="020B0604020202020204" pitchFamily="34" charset="0"/>
-              <a:cs typeface="Arial"/>
-            </a:endParaRPr>
-          </a:p>
-        </p:txBody>
-      </p:sp>
-      <p:sp>
-        <p:nvSpPr>
-          <p:cNvPr id="86" name="TextBox 85"/>
-          <p:cNvSpPr txBox="1"/>
-          <p:nvPr/>
-        </p:nvSpPr>
-        <p:spPr>
-          <a:xfrm>
-            <a:off x="2889503" y="4846320"/>
-            <a:ext cx="2240280" cy="822960"/>
-          </a:xfrm>
-          <a:prstGeom prst="rect">
-            <a:avLst/>
-          </a:prstGeom>
-          <a:noFill/>
-        </p:spPr>
-        <p:txBody>
-          <a:bodyPr wrap="square" lIns="0" tIns="0" rIns="0" bIns="0" anchor="t"/>
-          <a:lstStyle/>
-          <a:p>
-            <a:pPr marL="0" indent="0" algn="l">
-              <a:lnSpc>
-                <a:spcPct val="100000"/>
-              </a:lnSpc>
-              <a:buNone/>
-            </a:pPr>
-            <a:r>
-              <a:rPr lang="ru-RU" i="0">
-                <a:solidFill>
-                  <a:srgbClr val="595959"/>
-                </a:solidFill>
-                <a:latin typeface="Arial" panose="020B0604020202020204" pitchFamily="34" charset="0"/>
-                <a:cs typeface="Arial"/>
-              </a:rPr>
-              <a:t>72 строки</a:t>
-            </a:r>
-            <a:endParaRPr i="0">
-              <a:solidFill>
-                <a:srgbClr val="595959"/>
-              </a:solidFill>
-              <a:latin typeface="Arial" panose="020B0604020202020204" pitchFamily="34" charset="0"/>
-              <a:cs typeface="Arial"/>
-            </a:endParaRPr>
-          </a:p>
-        </p:txBody>
-      </p:sp>
-      <p:sp>
-        <p:nvSpPr>
-          <p:cNvPr id="87" name="TextBox 86"/>
-          <p:cNvSpPr txBox="1"/>
-          <p:nvPr/>
-        </p:nvSpPr>
-        <p:spPr>
-          <a:xfrm>
-            <a:off x="5221224" y="4297680"/>
-            <a:ext cx="2240280" cy="548640"/>
-          </a:xfrm>
-          <a:prstGeom prst="rect">
-            <a:avLst/>
-          </a:prstGeom>
-          <a:noFill/>
-        </p:spPr>
-        <p:txBody>
-          <a:bodyPr wrap="square" lIns="0" tIns="0" rIns="0" bIns="0" anchor="t"/>
-          <a:lstStyle/>
-          <a:p>
-            <a:pPr marL="0" indent="0" algn="l">
-              <a:buNone/>
-            </a:pPr>
-            <a:r>
-              <a:rPr lang="ru-RU" sz="1800" b="1" i="0">
-                <a:solidFill>
-                  <a:srgbClr val="262626"/>
-                </a:solidFill>
-                <a:latin typeface="Arial" panose="020B0604020202020204" pitchFamily="34" charset="0"/>
-                <a:cs typeface="Arial"/>
-              </a:rPr>
-              <a:t>Обучающая выборка</a:t>
-            </a:r>
-            <a:endParaRPr sz="1800" b="1" i="0">
-              <a:solidFill>
-                <a:srgbClr val="262626"/>
-              </a:solidFill>
-              <a:latin typeface="Arial" panose="020B0604020202020204" pitchFamily="34" charset="0"/>
-              <a:cs typeface="Arial"/>
-            </a:endParaRPr>
-          </a:p>
-        </p:txBody>
-      </p:sp>
-      <p:sp>
-        <p:nvSpPr>
-          <p:cNvPr id="88" name="TextBox 87"/>
-          <p:cNvSpPr txBox="1"/>
-          <p:nvPr/>
-        </p:nvSpPr>
-        <p:spPr>
-          <a:xfrm>
-            <a:off x="5221224" y="4846320"/>
-            <a:ext cx="2240280" cy="822960"/>
-          </a:xfrm>
-          <a:prstGeom prst="rect">
-            <a:avLst/>
-          </a:prstGeom>
-          <a:noFill/>
-        </p:spPr>
-        <p:txBody>
-          <a:bodyPr wrap="square" lIns="0" tIns="0" rIns="0" bIns="0" anchor="t"/>
-          <a:lstStyle/>
-          <a:p>
-            <a:pPr marL="0" indent="0" algn="l">
-              <a:lnSpc>
-                <a:spcPct val="100000"/>
-              </a:lnSpc>
-              <a:buNone/>
-            </a:pPr>
-            <a:r>
-              <a:rPr lang="ru-RU" i="0">
-                <a:solidFill>
-                  <a:srgbClr val="595959"/>
-                </a:solidFill>
-                <a:latin typeface="Arial" panose="020B0604020202020204" pitchFamily="34" charset="0"/>
-                <a:cs typeface="Arial"/>
-              </a:rPr>
-              <a:t>Всего 716 строк: 644 + 72</a:t>
-            </a:r>
-            <a:endParaRPr i="0">
-              <a:solidFill>
-                <a:srgbClr val="595959"/>
-              </a:solidFill>
-              <a:latin typeface="Arial" panose="020B0604020202020204" pitchFamily="34" charset="0"/>
-              <a:cs typeface="Arial"/>
-            </a:endParaRPr>
-          </a:p>
-        </p:txBody>
-      </p:sp>
-      <p:sp>
-        <p:nvSpPr>
-          <p:cNvPr id="89" name="Rectangle 88"/>
-          <p:cNvSpPr/>
-          <p:nvPr/>
-        </p:nvSpPr>
-        <p:spPr>
-          <a:xfrm>
-            <a:off x="7680960" y="4297680"/>
-            <a:ext cx="4087368" cy="1783080"/>
-          </a:xfrm>
-          <a:prstGeom prst="rect">
-            <a:avLst/>
-          </a:prstGeom>
-          <a:solidFill>
-            <a:srgbClr val="F1BE29"/>
-          </a:solidFill>
-          <a:ln>
-            <a:noFill/>
-          </a:ln>
-        </p:spPr>
-        <p:txBody>
-          <a:bodyPr rtlCol="0" anchor="ctr"/>
-          <a:lstStyle/>
-          <a:p>
-            <a:pPr algn="ctr"/>
-            <a:endParaRPr/>
-          </a:p>
-        </p:txBody>
-      </p:sp>
-      <p:sp>
-        <p:nvSpPr>
-          <p:cNvPr id="90" name="TextBox 89"/>
-          <p:cNvSpPr txBox="1"/>
-          <p:nvPr/>
-        </p:nvSpPr>
-        <p:spPr>
-          <a:xfrm>
-            <a:off x="7909560" y="4297680"/>
-            <a:ext cx="3657600" cy="1783080"/>
-          </a:xfrm>
-          <a:prstGeom prst="rect">
-            <a:avLst/>
-          </a:prstGeom>
-          <a:noFill/>
-        </p:spPr>
-        <p:txBody>
-          <a:bodyPr wrap="square" lIns="0" tIns="0" rIns="0" bIns="0" anchor="ctr"/>
-          <a:lstStyle/>
-          <a:p>
-            <a:pPr marL="0" indent="0" algn="l">
-              <a:lnSpc>
-                <a:spcPct val="105000"/>
-              </a:lnSpc>
-              <a:buNone/>
-            </a:pPr>
-            <a:r>
-              <a:rPr lang="ru-RU" sz="1800" b="1" i="0">
-                <a:solidFill>
-                  <a:srgbClr val="262626"/>
-                </a:solidFill>
-                <a:latin typeface="Arial" panose="020B0604020202020204" pitchFamily="34" charset="0"/>
-                <a:cs typeface="Arial"/>
-              </a:rPr>
-              <a:t>961 настраиваемый параметр
-76 эпох; лучшие веса эпохи 35</a:t>
-            </a:r>
-            <a:endParaRPr sz="1800" b="1" i="0">
-              <a:solidFill>
-                <a:srgbClr val="262626"/>
-              </a:solidFill>
-              <a:latin typeface="Arial" panose="020B0604020202020204" pitchFamily="34" charset="0"/>
-              <a:cs typeface="Arial"/>
-            </a:endParaRPr>
-          </a:p>
-        </p:txBody>
-      </p:sp>
-      <p:sp>
-        <p:nvSpPr>
           <p:cNvPr id="91" name="Источник"/>
           <p:cNvSpPr txBox="1"/>
           <p:nvPr/>
@@ -10165,16 +9870,16 @@
               <a:buNone/>
             </a:pPr>
             <a:r>
-              <a:rPr lang="ru-RU" sz="1600" b="0" i="0">
+              <a:rPr lang="ru-RU" sz="1300" i="0">
                 <a:solidFill>
                   <a:srgbClr val="595959"/>
                 </a:solidFill>
                 <a:latin typeface="Arial" panose="020B0604020202020204" pitchFamily="34" charset="0"/>
                 <a:cs typeface="Arial"/>
               </a:rPr>
-              <a:t>Источник: РПЗ, разд. 2.4</a:t>
+              <a:t>Источник: РПЗ, раздел о нейросети</a:t>
             </a:r>
-            <a:endParaRPr sz="1600" b="0" i="0">
+            <a:endParaRPr sz="1300" i="0">
               <a:solidFill>
                 <a:srgbClr val="595959"/>
               </a:solidFill>
@@ -10216,15 +9921,186 @@
             </a:pPr>
             <a:fld id="{00000000-1234-1234-1234-123412341234}" type="slidenum">
               <a:rPr lang="ru-RU" smtClean="0">
-                <a:latin typeface="Arial" panose="020B0604020202020204" pitchFamily="34" charset="0"/>
                 <a:cs typeface="Arial"/>
               </a:rPr>
               <a:t>11</a:t>
             </a:fld>
             <a:endParaRPr lang="ru-RU" dirty="0">
-              <a:latin typeface="Arial" panose="020B0604020202020204" pitchFamily="34" charset="0"/>
               <a:cs typeface="Arial"/>
             </a:endParaRPr>
+          </a:p>
+        </p:txBody>
+      </p:sp>
+      <p:sp>
+        <p:nvSpPr>
+          <p:cNvPr id="2" name="NNPurpose">
+            <a:extLst>
+              <a:ext uri="{FF2B5EF4-FFF2-40B4-BE49-F238E27FC236}">
+                <a16:creationId xmlns:a16="http://schemas.microsoft.com/office/drawing/2014/main" id="{8DA77781-FAA6-4FF2-BA1C-CFA3C244FF03}"/>
+              </a:ext>
+            </a:extLst>
+          </p:cNvPr>
+          <p:cNvSpPr txBox="1"/>
+          <p:nvPr/>
+        </p:nvSpPr>
+        <p:spPr>
+          <a:xfrm>
+            <a:off x="558800" y="1257300"/>
+            <a:ext cx="11201400" cy="323165"/>
+          </a:xfrm>
+          <a:prstGeom prst="rect">
+            <a:avLst/>
+          </a:prstGeom>
+          <a:noFill/>
+        </p:spPr>
+        <p:txBody>
+          <a:bodyPr vert="horz" wrap="square" rtlCol="0" anchor="ctr">
+            <a:noAutofit/>
+          </a:bodyPr>
+          <a:lstStyle/>
+          <a:p>
+            <a:pPr algn="ctr"/>
+            <a:r>
+              <a:rPr lang="ru-RU" sz="1500" b="1">
+                <a:solidFill>
+                  <a:srgbClr val="0E5DAB"/>
+                </a:solidFill>
+                <a:latin typeface="Arial" panose="020B0604020202020204" pitchFamily="34" charset="0"/>
+              </a:rPr>
+              <a:t>12 характеристик, включая известные модуль и прочность → соотношение компонентов</a:t>
+            </a:r>
+            <a:endParaRPr lang="ru-RU" sz="1500" b="1" dirty="0">
+              <a:solidFill>
+                <a:srgbClr val="0E5DAB"/>
+              </a:solidFill>
+              <a:latin typeface="Arial" panose="020B0604020202020204" pitchFamily="34" charset="0"/>
+            </a:endParaRPr>
+          </a:p>
+        </p:txBody>
+      </p:sp>
+      <p:sp>
+        <p:nvSpPr>
+          <p:cNvPr id="3" name="NNTraining">
+            <a:extLst>
+              <a:ext uri="{FF2B5EF4-FFF2-40B4-BE49-F238E27FC236}">
+                <a16:creationId xmlns:a16="http://schemas.microsoft.com/office/drawing/2014/main" id="{DB473981-65F0-4A38-A4C7-57D7042D5F40}"/>
+              </a:ext>
+            </a:extLst>
+          </p:cNvPr>
+          <p:cNvSpPr/>
+          <p:nvPr/>
+        </p:nvSpPr>
+        <p:spPr>
+          <a:xfrm>
+            <a:off x="558800" y="4381500"/>
+            <a:ext cx="5207000" cy="1397000"/>
+          </a:xfrm>
+          <a:prstGeom prst="roundRect">
+            <a:avLst/>
+          </a:prstGeom>
+          <a:solidFill>
+            <a:srgbClr val="DCE9F6"/>
+          </a:solidFill>
+          <a:ln w="17780">
+            <a:solidFill>
+              <a:srgbClr val="0E5DAB"/>
+            </a:solidFill>
+          </a:ln>
+        </p:spPr>
+        <p:style>
+          <a:lnRef idx="2">
+            <a:schemeClr val="accent1">
+              <a:shade val="50000"/>
+            </a:schemeClr>
+          </a:lnRef>
+          <a:fillRef idx="1">
+            <a:schemeClr val="accent1"/>
+          </a:fillRef>
+          <a:effectRef idx="0">
+            <a:schemeClr val="accent1"/>
+          </a:effectRef>
+          <a:fontRef idx="minor">
+            <a:schemeClr val="lt1"/>
+          </a:fontRef>
+        </p:style>
+        <p:txBody>
+          <a:bodyPr wrap="square" lIns="101600" tIns="76200" rIns="101600" bIns="76200" rtlCol="0" anchor="ctr"/>
+          <a:lstStyle/>
+          <a:p>
+            <a:pPr algn="ctr"/>
+            <a:r>
+              <a:rPr lang="ru-RU" sz="1700" b="1">
+                <a:solidFill>
+                  <a:srgbClr val="262626"/>
+                </a:solidFill>
+                <a:latin typeface="Arial" panose="020B0604020202020204" pitchFamily="34" charset="0"/>
+              </a:rPr>
+              <a:t>Обучение
+часть из 716 строк следит, когда пора остановиться</a:t>
+            </a:r>
+          </a:p>
+        </p:txBody>
+      </p:sp>
+      <p:sp>
+        <p:nvSpPr>
+          <p:cNvPr id="5" name="NNTest">
+            <a:extLst>
+              <a:ext uri="{FF2B5EF4-FFF2-40B4-BE49-F238E27FC236}">
+                <a16:creationId xmlns:a16="http://schemas.microsoft.com/office/drawing/2014/main" id="{6580F9B2-843E-4A6B-9211-95A55FA4E5BF}"/>
+              </a:ext>
+            </a:extLst>
+          </p:cNvPr>
+          <p:cNvSpPr/>
+          <p:nvPr/>
+        </p:nvSpPr>
+        <p:spPr>
+          <a:xfrm>
+            <a:off x="6553200" y="4381500"/>
+            <a:ext cx="5207000" cy="1397000"/>
+          </a:xfrm>
+          <a:prstGeom prst="roundRect">
+            <a:avLst/>
+          </a:prstGeom>
+          <a:solidFill>
+            <a:srgbClr val="FFC000"/>
+          </a:solidFill>
+          <a:ln w="17780">
+            <a:solidFill>
+              <a:srgbClr val="0E5DAB"/>
+            </a:solidFill>
+          </a:ln>
+        </p:spPr>
+        <p:style>
+          <a:lnRef idx="2">
+            <a:schemeClr val="accent1">
+              <a:shade val="50000"/>
+            </a:schemeClr>
+          </a:lnRef>
+          <a:fillRef idx="1">
+            <a:schemeClr val="accent1"/>
+          </a:fillRef>
+          <a:effectRef idx="0">
+            <a:schemeClr val="accent1"/>
+          </a:effectRef>
+          <a:fontRef idx="minor">
+            <a:schemeClr val="lt1"/>
+          </a:fontRef>
+        </p:style>
+        <p:txBody>
+          <a:bodyPr wrap="square" lIns="101600" tIns="76200" rIns="101600" bIns="76200" rtlCol="0" anchor="ctr"/>
+          <a:lstStyle/>
+          <a:p>
+            <a:pPr algn="ctr"/>
+            <a:r>
+              <a:rPr lang="ru-RU" sz="1700" b="1">
+                <a:solidFill>
+                  <a:srgbClr val="262626"/>
+                </a:solidFill>
+                <a:latin typeface="Arial" panose="020B0604020202020204" pitchFamily="34" charset="0"/>
+              </a:rPr>
+              <a:t>Итоговая проверка
+307 строк остаются закрытыми до конца</a:t>
+            </a:r>
           </a:p>
         </p:txBody>
       </p:sp>
@@ -10331,7 +10207,7 @@
                   <a:latin typeface="Arial" panose="020B0604020202020204" pitchFamily="34" charset="0"/>
                   <a:cs typeface="Arial" pitchFamily="2" charset="0"/>
                 </a:rPr>
-                <a:t>Нейросеть не превзошла прогноз среднего</a:t>
+                <a:t>Нейросеть не улучшила прогноз среднего</a:t>
               </a:r>
               <a:endParaRPr lang="ru-RU" sz="2600" b="1" spc="0" dirty="0">
                 <a:solidFill>
@@ -10621,1048 +10497,6 @@
           </p:txBody>
         </p:sp>
       </p:grpSp>
-      <p:pic>
-        <p:nvPicPr>
-          <p:cNvPr id="71" name="Picture 70" descr="nn_diagnostics.png"/>
-          <p:cNvPicPr>
-            <a:picLocks noChangeAspect="1"/>
-          </p:cNvPicPr>
-          <p:nvPr/>
-        </p:nvPicPr>
-        <p:blipFill>
-          <a:blip r:embed="rId3"/>
-          <a:stretch>
-            <a:fillRect/>
-          </a:stretch>
-        </p:blipFill>
-        <p:spPr>
-          <a:xfrm>
-            <a:off x="731520" y="1216152"/>
-            <a:ext cx="10698480" cy="4129690"/>
-          </a:xfrm>
-          <a:prstGeom prst="rect">
-            <a:avLst/>
-          </a:prstGeom>
-          <a:ln w="9525">
-            <a:solidFill>
-              <a:srgbClr val="D9D9D9"/>
-            </a:solidFill>
-          </a:ln>
-        </p:spPr>
-      </p:pic>
-      <p:graphicFrame>
-        <p:nvGraphicFramePr>
-          <p:cNvPr id="72" name="Метрики MLP"/>
-          <p:cNvGraphicFramePr>
-            <a:graphicFrameLocks noGrp="1"/>
-          </p:cNvGraphicFramePr>
-          <p:nvPr>
-            <p:extLst>
-              <p:ext uri="{D42A27DB-BD31-4B8C-83A1-F6EECF244321}">
-                <p14:modId xmlns:p14="http://schemas.microsoft.com/office/powerpoint/2010/main" val="3303965866"/>
-              </p:ext>
-            </p:extLst>
-          </p:nvPr>
-        </p:nvGraphicFramePr>
-        <p:xfrm>
-          <a:off x="557784" y="5413248"/>
-          <a:ext cx="11207798" cy="905256"/>
-        </p:xfrm>
-        <a:graphic>
-          <a:graphicData uri="http://schemas.openxmlformats.org/drawingml/2006/table">
-            <a:tbl>
-              <a:tblPr>
-                <a:tableStyleId>{2D5ABB26-0587-4C30-8999-92F81FD0307C}</a:tableStyleId>
-              </a:tblPr>
-              <a:tblGrid>
-                <a:gridCol w="1524000">
-                  <a:extLst>
-                    <a:ext uri="{9D8B030D-6E8A-4147-A177-3AD203B41FA5}">
-                      <a16:colId xmlns:a16="http://schemas.microsoft.com/office/drawing/2014/main" val="20000"/>
-                    </a:ext>
-                  </a:extLst>
-                </a:gridCol>
-                <a:gridCol w="1372514">
-                  <a:extLst>
-                    <a:ext uri="{9D8B030D-6E8A-4147-A177-3AD203B41FA5}">
-                      <a16:colId xmlns:a16="http://schemas.microsoft.com/office/drawing/2014/main" val="20001"/>
-                    </a:ext>
-                  </a:extLst>
-                </a:gridCol>
-                <a:gridCol w="1372514">
-                  <a:extLst>
-                    <a:ext uri="{9D8B030D-6E8A-4147-A177-3AD203B41FA5}">
-                      <a16:colId xmlns:a16="http://schemas.microsoft.com/office/drawing/2014/main" val="20002"/>
-                    </a:ext>
-                  </a:extLst>
-                </a:gridCol>
-                <a:gridCol w="1372514">
-                  <a:extLst>
-                    <a:ext uri="{9D8B030D-6E8A-4147-A177-3AD203B41FA5}">
-                      <a16:colId xmlns:a16="http://schemas.microsoft.com/office/drawing/2014/main" val="20003"/>
-                    </a:ext>
-                  </a:extLst>
-                </a:gridCol>
-                <a:gridCol w="1372514">
-                  <a:extLst>
-                    <a:ext uri="{9D8B030D-6E8A-4147-A177-3AD203B41FA5}">
-                      <a16:colId xmlns:a16="http://schemas.microsoft.com/office/drawing/2014/main" val="20004"/>
-                    </a:ext>
-                  </a:extLst>
-                </a:gridCol>
-                <a:gridCol w="1372514">
-                  <a:extLst>
-                    <a:ext uri="{9D8B030D-6E8A-4147-A177-3AD203B41FA5}">
-                      <a16:colId xmlns:a16="http://schemas.microsoft.com/office/drawing/2014/main" val="20005"/>
-                    </a:ext>
-                  </a:extLst>
-                </a:gridCol>
-                <a:gridCol w="1372514">
-                  <a:extLst>
-                    <a:ext uri="{9D8B030D-6E8A-4147-A177-3AD203B41FA5}">
-                      <a16:colId xmlns:a16="http://schemas.microsoft.com/office/drawing/2014/main" val="20006"/>
-                    </a:ext>
-                  </a:extLst>
-                </a:gridCol>
-                <a:gridCol w="1372514">
-                  <a:extLst>
-                    <a:ext uri="{9D8B030D-6E8A-4147-A177-3AD203B41FA5}">
-                      <a16:colId xmlns:a16="http://schemas.microsoft.com/office/drawing/2014/main" val="20007"/>
-                    </a:ext>
-                  </a:extLst>
-                </a:gridCol>
-              </a:tblGrid>
-              <a:tr h="304800">
-                <a:tc>
-                  <a:txBody>
-                    <a:bodyPr/>
-                    <a:lstStyle/>
-                    <a:p>
-                      <a:pPr marL="0" indent="0" algn="l">
-                        <a:buNone/>
-                      </a:pPr>
-                      <a:r>
-                        <a:rPr lang="ru-RU" sz="900" b="1" i="0">
-                          <a:solidFill>
-                            <a:srgbClr val="FFFFFF"/>
-                          </a:solidFill>
-                          <a:latin typeface="Arial" panose="020B0604020202020204" pitchFamily="34" charset="0"/>
-                          <a:cs typeface="Arial"/>
-                        </a:rPr>
-                        <a:t>Модель</a:t>
-                      </a:r>
-                      <a:endParaRPr sz="900" b="1" i="0">
-                        <a:solidFill>
-                          <a:srgbClr val="FFFFFF"/>
-                        </a:solidFill>
-                        <a:latin typeface="Arial" panose="020B0604020202020204" pitchFamily="34" charset="0"/>
-                        <a:cs typeface="Arial"/>
-                      </a:endParaRPr>
-                    </a:p>
-                  </a:txBody>
-                  <a:tcPr marT="27432" marB="27432" anchor="ctr">
-                    <a:lnL w="0">
-                      <a:noFill/>
-                    </a:lnL>
-                    <a:lnR w="0">
-                      <a:noFill/>
-                    </a:lnR>
-                    <a:lnT w="0">
-                      <a:noFill/>
-                    </a:lnT>
-                    <a:lnB w="19050">
-                      <a:solidFill>
-                        <a:srgbClr val="065CAB"/>
-                      </a:solidFill>
-                    </a:lnB>
-                    <a:solidFill>
-                      <a:srgbClr val="065CAB"/>
-                    </a:solidFill>
-                  </a:tcPr>
-                </a:tc>
-                <a:tc>
-                  <a:txBody>
-                    <a:bodyPr/>
-                    <a:lstStyle/>
-                    <a:p>
-                      <a:pPr marL="0" indent="0" algn="r">
-                        <a:buNone/>
-                      </a:pPr>
-                      <a:r>
-                        <a:rPr lang="en-US" sz="900" b="1" i="0">
-                          <a:solidFill>
-                            <a:srgbClr val="FFFFFF"/>
-                          </a:solidFill>
-                          <a:latin typeface="Arial" panose="020B0604020202020204" pitchFamily="34" charset="0"/>
-                          <a:cs typeface="Arial"/>
-                        </a:rPr>
-                        <a:t>CV RMSE</a:t>
-                      </a:r>
-                      <a:endParaRPr sz="900" b="1" i="0">
-                        <a:solidFill>
-                          <a:srgbClr val="FFFFFF"/>
-                        </a:solidFill>
-                        <a:latin typeface="Arial" panose="020B0604020202020204" pitchFamily="34" charset="0"/>
-                        <a:cs typeface="Arial"/>
-                      </a:endParaRPr>
-                    </a:p>
-                  </a:txBody>
-                  <a:tcPr marT="27432" marB="27432" anchor="ctr">
-                    <a:lnL w="0">
-                      <a:noFill/>
-                    </a:lnL>
-                    <a:lnR w="0">
-                      <a:noFill/>
-                    </a:lnR>
-                    <a:lnT w="0">
-                      <a:noFill/>
-                    </a:lnT>
-                    <a:lnB w="19050">
-                      <a:solidFill>
-                        <a:srgbClr val="065CAB"/>
-                      </a:solidFill>
-                    </a:lnB>
-                    <a:solidFill>
-                      <a:srgbClr val="065CAB"/>
-                    </a:solidFill>
-                  </a:tcPr>
-                </a:tc>
-                <a:tc>
-                  <a:txBody>
-                    <a:bodyPr/>
-                    <a:lstStyle/>
-                    <a:p>
-                      <a:pPr marL="0" indent="0" algn="r">
-                        <a:buNone/>
-                      </a:pPr>
-                      <a:r>
-                        <a:rPr lang="ru-RU" sz="900" b="1" i="0">
-                          <a:solidFill>
-                            <a:srgbClr val="FFFFFF"/>
-                          </a:solidFill>
-                          <a:latin typeface="Arial" panose="020B0604020202020204" pitchFamily="34" charset="0"/>
-                          <a:cs typeface="Arial"/>
-                        </a:rPr>
-                        <a:t>обучение </a:t>
-                      </a:r>
-                      <a:r>
-                        <a:rPr lang="en-US" sz="900" b="1" i="0">
-                          <a:solidFill>
-                            <a:srgbClr val="FFFFFF"/>
-                          </a:solidFill>
-                          <a:latin typeface="Arial" panose="020B0604020202020204" pitchFamily="34" charset="0"/>
-                          <a:cs typeface="Arial"/>
-                        </a:rPr>
-                        <a:t>RMSE</a:t>
-                      </a:r>
-                      <a:endParaRPr sz="900" b="1" i="0">
-                        <a:solidFill>
-                          <a:srgbClr val="FFFFFF"/>
-                        </a:solidFill>
-                        <a:latin typeface="Arial" panose="020B0604020202020204" pitchFamily="34" charset="0"/>
-                        <a:cs typeface="Arial"/>
-                      </a:endParaRPr>
-                    </a:p>
-                  </a:txBody>
-                  <a:tcPr marT="27432" marB="27432" anchor="ctr">
-                    <a:lnL w="0">
-                      <a:noFill/>
-                    </a:lnL>
-                    <a:lnR w="0">
-                      <a:noFill/>
-                    </a:lnR>
-                    <a:lnT w="0">
-                      <a:noFill/>
-                    </a:lnT>
-                    <a:lnB w="19050">
-                      <a:solidFill>
-                        <a:srgbClr val="065CAB"/>
-                      </a:solidFill>
-                    </a:lnB>
-                    <a:solidFill>
-                      <a:srgbClr val="065CAB"/>
-                    </a:solidFill>
-                  </a:tcPr>
-                </a:tc>
-                <a:tc>
-                  <a:txBody>
-                    <a:bodyPr/>
-                    <a:lstStyle/>
-                    <a:p>
-                      <a:pPr marL="0" indent="0" algn="r">
-                        <a:buNone/>
-                      </a:pPr>
-                      <a:r>
-                        <a:rPr lang="ru-RU" sz="900" b="1" i="0">
-                          <a:solidFill>
-                            <a:srgbClr val="FFFFFF"/>
-                          </a:solidFill>
-                          <a:latin typeface="Arial" panose="020B0604020202020204" pitchFamily="34" charset="0"/>
-                          <a:cs typeface="Arial"/>
-                        </a:rPr>
-                        <a:t>обучение </a:t>
-                      </a:r>
-                      <a:r>
-                        <a:rPr lang="en-US" sz="900" b="1" i="0">
-                          <a:solidFill>
-                            <a:srgbClr val="FFFFFF"/>
-                          </a:solidFill>
-                          <a:latin typeface="Arial" panose="020B0604020202020204" pitchFamily="34" charset="0"/>
-                          <a:cs typeface="Arial"/>
-                        </a:rPr>
-                        <a:t>MAE</a:t>
-                      </a:r>
-                      <a:endParaRPr sz="900" b="1" i="0">
-                        <a:solidFill>
-                          <a:srgbClr val="FFFFFF"/>
-                        </a:solidFill>
-                        <a:latin typeface="Arial" panose="020B0604020202020204" pitchFamily="34" charset="0"/>
-                        <a:cs typeface="Arial"/>
-                      </a:endParaRPr>
-                    </a:p>
-                  </a:txBody>
-                  <a:tcPr marT="27432" marB="27432" anchor="ctr">
-                    <a:lnL w="0">
-                      <a:noFill/>
-                    </a:lnL>
-                    <a:lnR w="0">
-                      <a:noFill/>
-                    </a:lnR>
-                    <a:lnT w="0">
-                      <a:noFill/>
-                    </a:lnT>
-                    <a:lnB w="19050">
-                      <a:solidFill>
-                        <a:srgbClr val="065CAB"/>
-                      </a:solidFill>
-                    </a:lnB>
-                    <a:solidFill>
-                      <a:srgbClr val="065CAB"/>
-                    </a:solidFill>
-                  </a:tcPr>
-                </a:tc>
-                <a:tc>
-                  <a:txBody>
-                    <a:bodyPr/>
-                    <a:lstStyle/>
-                    <a:p>
-                      <a:pPr marL="0" indent="0" algn="r">
-                        <a:buNone/>
-                      </a:pPr>
-                      <a:r>
-                        <a:rPr lang="ru-RU" sz="900" b="1" i="0">
-                          <a:solidFill>
-                            <a:srgbClr val="FFFFFF"/>
-                          </a:solidFill>
-                          <a:latin typeface="Arial" panose="020B0604020202020204" pitchFamily="34" charset="0"/>
-                          <a:cs typeface="Arial"/>
-                        </a:rPr>
-                        <a:t>обучение </a:t>
-                      </a:r>
-                      <a:r>
-                        <a:rPr lang="en-US" sz="900" b="1" i="0">
-                          <a:solidFill>
-                            <a:srgbClr val="FFFFFF"/>
-                          </a:solidFill>
-                          <a:latin typeface="Arial" panose="020B0604020202020204" pitchFamily="34" charset="0"/>
-                          <a:cs typeface="Arial"/>
-                        </a:rPr>
-                        <a:t>R²</a:t>
-                      </a:r>
-                      <a:endParaRPr sz="900" b="1" i="0">
-                        <a:solidFill>
-                          <a:srgbClr val="FFFFFF"/>
-                        </a:solidFill>
-                        <a:latin typeface="Arial" panose="020B0604020202020204" pitchFamily="34" charset="0"/>
-                        <a:cs typeface="Arial"/>
-                      </a:endParaRPr>
-                    </a:p>
-                  </a:txBody>
-                  <a:tcPr marT="27432" marB="27432" anchor="ctr">
-                    <a:lnL w="0">
-                      <a:noFill/>
-                    </a:lnL>
-                    <a:lnR w="0">
-                      <a:noFill/>
-                    </a:lnR>
-                    <a:lnT w="0">
-                      <a:noFill/>
-                    </a:lnT>
-                    <a:lnB w="19050">
-                      <a:solidFill>
-                        <a:srgbClr val="065CAB"/>
-                      </a:solidFill>
-                    </a:lnB>
-                    <a:solidFill>
-                      <a:srgbClr val="065CAB"/>
-                    </a:solidFill>
-                  </a:tcPr>
-                </a:tc>
-                <a:tc>
-                  <a:txBody>
-                    <a:bodyPr/>
-                    <a:lstStyle/>
-                    <a:p>
-                      <a:pPr marL="0" indent="0" algn="r">
-                        <a:buNone/>
-                      </a:pPr>
-                      <a:r>
-                        <a:rPr lang="ru-RU" sz="900" b="1" i="0">
-                          <a:solidFill>
-                            <a:srgbClr val="FFFFFF"/>
-                          </a:solidFill>
-                          <a:latin typeface="Arial" panose="020B0604020202020204" pitchFamily="34" charset="0"/>
-                          <a:cs typeface="Arial"/>
-                        </a:rPr>
-                        <a:t>тест </a:t>
-                      </a:r>
-                      <a:r>
-                        <a:rPr lang="en-US" sz="900" b="1" i="0">
-                          <a:solidFill>
-                            <a:srgbClr val="FFFFFF"/>
-                          </a:solidFill>
-                          <a:latin typeface="Arial" panose="020B0604020202020204" pitchFamily="34" charset="0"/>
-                          <a:cs typeface="Arial"/>
-                        </a:rPr>
-                        <a:t>RMSE</a:t>
-                      </a:r>
-                      <a:endParaRPr sz="900" b="1" i="0">
-                        <a:solidFill>
-                          <a:srgbClr val="FFFFFF"/>
-                        </a:solidFill>
-                        <a:latin typeface="Arial" panose="020B0604020202020204" pitchFamily="34" charset="0"/>
-                        <a:cs typeface="Arial"/>
-                      </a:endParaRPr>
-                    </a:p>
-                  </a:txBody>
-                  <a:tcPr marT="27432" marB="27432" anchor="ctr">
-                    <a:lnL w="0">
-                      <a:noFill/>
-                    </a:lnL>
-                    <a:lnR w="0">
-                      <a:noFill/>
-                    </a:lnR>
-                    <a:lnT w="0">
-                      <a:noFill/>
-                    </a:lnT>
-                    <a:lnB w="19050">
-                      <a:solidFill>
-                        <a:srgbClr val="065CAB"/>
-                      </a:solidFill>
-                    </a:lnB>
-                    <a:solidFill>
-                      <a:srgbClr val="065CAB"/>
-                    </a:solidFill>
-                  </a:tcPr>
-                </a:tc>
-                <a:tc>
-                  <a:txBody>
-                    <a:bodyPr/>
-                    <a:lstStyle/>
-                    <a:p>
-                      <a:pPr marL="0" indent="0" algn="r">
-                        <a:buNone/>
-                      </a:pPr>
-                      <a:r>
-                        <a:rPr lang="ru-RU" sz="900" b="1" i="0">
-                          <a:solidFill>
-                            <a:srgbClr val="FFFFFF"/>
-                          </a:solidFill>
-                          <a:latin typeface="Arial" panose="020B0604020202020204" pitchFamily="34" charset="0"/>
-                          <a:cs typeface="Arial"/>
-                        </a:rPr>
-                        <a:t>тест </a:t>
-                      </a:r>
-                      <a:r>
-                        <a:rPr lang="en-US" sz="900" b="1" i="0">
-                          <a:solidFill>
-                            <a:srgbClr val="FFFFFF"/>
-                          </a:solidFill>
-                          <a:latin typeface="Arial" panose="020B0604020202020204" pitchFamily="34" charset="0"/>
-                          <a:cs typeface="Arial"/>
-                        </a:rPr>
-                        <a:t>MAE</a:t>
-                      </a:r>
-                      <a:endParaRPr sz="900" b="1" i="0">
-                        <a:solidFill>
-                          <a:srgbClr val="FFFFFF"/>
-                        </a:solidFill>
-                        <a:latin typeface="Arial" panose="020B0604020202020204" pitchFamily="34" charset="0"/>
-                        <a:cs typeface="Arial"/>
-                      </a:endParaRPr>
-                    </a:p>
-                  </a:txBody>
-                  <a:tcPr marT="27432" marB="27432" anchor="ctr">
-                    <a:lnL w="0">
-                      <a:noFill/>
-                    </a:lnL>
-                    <a:lnR w="0">
-                      <a:noFill/>
-                    </a:lnR>
-                    <a:lnT w="0">
-                      <a:noFill/>
-                    </a:lnT>
-                    <a:lnB w="19050">
-                      <a:solidFill>
-                        <a:srgbClr val="065CAB"/>
-                      </a:solidFill>
-                    </a:lnB>
-                    <a:solidFill>
-                      <a:srgbClr val="065CAB"/>
-                    </a:solidFill>
-                  </a:tcPr>
-                </a:tc>
-                <a:tc>
-                  <a:txBody>
-                    <a:bodyPr/>
-                    <a:lstStyle/>
-                    <a:p>
-                      <a:pPr marL="0" indent="0" algn="r">
-                        <a:buNone/>
-                      </a:pPr>
-                      <a:r>
-                        <a:rPr lang="ru-RU" sz="900" b="1" i="0">
-                          <a:solidFill>
-                            <a:srgbClr val="FFFFFF"/>
-                          </a:solidFill>
-                          <a:latin typeface="Arial" panose="020B0604020202020204" pitchFamily="34" charset="0"/>
-                          <a:cs typeface="Arial"/>
-                        </a:rPr>
-                        <a:t>тест </a:t>
-                      </a:r>
-                      <a:r>
-                        <a:rPr lang="en-US" sz="900" b="1" i="0">
-                          <a:solidFill>
-                            <a:srgbClr val="FFFFFF"/>
-                          </a:solidFill>
-                          <a:latin typeface="Arial" panose="020B0604020202020204" pitchFamily="34" charset="0"/>
-                          <a:cs typeface="Arial"/>
-                        </a:rPr>
-                        <a:t>R²</a:t>
-                      </a:r>
-                      <a:endParaRPr sz="900" b="1" i="0">
-                        <a:solidFill>
-                          <a:srgbClr val="FFFFFF"/>
-                        </a:solidFill>
-                        <a:latin typeface="Arial" panose="020B0604020202020204" pitchFamily="34" charset="0"/>
-                        <a:cs typeface="Arial"/>
-                      </a:endParaRPr>
-                    </a:p>
-                  </a:txBody>
-                  <a:tcPr marT="27432" marB="27432" anchor="ctr">
-                    <a:lnL w="0">
-                      <a:noFill/>
-                    </a:lnL>
-                    <a:lnR w="0">
-                      <a:noFill/>
-                    </a:lnR>
-                    <a:lnT w="0">
-                      <a:noFill/>
-                    </a:lnT>
-                    <a:lnB w="19050">
-                      <a:solidFill>
-                        <a:srgbClr val="065CAB"/>
-                      </a:solidFill>
-                    </a:lnB>
-                    <a:solidFill>
-                      <a:srgbClr val="065CAB"/>
-                    </a:solidFill>
-                  </a:tcPr>
-                </a:tc>
-                <a:extLst>
-                  <a:ext uri="{0D108BD9-81ED-4DB2-BD59-A6C34878D82A}">
-                    <a16:rowId xmlns:a16="http://schemas.microsoft.com/office/drawing/2014/main" val="10000"/>
-                  </a:ext>
-                </a:extLst>
-              </a:tr>
-              <a:tr h="241300">
-                <a:tc>
-                  <a:txBody>
-                    <a:bodyPr/>
-                    <a:lstStyle/>
-                    <a:p>
-                      <a:pPr marL="0" indent="0" algn="l">
-                        <a:buNone/>
-                      </a:pPr>
-                      <a:r>
-                        <a:rPr lang="ru-RU" sz="1000" b="1" i="0">
-                          <a:solidFill>
-                            <a:srgbClr val="262626"/>
-                          </a:solidFill>
-                          <a:latin typeface="Arial" panose="020B0604020202020204" pitchFamily="34" charset="0"/>
-                          <a:cs typeface="Arial"/>
-                        </a:rPr>
-                        <a:t>нейросеть</a:t>
-                      </a:r>
-                      <a:endParaRPr sz="1000" b="1" i="0">
-                        <a:solidFill>
-                          <a:srgbClr val="262626"/>
-                        </a:solidFill>
-                        <a:latin typeface="Arial" panose="020B0604020202020204" pitchFamily="34" charset="0"/>
-                        <a:cs typeface="Arial"/>
-                      </a:endParaRPr>
-                    </a:p>
-                  </a:txBody>
-                  <a:tcPr marT="27432" marB="27432" anchor="ctr">
-                    <a:lnT w="19050" cap="flat" cmpd="sng" algn="ctr">
-                      <a:solidFill>
-                        <a:srgbClr val="065CAB"/>
-                      </a:solidFill>
-                      <a:prstDash val="solid"/>
-                      <a:round/>
-                      <a:headEnd type="none" w="med" len="med"/>
-                      <a:tailEnd type="none" w="med" len="med"/>
-                    </a:lnT>
-                    <a:noFill/>
-                  </a:tcPr>
-                </a:tc>
-                <a:tc>
-                  <a:txBody>
-                    <a:bodyPr/>
-                    <a:lstStyle/>
-                    <a:p>
-                      <a:pPr marL="0" indent="0" algn="r">
-                        <a:buNone/>
-                      </a:pPr>
-                      <a:r>
-                        <a:rPr sz="1000" b="0" i="0">
-                          <a:solidFill>
-                            <a:srgbClr val="262626"/>
-                          </a:solidFill>
-                          <a:latin typeface="Arial" panose="020B0604020202020204" pitchFamily="34" charset="0"/>
-                          <a:cs typeface="Arial"/>
-                        </a:rPr>
-                        <a:t>0,935</a:t>
-                      </a:r>
-                    </a:p>
-                  </a:txBody>
-                  <a:tcPr marT="27432" marB="27432" anchor="ctr">
-                    <a:lnT w="19050" cap="flat" cmpd="sng" algn="ctr">
-                      <a:solidFill>
-                        <a:srgbClr val="065CAB"/>
-                      </a:solidFill>
-                      <a:prstDash val="solid"/>
-                      <a:round/>
-                      <a:headEnd type="none" w="med" len="med"/>
-                      <a:tailEnd type="none" w="med" len="med"/>
-                    </a:lnT>
-                    <a:noFill/>
-                  </a:tcPr>
-                </a:tc>
-                <a:tc>
-                  <a:txBody>
-                    <a:bodyPr/>
-                    <a:lstStyle/>
-                    <a:p>
-                      <a:pPr marL="0" indent="0" algn="r">
-                        <a:buNone/>
-                      </a:pPr>
-                      <a:r>
-                        <a:rPr sz="1000" b="0" i="0">
-                          <a:solidFill>
-                            <a:srgbClr val="262626"/>
-                          </a:solidFill>
-                          <a:latin typeface="Arial" panose="020B0604020202020204" pitchFamily="34" charset="0"/>
-                          <a:cs typeface="Arial"/>
-                        </a:rPr>
-                        <a:t>0,870</a:t>
-                      </a:r>
-                    </a:p>
-                  </a:txBody>
-                  <a:tcPr marT="27432" marB="27432" anchor="ctr">
-                    <a:lnT w="19050" cap="flat" cmpd="sng" algn="ctr">
-                      <a:solidFill>
-                        <a:srgbClr val="065CAB"/>
-                      </a:solidFill>
-                      <a:prstDash val="solid"/>
-                      <a:round/>
-                      <a:headEnd type="none" w="med" len="med"/>
-                      <a:tailEnd type="none" w="med" len="med"/>
-                    </a:lnT>
-                    <a:noFill/>
-                  </a:tcPr>
-                </a:tc>
-                <a:tc>
-                  <a:txBody>
-                    <a:bodyPr/>
-                    <a:lstStyle/>
-                    <a:p>
-                      <a:pPr marL="0" indent="0" algn="r">
-                        <a:buNone/>
-                      </a:pPr>
-                      <a:r>
-                        <a:rPr sz="1000" b="0" i="0">
-                          <a:solidFill>
-                            <a:srgbClr val="262626"/>
-                          </a:solidFill>
-                          <a:latin typeface="Arial" panose="020B0604020202020204" pitchFamily="34" charset="0"/>
-                          <a:cs typeface="Arial"/>
-                        </a:rPr>
-                        <a:t>0,692</a:t>
-                      </a:r>
-                    </a:p>
-                  </a:txBody>
-                  <a:tcPr marT="27432" marB="27432" anchor="ctr">
-                    <a:lnT w="19050" cap="flat" cmpd="sng" algn="ctr">
-                      <a:solidFill>
-                        <a:srgbClr val="065CAB"/>
-                      </a:solidFill>
-                      <a:prstDash val="solid"/>
-                      <a:round/>
-                      <a:headEnd type="none" w="med" len="med"/>
-                      <a:tailEnd type="none" w="med" len="med"/>
-                    </a:lnT>
-                    <a:noFill/>
-                  </a:tcPr>
-                </a:tc>
-                <a:tc>
-                  <a:txBody>
-                    <a:bodyPr/>
-                    <a:lstStyle/>
-                    <a:p>
-                      <a:pPr marL="0" indent="0" algn="r">
-                        <a:buNone/>
-                      </a:pPr>
-                      <a:r>
-                        <a:rPr sz="1000" b="0" i="0">
-                          <a:solidFill>
-                            <a:srgbClr val="262626"/>
-                          </a:solidFill>
-                          <a:latin typeface="Arial" panose="020B0604020202020204" pitchFamily="34" charset="0"/>
-                          <a:cs typeface="Arial"/>
-                        </a:rPr>
-                        <a:t>0,079</a:t>
-                      </a:r>
-                    </a:p>
-                  </a:txBody>
-                  <a:tcPr marT="27432" marB="27432" anchor="ctr">
-                    <a:lnT w="19050" cap="flat" cmpd="sng" algn="ctr">
-                      <a:solidFill>
-                        <a:srgbClr val="065CAB"/>
-                      </a:solidFill>
-                      <a:prstDash val="solid"/>
-                      <a:round/>
-                      <a:headEnd type="none" w="med" len="med"/>
-                      <a:tailEnd type="none" w="med" len="med"/>
-                    </a:lnT>
-                    <a:noFill/>
-                  </a:tcPr>
-                </a:tc>
-                <a:tc>
-                  <a:txBody>
-                    <a:bodyPr/>
-                    <a:lstStyle/>
-                    <a:p>
-                      <a:pPr marL="0" indent="0" algn="r">
-                        <a:buNone/>
-                      </a:pPr>
-                      <a:r>
-                        <a:rPr sz="1000" b="1" i="0">
-                          <a:solidFill>
-                            <a:srgbClr val="262626"/>
-                          </a:solidFill>
-                          <a:latin typeface="Arial" panose="020B0604020202020204" pitchFamily="34" charset="0"/>
-                          <a:cs typeface="Arial"/>
-                        </a:rPr>
-                        <a:t>0,944</a:t>
-                      </a:r>
-                    </a:p>
-                  </a:txBody>
-                  <a:tcPr marT="27432" marB="27432" anchor="ctr">
-                    <a:lnT w="19050" cap="flat" cmpd="sng" algn="ctr">
-                      <a:solidFill>
-                        <a:srgbClr val="065CAB"/>
-                      </a:solidFill>
-                      <a:prstDash val="solid"/>
-                      <a:round/>
-                      <a:headEnd type="none" w="med" len="med"/>
-                      <a:tailEnd type="none" w="med" len="med"/>
-                    </a:lnT>
-                    <a:noFill/>
-                  </a:tcPr>
-                </a:tc>
-                <a:tc>
-                  <a:txBody>
-                    <a:bodyPr/>
-                    <a:lstStyle/>
-                    <a:p>
-                      <a:pPr marL="0" indent="0" algn="r">
-                        <a:buNone/>
-                      </a:pPr>
-                      <a:r>
-                        <a:rPr sz="1000" b="1" i="0">
-                          <a:solidFill>
-                            <a:srgbClr val="262626"/>
-                          </a:solidFill>
-                          <a:latin typeface="Arial" panose="020B0604020202020204" pitchFamily="34" charset="0"/>
-                          <a:cs typeface="Arial"/>
-                        </a:rPr>
-                        <a:t>0,777</a:t>
-                      </a:r>
-                    </a:p>
-                  </a:txBody>
-                  <a:tcPr marT="27432" marB="27432" anchor="ctr">
-                    <a:lnT w="19050" cap="flat" cmpd="sng" algn="ctr">
-                      <a:solidFill>
-                        <a:srgbClr val="065CAB"/>
-                      </a:solidFill>
-                      <a:prstDash val="solid"/>
-                      <a:round/>
-                      <a:headEnd type="none" w="med" len="med"/>
-                      <a:tailEnd type="none" w="med" len="med"/>
-                    </a:lnT>
-                    <a:noFill/>
-                  </a:tcPr>
-                </a:tc>
-                <a:tc>
-                  <a:txBody>
-                    <a:bodyPr/>
-                    <a:lstStyle/>
-                    <a:p>
-                      <a:pPr marL="0" indent="0" algn="r">
-                        <a:buNone/>
-                      </a:pPr>
-                      <a:r>
-                        <a:rPr sz="1000" b="1" i="0">
-                          <a:solidFill>
-                            <a:srgbClr val="262626"/>
-                          </a:solidFill>
-                          <a:latin typeface="Arial" panose="020B0604020202020204" pitchFamily="34" charset="0"/>
-                          <a:cs typeface="Arial"/>
-                        </a:rPr>
-                        <a:t>−0,040</a:t>
-                      </a:r>
-                    </a:p>
-                  </a:txBody>
-                  <a:tcPr marT="27432" marB="27432" anchor="ctr">
-                    <a:lnT w="19050" cap="flat" cmpd="sng" algn="ctr">
-                      <a:solidFill>
-                        <a:srgbClr val="065CAB"/>
-                      </a:solidFill>
-                      <a:prstDash val="solid"/>
-                      <a:round/>
-                      <a:headEnd type="none" w="med" len="med"/>
-                      <a:tailEnd type="none" w="med" len="med"/>
-                    </a:lnT>
-                    <a:noFill/>
-                  </a:tcPr>
-                </a:tc>
-                <a:extLst>
-                  <a:ext uri="{0D108BD9-81ED-4DB2-BD59-A6C34878D82A}">
-                    <a16:rowId xmlns:a16="http://schemas.microsoft.com/office/drawing/2014/main" val="10001"/>
-                  </a:ext>
-                </a:extLst>
-              </a:tr>
-              <a:tr h="241300">
-                <a:tc>
-                  <a:txBody>
-                    <a:bodyPr/>
-                    <a:lstStyle/>
-                    <a:p>
-                      <a:pPr marL="0" indent="0" algn="l">
-                        <a:buNone/>
-                      </a:pPr>
-                      <a:r>
-                        <a:rPr lang="ru-RU" sz="1000" b="0" i="0">
-                          <a:solidFill>
-                            <a:srgbClr val="262626"/>
-                          </a:solidFill>
-                          <a:latin typeface="Arial" panose="020B0604020202020204" pitchFamily="34" charset="0"/>
-                          <a:cs typeface="Arial"/>
-                        </a:rPr>
-                        <a:t>прогноз среднего</a:t>
-                      </a:r>
-                      <a:endParaRPr sz="1000" b="0" i="0">
-                        <a:solidFill>
-                          <a:srgbClr val="262626"/>
-                        </a:solidFill>
-                        <a:latin typeface="Arial" panose="020B0604020202020204" pitchFamily="34" charset="0"/>
-                        <a:cs typeface="Arial"/>
-                      </a:endParaRPr>
-                    </a:p>
-                  </a:txBody>
-                  <a:tcPr marT="27432" marB="27432" anchor="ctr">
-                    <a:noFill/>
-                  </a:tcPr>
-                </a:tc>
-                <a:tc>
-                  <a:txBody>
-                    <a:bodyPr/>
-                    <a:lstStyle/>
-                    <a:p>
-                      <a:pPr marL="0" indent="0" algn="r">
-                        <a:buNone/>
-                      </a:pPr>
-                      <a:r>
-                        <a:rPr sz="1000" b="0" i="0">
-                          <a:solidFill>
-                            <a:srgbClr val="262626"/>
-                          </a:solidFill>
-                          <a:latin typeface="Arial" panose="020B0604020202020204" pitchFamily="34" charset="0"/>
-                          <a:cs typeface="Arial"/>
-                        </a:rPr>
-                        <a:t>0,906</a:t>
-                      </a:r>
-                    </a:p>
-                  </a:txBody>
-                  <a:tcPr marT="27432" marB="27432" anchor="ctr">
-                    <a:noFill/>
-                  </a:tcPr>
-                </a:tc>
-                <a:tc>
-                  <a:txBody>
-                    <a:bodyPr/>
-                    <a:lstStyle/>
-                    <a:p>
-                      <a:pPr marL="0" indent="0" algn="r">
-                        <a:buNone/>
-                      </a:pPr>
-                      <a:r>
-                        <a:rPr sz="1000" b="0" i="0">
-                          <a:solidFill>
-                            <a:srgbClr val="262626"/>
-                          </a:solidFill>
-                          <a:latin typeface="Arial" panose="020B0604020202020204" pitchFamily="34" charset="0"/>
-                          <a:cs typeface="Arial"/>
-                        </a:rPr>
-                        <a:t>0,907</a:t>
-                      </a:r>
-                    </a:p>
-                  </a:txBody>
-                  <a:tcPr marT="27432" marB="27432" anchor="ctr">
-                    <a:noFill/>
-                  </a:tcPr>
-                </a:tc>
-                <a:tc>
-                  <a:txBody>
-                    <a:bodyPr/>
-                    <a:lstStyle/>
-                    <a:p>
-                      <a:pPr marL="0" indent="0" algn="r">
-                        <a:buNone/>
-                      </a:pPr>
-                      <a:r>
-                        <a:rPr sz="1000" b="0" i="0">
-                          <a:solidFill>
-                            <a:srgbClr val="262626"/>
-                          </a:solidFill>
-                          <a:latin typeface="Arial" panose="020B0604020202020204" pitchFamily="34" charset="0"/>
-                          <a:cs typeface="Arial"/>
-                        </a:rPr>
-                        <a:t>0,718</a:t>
-                      </a:r>
-                    </a:p>
-                  </a:txBody>
-                  <a:tcPr marT="27432" marB="27432" anchor="ctr">
-                    <a:noFill/>
-                  </a:tcPr>
-                </a:tc>
-                <a:tc>
-                  <a:txBody>
-                    <a:bodyPr/>
-                    <a:lstStyle/>
-                    <a:p>
-                      <a:pPr marL="0" indent="0" algn="r">
-                        <a:buNone/>
-                      </a:pPr>
-                      <a:r>
-                        <a:rPr sz="1000" b="0" i="0">
-                          <a:solidFill>
-                            <a:srgbClr val="262626"/>
-                          </a:solidFill>
-                          <a:latin typeface="Arial" panose="020B0604020202020204" pitchFamily="34" charset="0"/>
-                          <a:cs typeface="Arial"/>
-                        </a:rPr>
-                        <a:t>0,000</a:t>
-                      </a:r>
-                    </a:p>
-                  </a:txBody>
-                  <a:tcPr marT="27432" marB="27432" anchor="ctr">
-                    <a:noFill/>
-                  </a:tcPr>
-                </a:tc>
-                <a:tc>
-                  <a:txBody>
-                    <a:bodyPr/>
-                    <a:lstStyle/>
-                    <a:p>
-                      <a:pPr marL="0" indent="0" algn="r">
-                        <a:buNone/>
-                      </a:pPr>
-                      <a:r>
-                        <a:rPr sz="1000" b="0" i="0">
-                          <a:solidFill>
-                            <a:srgbClr val="262626"/>
-                          </a:solidFill>
-                          <a:latin typeface="Arial" panose="020B0604020202020204" pitchFamily="34" charset="0"/>
-                          <a:cs typeface="Arial"/>
-                        </a:rPr>
-                        <a:t>0,926</a:t>
-                      </a:r>
-                    </a:p>
-                  </a:txBody>
-                  <a:tcPr marT="27432" marB="27432" anchor="ctr">
-                    <a:noFill/>
-                  </a:tcPr>
-                </a:tc>
-                <a:tc>
-                  <a:txBody>
-                    <a:bodyPr/>
-                    <a:lstStyle/>
-                    <a:p>
-                      <a:pPr marL="0" indent="0" algn="r">
-                        <a:buNone/>
-                      </a:pPr>
-                      <a:r>
-                        <a:rPr sz="1000" b="0" i="0">
-                          <a:solidFill>
-                            <a:srgbClr val="262626"/>
-                          </a:solidFill>
-                          <a:latin typeface="Arial" panose="020B0604020202020204" pitchFamily="34" charset="0"/>
-                          <a:cs typeface="Arial"/>
-                        </a:rPr>
-                        <a:t>0,752</a:t>
-                      </a:r>
-                    </a:p>
-                  </a:txBody>
-                  <a:tcPr marT="27432" marB="27432" anchor="ctr">
-                    <a:noFill/>
-                  </a:tcPr>
-                </a:tc>
-                <a:tc>
-                  <a:txBody>
-                    <a:bodyPr/>
-                    <a:lstStyle/>
-                    <a:p>
-                      <a:pPr marL="0" indent="0" algn="r">
-                        <a:buNone/>
-                      </a:pPr>
-                      <a:r>
-                        <a:rPr sz="1000" b="0" i="0">
-                          <a:solidFill>
-                            <a:srgbClr val="262626"/>
-                          </a:solidFill>
-                          <a:latin typeface="Arial" panose="020B0604020202020204" pitchFamily="34" charset="0"/>
-                          <a:cs typeface="Arial"/>
-                        </a:rPr>
-                        <a:t>−0,001</a:t>
-                      </a:r>
-                    </a:p>
-                  </a:txBody>
-                  <a:tcPr marT="27432" marB="27432" anchor="ctr">
-                    <a:noFill/>
-                  </a:tcPr>
-                </a:tc>
-                <a:extLst>
-                  <a:ext uri="{0D108BD9-81ED-4DB2-BD59-A6C34878D82A}">
-                    <a16:rowId xmlns:a16="http://schemas.microsoft.com/office/drawing/2014/main" val="10002"/>
-                  </a:ext>
-                </a:extLst>
-              </a:tr>
-            </a:tbl>
-          </a:graphicData>
-        </a:graphic>
-      </p:graphicFrame>
       <p:sp>
         <p:nvSpPr>
           <p:cNvPr id="73" name="Источник"/>
@@ -11687,17 +10521,17 @@
               <a:buNone/>
             </a:pPr>
             <a:r>
-              <a:rPr lang="ru-RU" sz="1600" i="0">
+              <a:rPr lang="ru-RU" sz="1300" i="0">
                 <a:solidFill>
                   <a:srgbClr val="595959"/>
                 </a:solidFill>
                 <a:latin typeface="Arial" panose="020B0604020202020204" pitchFamily="34" charset="0"/>
                 <a:cs typeface="Arial"/>
               </a:rPr>
-              <a:t>Источник: РПЗ, рис. 11 и табл. 8; </a:t>
+              <a:t>Источник: РПЗ, таблица результатов нейросети; </a:t>
             </a:r>
             <a:r>
-              <a:rPr lang="en-US" sz="1600" i="0">
+              <a:rPr lang="en-US" sz="1300" i="0">
                 <a:solidFill>
                   <a:srgbClr val="595959"/>
                 </a:solidFill>
@@ -11706,7 +10540,7 @@
               </a:rPr>
               <a:t>reports/evaluation/metrics.csv</a:t>
             </a:r>
-            <a:endParaRPr sz="1600" i="0">
+            <a:endParaRPr sz="1300" i="0">
               <a:solidFill>
                 <a:srgbClr val="595959"/>
               </a:solidFill>
@@ -11748,15 +10582,413 @@
             </a:pPr>
             <a:fld id="{00000000-1234-1234-1234-123412341234}" type="slidenum">
               <a:rPr lang="ru-RU" smtClean="0">
-                <a:latin typeface="Arial" panose="020B0604020202020204" pitchFamily="34" charset="0"/>
                 <a:cs typeface="Arial"/>
               </a:rPr>
               <a:t>12</a:t>
             </a:fld>
             <a:endParaRPr lang="ru-RU" dirty="0">
-              <a:latin typeface="Arial" panose="020B0604020202020204" pitchFamily="34" charset="0"/>
               <a:cs typeface="Arial"/>
             </a:endParaRPr>
+          </a:p>
+        </p:txBody>
+      </p:sp>
+      <p:sp>
+        <p:nvSpPr>
+          <p:cNvPr id="2" name="RMSEExplain">
+            <a:extLst>
+              <a:ext uri="{FF2B5EF4-FFF2-40B4-BE49-F238E27FC236}">
+                <a16:creationId xmlns:a16="http://schemas.microsoft.com/office/drawing/2014/main" id="{6F07A398-7353-401C-9CA4-15E44754B9C2}"/>
+              </a:ext>
+            </a:extLst>
+          </p:cNvPr>
+          <p:cNvSpPr txBox="1"/>
+          <p:nvPr/>
+        </p:nvSpPr>
+        <p:spPr>
+          <a:xfrm>
+            <a:off x="558800" y="1333500"/>
+            <a:ext cx="11201400" cy="384721"/>
+          </a:xfrm>
+          <a:prstGeom prst="rect">
+            <a:avLst/>
+          </a:prstGeom>
+          <a:noFill/>
+        </p:spPr>
+        <p:txBody>
+          <a:bodyPr vert="horz" wrap="square" rtlCol="0" anchor="ctr">
+            <a:noAutofit/>
+          </a:bodyPr>
+          <a:lstStyle/>
+          <a:p>
+            <a:pPr algn="ctr"/>
+            <a:r>
+              <a:rPr lang="ru-RU" sz="1900" b="1">
+                <a:solidFill>
+                  <a:srgbClr val="0E5DAB"/>
+                </a:solidFill>
+                <a:latin typeface="Arial" panose="020B0604020202020204" pitchFamily="34" charset="0"/>
+              </a:rPr>
+              <a:t>Ошибка RMSE на 307 строках: меньше – лучше</a:t>
+            </a:r>
+            <a:endParaRPr lang="ru-RU" sz="1900" b="1" dirty="0">
+              <a:solidFill>
+                <a:srgbClr val="0E5DAB"/>
+              </a:solidFill>
+              <a:latin typeface="Arial" panose="020B0604020202020204" pitchFamily="34" charset="0"/>
+            </a:endParaRPr>
+          </a:p>
+        </p:txBody>
+      </p:sp>
+      <p:graphicFrame>
+        <p:nvGraphicFramePr>
+          <p:cNvPr id="3" name="MLPComparison">
+            <a:extLst>
+              <a:ext uri="{FF2B5EF4-FFF2-40B4-BE49-F238E27FC236}">
+                <a16:creationId xmlns:a16="http://schemas.microsoft.com/office/drawing/2014/main" id="{EEF5B9FF-883A-4AF8-8A8A-2610ECF73160}"/>
+              </a:ext>
+            </a:extLst>
+          </p:cNvPr>
+          <p:cNvGraphicFramePr>
+            <a:graphicFrameLocks noGrp="1"/>
+          </p:cNvGraphicFramePr>
+          <p:nvPr>
+            <p:extLst>
+              <p:ext uri="{D42A27DB-BD31-4B8C-83A1-F6EECF244321}">
+                <p14:modId xmlns:p14="http://schemas.microsoft.com/office/powerpoint/2010/main" val="182152145"/>
+              </p:ext>
+            </p:extLst>
+          </p:nvPr>
+        </p:nvGraphicFramePr>
+        <p:xfrm>
+          <a:off x="1066800" y="2222500"/>
+          <a:ext cx="10058400" cy="2514600"/>
+        </p:xfrm>
+        <a:graphic>
+          <a:graphicData uri="http://schemas.openxmlformats.org/drawingml/2006/table">
+            <a:tbl>
+              <a:tblPr firstRow="1" bandRow="1">
+                <a:tableStyleId>{5C22544A-7EE6-4342-B048-85BDC9FD1C3A}</a:tableStyleId>
+              </a:tblPr>
+              <a:tblGrid>
+                <a:gridCol w="3429000">
+                  <a:extLst>
+                    <a:ext uri="{9D8B030D-6E8A-4147-A177-3AD203B41FA5}">
+                      <a16:colId xmlns:a16="http://schemas.microsoft.com/office/drawing/2014/main" val="1367277442"/>
+                    </a:ext>
+                  </a:extLst>
+                </a:gridCol>
+                <a:gridCol w="2921000">
+                  <a:extLst>
+                    <a:ext uri="{9D8B030D-6E8A-4147-A177-3AD203B41FA5}">
+                      <a16:colId xmlns:a16="http://schemas.microsoft.com/office/drawing/2014/main" val="1317315626"/>
+                    </a:ext>
+                  </a:extLst>
+                </a:gridCol>
+                <a:gridCol w="3708400">
+                  <a:extLst>
+                    <a:ext uri="{9D8B030D-6E8A-4147-A177-3AD203B41FA5}">
+                      <a16:colId xmlns:a16="http://schemas.microsoft.com/office/drawing/2014/main" val="3079176535"/>
+                    </a:ext>
+                  </a:extLst>
+                </a:gridCol>
+              </a:tblGrid>
+              <a:tr h="838200">
+                <a:tc>
+                  <a:txBody>
+                    <a:bodyPr/>
+                    <a:lstStyle/>
+                    <a:p>
+                      <a:pPr algn="l"/>
+                      <a:r>
+                        <a:rPr lang="ru-RU" sz="1600" b="1">
+                          <a:solidFill>
+                            <a:srgbClr val="262626"/>
+                          </a:solidFill>
+                          <a:latin typeface="Arial" panose="020B0604020202020204" pitchFamily="34" charset="0"/>
+                        </a:rPr>
+                        <a:t>Способ</a:t>
+                      </a:r>
+                    </a:p>
+                  </a:txBody>
+                  <a:tcPr anchor="ctr">
+                    <a:solidFill>
+                      <a:srgbClr val="DCE9F6"/>
+                    </a:solidFill>
+                  </a:tcPr>
+                </a:tc>
+                <a:tc>
+                  <a:txBody>
+                    <a:bodyPr/>
+                    <a:lstStyle/>
+                    <a:p>
+                      <a:pPr algn="l"/>
+                      <a:r>
+                        <a:rPr lang="en-US" sz="1600" b="1">
+                          <a:solidFill>
+                            <a:srgbClr val="262626"/>
+                          </a:solidFill>
+                          <a:latin typeface="Arial" panose="020B0604020202020204" pitchFamily="34" charset="0"/>
+                        </a:rPr>
+                        <a:t>RMSE</a:t>
+                      </a:r>
+                      <a:endParaRPr lang="ru-RU" sz="1600" b="1">
+                        <a:solidFill>
+                          <a:srgbClr val="262626"/>
+                        </a:solidFill>
+                        <a:latin typeface="Arial" panose="020B0604020202020204" pitchFamily="34" charset="0"/>
+                      </a:endParaRPr>
+                    </a:p>
+                  </a:txBody>
+                  <a:tcPr anchor="ctr">
+                    <a:solidFill>
+                      <a:srgbClr val="DCE9F6"/>
+                    </a:solidFill>
+                  </a:tcPr>
+                </a:tc>
+                <a:tc>
+                  <a:txBody>
+                    <a:bodyPr/>
+                    <a:lstStyle/>
+                    <a:p>
+                      <a:pPr algn="l"/>
+                      <a:r>
+                        <a:rPr lang="ru-RU" sz="1600" b="1">
+                          <a:solidFill>
+                            <a:srgbClr val="262626"/>
+                          </a:solidFill>
+                          <a:latin typeface="Arial" panose="020B0604020202020204" pitchFamily="34" charset="0"/>
+                        </a:rPr>
+                        <a:t>Что это означает</a:t>
+                      </a:r>
+                    </a:p>
+                  </a:txBody>
+                  <a:tcPr anchor="ctr">
+                    <a:solidFill>
+                      <a:srgbClr val="DCE9F6"/>
+                    </a:solidFill>
+                  </a:tcPr>
+                </a:tc>
+                <a:extLst>
+                  <a:ext uri="{0D108BD9-81ED-4DB2-BD59-A6C34878D82A}">
+                    <a16:rowId xmlns:a16="http://schemas.microsoft.com/office/drawing/2014/main" val="2563653261"/>
+                  </a:ext>
+                </a:extLst>
+              </a:tr>
+              <a:tr h="838200">
+                <a:tc>
+                  <a:txBody>
+                    <a:bodyPr/>
+                    <a:lstStyle/>
+                    <a:p>
+                      <a:pPr algn="l"/>
+                      <a:r>
+                        <a:rPr lang="ru-RU" sz="1800" b="1">
+                          <a:solidFill>
+                            <a:srgbClr val="262626"/>
+                          </a:solidFill>
+                          <a:latin typeface="Arial" panose="020B0604020202020204" pitchFamily="34" charset="0"/>
+                        </a:rPr>
+                        <a:t>Прогноз среднего</a:t>
+                      </a:r>
+                    </a:p>
+                  </a:txBody>
+                  <a:tcPr anchor="ctr">
+                    <a:solidFill>
+                      <a:srgbClr val="FFFFFF"/>
+                    </a:solidFill>
+                  </a:tcPr>
+                </a:tc>
+                <a:tc>
+                  <a:txBody>
+                    <a:bodyPr/>
+                    <a:lstStyle/>
+                    <a:p>
+                      <a:pPr algn="l"/>
+                      <a:r>
+                        <a:rPr lang="ru-RU" sz="2400" b="1">
+                          <a:solidFill>
+                            <a:srgbClr val="262626"/>
+                          </a:solidFill>
+                          <a:latin typeface="Arial" panose="020B0604020202020204" pitchFamily="34" charset="0"/>
+                        </a:rPr>
+                        <a:t>0,926</a:t>
+                      </a:r>
+                    </a:p>
+                  </a:txBody>
+                  <a:tcPr anchor="ctr">
+                    <a:solidFill>
+                      <a:srgbClr val="FFFFFF"/>
+                    </a:solidFill>
+                  </a:tcPr>
+                </a:tc>
+                <a:tc>
+                  <a:txBody>
+                    <a:bodyPr/>
+                    <a:lstStyle/>
+                    <a:p>
+                      <a:pPr algn="l"/>
+                      <a:r>
+                        <a:rPr lang="ru-RU" sz="1800" b="1">
+                          <a:solidFill>
+                            <a:srgbClr val="262626"/>
+                          </a:solidFill>
+                          <a:latin typeface="Arial" panose="020B0604020202020204" pitchFamily="34" charset="0"/>
+                        </a:rPr>
+                        <a:t>ошибка меньше</a:t>
+                      </a:r>
+                    </a:p>
+                  </a:txBody>
+                  <a:tcPr anchor="ctr">
+                    <a:solidFill>
+                      <a:srgbClr val="FFFFFF"/>
+                    </a:solidFill>
+                  </a:tcPr>
+                </a:tc>
+                <a:extLst>
+                  <a:ext uri="{0D108BD9-81ED-4DB2-BD59-A6C34878D82A}">
+                    <a16:rowId xmlns:a16="http://schemas.microsoft.com/office/drawing/2014/main" val="3252198863"/>
+                  </a:ext>
+                </a:extLst>
+              </a:tr>
+              <a:tr h="838200">
+                <a:tc>
+                  <a:txBody>
+                    <a:bodyPr/>
+                    <a:lstStyle/>
+                    <a:p>
+                      <a:pPr algn="l"/>
+                      <a:r>
+                        <a:rPr lang="ru-RU" sz="1800" b="0">
+                          <a:solidFill>
+                            <a:srgbClr val="262626"/>
+                          </a:solidFill>
+                          <a:latin typeface="Arial" panose="020B0604020202020204" pitchFamily="34" charset="0"/>
+                        </a:rPr>
+                        <a:t>Нейросеть</a:t>
+                      </a:r>
+                    </a:p>
+                  </a:txBody>
+                  <a:tcPr anchor="ctr">
+                    <a:solidFill>
+                      <a:srgbClr val="FFFFFF"/>
+                    </a:solidFill>
+                  </a:tcPr>
+                </a:tc>
+                <a:tc>
+                  <a:txBody>
+                    <a:bodyPr/>
+                    <a:lstStyle/>
+                    <a:p>
+                      <a:pPr algn="l"/>
+                      <a:r>
+                        <a:rPr lang="ru-RU" sz="2400" b="0">
+                          <a:solidFill>
+                            <a:srgbClr val="262626"/>
+                          </a:solidFill>
+                          <a:latin typeface="Arial" panose="020B0604020202020204" pitchFamily="34" charset="0"/>
+                        </a:rPr>
+                        <a:t>0,944</a:t>
+                      </a:r>
+                    </a:p>
+                  </a:txBody>
+                  <a:tcPr anchor="ctr">
+                    <a:solidFill>
+                      <a:srgbClr val="FFFFFF"/>
+                    </a:solidFill>
+                  </a:tcPr>
+                </a:tc>
+                <a:tc>
+                  <a:txBody>
+                    <a:bodyPr/>
+                    <a:lstStyle/>
+                    <a:p>
+                      <a:pPr algn="l"/>
+                      <a:r>
+                        <a:rPr lang="ru-RU" sz="1800" b="0">
+                          <a:solidFill>
+                            <a:srgbClr val="262626"/>
+                          </a:solidFill>
+                          <a:latin typeface="Arial" panose="020B0604020202020204" pitchFamily="34" charset="0"/>
+                        </a:rPr>
+                        <a:t>ошибка больше</a:t>
+                      </a:r>
+                    </a:p>
+                  </a:txBody>
+                  <a:tcPr anchor="ctr">
+                    <a:solidFill>
+                      <a:srgbClr val="FFFFFF"/>
+                    </a:solidFill>
+                  </a:tcPr>
+                </a:tc>
+                <a:extLst>
+                  <a:ext uri="{0D108BD9-81ED-4DB2-BD59-A6C34878D82A}">
+                    <a16:rowId xmlns:a16="http://schemas.microsoft.com/office/drawing/2014/main" val="1783141874"/>
+                  </a:ext>
+                </a:extLst>
+              </a:tr>
+            </a:tbl>
+          </a:graphicData>
+        </a:graphic>
+      </p:graphicFrame>
+      <p:sp>
+        <p:nvSpPr>
+          <p:cNvPr id="5" name="MLPConclusion">
+            <a:extLst>
+              <a:ext uri="{FF2B5EF4-FFF2-40B4-BE49-F238E27FC236}">
+                <a16:creationId xmlns:a16="http://schemas.microsoft.com/office/drawing/2014/main" id="{83CEC55B-3D0C-4480-AFCF-F0AA30779602}"/>
+              </a:ext>
+            </a:extLst>
+          </p:cNvPr>
+          <p:cNvSpPr/>
+          <p:nvPr/>
+        </p:nvSpPr>
+        <p:spPr>
+          <a:xfrm>
+            <a:off x="2032000" y="5067300"/>
+            <a:ext cx="8128000" cy="863600"/>
+          </a:xfrm>
+          <a:prstGeom prst="roundRect">
+            <a:avLst/>
+          </a:prstGeom>
+          <a:solidFill>
+            <a:srgbClr val="FFC000"/>
+          </a:solidFill>
+          <a:ln w="17780">
+            <a:solidFill>
+              <a:srgbClr val="0E5DAB"/>
+            </a:solidFill>
+          </a:ln>
+        </p:spPr>
+        <p:style>
+          <a:lnRef idx="2">
+            <a:schemeClr val="accent1">
+              <a:shade val="50000"/>
+            </a:schemeClr>
+          </a:lnRef>
+          <a:fillRef idx="1">
+            <a:schemeClr val="accent1"/>
+          </a:fillRef>
+          <a:effectRef idx="0">
+            <a:schemeClr val="accent1"/>
+          </a:effectRef>
+          <a:fontRef idx="minor">
+            <a:schemeClr val="lt1"/>
+          </a:fontRef>
+        </p:style>
+        <p:txBody>
+          <a:bodyPr wrap="square" lIns="101600" tIns="76200" rIns="101600" bIns="76200" rtlCol="0" anchor="ctr"/>
+          <a:lstStyle/>
+          <a:p>
+            <a:pPr algn="ctr"/>
+            <a:r>
+              <a:rPr lang="ru-RU" sz="2000" b="1">
+                <a:solidFill>
+                  <a:srgbClr val="262626"/>
+                </a:solidFill>
+                <a:latin typeface="Arial" panose="020B0604020202020204" pitchFamily="34" charset="0"/>
+              </a:rPr>
+              <a:t>Нейросеть сложнее, но простой прогноз среднего оказался точнее</a:t>
+            </a:r>
           </a:p>
         </p:txBody>
       </p:sp>
@@ -11818,17 +11050,15 @@
                 <a:solidFill>
                   <a:srgbClr val="065CAB"/>
                 </a:solidFill>
-                <a:latin typeface="Arial" panose="020B0604020202020204" pitchFamily="34" charset="0"/>
                 <a:cs typeface="Arial"/>
               </a:rPr>
-              <a:t>Если перемешать один признак и ошибка растёт, модель на него опиралась
-Синие столбцы – изменение RMSE; чёрные отрезки – разброс 10 повторов</a:t>
+              <a:t>Один столбец перемешивают и снова измеряют ошибку
+Если ошибка растёт, модель опиралась на эту характеристику</a:t>
             </a:r>
             <a:endParaRPr sz="1600" i="0">
               <a:solidFill>
                 <a:srgbClr val="262626"/>
               </a:solidFill>
-              <a:latin typeface="Arial" panose="020B0604020202020204" pitchFamily="34" charset="0"/>
               <a:cs typeface="Arial"/>
             </a:endParaRPr>
           </a:p>
@@ -11912,7 +11142,7 @@
                   <a:latin typeface="Arial" panose="020B0604020202020204" pitchFamily="34" charset="0"/>
                   <a:cs typeface="Arial" pitchFamily="2" charset="0"/>
                 </a:rPr>
-                <a:t>Важность признаков описывает модель, а не физический закон</a:t>
+                <a:t>Какие характеристики использует модель</a:t>
               </a:r>
               <a:endParaRPr lang="ru-RU" sz="2600" b="1" spc="0" dirty="0">
                 <a:solidFill>
@@ -12288,16 +11518,16 @@
               <a:buNone/>
             </a:pPr>
             <a:r>
-              <a:rPr lang="ru-RU" sz="1500" i="0">
+              <a:rPr lang="ru-RU" sz="1500" b="1" i="0">
                 <a:solidFill>
                   <a:srgbClr val="262626"/>
                 </a:solidFill>
                 <a:latin typeface="Arial" panose="020B0604020202020204" pitchFamily="34" charset="0"/>
                 <a:cs typeface="Arial"/>
               </a:rPr>
-              <a:t>Ограничения: группы и партии неизвестны; перенос на новые материалы и лабораторная проверка не выполнены</a:t>
+              <a:t>Это описание поведения модели, а не физический закон и не способ подобрать рецептуру</a:t>
             </a:r>
-            <a:endParaRPr sz="1500" i="0">
+            <a:endParaRPr sz="1500" b="1" i="0">
               <a:solidFill>
                 <a:srgbClr val="262626"/>
               </a:solidFill>
@@ -12394,16 +11624,16 @@
               <a:buNone/>
             </a:pPr>
             <a:r>
-              <a:rPr lang="ru-RU" sz="1500" i="0">
+              <a:rPr lang="ru-RU" i="0">
                 <a:solidFill>
                   <a:srgbClr val="262626"/>
                 </a:solidFill>
                 <a:latin typeface="Arial" panose="020B0604020202020204" pitchFamily="34" charset="0"/>
                 <a:cs typeface="Arial"/>
               </a:rPr>
-              <a:t>Для модуля важности нулевые, потому что модель всегда выдаёт одно среднее значение</a:t>
+              <a:t>Ось X показывает изменение RMSE; линии показывают разброс 10 повторов</a:t>
             </a:r>
-            <a:endParaRPr sz="1500" i="0">
+            <a:endParaRPr i="0">
               <a:solidFill>
                 <a:srgbClr val="262626"/>
               </a:solidFill>
@@ -12437,16 +11667,26 @@
               <a:buNone/>
             </a:pPr>
             <a:r>
-              <a:rPr lang="ru-RU" sz="1600" b="0" i="0">
+              <a:rPr lang="ru-RU" sz="1300" i="0">
                 <a:solidFill>
                   <a:srgbClr val="595959"/>
                 </a:solidFill>
                 <a:latin typeface="Arial" panose="020B0604020202020204" pitchFamily="34" charset="0"/>
                 <a:cs typeface="Arial"/>
               </a:rPr>
-              <a:t>Источник: РПЗ, рис. 10</a:t>
+              <a:t>Источник: РПЗ, рисунок с важностью характеристик; </a:t>
             </a:r>
-            <a:endParaRPr sz="1600" b="0" i="0">
+            <a:r>
+              <a:rPr lang="en-US" sz="1300" i="0">
+                <a:solidFill>
+                  <a:srgbClr val="595959"/>
+                </a:solidFill>
+                <a:latin typeface="Arial" panose="020B0604020202020204" pitchFamily="34" charset="0"/>
+                <a:cs typeface="Arial"/>
+              </a:rPr>
+              <a:t>reports/evaluation/permutation_importance.csv</a:t>
+            </a:r>
+            <a:endParaRPr sz="1300" i="0">
               <a:solidFill>
                 <a:srgbClr val="595959"/>
               </a:solidFill>
@@ -12488,15 +11728,75 @@
             </a:pPr>
             <a:fld id="{00000000-1234-1234-1234-123412341234}" type="slidenum">
               <a:rPr lang="ru-RU" smtClean="0">
-                <a:latin typeface="Arial" panose="020B0604020202020204" pitchFamily="34" charset="0"/>
                 <a:cs typeface="Arial"/>
               </a:rPr>
               <a:t>13</a:t>
             </a:fld>
             <a:endParaRPr lang="ru-RU" dirty="0">
-              <a:latin typeface="Arial" panose="020B0604020202020204" pitchFamily="34" charset="0"/>
               <a:cs typeface="Arial"/>
             </a:endParaRPr>
+          </a:p>
+        </p:txBody>
+      </p:sp>
+      <p:sp>
+        <p:nvSpPr>
+          <p:cNvPr id="2" name="ImportanceTitleCover">
+            <a:extLst>
+              <a:ext uri="{FF2B5EF4-FFF2-40B4-BE49-F238E27FC236}">
+                <a16:creationId xmlns:a16="http://schemas.microsoft.com/office/drawing/2014/main" id="{931ACC15-F833-44C5-A600-B5AA1BE30FA7}"/>
+              </a:ext>
+            </a:extLst>
+          </p:cNvPr>
+          <p:cNvSpPr/>
+          <p:nvPr/>
+        </p:nvSpPr>
+        <p:spPr>
+          <a:xfrm>
+            <a:off x="4800600" y="1409700"/>
+            <a:ext cx="6959600" cy="495300"/>
+          </a:xfrm>
+          <a:prstGeom prst="roundRect">
+            <a:avLst/>
+          </a:prstGeom>
+          <a:solidFill>
+            <a:srgbClr val="FFFFFF"/>
+          </a:solidFill>
+          <a:ln w="17780">
+            <a:solidFill>
+              <a:srgbClr val="FFFFFF"/>
+            </a:solidFill>
+          </a:ln>
+        </p:spPr>
+        <p:style>
+          <a:lnRef idx="2">
+            <a:schemeClr val="accent1">
+              <a:shade val="50000"/>
+            </a:schemeClr>
+          </a:lnRef>
+          <a:fillRef idx="1">
+            <a:schemeClr val="accent1"/>
+          </a:fillRef>
+          <a:effectRef idx="0">
+            <a:schemeClr val="accent1"/>
+          </a:effectRef>
+          <a:fontRef idx="minor">
+            <a:schemeClr val="lt1"/>
+          </a:fontRef>
+        </p:style>
+        <p:txBody>
+          <a:bodyPr wrap="square" lIns="101600" tIns="76200" rIns="101600" bIns="76200" rtlCol="0" anchor="ctr"/>
+          <a:lstStyle/>
+          <a:p>
+            <a:pPr algn="ctr"/>
+            <a:r>
+              <a:rPr lang="ru-RU" sz="1200" b="1">
+                <a:solidFill>
+                  <a:srgbClr val="262626"/>
+                </a:solidFill>
+                <a:latin typeface="Arial" panose="020B0604020202020204" pitchFamily="34" charset="0"/>
+              </a:rPr>
+              <a:t>Как изменяется ошибка после перемешивания одной характеристики</a:t>
+            </a:r>
           </a:p>
         </p:txBody>
       </p:sp>
@@ -12542,22 +11842,29 @@
           </a:xfrm>
         </p:spPr>
         <p:txBody>
-          <a:bodyPr/>
+          <a:bodyPr wrap="square">
+            <a:normAutofit/>
+          </a:bodyPr>
           <a:lstStyle/>
           <a:p>
             <a:pPr marL="0" indent="0" algn="l">
               <a:buNone/>
             </a:pPr>
             <a:r>
-              <a:rPr sz="2000" b="1" i="0">
+              <a:rPr lang="ru-RU" sz="1800" b="1" i="0">
                 <a:solidFill>
                   <a:srgbClr val="F1BE29"/>
                 </a:solidFill>
-                <a:latin typeface="Arial" panose="020B0604020202020204" pitchFamily="34" charset="0"/>
                 <a:cs typeface="Arial"/>
               </a:rPr>
-              <a:t>Воспроизводимость</a:t>
+              <a:t>Воспроизводимый результат</a:t>
             </a:r>
+            <a:endParaRPr sz="1800" b="1" i="0">
+              <a:solidFill>
+                <a:srgbClr val="F1BE29"/>
+              </a:solidFill>
+              <a:cs typeface="Arial"/>
+            </a:endParaRPr>
           </a:p>
         </p:txBody>
       </p:sp>
@@ -12578,22 +11885,29 @@
           </a:xfrm>
         </p:spPr>
         <p:txBody>
-          <a:bodyPr/>
+          <a:bodyPr wrap="square">
+            <a:normAutofit/>
+          </a:bodyPr>
           <a:lstStyle/>
           <a:p>
             <a:pPr marL="0" indent="0" algn="l">
               <a:buNone/>
             </a:pPr>
             <a:r>
-              <a:rPr sz="2000" b="1" i="0">
+              <a:rPr lang="ru-RU" sz="1800" b="1" i="0">
                 <a:solidFill>
                   <a:srgbClr val="F1BE29"/>
                 </a:solidFill>
-                <a:latin typeface="Arial" panose="020B0604020202020204" pitchFamily="34" charset="0"/>
                 <a:cs typeface="Arial"/>
               </a:rPr>
-              <a:t>Учебное приложение Streamlit</a:t>
+              <a:t>Путь одного расчёта</a:t>
             </a:r>
+            <a:endParaRPr sz="1800" b="1" i="0">
+              <a:solidFill>
+                <a:srgbClr val="F1BE29"/>
+              </a:solidFill>
+              <a:cs typeface="Arial"/>
+            </a:endParaRPr>
           </a:p>
         </p:txBody>
       </p:sp>
@@ -12675,7 +11989,7 @@
                   <a:latin typeface="Arial" panose="020B0604020202020204" pitchFamily="34" charset="0"/>
                   <a:cs typeface="Arial" pitchFamily="2" charset="0"/>
                 </a:rPr>
-                <a:t>Приложение и воспроизводимый репозиторий</a:t>
+                <a:t>Приложение: 11 входов и два результата</a:t>
               </a:r>
               <a:endParaRPr lang="ru-RU" sz="2600" b="1" spc="0" dirty="0">
                 <a:solidFill>
@@ -13058,15 +12372,23 @@
               <a:buNone/>
             </a:pPr>
             <a:r>
-              <a:rPr sz="1600" b="0" i="0">
+              <a:rPr lang="ru-RU" i="0">
                 <a:solidFill>
                   <a:srgbClr val="262626"/>
                 </a:solidFill>
                 <a:latin typeface="Arial" panose="020B0604020202020204" pitchFamily="34" charset="0"/>
                 <a:cs typeface="Arial"/>
               </a:rPr>
-              <a:t>входов</a:t>
+              <a:t>известных
+характеристик</a:t>
             </a:r>
+            <a:endParaRPr i="0">
+              <a:solidFill>
+                <a:srgbClr val="262626"/>
+              </a:solidFill>
+              <a:latin typeface="Arial" panose="020B0604020202020204" pitchFamily="34" charset="0"/>
+              <a:cs typeface="Arial"/>
+            </a:endParaRPr>
           </a:p>
         </p:txBody>
       </p:sp>
@@ -13146,7 +12468,7 @@
               <a:buNone/>
             </a:pPr>
             <a:r>
-              <a:rPr sz="2200" b="1" i="0">
+              <a:rPr lang="ru-RU" sz="1700" b="1" i="0">
                 <a:solidFill>
                   <a:srgbClr val="065CAB"/>
                 </a:solidFill>
@@ -13155,6 +12477,13 @@
               </a:rPr>
               <a:t>проверка</a:t>
             </a:r>
+            <a:endParaRPr sz="1700" b="1" i="0">
+              <a:solidFill>
+                <a:srgbClr val="065CAB"/>
+              </a:solidFill>
+              <a:latin typeface="Arial" panose="020B0604020202020204" pitchFamily="34" charset="0"/>
+              <a:cs typeface="Arial"/>
+            </a:endParaRPr>
           </a:p>
         </p:txBody>
       </p:sp>
@@ -13185,17 +12514,18 @@
               <a:buNone/>
             </a:pPr>
             <a:r>
-              <a:rPr lang="ru-RU" sz="1300" i="0">
+              <a:rPr lang="ru-RU" sz="1200" i="0">
                 <a:solidFill>
                   <a:srgbClr val="262626"/>
                 </a:solidFill>
                 <a:latin typeface="Arial" panose="020B0604020202020204" pitchFamily="34" charset="0"/>
                 <a:cs typeface="Arial"/>
               </a:rPr>
-              <a:t>проверка
-ввода</a:t>
+              <a:t>формат и
+предупреждение
+о диапазоне</a:t>
             </a:r>
-            <a:endParaRPr sz="1300" i="0">
+            <a:endParaRPr sz="1200" i="0">
               <a:solidFill>
                 <a:srgbClr val="262626"/>
               </a:solidFill>
@@ -13320,7 +12650,7 @@
               <a:buNone/>
             </a:pPr>
             <a:r>
-              <a:rPr sz="1600" b="0" i="0">
+              <a:rPr lang="ru-RU" i="0">
                 <a:solidFill>
                   <a:srgbClr val="262626"/>
                 </a:solidFill>
@@ -13329,6 +12659,13 @@
               </a:rPr>
               <a:t>прогноза</a:t>
             </a:r>
+            <a:endParaRPr i="0">
+              <a:solidFill>
+                <a:srgbClr val="262626"/>
+              </a:solidFill>
+              <a:latin typeface="Arial" panose="020B0604020202020204" pitchFamily="34" charset="0"/>
+              <a:cs typeface="Arial"/>
+            </a:endParaRPr>
           </a:p>
         </p:txBody>
       </p:sp>
@@ -13359,17 +12696,18 @@
               <a:buNone/>
             </a:pPr>
             <a:r>
-              <a:rPr lang="ru-RU" sz="1600" i="0">
+              <a:rPr lang="ru-RU" sz="1500" i="0">
                 <a:solidFill>
                   <a:srgbClr val="262626"/>
                 </a:solidFill>
                 <a:latin typeface="Arial" panose="020B0604020202020204" pitchFamily="34" charset="0"/>
                 <a:cs typeface="Arial"/>
               </a:rPr>
-              <a:t>Модуль упругости при растяжении – прогноз среднего
-Прочность при растяжении – градиентный бустинг</a:t>
+              <a:t>Две прямые модели дают:
+модуль упругости при растяжении
+прочность при растяжении</a:t>
             </a:r>
-            <a:endParaRPr sz="1600" i="0">
+            <a:endParaRPr sz="1500" i="0">
               <a:solidFill>
                 <a:srgbClr val="595959"/>
               </a:solidFill>
@@ -13473,7 +12811,7 @@
                 <a:latin typeface="Arial" panose="020B0604020202020204" pitchFamily="34" charset="0"/>
                 <a:cs typeface="Arial"/>
               </a:rPr>
-              <a:t>Демо: медианные входы и угол 90° дают 73,2073 ГПа и 2502,06 МПа</a:t>
+              <a:t>Демонстрационный профиль: 73,2073 ГПа и 2502,06 МПа</a:t>
             </a:r>
             <a:endParaRPr i="0">
               <a:solidFill>
@@ -13519,7 +12857,7 @@
                 <a:latin typeface="Arial" panose="020B0604020202020204" pitchFamily="34" charset="0"/>
                 <a:cs typeface="Arial"/>
               </a:rPr>
-              <a:t>Это расчёт для демонстрационного профиля, а не испытание нового образца</a:t>
+              <a:t>Это расчёт моделей, а не лабораторное измерение нового образца</a:t>
             </a:r>
             <a:endParaRPr b="1" i="0">
               <a:solidFill>
@@ -13588,17 +12926,19 @@
               <a:buNone/>
             </a:pPr>
             <a:r>
-              <a:rPr lang="ru-RU" sz="1600" i="0">
+              <a:rPr lang="ru-RU" sz="1700" i="0">
                 <a:solidFill>
                   <a:srgbClr val="262626"/>
                 </a:solidFill>
                 <a:latin typeface="Arial" panose="020B0604020202020204" pitchFamily="34" charset="0"/>
                 <a:cs typeface="Arial"/>
               </a:rPr>
-              <a:t>Репозиторий фиксирует
-данные, разбиение, модели, отчёты и notebook</a:t>
+              <a:t>Репозиторий содержит
+данные и код
+зафиксированное разделение
+модели и отчёты</a:t>
             </a:r>
-            <a:endParaRPr sz="1600" i="0">
+            <a:endParaRPr sz="1700" i="0">
               <a:solidFill>
                 <a:srgbClr val="262626"/>
               </a:solidFill>
@@ -13689,26 +13029,16 @@
               <a:buNone/>
             </a:pPr>
             <a:r>
-              <a:rPr lang="ru-RU" sz="1600" b="0" i="0">
+              <a:rPr lang="ru-RU" sz="1300" i="0">
                 <a:solidFill>
                   <a:srgbClr val="595959"/>
                 </a:solidFill>
                 <a:latin typeface="Arial" panose="020B0604020202020204" pitchFamily="34" charset="0"/>
                 <a:cs typeface="Arial"/>
               </a:rPr>
-              <a:t>Источник: РПЗ, разд. 2.5; </a:t>
+              <a:t>Источник: РПЗ, раздел о приложении и репозитории; docs/application.md</a:t>
             </a:r>
-            <a:r>
-              <a:rPr lang="en-US" sz="1600" b="0" i="0">
-                <a:solidFill>
-                  <a:srgbClr val="595959"/>
-                </a:solidFill>
-                <a:latin typeface="Arial" panose="020B0604020202020204" pitchFamily="34" charset="0"/>
-                <a:cs typeface="Arial"/>
-              </a:rPr>
-              <a:t>docs/application.md</a:t>
-            </a:r>
-            <a:endParaRPr sz="1600" b="0" i="0">
+            <a:endParaRPr sz="1300" i="0">
               <a:solidFill>
                 <a:srgbClr val="595959"/>
               </a:solidFill>
@@ -13750,13 +13080,11 @@
             </a:pPr>
             <a:fld id="{00000000-1234-1234-1234-123412341234}" type="slidenum">
               <a:rPr lang="ru-RU" smtClean="0">
-                <a:latin typeface="Arial" panose="020B0604020202020204" pitchFamily="34" charset="0"/>
                 <a:cs typeface="Arial"/>
               </a:rPr>
               <a:t>14</a:t>
             </a:fld>
             <a:endParaRPr lang="ru-RU" dirty="0">
-              <a:latin typeface="Arial" panose="020B0604020202020204" pitchFamily="34" charset="0"/>
               <a:cs typeface="Arial"/>
             </a:endParaRPr>
           </a:p>
@@ -13804,7 +13132,7 @@
           </a:xfrm>
         </p:spPr>
         <p:txBody>
-          <a:bodyPr wrap="none">
+          <a:bodyPr wrap="square">
             <a:normAutofit/>
           </a:bodyPr>
           <a:lstStyle/>
@@ -13817,16 +13145,14 @@
                 <a:solidFill>
                   <a:srgbClr val="F1BE29"/>
                 </a:solidFill>
-                <a:latin typeface="Arial" panose="020B0604020202020204" pitchFamily="34" charset="0"/>
                 <a:cs typeface="Arial"/>
               </a:rPr>
-              <a:t>Итог: воспроизводимый процесс и честная оценка качества</a:t>
+              <a:t>Полный процесс реализован, но качество прогнозов остаётся слабым</a:t>
             </a:r>
             <a:endParaRPr sz="1800" b="1" i="0">
               <a:solidFill>
                 <a:srgbClr val="F1BE29"/>
               </a:solidFill>
-              <a:latin typeface="Arial" panose="020B0604020202020204" pitchFamily="34" charset="0"/>
               <a:cs typeface="Arial"/>
             </a:endParaRPr>
           </a:p>
@@ -13910,7 +13236,7 @@
                   <a:latin typeface="Arial" panose="020B0604020202020204" pitchFamily="34" charset="0"/>
                   <a:cs typeface="Arial" pitchFamily="2" charset="0"/>
                 </a:rPr>
-                <a:t>Выводы</a:t>
+                <a:t>Итоги работы</a:t>
               </a:r>
               <a:endParaRPr lang="ru-RU" sz="2600" b="1" spc="0" dirty="0">
                 <a:solidFill>
@@ -14224,15 +13550,32 @@
               <a:buNone/>
             </a:pPr>
             <a:r>
-              <a:rPr sz="1600" b="0" i="0">
+              <a:rPr lang="en-US" sz="1300" i="0">
                 <a:solidFill>
                   <a:srgbClr val="595959"/>
                 </a:solidFill>
                 <a:latin typeface="Arial" panose="020B0604020202020204" pitchFamily="34" charset="0"/>
                 <a:cs typeface="Arial"/>
               </a:rPr>
-              <a:t>test R²</a:t>
+              <a:t>R² </a:t>
             </a:r>
+            <a:r>
+              <a:rPr lang="ru-RU" sz="1300" i="0">
+                <a:solidFill>
+                  <a:srgbClr val="595959"/>
+                </a:solidFill>
+                <a:latin typeface="Arial" panose="020B0604020202020204" pitchFamily="34" charset="0"/>
+                <a:cs typeface="Arial"/>
+              </a:rPr>
+              <a:t>на итоговой проверке</a:t>
+            </a:r>
+            <a:endParaRPr sz="1300" i="0">
+              <a:solidFill>
+                <a:srgbClr val="595959"/>
+              </a:solidFill>
+              <a:latin typeface="Arial" panose="020B0604020202020204" pitchFamily="34" charset="0"/>
+              <a:cs typeface="Arial"/>
+            </a:endParaRPr>
           </a:p>
         </p:txBody>
       </p:sp>
@@ -14362,17 +13705,17 @@
               <a:buNone/>
             </a:pPr>
             <a:r>
-              <a:rPr lang="ru-RU" sz="1700" i="0">
+              <a:rPr lang="ru-RU" sz="1600" i="0">
                 <a:solidFill>
                   <a:srgbClr val="262626"/>
                 </a:solidFill>
                 <a:latin typeface="Arial" panose="020B0604020202020204" pitchFamily="34" charset="0"/>
                 <a:cs typeface="Arial"/>
               </a:rPr>
-              <a:t>Модуль упругости при растяжении
-лучше оказался прогноз среднего</a:t>
+              <a:t>Модуль упругости
+лучше прогноз среднего</a:t>
             </a:r>
-            <a:endParaRPr sz="1700" i="0">
+            <a:endParaRPr sz="1600" i="0">
               <a:solidFill>
                 <a:srgbClr val="595959"/>
               </a:solidFill>
@@ -14551,8 +13894,8 @@
                 <a:latin typeface="Arial" panose="020B0604020202020204" pitchFamily="34" charset="0"/>
                 <a:cs typeface="Arial"/>
               </a:rPr>
-              <a:t>Прочность при растяжении
-качество бустинга близко к качеству прогноза среднего</a:t>
+              <a:t>Прочность
+бустинг почти равен среднему</a:t>
             </a:r>
             <a:endParaRPr sz="1600" i="0">
               <a:solidFill>
@@ -14726,17 +14069,17 @@
               <a:buNone/>
             </a:pPr>
             <a:r>
-              <a:rPr lang="ru-RU" sz="1700" i="0">
+              <a:rPr lang="ru-RU" sz="1600" i="0">
                 <a:solidFill>
                   <a:srgbClr val="262626"/>
                 </a:solidFill>
                 <a:latin typeface="Arial" panose="020B0604020202020204" pitchFamily="34" charset="0"/>
                 <a:cs typeface="Arial"/>
               </a:rPr>
-              <a:t>Соотношение матрица–наполнитель
-нейросеть хуже прогноза среднего</a:t>
+              <a:t>Отношение компонентов
+нейросеть хуже среднего</a:t>
             </a:r>
-            <a:endParaRPr sz="1700" i="0">
+            <a:endParaRPr sz="1600" i="0">
               <a:solidFill>
                 <a:srgbClr val="595959"/>
               </a:solidFill>
@@ -14839,20 +14182,19 @@
               <a:buNone/>
             </a:pPr>
             <a:r>
-              <a:rPr lang="ru-RU" sz="1700" i="0">
+              <a:rPr lang="ru-RU" sz="1600" i="0">
                 <a:solidFill>
                   <a:srgbClr val="262626"/>
                 </a:solidFill>
                 <a:latin typeface="Arial" panose="020B0604020202020204" pitchFamily="34" charset="0"/>
                 <a:cs typeface="Arial"/>
               </a:rPr>
-              <a:t>Что нужно дальше
-описать происхождение данных
-проверить на новой выборке
-сверить с лабораторными испытаниями
-Текущие модели не предназначены для подбора рецептуры</a:t>
+              <a:t>Вывод по цели
+Процесс работает и воспроизводится
+Промышленная точность и подбор рецептуры не подтверждены
+Дальше нужны внешние данные и лабораторная проверка</a:t>
             </a:r>
-            <a:endParaRPr sz="1700" i="0">
+            <a:endParaRPr sz="1600" i="0">
               <a:solidFill>
                 <a:srgbClr val="262626"/>
               </a:solidFill>
@@ -14886,15 +14228,42 @@
               <a:buNone/>
             </a:pPr>
             <a:r>
-              <a:rPr sz="1600" b="0" i="0">
+              <a:rPr lang="ru-RU" sz="1300" i="0">
                 <a:solidFill>
                   <a:srgbClr val="595959"/>
                 </a:solidFill>
                 <a:latin typeface="Arial" panose="020B0604020202020204" pitchFamily="34" charset="0"/>
                 <a:cs typeface="Arial"/>
               </a:rPr>
-              <a:t>Источник: reports/evaluation/metrics.csv; РПЗ, заключение</a:t>
+              <a:t>Источник: </a:t>
             </a:r>
+            <a:r>
+              <a:rPr lang="en-US" sz="1300" i="0">
+                <a:solidFill>
+                  <a:srgbClr val="595959"/>
+                </a:solidFill>
+                <a:latin typeface="Arial" panose="020B0604020202020204" pitchFamily="34" charset="0"/>
+                <a:cs typeface="Arial"/>
+              </a:rPr>
+              <a:t>reports/evaluation/metrics.csv; </a:t>
+            </a:r>
+            <a:r>
+              <a:rPr lang="ru-RU" sz="1300" i="0">
+                <a:solidFill>
+                  <a:srgbClr val="595959"/>
+                </a:solidFill>
+                <a:latin typeface="Arial" panose="020B0604020202020204" pitchFamily="34" charset="0"/>
+                <a:cs typeface="Arial"/>
+              </a:rPr>
+              <a:t>РПЗ, заключение</a:t>
+            </a:r>
+            <a:endParaRPr sz="1300" i="0">
+              <a:solidFill>
+                <a:srgbClr val="595959"/>
+              </a:solidFill>
+              <a:latin typeface="Arial" panose="020B0604020202020204" pitchFamily="34" charset="0"/>
+              <a:cs typeface="Arial"/>
+            </a:endParaRPr>
           </a:p>
         </p:txBody>
       </p:sp>
@@ -14930,13 +14299,11 @@
             </a:pPr>
             <a:fld id="{00000000-1234-1234-1234-123412341234}" type="slidenum">
               <a:rPr lang="ru-RU" smtClean="0">
-                <a:latin typeface="Arial" panose="020B0604020202020204" pitchFamily="34" charset="0"/>
                 <a:cs typeface="Arial"/>
               </a:rPr>
               <a:t>15</a:t>
             </a:fld>
             <a:endParaRPr lang="ru-RU" dirty="0">
-              <a:latin typeface="Arial" panose="020B0604020202020204" pitchFamily="34" charset="0"/>
               <a:cs typeface="Arial"/>
             </a:endParaRPr>
           </a:p>
@@ -14993,15 +14360,15 @@
               <a:buNone/>
             </a:pPr>
             <a:r>
-              <a:rPr lang="ru-RU" sz="2200" b="1" i="0">
+              <a:rPr lang="ru-RU" sz="2100" b="1" i="0">
                 <a:solidFill>
                   <a:srgbClr val="F1BE29"/>
                 </a:solidFill>
                 <a:cs typeface="Arial"/>
               </a:rPr>
-              <a:t>Свойства зависят от сочетания компонентов и условий изготовления</a:t>
+              <a:t>Прогноз даёт предварительную оценку до физического испытания</a:t>
             </a:r>
-            <a:endParaRPr sz="2200" b="1" i="0">
+            <a:endParaRPr sz="2100" b="1" i="0">
               <a:solidFill>
                 <a:srgbClr val="F1BE29"/>
               </a:solidFill>
@@ -15088,7 +14455,7 @@
                   <a:latin typeface="Arial" panose="020B0604020202020204" pitchFamily="34" charset="0"/>
                   <a:cs typeface="Arial" pitchFamily="2" charset="0"/>
                 </a:rPr>
-                <a:t>Композиционный материал и прогнозируемые свойства</a:t>
+                <a:t>Материал и два прогнозируемых свойства</a:t>
               </a:r>
               <a:endParaRPr lang="ru-RU" sz="2600" b="1" spc="0" dirty="0">
                 <a:solidFill>
@@ -15504,34 +14871,17 @@
               <a:buNone/>
             </a:pPr>
             <a:r>
-              <a:rPr lang="ru-RU" sz="1900" i="0">
+              <a:rPr lang="ru-RU" sz="1800" i="0">
                 <a:solidFill>
                   <a:srgbClr val="595959"/>
                 </a:solidFill>
                 <a:latin typeface="Arial" panose="020B0604020202020204" pitchFamily="34" charset="0"/>
                 <a:cs typeface="Arial"/>
               </a:rPr>
-              <a:t>Связующее (матрица)</a:t>
+              <a:t>Связующее (матрица)
+удерживает компоненты и передаёт нагрузку</a:t>
             </a:r>
-          </a:p>
-          <a:p>
-            <a:pPr marL="0" indent="0" algn="l">
-              <a:lnSpc>
-                <a:spcPct val="100000"/>
-              </a:lnSpc>
-              <a:buNone/>
-            </a:pPr>
-            <a:r>
-              <a:rPr lang="ru-RU" sz="1900" i="0">
-                <a:solidFill>
-                  <a:srgbClr val="595959"/>
-                </a:solidFill>
-                <a:latin typeface="Arial" panose="020B0604020202020204" pitchFamily="34" charset="0"/>
-                <a:cs typeface="Arial"/>
-              </a:rPr>
-              <a:t>соединяет компоненты и передаёт нагрузку</a:t>
-            </a:r>
-            <a:endParaRPr sz="1900" i="0">
+            <a:endParaRPr sz="1800" i="0">
               <a:solidFill>
                 <a:srgbClr val="262626"/>
               </a:solidFill>
@@ -15667,34 +15017,17 @@
               <a:buNone/>
             </a:pPr>
             <a:r>
-              <a:rPr lang="ru-RU" sz="1900" i="0">
+              <a:rPr lang="ru-RU" sz="1800" i="0">
                 <a:solidFill>
                   <a:srgbClr val="595959"/>
                 </a:solidFill>
                 <a:latin typeface="Arial" panose="020B0604020202020204" pitchFamily="34" charset="0"/>
                 <a:cs typeface="Arial"/>
               </a:rPr>
-              <a:t>Наполнитель</a:t>
+              <a:t>Наполнитель
+влияет на свойства и может усиливать материал</a:t>
             </a:r>
-          </a:p>
-          <a:p>
-            <a:pPr marL="0" indent="0" algn="l">
-              <a:lnSpc>
-                <a:spcPct val="100000"/>
-              </a:lnSpc>
-              <a:buNone/>
-            </a:pPr>
-            <a:r>
-              <a:rPr lang="ru-RU" sz="1900" i="0">
-                <a:solidFill>
-                  <a:srgbClr val="595959"/>
-                </a:solidFill>
-                <a:latin typeface="Arial" panose="020B0604020202020204" pitchFamily="34" charset="0"/>
-                <a:cs typeface="Arial"/>
-              </a:rPr>
-              <a:t>влияет на свойства; может усиливать материал</a:t>
-            </a:r>
-            <a:endParaRPr sz="1900" i="0">
+            <a:endParaRPr sz="1800" i="0">
               <a:solidFill>
                 <a:srgbClr val="262626"/>
               </a:solidFill>
@@ -15830,34 +15163,17 @@
               <a:buNone/>
             </a:pPr>
             <a:r>
-              <a:rPr lang="ru-RU" sz="1900" i="0">
+              <a:rPr lang="ru-RU" sz="1800" i="0">
                 <a:solidFill>
                   <a:srgbClr val="595959"/>
                 </a:solidFill>
                 <a:latin typeface="Arial" panose="020B0604020202020204" pitchFamily="34" charset="0"/>
                 <a:cs typeface="Arial"/>
               </a:rPr>
-              <a:t>Задача работы</a:t>
+              <a:t>Цель
+оценить свойства по известным характеристикам</a:t>
             </a:r>
-          </a:p>
-          <a:p>
-            <a:pPr marL="0" indent="0" algn="l">
-              <a:lnSpc>
-                <a:spcPct val="100000"/>
-              </a:lnSpc>
-              <a:buNone/>
-            </a:pPr>
-            <a:r>
-              <a:rPr lang="ru-RU" sz="1900" i="0">
-                <a:solidFill>
-                  <a:srgbClr val="595959"/>
-                </a:solidFill>
-                <a:latin typeface="Arial" panose="020B0604020202020204" pitchFamily="34" charset="0"/>
-                <a:cs typeface="Arial"/>
-              </a:rPr>
-              <a:t>прогнозировать свойства по имеющимся характеристикам</a:t>
-            </a:r>
-            <a:endParaRPr sz="1900" i="0">
+            <a:endParaRPr sz="1800" i="0">
               <a:solidFill>
                 <a:srgbClr val="262626"/>
               </a:solidFill>
@@ -15924,118 +15240,20 @@
               <a:buNone/>
             </a:pPr>
             <a:r>
-              <a:rPr lang="ru-RU" sz="1600" i="0">
+              <a:rPr lang="ru-RU" sz="1700" i="0">
                 <a:solidFill>
                   <a:srgbClr val="262626"/>
                 </a:solidFill>
                 <a:latin typeface="Arial" panose="020B0604020202020204" pitchFamily="34" charset="0"/>
                 <a:cs typeface="Arial"/>
               </a:rPr>
-              <a:t>Что прогнозируем</a:t>
+              <a:t>Что оцениваем
+Модуль упругости при растяжении
+сопротивление обратимому растяжению
+Прочность при растяжении
+предел перед разрушением</a:t>
             </a:r>
-          </a:p>
-          <a:p>
-            <a:pPr marL="0" indent="0" algn="l">
-              <a:lnSpc>
-                <a:spcPct val="105000"/>
-              </a:lnSpc>
-              <a:buNone/>
-            </a:pPr>
-            <a:endParaRPr lang="ru-RU" sz="1600" i="0">
-              <a:solidFill>
-                <a:srgbClr val="262626"/>
-              </a:solidFill>
-              <a:latin typeface="Arial" panose="020B0604020202020204" pitchFamily="34" charset="0"/>
-              <a:cs typeface="Arial"/>
-            </a:endParaRPr>
-          </a:p>
-          <a:p>
-            <a:pPr marL="0" indent="0" algn="l">
-              <a:lnSpc>
-                <a:spcPct val="105000"/>
-              </a:lnSpc>
-              <a:buNone/>
-            </a:pPr>
-            <a:r>
-              <a:rPr lang="ru-RU" sz="1600" i="0">
-                <a:solidFill>
-                  <a:srgbClr val="262626"/>
-                </a:solidFill>
-                <a:latin typeface="Arial" panose="020B0604020202020204" pitchFamily="34" charset="0"/>
-                <a:cs typeface="Arial"/>
-              </a:rPr>
-              <a:t>Модуль упругости при растяжении</a:t>
-            </a:r>
-          </a:p>
-          <a:p>
-            <a:pPr marL="0" indent="0" algn="l">
-              <a:lnSpc>
-                <a:spcPct val="105000"/>
-              </a:lnSpc>
-              <a:buNone/>
-            </a:pPr>
-            <a:r>
-              <a:rPr lang="ru-RU" sz="1600" i="0">
-                <a:solidFill>
-                  <a:srgbClr val="262626"/>
-                </a:solidFill>
-                <a:latin typeface="Arial" panose="020B0604020202020204" pitchFamily="34" charset="0"/>
-                <a:cs typeface="Arial"/>
-              </a:rPr>
-              <a:t>сопротивление обратимому растяжению</a:t>
-            </a:r>
-          </a:p>
-          <a:p>
-            <a:pPr marL="0" indent="0" algn="l">
-              <a:lnSpc>
-                <a:spcPct val="105000"/>
-              </a:lnSpc>
-              <a:buNone/>
-            </a:pPr>
-            <a:endParaRPr lang="ru-RU" sz="1600" i="0">
-              <a:solidFill>
-                <a:srgbClr val="262626"/>
-              </a:solidFill>
-              <a:latin typeface="Arial" panose="020B0604020202020204" pitchFamily="34" charset="0"/>
-              <a:cs typeface="Arial"/>
-            </a:endParaRPr>
-          </a:p>
-          <a:p>
-            <a:pPr marL="0" indent="0" algn="l">
-              <a:lnSpc>
-                <a:spcPct val="105000"/>
-              </a:lnSpc>
-              <a:buNone/>
-            </a:pPr>
-            <a:r>
-              <a:rPr lang="ru-RU" sz="1600" i="0">
-                <a:solidFill>
-                  <a:srgbClr val="262626"/>
-                </a:solidFill>
-                <a:latin typeface="Arial" panose="020B0604020202020204" pitchFamily="34" charset="0"/>
-                <a:cs typeface="Arial"/>
-              </a:rPr>
-              <a:t>Прочность при растяжении</a:t>
-            </a:r>
-          </a:p>
-          <a:p>
-            <a:pPr marL="0" indent="0" algn="l">
-              <a:lnSpc>
-                <a:spcPct val="105000"/>
-              </a:lnSpc>
-              <a:buNone/>
-            </a:pPr>
-            <a:r>
-              <a:rPr lang="ru-RU" sz="1600" i="0">
-                <a:solidFill>
-                  <a:srgbClr val="262626"/>
-                </a:solidFill>
-                <a:latin typeface="Arial" panose="020B0604020202020204" pitchFamily="34" charset="0"/>
-                <a:cs typeface="Arial"/>
-              </a:rPr>
-              <a:t>предельное напряжение до разрушения</a:t>
-            </a:r>
-            <a:endParaRPr sz="1600" i="0">
+            <a:endParaRPr sz="1700" i="0">
               <a:solidFill>
                 <a:srgbClr val="262626"/>
               </a:solidFill>
@@ -16069,7 +15287,7 @@
               <a:buNone/>
             </a:pPr>
             <a:r>
-              <a:rPr lang="ru-RU" sz="1600" b="0" i="0">
+              <a:rPr lang="ru-RU" i="0">
                 <a:solidFill>
                   <a:srgbClr val="595959"/>
                 </a:solidFill>
@@ -16078,7 +15296,7 @@
               </a:rPr>
               <a:t>Источник: РПЗ, введение</a:t>
             </a:r>
-            <a:endParaRPr sz="1600" b="0" i="0">
+            <a:endParaRPr i="0">
               <a:solidFill>
                 <a:srgbClr val="595959"/>
               </a:solidFill>
@@ -16120,13 +15338,11 @@
             </a:pPr>
             <a:fld id="{00000000-1234-1234-1234-123412341234}" type="slidenum">
               <a:rPr lang="ru-RU" smtClean="0">
-                <a:latin typeface="Arial" panose="020B0604020202020204" pitchFamily="34" charset="0"/>
                 <a:cs typeface="Arial"/>
               </a:rPr>
               <a:t>2</a:t>
             </a:fld>
             <a:endParaRPr lang="ru-RU" dirty="0">
-              <a:latin typeface="Arial" panose="020B0604020202020204" pitchFamily="34" charset="0"/>
               <a:cs typeface="Arial"/>
             </a:endParaRPr>
           </a:p>
@@ -16235,7 +15451,7 @@
                   <a:latin typeface="Arial" panose="020B0604020202020204" pitchFamily="34" charset="0"/>
                   <a:cs typeface="Arial" pitchFamily="2" charset="0"/>
                 </a:rPr>
-                <a:t>Исходные данные из двух таблиц</a:t>
+                <a:t>Две таблицы образуют один набор данных</a:t>
               </a:r>
               <a:endParaRPr lang="ru-RU" sz="2600" b="1" spc="0" dirty="0">
                 <a:solidFill>
@@ -16534,7 +15750,7 @@
           <p:nvPr>
             <p:extLst>
               <p:ext uri="{D42A27DB-BD31-4B8C-83A1-F6EECF244321}">
-                <p14:modId xmlns:p14="http://schemas.microsoft.com/office/powerpoint/2010/main" val="642001043"/>
+                <p14:modId xmlns:p14="http://schemas.microsoft.com/office/powerpoint/2010/main" val="1265352088"/>
               </p:ext>
             </p:extLst>
           </p:nvPr>
@@ -16894,19 +16110,28 @@
                         <a:buNone/>
                       </a:pPr>
                       <a:r>
-                        <a:rPr sz="2200" b="1" i="0">
+                        <a:rPr lang="ru-RU" sz="1600" b="1" i="0">
                           <a:solidFill>
-                            <a:srgbClr val="065CAB"/>
+                            <a:srgbClr val="262626"/>
                           </a:solidFill>
                           <a:latin typeface="Arial" panose="020B0604020202020204" pitchFamily="34" charset="0"/>
                           <a:cs typeface="Arial"/>
                         </a:rPr>
-                        <a:t>INNER JOIN</a:t>
+                        <a:t>Совпавшие строки</a:t>
                       </a:r>
+                      <a:endParaRPr sz="1600" b="1" i="0">
+                        <a:solidFill>
+                          <a:srgbClr val="262626"/>
+                        </a:solidFill>
+                        <a:latin typeface="Arial" panose="020B0604020202020204" pitchFamily="34" charset="0"/>
+                        <a:cs typeface="Arial"/>
+                      </a:endParaRPr>
                     </a:p>
                   </a:txBody>
                   <a:tcPr marT="27432" marB="27432" anchor="ctr">
-                    <a:noFill/>
+                    <a:solidFill>
+                      <a:srgbClr val="FFFFFF"/>
+                    </a:solidFill>
                   </a:tcPr>
                 </a:tc>
                 <a:tc>
@@ -16991,31 +16216,17 @@
               <a:buNone/>
             </a:pPr>
             <a:r>
-              <a:rPr lang="ru-RU" sz="1300" i="0">
+              <a:rPr lang="ru-RU" sz="1700" i="0">
                 <a:solidFill>
                   <a:srgbClr val="595959"/>
                 </a:solidFill>
                 <a:latin typeface="Arial" panose="020B0604020202020204" pitchFamily="34" charset="0"/>
                 <a:cs typeface="Arial"/>
               </a:rPr>
-              <a:t>INNER JOIN: оставлены строки, присутствующие в обеих таблицах.</a:t>
+              <a:t>Таблицы сопоставлены по исходному индексу.
+Результат: 1023 строки × 13 показателей.</a:t>
             </a:r>
-          </a:p>
-          <a:p>
-            <a:pPr marL="0" indent="0" algn="l">
-              <a:buNone/>
-            </a:pPr>
-            <a:r>
-              <a:rPr lang="ru-RU" sz="1300" i="0">
-                <a:solidFill>
-                  <a:srgbClr val="595959"/>
-                </a:solidFill>
-                <a:latin typeface="Arial" panose="020B0604020202020204" pitchFamily="34" charset="0"/>
-                <a:cs typeface="Arial"/>
-              </a:rPr>
-              <a:t>Каждая итоговая строка содержит характеристики и известные конечные свойства.</a:t>
-            </a:r>
-            <a:endParaRPr sz="1300" i="0">
+            <a:endParaRPr sz="1700" i="0">
               <a:solidFill>
                 <a:srgbClr val="595959"/>
               </a:solidFill>
@@ -17151,31 +16362,17 @@
               <a:buNone/>
             </a:pPr>
             <a:r>
-              <a:rPr lang="ru-RU" sz="1900" i="0">
+              <a:rPr lang="ru-RU" sz="1800" i="0">
                 <a:solidFill>
                   <a:srgbClr val="262626"/>
                 </a:solidFill>
                 <a:latin typeface="Arial" panose="020B0604020202020204" pitchFamily="34" charset="0"/>
                 <a:cs typeface="Arial"/>
               </a:rPr>
-              <a:t>строк второй таблицы без пары</a:t>
+              <a:t>строк без пары
+не вошли в набор</a:t>
             </a:r>
-          </a:p>
-          <a:p>
-            <a:pPr marL="0" indent="0" algn="l">
-              <a:buNone/>
-            </a:pPr>
-            <a:r>
-              <a:rPr lang="ru-RU" sz="1900" i="0">
-                <a:solidFill>
-                  <a:srgbClr val="262626"/>
-                </a:solidFill>
-                <a:latin typeface="Arial" panose="020B0604020202020204" pitchFamily="34" charset="0"/>
-                <a:cs typeface="Arial"/>
-              </a:rPr>
-              <a:t>не вошли в итоговый набор</a:t>
-            </a:r>
-            <a:endParaRPr sz="1900" i="0">
+            <a:endParaRPr sz="1800" i="0">
               <a:solidFill>
                 <a:srgbClr val="595959"/>
               </a:solidFill>
@@ -17479,16 +16676,16 @@
               <a:buNone/>
             </a:pPr>
             <a:r>
-              <a:rPr lang="ru-RU" sz="1600" i="0">
+              <a:rPr lang="ru-RU" sz="1500" i="0">
                 <a:solidFill>
                   <a:srgbClr val="262626"/>
                 </a:solidFill>
                 <a:latin typeface="Arial" panose="020B0604020202020204" pitchFamily="34" charset="0"/>
                 <a:cs typeface="Arial"/>
               </a:rPr>
-              <a:t>происхождение, группы, партии и часть единиц не описаны</a:t>
+              <a:t>происхождение строк, группы, партии и часть единиц не описаны</a:t>
             </a:r>
-            <a:endParaRPr sz="1600" i="0">
+            <a:endParaRPr sz="1500" i="0">
               <a:solidFill>
                 <a:srgbClr val="262626"/>
               </a:solidFill>
@@ -17522,16 +16719,16 @@
               <a:buNone/>
             </a:pPr>
             <a:r>
-              <a:rPr lang="ru-RU" sz="1600" b="0" i="0">
+              <a:rPr lang="ru-RU" sz="1300" i="0">
                 <a:solidFill>
                   <a:srgbClr val="595959"/>
                 </a:solidFill>
                 <a:latin typeface="Arial" panose="020B0604020202020204" pitchFamily="34" charset="0"/>
                 <a:cs typeface="Arial"/>
               </a:rPr>
-              <a:t>Источник: РПЗ, табл. 5; словарь данных репозитория</a:t>
+              <a:t>Источник: РПЗ, раздел 1.1 и таблица исходных данных; словарь данных репозитория</a:t>
             </a:r>
-            <a:endParaRPr sz="1600" b="0" i="0">
+            <a:endParaRPr sz="1300" i="0">
               <a:solidFill>
                 <a:srgbClr val="595959"/>
               </a:solidFill>
@@ -17573,13 +16770,11 @@
             </a:pPr>
             <a:fld id="{00000000-1234-1234-1234-123412341234}" type="slidenum">
               <a:rPr lang="ru-RU" smtClean="0">
-                <a:latin typeface="Arial" panose="020B0604020202020204" pitchFamily="34" charset="0"/>
                 <a:cs typeface="Arial"/>
               </a:rPr>
               <a:t>3</a:t>
             </a:fld>
             <a:endParaRPr lang="ru-RU" dirty="0">
-              <a:latin typeface="Arial" panose="020B0604020202020204" pitchFamily="34" charset="0"/>
               <a:cs typeface="Arial"/>
             </a:endParaRPr>
           </a:p>
@@ -17610,216 +16805,6 @@
           <a:chExt cx="0" cy="0"/>
         </a:xfrm>
       </p:grpSpPr>
-      <p:sp>
-        <p:nvSpPr>
-          <p:cNvPr id="2" name="Text Placeholder 1"/>
-          <p:cNvSpPr>
-            <a:spLocks noGrp="1"/>
-          </p:cNvSpPr>
-          <p:nvPr>
-            <p:ph type="body" idx="13"/>
-          </p:nvPr>
-        </p:nvSpPr>
-        <p:spPr>
-          <a:xfrm>
-            <a:off x="557784" y="1783080"/>
-            <a:ext cx="6309360" cy="4434840"/>
-          </a:xfrm>
-        </p:spPr>
-        <p:txBody>
-          <a:bodyPr>
-            <a:normAutofit/>
-          </a:bodyPr>
-          <a:lstStyle/>
-          <a:p>
-            <a:pPr marL="0" indent="0" algn="l">
-              <a:lnSpc>
-                <a:spcPct val="100000"/>
-              </a:lnSpc>
-              <a:spcBef>
-                <a:spcPts val="0"/>
-              </a:spcBef>
-              <a:buNone/>
-            </a:pPr>
-            <a:r>
-              <a:rPr lang="ru-RU" sz="1600" i="0">
-                <a:solidFill>
-                  <a:srgbClr val="065CAB"/>
-                </a:solidFill>
-                <a:cs typeface="Arial"/>
-              </a:rPr>
-              <a:t>Характеристики состава</a:t>
-            </a:r>
-          </a:p>
-          <a:p>
-            <a:pPr marL="0" indent="0" algn="l">
-              <a:lnSpc>
-                <a:spcPct val="100000"/>
-              </a:lnSpc>
-              <a:spcBef>
-                <a:spcPts val="0"/>
-              </a:spcBef>
-              <a:buNone/>
-            </a:pPr>
-            <a:r>
-              <a:rPr lang="ru-RU" sz="1600" i="0">
-                <a:solidFill>
-                  <a:srgbClr val="065CAB"/>
-                </a:solidFill>
-                <a:cs typeface="Arial"/>
-              </a:rPr>
-              <a:t>Соотношение матрица–наполнитель; плотность; модуль упругости; отвердитель; эпоксидные группы; температура вспышки</a:t>
-            </a:r>
-          </a:p>
-          <a:p>
-            <a:pPr marL="0" indent="0" algn="l">
-              <a:lnSpc>
-                <a:spcPct val="100000"/>
-              </a:lnSpc>
-              <a:spcBef>
-                <a:spcPts val="0"/>
-              </a:spcBef>
-              <a:buNone/>
-            </a:pPr>
-            <a:endParaRPr lang="ru-RU" sz="1600" i="0">
-              <a:solidFill>
-                <a:srgbClr val="065CAB"/>
-              </a:solidFill>
-              <a:cs typeface="Arial"/>
-            </a:endParaRPr>
-          </a:p>
-          <a:p>
-            <a:pPr marL="0" indent="0" algn="l">
-              <a:lnSpc>
-                <a:spcPct val="100000"/>
-              </a:lnSpc>
-              <a:spcBef>
-                <a:spcPts val="0"/>
-              </a:spcBef>
-              <a:buNone/>
-            </a:pPr>
-            <a:r>
-              <a:rPr lang="ru-RU" sz="1600" i="0">
-                <a:solidFill>
-                  <a:srgbClr val="065CAB"/>
-                </a:solidFill>
-                <a:cs typeface="Arial"/>
-              </a:rPr>
-              <a:t>Характеристики изготовления</a:t>
-            </a:r>
-          </a:p>
-          <a:p>
-            <a:pPr marL="0" indent="0" algn="l">
-              <a:lnSpc>
-                <a:spcPct val="100000"/>
-              </a:lnSpc>
-              <a:spcBef>
-                <a:spcPts val="0"/>
-              </a:spcBef>
-              <a:buNone/>
-            </a:pPr>
-            <a:r>
-              <a:rPr lang="ru-RU" sz="1600" i="0">
-                <a:solidFill>
-                  <a:srgbClr val="065CAB"/>
-                </a:solidFill>
-                <a:cs typeface="Arial"/>
-              </a:rPr>
-              <a:t>Поверхностная плотность; потребление смолы; угол, шаг и плотность нашивки</a:t>
-            </a:r>
-            <a:endParaRPr sz="1600" i="0">
-              <a:solidFill>
-                <a:srgbClr val="262626"/>
-              </a:solidFill>
-              <a:cs typeface="Arial"/>
-            </a:endParaRPr>
-          </a:p>
-        </p:txBody>
-      </p:sp>
-      <p:sp>
-        <p:nvSpPr>
-          <p:cNvPr id="3" name="Text Placeholder 2"/>
-          <p:cNvSpPr>
-            <a:spLocks noGrp="1"/>
-          </p:cNvSpPr>
-          <p:nvPr>
-            <p:ph type="body" idx="2"/>
-          </p:nvPr>
-        </p:nvSpPr>
-        <p:spPr>
-          <a:xfrm>
-            <a:off x="7269480" y="1280160"/>
-            <a:ext cx="4498848" cy="457200"/>
-          </a:xfrm>
-        </p:spPr>
-        <p:txBody>
-          <a:bodyPr/>
-          <a:lstStyle/>
-          <a:p>
-            <a:pPr marL="0" indent="0" algn="l">
-              <a:buNone/>
-            </a:pPr>
-            <a:r>
-              <a:rPr lang="ru-RU" sz="2000" b="1" i="0">
-                <a:solidFill>
-                  <a:srgbClr val="F1BE29"/>
-                </a:solidFill>
-                <a:cs typeface="Arial"/>
-              </a:rPr>
-              <a:t>Обучение, проверка и результат</a:t>
-            </a:r>
-            <a:endParaRPr sz="2000" b="1" i="0">
-              <a:solidFill>
-                <a:srgbClr val="F1BE29"/>
-              </a:solidFill>
-              <a:cs typeface="Arial"/>
-            </a:endParaRPr>
-          </a:p>
-        </p:txBody>
-      </p:sp>
-      <p:sp>
-        <p:nvSpPr>
-          <p:cNvPr id="4" name="Text Placeholder 3"/>
-          <p:cNvSpPr>
-            <a:spLocks noGrp="1"/>
-          </p:cNvSpPr>
-          <p:nvPr>
-            <p:ph type="body" idx="14"/>
-          </p:nvPr>
-        </p:nvSpPr>
-        <p:spPr>
-          <a:xfrm>
-            <a:off x="557784" y="1261872"/>
-            <a:ext cx="6400800" cy="457200"/>
-          </a:xfrm>
-        </p:spPr>
-        <p:txBody>
-          <a:bodyPr>
-            <a:normAutofit/>
-          </a:bodyPr>
-          <a:lstStyle/>
-          <a:p>
-            <a:pPr marL="0" indent="0" algn="l">
-              <a:buNone/>
-            </a:pPr>
-            <a:r>
-              <a:rPr lang="ru-RU" sz="1800" b="1" i="0">
-                <a:solidFill>
-                  <a:srgbClr val="F1BE29"/>
-                </a:solidFill>
-                <a:cs typeface="Arial"/>
-              </a:rPr>
-              <a:t>Вход прямых моделей: 11 характеристик</a:t>
-            </a:r>
-            <a:endParaRPr sz="1800" b="1" i="0">
-              <a:solidFill>
-                <a:srgbClr val="F1BE29"/>
-              </a:solidFill>
-              <a:cs typeface="Arial"/>
-            </a:endParaRPr>
-          </a:p>
-        </p:txBody>
-      </p:sp>
       <p:grpSp>
         <p:nvGrpSpPr>
           <p:cNvPr id="65" name="Заголовок слайда">
@@ -17898,7 +16883,7 @@
                   <a:latin typeface="Arial" panose="020B0604020202020204" pitchFamily="34" charset="0"/>
                   <a:cs typeface="Arial" pitchFamily="2" charset="0"/>
                 </a:rPr>
-                <a:t>Как модель получает прогноз</a:t>
+                <a:t>Восемь шагов от данных до приложения</a:t>
               </a:r>
               <a:endParaRPr lang="ru-RU" sz="2600" b="1" spc="0" dirty="0">
                 <a:solidFill>
@@ -18190,345 +17175,6 @@
       </p:grpSp>
       <p:sp>
         <p:nvSpPr>
-          <p:cNvPr id="71" name="Rectangle 70"/>
-          <p:cNvSpPr/>
-          <p:nvPr/>
-        </p:nvSpPr>
-        <p:spPr>
-          <a:xfrm>
-            <a:off x="7269480" y="1783080"/>
-            <a:ext cx="4498848" cy="1874519"/>
-          </a:xfrm>
-          <a:prstGeom prst="rect">
-            <a:avLst/>
-          </a:prstGeom>
-          <a:solidFill>
-            <a:srgbClr val="E3F0FD"/>
-          </a:solidFill>
-          <a:ln>
-            <a:noFill/>
-          </a:ln>
-        </p:spPr>
-        <p:txBody>
-          <a:bodyPr rtlCol="0" anchor="ctr"/>
-          <a:lstStyle/>
-          <a:p>
-            <a:pPr algn="ctr"/>
-            <a:endParaRPr/>
-          </a:p>
-        </p:txBody>
-      </p:sp>
-      <p:sp>
-        <p:nvSpPr>
-          <p:cNvPr id="72" name="TextBox 71"/>
-          <p:cNvSpPr txBox="1"/>
-          <p:nvPr/>
-        </p:nvSpPr>
-        <p:spPr>
-          <a:xfrm>
-            <a:off x="7452360" y="1874519"/>
-            <a:ext cx="4160520" cy="1737360"/>
-          </a:xfrm>
-          <a:prstGeom prst="rect">
-            <a:avLst/>
-          </a:prstGeom>
-          <a:noFill/>
-        </p:spPr>
-        <p:txBody>
-          <a:bodyPr wrap="square" lIns="0" tIns="0" rIns="0" bIns="0" anchor="t"/>
-          <a:lstStyle/>
-          <a:p>
-            <a:pPr marL="0" indent="0" algn="l">
-              <a:lnSpc>
-                <a:spcPct val="100000"/>
-              </a:lnSpc>
-              <a:buNone/>
-            </a:pPr>
-            <a:r>
-              <a:rPr lang="ru-RU" sz="1500" i="0">
-                <a:solidFill>
-                  <a:srgbClr val="595959"/>
-                </a:solidFill>
-                <a:latin typeface="Arial" panose="020B0604020202020204" pitchFamily="34" charset="0"/>
-                <a:cs typeface="Arial"/>
-              </a:rPr>
-              <a:t>Обучение и проверка</a:t>
-            </a:r>
-          </a:p>
-          <a:p>
-            <a:pPr marL="0" indent="0" algn="l">
-              <a:lnSpc>
-                <a:spcPct val="100000"/>
-              </a:lnSpc>
-              <a:buNone/>
-            </a:pPr>
-            <a:r>
-              <a:rPr lang="ru-RU" sz="1500" i="0">
-                <a:solidFill>
-                  <a:srgbClr val="595959"/>
-                </a:solidFill>
-                <a:latin typeface="Arial" panose="020B0604020202020204" pitchFamily="34" charset="0"/>
-                <a:cs typeface="Arial"/>
-              </a:rPr>
-              <a:t>716 строк – обучающая выборка</a:t>
-            </a:r>
-          </a:p>
-          <a:p>
-            <a:pPr marL="0" indent="0" algn="l">
-              <a:lnSpc>
-                <a:spcPct val="100000"/>
-              </a:lnSpc>
-              <a:buNone/>
-            </a:pPr>
-            <a:r>
-              <a:rPr lang="ru-RU" sz="1500" i="0">
-                <a:solidFill>
-                  <a:srgbClr val="595959"/>
-                </a:solidFill>
-                <a:latin typeface="Arial" panose="020B0604020202020204" pitchFamily="34" charset="0"/>
-                <a:cs typeface="Arial"/>
-              </a:rPr>
-              <a:t>307 строк – независимая тестовая выборка</a:t>
-            </a:r>
-          </a:p>
-          <a:p>
-            <a:pPr marL="0" indent="0" algn="l">
-              <a:lnSpc>
-                <a:spcPct val="100000"/>
-              </a:lnSpc>
-              <a:buNone/>
-            </a:pPr>
-            <a:endParaRPr lang="ru-RU" sz="1500" i="0">
-              <a:solidFill>
-                <a:srgbClr val="595959"/>
-              </a:solidFill>
-              <a:latin typeface="Arial" panose="020B0604020202020204" pitchFamily="34" charset="0"/>
-              <a:cs typeface="Arial"/>
-            </a:endParaRPr>
-          </a:p>
-          <a:p>
-            <a:pPr marL="0" indent="0" algn="l">
-              <a:lnSpc>
-                <a:spcPct val="100000"/>
-              </a:lnSpc>
-              <a:buNone/>
-            </a:pPr>
-            <a:r>
-              <a:rPr lang="ru-RU" sz="1500" i="0">
-                <a:solidFill>
-                  <a:srgbClr val="595959"/>
-                </a:solidFill>
-                <a:latin typeface="Arial" panose="020B0604020202020204" pitchFamily="34" charset="0"/>
-                <a:cs typeface="Arial"/>
-              </a:rPr>
-              <a:t>Новый набор из 11 характеристик →</a:t>
-            </a:r>
-          </a:p>
-          <a:p>
-            <a:pPr marL="0" indent="0" algn="l">
-              <a:lnSpc>
-                <a:spcPct val="100000"/>
-              </a:lnSpc>
-              <a:buNone/>
-            </a:pPr>
-            <a:r>
-              <a:rPr lang="ru-RU" sz="1500" i="0">
-                <a:solidFill>
-                  <a:srgbClr val="595959"/>
-                </a:solidFill>
-                <a:latin typeface="Arial" panose="020B0604020202020204" pitchFamily="34" charset="0"/>
-                <a:cs typeface="Arial"/>
-              </a:rPr>
-              <a:t>две оценки: модуль, ГПа, и прочность, МПа</a:t>
-            </a:r>
-            <a:endParaRPr sz="1500" i="0">
-              <a:solidFill>
-                <a:srgbClr val="595959"/>
-              </a:solidFill>
-              <a:latin typeface="Arial" panose="020B0604020202020204" pitchFamily="34" charset="0"/>
-              <a:cs typeface="Arial"/>
-            </a:endParaRPr>
-          </a:p>
-        </p:txBody>
-      </p:sp>
-      <p:sp>
-        <p:nvSpPr>
-          <p:cNvPr id="73" name="Rectangle 72"/>
-          <p:cNvSpPr/>
-          <p:nvPr/>
-        </p:nvSpPr>
-        <p:spPr>
-          <a:xfrm>
-            <a:off x="7269480" y="3794760"/>
-            <a:ext cx="4498848" cy="1691640"/>
-          </a:xfrm>
-          <a:prstGeom prst="rect">
-            <a:avLst/>
-          </a:prstGeom>
-          <a:solidFill>
-            <a:srgbClr val="FDF3D4"/>
-          </a:solidFill>
-          <a:ln>
-            <a:noFill/>
-          </a:ln>
-        </p:spPr>
-        <p:txBody>
-          <a:bodyPr rtlCol="0" anchor="ctr"/>
-          <a:lstStyle/>
-          <a:p>
-            <a:pPr algn="ctr"/>
-            <a:endParaRPr/>
-          </a:p>
-        </p:txBody>
-      </p:sp>
-      <p:sp>
-        <p:nvSpPr>
-          <p:cNvPr id="74" name="TextBox 73"/>
-          <p:cNvSpPr txBox="1"/>
-          <p:nvPr/>
-        </p:nvSpPr>
-        <p:spPr>
-          <a:xfrm>
-            <a:off x="7452360" y="3858768"/>
-            <a:ext cx="4160520" cy="1600200"/>
-          </a:xfrm>
-          <a:prstGeom prst="rect">
-            <a:avLst/>
-          </a:prstGeom>
-          <a:noFill/>
-        </p:spPr>
-        <p:txBody>
-          <a:bodyPr wrap="square" lIns="0" tIns="0" rIns="0" bIns="0" anchor="t"/>
-          <a:lstStyle/>
-          <a:p>
-            <a:pPr marL="0" indent="0" algn="l">
-              <a:lnSpc>
-                <a:spcPct val="100000"/>
-              </a:lnSpc>
-              <a:buNone/>
-            </a:pPr>
-            <a:r>
-              <a:rPr lang="ru-RU" i="0">
-                <a:solidFill>
-                  <a:srgbClr val="595959"/>
-                </a:solidFill>
-                <a:latin typeface="Arial" panose="020B0604020202020204" pitchFamily="34" charset="0"/>
-                <a:cs typeface="Arial"/>
-              </a:rPr>
-              <a:t>Дополнительная задача</a:t>
-            </a:r>
-          </a:p>
-          <a:p>
-            <a:pPr marL="0" indent="0" algn="l">
-              <a:lnSpc>
-                <a:spcPct val="100000"/>
-              </a:lnSpc>
-              <a:buNone/>
-            </a:pPr>
-            <a:r>
-              <a:rPr lang="ru-RU" i="0">
-                <a:solidFill>
-                  <a:srgbClr val="595959"/>
-                </a:solidFill>
-                <a:latin typeface="Arial" panose="020B0604020202020204" pitchFamily="34" charset="0"/>
-                <a:cs typeface="Arial"/>
-              </a:rPr>
-              <a:t>12 известных показателей, включая известные модуль и прочность →</a:t>
-            </a:r>
-          </a:p>
-          <a:p>
-            <a:pPr marL="0" indent="0" algn="l">
-              <a:lnSpc>
-                <a:spcPct val="100000"/>
-              </a:lnSpc>
-              <a:buNone/>
-            </a:pPr>
-            <a:r>
-              <a:rPr lang="ru-RU" i="0">
-                <a:solidFill>
-                  <a:srgbClr val="595959"/>
-                </a:solidFill>
-                <a:latin typeface="Arial" panose="020B0604020202020204" pitchFamily="34" charset="0"/>
-                <a:cs typeface="Arial"/>
-              </a:rPr>
-              <a:t>соотношение матрица–наполнитель</a:t>
-            </a:r>
-          </a:p>
-          <a:p>
-            <a:pPr marL="0" indent="0" algn="l">
-              <a:lnSpc>
-                <a:spcPct val="100000"/>
-              </a:lnSpc>
-              <a:buNone/>
-            </a:pPr>
-            <a:r>
-              <a:rPr lang="ru-RU" i="0">
-                <a:solidFill>
-                  <a:srgbClr val="595959"/>
-                </a:solidFill>
-                <a:latin typeface="Arial" panose="020B0604020202020204" pitchFamily="34" charset="0"/>
-                <a:cs typeface="Arial"/>
-              </a:rPr>
-              <a:t>В приложение не включена</a:t>
-            </a:r>
-            <a:endParaRPr i="0">
-              <a:solidFill>
-                <a:srgbClr val="065CAB"/>
-              </a:solidFill>
-              <a:latin typeface="Arial" panose="020B0604020202020204" pitchFamily="34" charset="0"/>
-              <a:cs typeface="Arial"/>
-            </a:endParaRPr>
-          </a:p>
-        </p:txBody>
-      </p:sp>
-      <p:sp>
-        <p:nvSpPr>
-          <p:cNvPr id="75" name="TextBox 74"/>
-          <p:cNvSpPr txBox="1"/>
-          <p:nvPr/>
-        </p:nvSpPr>
-        <p:spPr>
-          <a:xfrm>
-            <a:off x="7269480" y="5577840"/>
-            <a:ext cx="4498848" cy="731520"/>
-          </a:xfrm>
-          <a:prstGeom prst="rect">
-            <a:avLst/>
-          </a:prstGeom>
-          <a:noFill/>
-        </p:spPr>
-        <p:txBody>
-          <a:bodyPr wrap="square" lIns="0" tIns="0" rIns="0" bIns="0" anchor="t"/>
-          <a:lstStyle/>
-          <a:p>
-            <a:pPr marL="0" indent="0" algn="l">
-              <a:lnSpc>
-                <a:spcPct val="100000"/>
-              </a:lnSpc>
-              <a:buNone/>
-            </a:pPr>
-            <a:r>
-              <a:rPr lang="ru-RU" sz="1000" b="1" i="0">
-                <a:solidFill>
-                  <a:srgbClr val="595959"/>
-                </a:solidFill>
-                <a:latin typeface="Arial" panose="020B0604020202020204" pitchFamily="34" charset="0"/>
-                <a:cs typeface="Arial"/>
-              </a:rPr>
-              <a:t>Конечные свойства исключены из 11 входов прямых моделей. Входной «модуль упругости» и целевой «модуль упругости при растяжении» – разные столбцы.</a:t>
-            </a:r>
-            <a:endParaRPr sz="1000" b="1" i="0">
-              <a:solidFill>
-                <a:srgbClr val="595959"/>
-              </a:solidFill>
-              <a:latin typeface="Arial" panose="020B0604020202020204" pitchFamily="34" charset="0"/>
-              <a:cs typeface="Arial"/>
-            </a:endParaRPr>
-          </a:p>
-        </p:txBody>
-      </p:sp>
-      <p:sp>
-        <p:nvSpPr>
           <p:cNvPr id="76" name="Источник"/>
           <p:cNvSpPr txBox="1"/>
           <p:nvPr/>
@@ -18551,16 +17197,16 @@
               <a:buNone/>
             </a:pPr>
             <a:r>
-              <a:rPr lang="ru-RU" sz="1600" b="0" i="0">
+              <a:rPr lang="ru-RU" sz="1300" i="0">
                 <a:solidFill>
                   <a:srgbClr val="595959"/>
                 </a:solidFill>
                 <a:latin typeface="Arial" panose="020B0604020202020204" pitchFamily="34" charset="0"/>
                 <a:cs typeface="Arial"/>
               </a:rPr>
-              <a:t>Источник: РПЗ, разд. 1.1; словарь данных репозитория</a:t>
+              <a:t>Источник: РПЗ, разделы 1.2 и 2.1–2.6</a:t>
             </a:r>
-            <a:endParaRPr sz="1600" b="0" i="0">
+            <a:endParaRPr sz="1300" i="0">
               <a:solidFill>
                 <a:srgbClr val="595959"/>
               </a:solidFill>
@@ -18602,14 +17248,693 @@
             </a:pPr>
             <a:fld id="{00000000-1234-1234-1234-123412341234}" type="slidenum">
               <a:rPr lang="ru-RU" smtClean="0">
-                <a:latin typeface="Arial" panose="020B0604020202020204" pitchFamily="34" charset="0"/>
                 <a:cs typeface="Arial"/>
               </a:rPr>
               <a:t>4</a:t>
             </a:fld>
             <a:endParaRPr lang="ru-RU" dirty="0">
+              <a:cs typeface="Arial"/>
+            </a:endParaRPr>
+          </a:p>
+        </p:txBody>
+      </p:sp>
+      <p:sp>
+        <p:nvSpPr>
+          <p:cNvPr id="7" name="Текст 6">
+            <a:extLst>
+              <a:ext uri="{FF2B5EF4-FFF2-40B4-BE49-F238E27FC236}">
+                <a16:creationId xmlns:a16="http://schemas.microsoft.com/office/drawing/2014/main" id="{C819DC7D-B729-474D-92A8-9E837866C3EF}"/>
+              </a:ext>
+            </a:extLst>
+          </p:cNvPr>
+          <p:cNvSpPr>
+            <a:spLocks noGrp="1"/>
+          </p:cNvSpPr>
+          <p:nvPr>
+            <p:ph type="body" idx="14"/>
+          </p:nvPr>
+        </p:nvSpPr>
+        <p:spPr/>
+        <p:txBody>
+          <a:bodyPr/>
+          <a:lstStyle/>
+          <a:p>
+            <a:endParaRPr lang="ru-RU"/>
+          </a:p>
+        </p:txBody>
+      </p:sp>
+      <p:sp>
+        <p:nvSpPr>
+          <p:cNvPr id="9" name="Текст 8">
+            <a:extLst>
+              <a:ext uri="{FF2B5EF4-FFF2-40B4-BE49-F238E27FC236}">
+                <a16:creationId xmlns:a16="http://schemas.microsoft.com/office/drawing/2014/main" id="{7ED6C69E-38D1-4DED-9DAC-27FB7BBABA46}"/>
+              </a:ext>
+            </a:extLst>
+          </p:cNvPr>
+          <p:cNvSpPr>
+            <a:spLocks noGrp="1"/>
+          </p:cNvSpPr>
+          <p:nvPr>
+            <p:ph type="body" idx="2"/>
+          </p:nvPr>
+        </p:nvSpPr>
+        <p:spPr/>
+        <p:txBody>
+          <a:bodyPr/>
+          <a:lstStyle/>
+          <a:p>
+            <a:endParaRPr lang="ru-RU"/>
+          </a:p>
+        </p:txBody>
+      </p:sp>
+      <p:sp>
+        <p:nvSpPr>
+          <p:cNvPr id="11" name="Текст 10">
+            <a:extLst>
+              <a:ext uri="{FF2B5EF4-FFF2-40B4-BE49-F238E27FC236}">
+                <a16:creationId xmlns:a16="http://schemas.microsoft.com/office/drawing/2014/main" id="{1C545EA9-F8A6-44B3-B6BB-7EAE56AE6AAB}"/>
+              </a:ext>
+            </a:extLst>
+          </p:cNvPr>
+          <p:cNvSpPr>
+            <a:spLocks noGrp="1"/>
+          </p:cNvSpPr>
+          <p:nvPr>
+            <p:ph type="body" idx="13"/>
+          </p:nvPr>
+        </p:nvSpPr>
+        <p:spPr/>
+        <p:txBody>
+          <a:bodyPr/>
+          <a:lstStyle/>
+          <a:p>
+            <a:endParaRPr lang="ru-RU"/>
+          </a:p>
+        </p:txBody>
+      </p:sp>
+      <p:sp>
+        <p:nvSpPr>
+          <p:cNvPr id="12" name="ProcessIntro">
+            <a:extLst>
+              <a:ext uri="{FF2B5EF4-FFF2-40B4-BE49-F238E27FC236}">
+                <a16:creationId xmlns:a16="http://schemas.microsoft.com/office/drawing/2014/main" id="{8796F32C-30B0-4E1B-B775-1653B260CC9C}"/>
+              </a:ext>
+            </a:extLst>
+          </p:cNvPr>
+          <p:cNvSpPr txBox="1"/>
+          <p:nvPr/>
+        </p:nvSpPr>
+        <p:spPr>
+          <a:xfrm>
+            <a:off x="558800" y="1295400"/>
+            <a:ext cx="11201400" cy="384721"/>
+          </a:xfrm>
+          <a:prstGeom prst="rect">
+            <a:avLst/>
+          </a:prstGeom>
+          <a:noFill/>
+        </p:spPr>
+        <p:txBody>
+          <a:bodyPr vert="horz" wrap="square" rtlCol="0" anchor="ctr">
+            <a:noAutofit/>
+          </a:bodyPr>
+          <a:lstStyle/>
+          <a:p>
+            <a:pPr algn="ctr"/>
+            <a:r>
+              <a:rPr lang="ru-RU" sz="1900" b="1">
+                <a:solidFill>
+                  <a:srgbClr val="0E5DAB"/>
+                </a:solidFill>
+                <a:latin typeface="Arial" panose="020B0604020202020204" pitchFamily="34" charset="0"/>
+              </a:rPr>
+              <a:t>Данные для итоговой проверки остаются закрытыми до шага 6</a:t>
+            </a:r>
+            <a:endParaRPr lang="ru-RU" sz="1900" b="1" dirty="0">
+              <a:solidFill>
+                <a:srgbClr val="0E5DAB"/>
+              </a:solidFill>
               <a:latin typeface="Arial" panose="020B0604020202020204" pitchFamily="34" charset="0"/>
-              <a:cs typeface="Arial"/>
+            </a:endParaRPr>
+          </a:p>
+        </p:txBody>
+      </p:sp>
+      <p:sp>
+        <p:nvSpPr>
+          <p:cNvPr id="13" name="Process1">
+            <a:extLst>
+              <a:ext uri="{FF2B5EF4-FFF2-40B4-BE49-F238E27FC236}">
+                <a16:creationId xmlns:a16="http://schemas.microsoft.com/office/drawing/2014/main" id="{4C13494F-FAA0-46F3-B922-7F3093C9E6A6}"/>
+              </a:ext>
+            </a:extLst>
+          </p:cNvPr>
+          <p:cNvSpPr/>
+          <p:nvPr/>
+        </p:nvSpPr>
+        <p:spPr>
+          <a:xfrm>
+            <a:off x="558800" y="2032000"/>
+            <a:ext cx="2603500" cy="1371600"/>
+          </a:xfrm>
+          <a:prstGeom prst="roundRect">
+            <a:avLst/>
+          </a:prstGeom>
+          <a:solidFill>
+            <a:srgbClr val="DCE9F6"/>
+          </a:solidFill>
+          <a:ln w="17780">
+            <a:solidFill>
+              <a:srgbClr val="0E5DAB"/>
+            </a:solidFill>
+          </a:ln>
+        </p:spPr>
+        <p:style>
+          <a:lnRef idx="2">
+            <a:schemeClr val="accent1">
+              <a:shade val="50000"/>
+            </a:schemeClr>
+          </a:lnRef>
+          <a:fillRef idx="1">
+            <a:schemeClr val="accent1"/>
+          </a:fillRef>
+          <a:effectRef idx="0">
+            <a:schemeClr val="accent1"/>
+          </a:effectRef>
+          <a:fontRef idx="minor">
+            <a:schemeClr val="lt1"/>
+          </a:fontRef>
+        </p:style>
+        <p:txBody>
+          <a:bodyPr wrap="square" lIns="101600" tIns="76200" rIns="101600" bIns="76200" rtlCol="0" anchor="ctr"/>
+          <a:lstStyle/>
+          <a:p>
+            <a:pPr algn="ctr"/>
+            <a:r>
+              <a:rPr lang="ru-RU" sz="1600" b="1">
+                <a:solidFill>
+                  <a:srgbClr val="262626"/>
+                </a:solidFill>
+                <a:latin typeface="Arial" panose="020B0604020202020204" pitchFamily="34" charset="0"/>
+              </a:rPr>
+              <a:t>1
+Проверить и
+объединить таблицы</a:t>
+            </a:r>
+          </a:p>
+        </p:txBody>
+      </p:sp>
+      <p:sp>
+        <p:nvSpPr>
+          <p:cNvPr id="14" name="Process2">
+            <a:extLst>
+              <a:ext uri="{FF2B5EF4-FFF2-40B4-BE49-F238E27FC236}">
+                <a16:creationId xmlns:a16="http://schemas.microsoft.com/office/drawing/2014/main" id="{D3A970E2-08DC-44ED-9F9F-394FFBE4B0EF}"/>
+              </a:ext>
+            </a:extLst>
+          </p:cNvPr>
+          <p:cNvSpPr/>
+          <p:nvPr/>
+        </p:nvSpPr>
+        <p:spPr>
+          <a:xfrm>
+            <a:off x="3378200" y="2032000"/>
+            <a:ext cx="2603500" cy="1371600"/>
+          </a:xfrm>
+          <a:prstGeom prst="roundRect">
+            <a:avLst/>
+          </a:prstGeom>
+          <a:solidFill>
+            <a:srgbClr val="DCE9F6"/>
+          </a:solidFill>
+          <a:ln w="17780">
+            <a:solidFill>
+              <a:srgbClr val="0E5DAB"/>
+            </a:solidFill>
+          </a:ln>
+        </p:spPr>
+        <p:style>
+          <a:lnRef idx="2">
+            <a:schemeClr val="accent1">
+              <a:shade val="50000"/>
+            </a:schemeClr>
+          </a:lnRef>
+          <a:fillRef idx="1">
+            <a:schemeClr val="accent1"/>
+          </a:fillRef>
+          <a:effectRef idx="0">
+            <a:schemeClr val="accent1"/>
+          </a:effectRef>
+          <a:fontRef idx="minor">
+            <a:schemeClr val="lt1"/>
+          </a:fontRef>
+        </p:style>
+        <p:txBody>
+          <a:bodyPr wrap="square" lIns="101600" tIns="76200" rIns="101600" bIns="76200" rtlCol="0" anchor="ctr"/>
+          <a:lstStyle/>
+          <a:p>
+            <a:pPr algn="ctr"/>
+            <a:r>
+              <a:rPr lang="ru-RU" sz="1600">
+                <a:solidFill>
+                  <a:srgbClr val="262626"/>
+                </a:solidFill>
+                <a:latin typeface="Arial" panose="020B0604020202020204" pitchFamily="34" charset="0"/>
+              </a:rPr>
+              <a:t>2
+Отделить 716 строк
+и 307 строк</a:t>
+            </a:r>
+          </a:p>
+        </p:txBody>
+      </p:sp>
+      <p:sp>
+        <p:nvSpPr>
+          <p:cNvPr id="15" name="Process3">
+            <a:extLst>
+              <a:ext uri="{FF2B5EF4-FFF2-40B4-BE49-F238E27FC236}">
+                <a16:creationId xmlns:a16="http://schemas.microsoft.com/office/drawing/2014/main" id="{25C0BE1A-DBC6-4BA3-9B9B-FD59268F3008}"/>
+              </a:ext>
+            </a:extLst>
+          </p:cNvPr>
+          <p:cNvSpPr/>
+          <p:nvPr/>
+        </p:nvSpPr>
+        <p:spPr>
+          <a:xfrm>
+            <a:off x="6197600" y="2032000"/>
+            <a:ext cx="2603500" cy="1371600"/>
+          </a:xfrm>
+          <a:prstGeom prst="roundRect">
+            <a:avLst/>
+          </a:prstGeom>
+          <a:solidFill>
+            <a:srgbClr val="DCE9F6"/>
+          </a:solidFill>
+          <a:ln w="17780">
+            <a:solidFill>
+              <a:srgbClr val="0E5DAB"/>
+            </a:solidFill>
+          </a:ln>
+        </p:spPr>
+        <p:style>
+          <a:lnRef idx="2">
+            <a:schemeClr val="accent1">
+              <a:shade val="50000"/>
+            </a:schemeClr>
+          </a:lnRef>
+          <a:fillRef idx="1">
+            <a:schemeClr val="accent1"/>
+          </a:fillRef>
+          <a:effectRef idx="0">
+            <a:schemeClr val="accent1"/>
+          </a:effectRef>
+          <a:fontRef idx="minor">
+            <a:schemeClr val="lt1"/>
+          </a:fontRef>
+        </p:style>
+        <p:txBody>
+          <a:bodyPr wrap="square" lIns="101600" tIns="76200" rIns="101600" bIns="76200" rtlCol="0" anchor="ctr"/>
+          <a:lstStyle/>
+          <a:p>
+            <a:pPr algn="ctr"/>
+            <a:r>
+              <a:rPr lang="ru-RU" sz="1600">
+                <a:solidFill>
+                  <a:srgbClr val="262626"/>
+                </a:solidFill>
+                <a:latin typeface="Arial" panose="020B0604020202020204" pitchFamily="34" charset="0"/>
+              </a:rPr>
+              <a:t>3
+Изучить только
+716 строк</a:t>
+            </a:r>
+          </a:p>
+        </p:txBody>
+      </p:sp>
+      <p:sp>
+        <p:nvSpPr>
+          <p:cNvPr id="16" name="Process4">
+            <a:extLst>
+              <a:ext uri="{FF2B5EF4-FFF2-40B4-BE49-F238E27FC236}">
+                <a16:creationId xmlns:a16="http://schemas.microsoft.com/office/drawing/2014/main" id="{E001220A-E470-4476-BC6F-0999163BF7A6}"/>
+              </a:ext>
+            </a:extLst>
+          </p:cNvPr>
+          <p:cNvSpPr/>
+          <p:nvPr/>
+        </p:nvSpPr>
+        <p:spPr>
+          <a:xfrm>
+            <a:off x="9017000" y="2032000"/>
+            <a:ext cx="2603500" cy="1371600"/>
+          </a:xfrm>
+          <a:prstGeom prst="roundRect">
+            <a:avLst/>
+          </a:prstGeom>
+          <a:solidFill>
+            <a:srgbClr val="DCE9F6"/>
+          </a:solidFill>
+          <a:ln w="17780">
+            <a:solidFill>
+              <a:srgbClr val="0E5DAB"/>
+            </a:solidFill>
+          </a:ln>
+        </p:spPr>
+        <p:style>
+          <a:lnRef idx="2">
+            <a:schemeClr val="accent1">
+              <a:shade val="50000"/>
+            </a:schemeClr>
+          </a:lnRef>
+          <a:fillRef idx="1">
+            <a:schemeClr val="accent1"/>
+          </a:fillRef>
+          <a:effectRef idx="0">
+            <a:schemeClr val="accent1"/>
+          </a:effectRef>
+          <a:fontRef idx="minor">
+            <a:schemeClr val="lt1"/>
+          </a:fontRef>
+        </p:style>
+        <p:txBody>
+          <a:bodyPr wrap="square" lIns="101600" tIns="76200" rIns="101600" bIns="76200" rtlCol="0" anchor="ctr"/>
+          <a:lstStyle/>
+          <a:p>
+            <a:pPr algn="ctr"/>
+            <a:r>
+              <a:rPr lang="ru-RU" sz="1600">
+                <a:solidFill>
+                  <a:srgbClr val="262626"/>
+                </a:solidFill>
+                <a:latin typeface="Arial" panose="020B0604020202020204" pitchFamily="34" charset="0"/>
+              </a:rPr>
+              <a:t>4
+Подготовить
+характеристики</a:t>
+            </a:r>
+          </a:p>
+        </p:txBody>
+      </p:sp>
+      <p:sp>
+        <p:nvSpPr>
+          <p:cNvPr id="17" name="Process5">
+            <a:extLst>
+              <a:ext uri="{FF2B5EF4-FFF2-40B4-BE49-F238E27FC236}">
+                <a16:creationId xmlns:a16="http://schemas.microsoft.com/office/drawing/2014/main" id="{FA320182-BCF9-49A2-8556-C8AA640F7C3A}"/>
+              </a:ext>
+            </a:extLst>
+          </p:cNvPr>
+          <p:cNvSpPr/>
+          <p:nvPr/>
+        </p:nvSpPr>
+        <p:spPr>
+          <a:xfrm>
+            <a:off x="558800" y="4000500"/>
+            <a:ext cx="2603500" cy="1371600"/>
+          </a:xfrm>
+          <a:prstGeom prst="roundRect">
+            <a:avLst/>
+          </a:prstGeom>
+          <a:solidFill>
+            <a:srgbClr val="DCE9F6"/>
+          </a:solidFill>
+          <a:ln w="17780">
+            <a:solidFill>
+              <a:srgbClr val="0E5DAB"/>
+            </a:solidFill>
+          </a:ln>
+        </p:spPr>
+        <p:style>
+          <a:lnRef idx="2">
+            <a:schemeClr val="accent1">
+              <a:shade val="50000"/>
+            </a:schemeClr>
+          </a:lnRef>
+          <a:fillRef idx="1">
+            <a:schemeClr val="accent1"/>
+          </a:fillRef>
+          <a:effectRef idx="0">
+            <a:schemeClr val="accent1"/>
+          </a:effectRef>
+          <a:fontRef idx="minor">
+            <a:schemeClr val="lt1"/>
+          </a:fontRef>
+        </p:style>
+        <p:txBody>
+          <a:bodyPr wrap="square" lIns="101600" tIns="76200" rIns="101600" bIns="76200" rtlCol="0" anchor="ctr"/>
+          <a:lstStyle/>
+          <a:p>
+            <a:pPr algn="ctr"/>
+            <a:r>
+              <a:rPr lang="ru-RU" sz="1600">
+                <a:solidFill>
+                  <a:srgbClr val="262626"/>
+                </a:solidFill>
+                <a:latin typeface="Arial" panose="020B0604020202020204" pitchFamily="34" charset="0"/>
+              </a:rPr>
+              <a:t>5
+Обучить и сравнить
+в 10 проверках</a:t>
+            </a:r>
+          </a:p>
+        </p:txBody>
+      </p:sp>
+      <p:sp>
+        <p:nvSpPr>
+          <p:cNvPr id="18" name="Process6">
+            <a:extLst>
+              <a:ext uri="{FF2B5EF4-FFF2-40B4-BE49-F238E27FC236}">
+                <a16:creationId xmlns:a16="http://schemas.microsoft.com/office/drawing/2014/main" id="{1DF37619-33D8-45D2-9FD1-C14CB44F3EF3}"/>
+              </a:ext>
+            </a:extLst>
+          </p:cNvPr>
+          <p:cNvSpPr/>
+          <p:nvPr/>
+        </p:nvSpPr>
+        <p:spPr>
+          <a:xfrm>
+            <a:off x="3378200" y="4000500"/>
+            <a:ext cx="2603500" cy="1371600"/>
+          </a:xfrm>
+          <a:prstGeom prst="roundRect">
+            <a:avLst/>
+          </a:prstGeom>
+          <a:solidFill>
+            <a:srgbClr val="FFC000"/>
+          </a:solidFill>
+          <a:ln w="17780">
+            <a:solidFill>
+              <a:srgbClr val="0E5DAB"/>
+            </a:solidFill>
+          </a:ln>
+        </p:spPr>
+        <p:style>
+          <a:lnRef idx="2">
+            <a:schemeClr val="accent1">
+              <a:shade val="50000"/>
+            </a:schemeClr>
+          </a:lnRef>
+          <a:fillRef idx="1">
+            <a:schemeClr val="accent1"/>
+          </a:fillRef>
+          <a:effectRef idx="0">
+            <a:schemeClr val="accent1"/>
+          </a:effectRef>
+          <a:fontRef idx="minor">
+            <a:schemeClr val="lt1"/>
+          </a:fontRef>
+        </p:style>
+        <p:txBody>
+          <a:bodyPr wrap="square" lIns="101600" tIns="76200" rIns="101600" bIns="76200" rtlCol="0" anchor="ctr"/>
+          <a:lstStyle/>
+          <a:p>
+            <a:pPr algn="ctr"/>
+            <a:r>
+              <a:rPr lang="ru-RU" sz="1600" b="1">
+                <a:solidFill>
+                  <a:srgbClr val="262626"/>
+                </a:solidFill>
+                <a:latin typeface="Arial" panose="020B0604020202020204" pitchFamily="34" charset="0"/>
+              </a:rPr>
+              <a:t>6
+Один раз проверить
+на 307 строках</a:t>
+            </a:r>
+          </a:p>
+        </p:txBody>
+      </p:sp>
+      <p:sp>
+        <p:nvSpPr>
+          <p:cNvPr id="19" name="Process7">
+            <a:extLst>
+              <a:ext uri="{FF2B5EF4-FFF2-40B4-BE49-F238E27FC236}">
+                <a16:creationId xmlns:a16="http://schemas.microsoft.com/office/drawing/2014/main" id="{903C70EA-E48E-49EA-AAA2-F57790FC4CD0}"/>
+              </a:ext>
+            </a:extLst>
+          </p:cNvPr>
+          <p:cNvSpPr/>
+          <p:nvPr/>
+        </p:nvSpPr>
+        <p:spPr>
+          <a:xfrm>
+            <a:off x="6197600" y="4000500"/>
+            <a:ext cx="2603500" cy="1371600"/>
+          </a:xfrm>
+          <a:prstGeom prst="roundRect">
+            <a:avLst/>
+          </a:prstGeom>
+          <a:solidFill>
+            <a:srgbClr val="DCE9F6"/>
+          </a:solidFill>
+          <a:ln w="17780">
+            <a:solidFill>
+              <a:srgbClr val="0E5DAB"/>
+            </a:solidFill>
+          </a:ln>
+        </p:spPr>
+        <p:style>
+          <a:lnRef idx="2">
+            <a:schemeClr val="accent1">
+              <a:shade val="50000"/>
+            </a:schemeClr>
+          </a:lnRef>
+          <a:fillRef idx="1">
+            <a:schemeClr val="accent1"/>
+          </a:fillRef>
+          <a:effectRef idx="0">
+            <a:schemeClr val="accent1"/>
+          </a:effectRef>
+          <a:fontRef idx="minor">
+            <a:schemeClr val="lt1"/>
+          </a:fontRef>
+        </p:style>
+        <p:txBody>
+          <a:bodyPr wrap="square" lIns="101600" tIns="76200" rIns="101600" bIns="76200" rtlCol="0" anchor="ctr"/>
+          <a:lstStyle/>
+          <a:p>
+            <a:pPr algn="ctr"/>
+            <a:r>
+              <a:rPr lang="ru-RU" sz="1600">
+                <a:solidFill>
+                  <a:srgbClr val="262626"/>
+                </a:solidFill>
+                <a:latin typeface="Arial" panose="020B0604020202020204" pitchFamily="34" charset="0"/>
+              </a:rPr>
+              <a:t>7
+Подключить модели
+к приложению</a:t>
+            </a:r>
+          </a:p>
+        </p:txBody>
+      </p:sp>
+      <p:sp>
+        <p:nvSpPr>
+          <p:cNvPr id="20" name="Process8">
+            <a:extLst>
+              <a:ext uri="{FF2B5EF4-FFF2-40B4-BE49-F238E27FC236}">
+                <a16:creationId xmlns:a16="http://schemas.microsoft.com/office/drawing/2014/main" id="{8E16E5D7-7AF5-4208-B9C0-76C0B38AA343}"/>
+              </a:ext>
+            </a:extLst>
+          </p:cNvPr>
+          <p:cNvSpPr/>
+          <p:nvPr/>
+        </p:nvSpPr>
+        <p:spPr>
+          <a:xfrm>
+            <a:off x="9017000" y="4000500"/>
+            <a:ext cx="2603500" cy="1371600"/>
+          </a:xfrm>
+          <a:prstGeom prst="roundRect">
+            <a:avLst/>
+          </a:prstGeom>
+          <a:solidFill>
+            <a:srgbClr val="DCE9F6"/>
+          </a:solidFill>
+          <a:ln w="17780">
+            <a:solidFill>
+              <a:srgbClr val="0E5DAB"/>
+            </a:solidFill>
+          </a:ln>
+        </p:spPr>
+        <p:style>
+          <a:lnRef idx="2">
+            <a:schemeClr val="accent1">
+              <a:shade val="50000"/>
+            </a:schemeClr>
+          </a:lnRef>
+          <a:fillRef idx="1">
+            <a:schemeClr val="accent1"/>
+          </a:fillRef>
+          <a:effectRef idx="0">
+            <a:schemeClr val="accent1"/>
+          </a:effectRef>
+          <a:fontRef idx="minor">
+            <a:schemeClr val="lt1"/>
+          </a:fontRef>
+        </p:style>
+        <p:txBody>
+          <a:bodyPr wrap="square" lIns="101600" tIns="76200" rIns="101600" bIns="76200" rtlCol="0" anchor="ctr"/>
+          <a:lstStyle/>
+          <a:p>
+            <a:pPr algn="ctr"/>
+            <a:r>
+              <a:rPr lang="ru-RU" sz="1600">
+                <a:solidFill>
+                  <a:srgbClr val="262626"/>
+                </a:solidFill>
+                <a:latin typeface="Arial" panose="020B0604020202020204" pitchFamily="34" charset="0"/>
+              </a:rPr>
+              <a:t>8
+Сохранить результат
+в репозитории</a:t>
+            </a:r>
+          </a:p>
+        </p:txBody>
+      </p:sp>
+      <p:sp>
+        <p:nvSpPr>
+          <p:cNvPr id="21" name="ProcessFooter">
+            <a:extLst>
+              <a:ext uri="{FF2B5EF4-FFF2-40B4-BE49-F238E27FC236}">
+                <a16:creationId xmlns:a16="http://schemas.microsoft.com/office/drawing/2014/main" id="{AE311003-0165-43C4-8985-3F767A45A252}"/>
+              </a:ext>
+            </a:extLst>
+          </p:cNvPr>
+          <p:cNvSpPr txBox="1"/>
+          <p:nvPr/>
+        </p:nvSpPr>
+        <p:spPr>
+          <a:xfrm>
+            <a:off x="558800" y="5613400"/>
+            <a:ext cx="11201400" cy="338554"/>
+          </a:xfrm>
+          <a:prstGeom prst="rect">
+            <a:avLst/>
+          </a:prstGeom>
+          <a:noFill/>
+        </p:spPr>
+        <p:txBody>
+          <a:bodyPr vert="horz" wrap="square" rtlCol="0" anchor="ctr">
+            <a:noAutofit/>
+          </a:bodyPr>
+          <a:lstStyle/>
+          <a:p>
+            <a:pPr algn="ctr"/>
+            <a:r>
+              <a:rPr lang="ru-RU" sz="1600">
+                <a:solidFill>
+                  <a:srgbClr val="262626"/>
+                </a:solidFill>
+                <a:latin typeface="Arial" panose="020B0604020202020204" pitchFamily="34" charset="0"/>
+              </a:rPr>
+              <a:t>Сначала формируется честная проверка, затем выбираются методы и только после этого оценивается результат</a:t>
+            </a:r>
+            <a:endParaRPr lang="ru-RU" sz="1600" dirty="0">
+              <a:solidFill>
+                <a:srgbClr val="262626"/>
+              </a:solidFill>
+              <a:latin typeface="Arial" panose="020B0604020202020204" pitchFamily="34" charset="0"/>
             </a:endParaRPr>
           </a:p>
         </p:txBody>
@@ -18717,7 +18042,7 @@
                   <a:latin typeface="Arial" panose="020B0604020202020204" pitchFamily="34" charset="0"/>
                   <a:cs typeface="Arial" pitchFamily="2" charset="0"/>
                 </a:rPr>
-                <a:t>Методы машинного обучения</a:t>
+                <a:t>Данные для обучения и итоговой проверки</a:t>
               </a:r>
               <a:endParaRPr lang="ru-RU" sz="2600" b="1" spc="0" dirty="0">
                 <a:solidFill>
@@ -19009,898 +18334,6 @@
       </p:grpSp>
       <p:sp>
         <p:nvSpPr>
-          <p:cNvPr id="71" name="TextBox 70"/>
-          <p:cNvSpPr txBox="1"/>
-          <p:nvPr/>
-        </p:nvSpPr>
-        <p:spPr>
-          <a:xfrm>
-            <a:off x="557784" y="1481328"/>
-            <a:ext cx="7315200" cy="731520"/>
-          </a:xfrm>
-          <a:prstGeom prst="rect">
-            <a:avLst/>
-          </a:prstGeom>
-          <a:noFill/>
-        </p:spPr>
-        <p:txBody>
-          <a:bodyPr wrap="square" lIns="0" tIns="0" rIns="0" bIns="0" anchor="t"/>
-          <a:lstStyle/>
-          <a:p>
-            <a:pPr marL="0" indent="0" algn="l">
-              <a:lnSpc>
-                <a:spcPct val="100000"/>
-              </a:lnSpc>
-              <a:buNone/>
-            </a:pPr>
-            <a:r>
-              <a:rPr lang="ru-RU" sz="1900" b="1" i="0">
-                <a:solidFill>
-                  <a:srgbClr val="F1BE29"/>
-                </a:solidFill>
-                <a:latin typeface="Arial" panose="020B0604020202020204" pitchFamily="34" charset="0"/>
-                <a:cs typeface="Arial"/>
-              </a:rPr>
-              <a:t>Пять подходов сравнивались на одинаковых данных</a:t>
-            </a:r>
-            <a:endParaRPr sz="1900" b="1" i="0">
-              <a:solidFill>
-                <a:srgbClr val="F1BE29"/>
-              </a:solidFill>
-              <a:latin typeface="Arial" panose="020B0604020202020204" pitchFamily="34" charset="0"/>
-              <a:cs typeface="Arial"/>
-            </a:endParaRPr>
-          </a:p>
-        </p:txBody>
-      </p:sp>
-      <p:graphicFrame>
-        <p:nvGraphicFramePr>
-          <p:cNvPr id="72" name="CV RMSE"/>
-          <p:cNvGraphicFramePr>
-            <a:graphicFrameLocks noGrp="1"/>
-          </p:cNvGraphicFramePr>
-          <p:nvPr>
-            <p:extLst>
-              <p:ext uri="{D42A27DB-BD31-4B8C-83A1-F6EECF244321}">
-                <p14:modId xmlns:p14="http://schemas.microsoft.com/office/powerpoint/2010/main" val="2156917715"/>
-              </p:ext>
-            </p:extLst>
-          </p:nvPr>
-        </p:nvGraphicFramePr>
-        <p:xfrm>
-          <a:off x="557784" y="2286000"/>
-          <a:ext cx="7315200" cy="3291840"/>
-        </p:xfrm>
-        <a:graphic>
-          <a:graphicData uri="http://schemas.openxmlformats.org/drawingml/2006/table">
-            <a:tbl>
-              <a:tblPr>
-                <a:tableStyleId>{2D5ABB26-0587-4C30-8999-92F81FD0307C}</a:tableStyleId>
-              </a:tblPr>
-              <a:tblGrid>
-                <a:gridCol w="1609344">
-                  <a:extLst>
-                    <a:ext uri="{9D8B030D-6E8A-4147-A177-3AD203B41FA5}">
-                      <a16:colId xmlns:a16="http://schemas.microsoft.com/office/drawing/2014/main" val="20000"/>
-                    </a:ext>
-                  </a:extLst>
-                </a:gridCol>
-                <a:gridCol w="3877056">
-                  <a:extLst>
-                    <a:ext uri="{9D8B030D-6E8A-4147-A177-3AD203B41FA5}">
-                      <a16:colId xmlns:a16="http://schemas.microsoft.com/office/drawing/2014/main" val="20001"/>
-                    </a:ext>
-                  </a:extLst>
-                </a:gridCol>
-                <a:gridCol w="1828800">
-                  <a:extLst>
-                    <a:ext uri="{9D8B030D-6E8A-4147-A177-3AD203B41FA5}">
-                      <a16:colId xmlns:a16="http://schemas.microsoft.com/office/drawing/2014/main" val="20002"/>
-                    </a:ext>
-                  </a:extLst>
-                </a:gridCol>
-              </a:tblGrid>
-              <a:tr h="548640">
-                <a:tc>
-                  <a:txBody>
-                    <a:bodyPr/>
-                    <a:lstStyle/>
-                    <a:p>
-                      <a:pPr marL="0" indent="0" algn="l">
-                        <a:buNone/>
-                      </a:pPr>
-                      <a:r>
-                        <a:rPr lang="ru-RU" sz="1500" b="1" i="0">
-                          <a:solidFill>
-                            <a:srgbClr val="FFFFFF"/>
-                          </a:solidFill>
-                          <a:latin typeface="Arial" panose="020B0604020202020204" pitchFamily="34" charset="0"/>
-                          <a:cs typeface="Arial"/>
-                        </a:rPr>
-                        <a:t>Модель</a:t>
-                      </a:r>
-                      <a:endParaRPr sz="1500" b="1" i="0">
-                        <a:solidFill>
-                          <a:srgbClr val="FFFFFF"/>
-                        </a:solidFill>
-                        <a:latin typeface="Arial" panose="020B0604020202020204" pitchFamily="34" charset="0"/>
-                        <a:cs typeface="Arial"/>
-                      </a:endParaRPr>
-                    </a:p>
-                  </a:txBody>
-                  <a:tcPr marT="27432" marB="27432" anchor="ctr">
-                    <a:lnL w="0">
-                      <a:noFill/>
-                    </a:lnL>
-                    <a:lnR w="0">
-                      <a:noFill/>
-                    </a:lnR>
-                    <a:lnT w="0">
-                      <a:noFill/>
-                    </a:lnT>
-                    <a:lnB w="19050">
-                      <a:solidFill>
-                        <a:srgbClr val="065CAB"/>
-                      </a:solidFill>
-                    </a:lnB>
-                    <a:solidFill>
-                      <a:srgbClr val="065CAB"/>
-                    </a:solidFill>
-                  </a:tcPr>
-                </a:tc>
-                <a:tc>
-                  <a:txBody>
-                    <a:bodyPr/>
-                    <a:lstStyle/>
-                    <a:p>
-                      <a:pPr marL="0" indent="0" algn="r">
-                        <a:buNone/>
-                      </a:pPr>
-                      <a:r>
-                        <a:rPr lang="ru-RU" sz="1500" b="1" i="0">
-                          <a:solidFill>
-                            <a:srgbClr val="FFFFFF"/>
-                          </a:solidFill>
-                          <a:latin typeface="Arial" panose="020B0604020202020204" pitchFamily="34" charset="0"/>
-                          <a:cs typeface="Arial"/>
-                        </a:rPr>
-                        <a:t>Принцип работы</a:t>
-                      </a:r>
-                      <a:endParaRPr sz="1500" b="1" i="0">
-                        <a:solidFill>
-                          <a:srgbClr val="FFFFFF"/>
-                        </a:solidFill>
-                        <a:latin typeface="Arial" panose="020B0604020202020204" pitchFamily="34" charset="0"/>
-                        <a:cs typeface="Arial"/>
-                      </a:endParaRPr>
-                    </a:p>
-                  </a:txBody>
-                  <a:tcPr marT="27432" marB="27432" anchor="ctr">
-                    <a:lnL w="0">
-                      <a:noFill/>
-                    </a:lnL>
-                    <a:lnR w="0">
-                      <a:noFill/>
-                    </a:lnR>
-                    <a:lnT w="0">
-                      <a:noFill/>
-                    </a:lnT>
-                    <a:lnB w="19050">
-                      <a:solidFill>
-                        <a:srgbClr val="065CAB"/>
-                      </a:solidFill>
-                    </a:lnB>
-                    <a:solidFill>
-                      <a:srgbClr val="065CAB"/>
-                    </a:solidFill>
-                  </a:tcPr>
-                </a:tc>
-                <a:tc>
-                  <a:txBody>
-                    <a:bodyPr/>
-                    <a:lstStyle/>
-                    <a:p>
-                      <a:pPr marL="0" indent="0" algn="r">
-                        <a:buNone/>
-                      </a:pPr>
-                      <a:r>
-                        <a:rPr lang="ru-RU" sz="1500" b="1" i="0">
-                          <a:solidFill>
-                            <a:srgbClr val="FFFFFF"/>
-                          </a:solidFill>
-                          <a:latin typeface="Arial" panose="020B0604020202020204" pitchFamily="34" charset="0"/>
-                          <a:cs typeface="Arial"/>
-                        </a:rPr>
-                        <a:t>Роль</a:t>
-                      </a:r>
-                      <a:endParaRPr sz="1500" b="1" i="0">
-                        <a:solidFill>
-                          <a:srgbClr val="FFFFFF"/>
-                        </a:solidFill>
-                        <a:latin typeface="Arial" panose="020B0604020202020204" pitchFamily="34" charset="0"/>
-                        <a:cs typeface="Arial"/>
-                      </a:endParaRPr>
-                    </a:p>
-                  </a:txBody>
-                  <a:tcPr marT="27432" marB="27432" anchor="ctr">
-                    <a:lnL w="0">
-                      <a:noFill/>
-                    </a:lnL>
-                    <a:lnR w="0">
-                      <a:noFill/>
-                    </a:lnR>
-                    <a:lnT w="0">
-                      <a:noFill/>
-                    </a:lnT>
-                    <a:lnB w="19050">
-                      <a:solidFill>
-                        <a:srgbClr val="065CAB"/>
-                      </a:solidFill>
-                    </a:lnB>
-                    <a:solidFill>
-                      <a:srgbClr val="065CAB"/>
-                    </a:solidFill>
-                  </a:tcPr>
-                </a:tc>
-                <a:extLst>
-                  <a:ext uri="{0D108BD9-81ED-4DB2-BD59-A6C34878D82A}">
-                    <a16:rowId xmlns:a16="http://schemas.microsoft.com/office/drawing/2014/main" val="10000"/>
-                  </a:ext>
-                </a:extLst>
-              </a:tr>
-              <a:tr h="548640">
-                <a:tc>
-                  <a:txBody>
-                    <a:bodyPr/>
-                    <a:lstStyle/>
-                    <a:p>
-                      <a:pPr marL="0" indent="0" algn="l">
-                        <a:buNone/>
-                      </a:pPr>
-                      <a:r>
-                        <a:rPr lang="ru-RU" sz="1400" b="0" i="0">
-                          <a:solidFill>
-                            <a:srgbClr val="262626"/>
-                          </a:solidFill>
-                          <a:latin typeface="Arial" panose="020B0604020202020204" pitchFamily="34" charset="0"/>
-                          <a:cs typeface="Arial"/>
-                        </a:rPr>
-                        <a:t>Прогноз среднего</a:t>
-                      </a:r>
-                      <a:endParaRPr sz="1400" b="0" i="0">
-                        <a:solidFill>
-                          <a:srgbClr val="262626"/>
-                        </a:solidFill>
-                        <a:latin typeface="Arial" panose="020B0604020202020204" pitchFamily="34" charset="0"/>
-                        <a:cs typeface="Arial"/>
-                      </a:endParaRPr>
-                    </a:p>
-                  </a:txBody>
-                  <a:tcPr marT="27432" marB="27432" anchor="ctr">
-                    <a:lnT w="19050" cap="flat" cmpd="sng" algn="ctr">
-                      <a:solidFill>
-                        <a:srgbClr val="065CAB"/>
-                      </a:solidFill>
-                      <a:prstDash val="solid"/>
-                      <a:round/>
-                      <a:headEnd type="none" w="med" len="med"/>
-                      <a:tailEnd type="none" w="med" len="med"/>
-                    </a:lnT>
-                    <a:noFill/>
-                  </a:tcPr>
-                </a:tc>
-                <a:tc>
-                  <a:txBody>
-                    <a:bodyPr/>
-                    <a:lstStyle/>
-                    <a:p>
-                      <a:pPr marL="0" indent="0" algn="r">
-                        <a:buNone/>
-                      </a:pPr>
-                      <a:r>
-                        <a:rPr lang="ru-RU" sz="1400" b="0" i="0">
-                          <a:solidFill>
-                            <a:srgbClr val="065CAB"/>
-                          </a:solidFill>
-                          <a:latin typeface="Arial" panose="020B0604020202020204" pitchFamily="34" charset="0"/>
-                          <a:cs typeface="Arial"/>
-                        </a:rPr>
-                        <a:t>Одно среднее обучающей выборки для всех строк</a:t>
-                      </a:r>
-                      <a:endParaRPr sz="1400" b="0" i="0">
-                        <a:solidFill>
-                          <a:srgbClr val="595959"/>
-                        </a:solidFill>
-                        <a:latin typeface="Arial" panose="020B0604020202020204" pitchFamily="34" charset="0"/>
-                        <a:cs typeface="Arial"/>
-                      </a:endParaRPr>
-                    </a:p>
-                  </a:txBody>
-                  <a:tcPr marT="27432" marB="27432" anchor="ctr">
-                    <a:lnT w="19050" cap="flat" cmpd="sng" algn="ctr">
-                      <a:solidFill>
-                        <a:srgbClr val="065CAB"/>
-                      </a:solidFill>
-                      <a:prstDash val="solid"/>
-                      <a:round/>
-                      <a:headEnd type="none" w="med" len="med"/>
-                      <a:tailEnd type="none" w="med" len="med"/>
-                    </a:lnT>
-                    <a:noFill/>
-                  </a:tcPr>
-                </a:tc>
-                <a:tc>
-                  <a:txBody>
-                    <a:bodyPr/>
-                    <a:lstStyle/>
-                    <a:p>
-                      <a:pPr marL="0" indent="0" algn="r">
-                        <a:buNone/>
-                      </a:pPr>
-                      <a:r>
-                        <a:rPr lang="ru-RU" sz="1400" b="0" i="0">
-                          <a:solidFill>
-                            <a:srgbClr val="262626"/>
-                          </a:solidFill>
-                          <a:latin typeface="Arial" panose="020B0604020202020204" pitchFamily="34" charset="0"/>
-                          <a:cs typeface="Arial"/>
-                        </a:rPr>
-                        <a:t>базовый ориентир</a:t>
-                      </a:r>
-                      <a:endParaRPr sz="1400" b="0" i="0">
-                        <a:solidFill>
-                          <a:srgbClr val="595959"/>
-                        </a:solidFill>
-                        <a:latin typeface="Arial" panose="020B0604020202020204" pitchFamily="34" charset="0"/>
-                        <a:cs typeface="Arial"/>
-                      </a:endParaRPr>
-                    </a:p>
-                  </a:txBody>
-                  <a:tcPr marT="27432" marB="27432" anchor="ctr">
-                    <a:lnT w="19050" cap="flat" cmpd="sng" algn="ctr">
-                      <a:solidFill>
-                        <a:srgbClr val="065CAB"/>
-                      </a:solidFill>
-                      <a:prstDash val="solid"/>
-                      <a:round/>
-                      <a:headEnd type="none" w="med" len="med"/>
-                      <a:tailEnd type="none" w="med" len="med"/>
-                    </a:lnT>
-                    <a:noFill/>
-                  </a:tcPr>
-                </a:tc>
-                <a:extLst>
-                  <a:ext uri="{0D108BD9-81ED-4DB2-BD59-A6C34878D82A}">
-                    <a16:rowId xmlns:a16="http://schemas.microsoft.com/office/drawing/2014/main" val="10001"/>
-                  </a:ext>
-                </a:extLst>
-              </a:tr>
-              <a:tr h="548640">
-                <a:tc>
-                  <a:txBody>
-                    <a:bodyPr/>
-                    <a:lstStyle/>
-                    <a:p>
-                      <a:pPr marL="0" indent="0" algn="l">
-                        <a:buNone/>
-                      </a:pPr>
-                      <a:r>
-                        <a:rPr lang="ru-RU" sz="1400" b="0" i="0">
-                          <a:solidFill>
-                            <a:srgbClr val="262626"/>
-                          </a:solidFill>
-                          <a:latin typeface="Arial" panose="020B0604020202020204" pitchFamily="34" charset="0"/>
-                          <a:cs typeface="Arial"/>
-                        </a:rPr>
-                        <a:t>Гребневая регрессия (</a:t>
-                      </a:r>
-                      <a:r>
-                        <a:rPr lang="en-US" sz="1400" b="0" i="0">
-                          <a:solidFill>
-                            <a:srgbClr val="262626"/>
-                          </a:solidFill>
-                          <a:latin typeface="Arial" panose="020B0604020202020204" pitchFamily="34" charset="0"/>
-                          <a:cs typeface="Arial"/>
-                        </a:rPr>
-                        <a:t>Ridge)</a:t>
-                      </a:r>
-                      <a:endParaRPr sz="1400" b="0" i="0">
-                        <a:solidFill>
-                          <a:srgbClr val="262626"/>
-                        </a:solidFill>
-                        <a:latin typeface="Arial" panose="020B0604020202020204" pitchFamily="34" charset="0"/>
-                        <a:cs typeface="Arial"/>
-                      </a:endParaRPr>
-                    </a:p>
-                  </a:txBody>
-                  <a:tcPr marT="27432" marB="27432" anchor="ctr">
-                    <a:noFill/>
-                  </a:tcPr>
-                </a:tc>
-                <a:tc>
-                  <a:txBody>
-                    <a:bodyPr/>
-                    <a:lstStyle/>
-                    <a:p>
-                      <a:pPr marL="0" indent="0" algn="r">
-                        <a:buNone/>
-                      </a:pPr>
-                      <a:r>
-                        <a:rPr lang="ru-RU" sz="1400" b="0" i="0">
-                          <a:solidFill>
-                            <a:srgbClr val="262626"/>
-                          </a:solidFill>
-                          <a:latin typeface="Arial" panose="020B0604020202020204" pitchFamily="34" charset="0"/>
-                          <a:cs typeface="Arial"/>
-                        </a:rPr>
-                        <a:t>Линейная модель со штрафом за большие коэффициенты</a:t>
-                      </a:r>
-                      <a:endParaRPr sz="1400" b="0" i="0">
-                        <a:solidFill>
-                          <a:srgbClr val="595959"/>
-                        </a:solidFill>
-                        <a:latin typeface="Arial" panose="020B0604020202020204" pitchFamily="34" charset="0"/>
-                        <a:cs typeface="Arial"/>
-                      </a:endParaRPr>
-                    </a:p>
-                  </a:txBody>
-                  <a:tcPr marT="27432" marB="27432" anchor="ctr">
-                    <a:noFill/>
-                  </a:tcPr>
-                </a:tc>
-                <a:tc>
-                  <a:txBody>
-                    <a:bodyPr/>
-                    <a:lstStyle/>
-                    <a:p>
-                      <a:pPr marL="0" indent="0" algn="r">
-                        <a:buNone/>
-                      </a:pPr>
-                      <a:r>
-                        <a:rPr lang="ru-RU" sz="1400" b="0" i="0">
-                          <a:solidFill>
-                            <a:srgbClr val="262626"/>
-                          </a:solidFill>
-                          <a:latin typeface="Arial" panose="020B0604020202020204" pitchFamily="34" charset="0"/>
-                          <a:cs typeface="Arial"/>
-                        </a:rPr>
-                        <a:t>кандидат</a:t>
-                      </a:r>
-                      <a:endParaRPr sz="1400" b="0" i="0">
-                        <a:solidFill>
-                          <a:srgbClr val="595959"/>
-                        </a:solidFill>
-                        <a:latin typeface="Arial" panose="020B0604020202020204" pitchFamily="34" charset="0"/>
-                        <a:cs typeface="Arial"/>
-                      </a:endParaRPr>
-                    </a:p>
-                  </a:txBody>
-                  <a:tcPr marT="27432" marB="27432" anchor="ctr">
-                    <a:noFill/>
-                  </a:tcPr>
-                </a:tc>
-                <a:extLst>
-                  <a:ext uri="{0D108BD9-81ED-4DB2-BD59-A6C34878D82A}">
-                    <a16:rowId xmlns:a16="http://schemas.microsoft.com/office/drawing/2014/main" val="10002"/>
-                  </a:ext>
-                </a:extLst>
-              </a:tr>
-              <a:tr h="548640">
-                <a:tc>
-                  <a:txBody>
-                    <a:bodyPr/>
-                    <a:lstStyle/>
-                    <a:p>
-                      <a:pPr marL="0" indent="0" algn="l">
-                        <a:buNone/>
-                      </a:pPr>
-                      <a:r>
-                        <a:rPr lang="ru-RU" sz="1400" b="0" i="0">
-                          <a:solidFill>
-                            <a:srgbClr val="262626"/>
-                          </a:solidFill>
-                          <a:latin typeface="Arial" panose="020B0604020202020204" pitchFamily="34" charset="0"/>
-                          <a:cs typeface="Arial"/>
-                        </a:rPr>
-                        <a:t>Случайный лес (</a:t>
-                      </a:r>
-                      <a:r>
-                        <a:rPr lang="en-US" sz="1400" b="0" i="0">
-                          <a:solidFill>
-                            <a:srgbClr val="262626"/>
-                          </a:solidFill>
-                          <a:latin typeface="Arial" panose="020B0604020202020204" pitchFamily="34" charset="0"/>
-                          <a:cs typeface="Arial"/>
-                        </a:rPr>
-                        <a:t>Random Forest)</a:t>
-                      </a:r>
-                      <a:endParaRPr sz="1400" b="0" i="0">
-                        <a:solidFill>
-                          <a:srgbClr val="262626"/>
-                        </a:solidFill>
-                        <a:latin typeface="Arial" panose="020B0604020202020204" pitchFamily="34" charset="0"/>
-                        <a:cs typeface="Arial"/>
-                      </a:endParaRPr>
-                    </a:p>
-                  </a:txBody>
-                  <a:tcPr marT="27432" marB="27432" anchor="ctr">
-                    <a:noFill/>
-                  </a:tcPr>
-                </a:tc>
-                <a:tc>
-                  <a:txBody>
-                    <a:bodyPr/>
-                    <a:lstStyle/>
-                    <a:p>
-                      <a:pPr marL="0" indent="0" algn="r">
-                        <a:buNone/>
-                      </a:pPr>
-                      <a:r>
-                        <a:rPr lang="ru-RU" sz="1400" b="0" i="0">
-                          <a:solidFill>
-                            <a:srgbClr val="262626"/>
-                          </a:solidFill>
-                          <a:latin typeface="Arial" panose="020B0604020202020204" pitchFamily="34" charset="0"/>
-                          <a:cs typeface="Arial"/>
-                        </a:rPr>
-                        <a:t>Много деревьев решений; ответы усредняются</a:t>
-                      </a:r>
-                      <a:endParaRPr sz="1400" b="0" i="0">
-                        <a:solidFill>
-                          <a:srgbClr val="595959"/>
-                        </a:solidFill>
-                        <a:latin typeface="Arial" panose="020B0604020202020204" pitchFamily="34" charset="0"/>
-                        <a:cs typeface="Arial"/>
-                      </a:endParaRPr>
-                    </a:p>
-                  </a:txBody>
-                  <a:tcPr marT="27432" marB="27432" anchor="ctr">
-                    <a:noFill/>
-                  </a:tcPr>
-                </a:tc>
-                <a:tc>
-                  <a:txBody>
-                    <a:bodyPr/>
-                    <a:lstStyle/>
-                    <a:p>
-                      <a:pPr marL="0" indent="0" algn="r">
-                        <a:buNone/>
-                      </a:pPr>
-                      <a:r>
-                        <a:rPr lang="ru-RU" sz="1400" b="0" i="0">
-                          <a:solidFill>
-                            <a:srgbClr val="262626"/>
-                          </a:solidFill>
-                          <a:latin typeface="Arial" panose="020B0604020202020204" pitchFamily="34" charset="0"/>
-                          <a:cs typeface="Arial"/>
-                        </a:rPr>
-                        <a:t>кандидат</a:t>
-                      </a:r>
-                      <a:endParaRPr sz="1400" b="0" i="0">
-                        <a:solidFill>
-                          <a:srgbClr val="595959"/>
-                        </a:solidFill>
-                        <a:latin typeface="Arial" panose="020B0604020202020204" pitchFamily="34" charset="0"/>
-                        <a:cs typeface="Arial"/>
-                      </a:endParaRPr>
-                    </a:p>
-                  </a:txBody>
-                  <a:tcPr marT="27432" marB="27432" anchor="ctr">
-                    <a:noFill/>
-                  </a:tcPr>
-                </a:tc>
-                <a:extLst>
-                  <a:ext uri="{0D108BD9-81ED-4DB2-BD59-A6C34878D82A}">
-                    <a16:rowId xmlns:a16="http://schemas.microsoft.com/office/drawing/2014/main" val="10003"/>
-                  </a:ext>
-                </a:extLst>
-              </a:tr>
-              <a:tr h="548640">
-                <a:tc>
-                  <a:txBody>
-                    <a:bodyPr/>
-                    <a:lstStyle/>
-                    <a:p>
-                      <a:pPr marL="0" indent="0" algn="l">
-                        <a:buNone/>
-                      </a:pPr>
-                      <a:r>
-                        <a:rPr lang="ru-RU" sz="1400" b="0" i="0">
-                          <a:solidFill>
-                            <a:srgbClr val="262626"/>
-                          </a:solidFill>
-                          <a:latin typeface="Arial" panose="020B0604020202020204" pitchFamily="34" charset="0"/>
-                          <a:cs typeface="Arial"/>
-                        </a:rPr>
-                        <a:t>Градиентный бустинг</a:t>
-                      </a:r>
-                      <a:endParaRPr sz="1400" b="0" i="0">
-                        <a:solidFill>
-                          <a:srgbClr val="262626"/>
-                        </a:solidFill>
-                        <a:latin typeface="Arial" panose="020B0604020202020204" pitchFamily="34" charset="0"/>
-                        <a:cs typeface="Arial"/>
-                      </a:endParaRPr>
-                    </a:p>
-                  </a:txBody>
-                  <a:tcPr marT="27432" marB="27432" anchor="ctr">
-                    <a:noFill/>
-                  </a:tcPr>
-                </a:tc>
-                <a:tc>
-                  <a:txBody>
-                    <a:bodyPr/>
-                    <a:lstStyle/>
-                    <a:p>
-                      <a:pPr marL="0" indent="0" algn="r">
-                        <a:buNone/>
-                      </a:pPr>
-                      <a:r>
-                        <a:rPr lang="ru-RU" sz="1400" b="0" i="0">
-                          <a:solidFill>
-                            <a:srgbClr val="262626"/>
-                          </a:solidFill>
-                          <a:latin typeface="Arial" panose="020B0604020202020204" pitchFamily="34" charset="0"/>
-                          <a:cs typeface="Arial"/>
-                        </a:rPr>
-                        <a:t>Деревья по очереди исправляют ошибки</a:t>
-                      </a:r>
-                      <a:endParaRPr sz="1400" b="0" i="0">
-                        <a:solidFill>
-                          <a:srgbClr val="595959"/>
-                        </a:solidFill>
-                        <a:latin typeface="Arial" panose="020B0604020202020204" pitchFamily="34" charset="0"/>
-                        <a:cs typeface="Arial"/>
-                      </a:endParaRPr>
-                    </a:p>
-                  </a:txBody>
-                  <a:tcPr marT="27432" marB="27432" anchor="ctr">
-                    <a:noFill/>
-                  </a:tcPr>
-                </a:tc>
-                <a:tc>
-                  <a:txBody>
-                    <a:bodyPr/>
-                    <a:lstStyle/>
-                    <a:p>
-                      <a:pPr marL="0" indent="0" algn="r">
-                        <a:buNone/>
-                      </a:pPr>
-                      <a:r>
-                        <a:rPr lang="ru-RU" sz="1400" b="0" i="0">
-                          <a:solidFill>
-                            <a:srgbClr val="065CAB"/>
-                          </a:solidFill>
-                          <a:latin typeface="Arial" panose="020B0604020202020204" pitchFamily="34" charset="0"/>
-                          <a:cs typeface="Arial"/>
-                        </a:rPr>
-                        <a:t>кандидат</a:t>
-                      </a:r>
-                      <a:endParaRPr sz="1400" b="0" i="0">
-                        <a:solidFill>
-                          <a:srgbClr val="595959"/>
-                        </a:solidFill>
-                        <a:latin typeface="Arial" panose="020B0604020202020204" pitchFamily="34" charset="0"/>
-                        <a:cs typeface="Arial"/>
-                      </a:endParaRPr>
-                    </a:p>
-                  </a:txBody>
-                  <a:tcPr marT="27432" marB="27432" anchor="ctr">
-                    <a:noFill/>
-                  </a:tcPr>
-                </a:tc>
-                <a:extLst>
-                  <a:ext uri="{0D108BD9-81ED-4DB2-BD59-A6C34878D82A}">
-                    <a16:rowId xmlns:a16="http://schemas.microsoft.com/office/drawing/2014/main" val="10004"/>
-                  </a:ext>
-                </a:extLst>
-              </a:tr>
-              <a:tr h="548640">
-                <a:tc>
-                  <a:txBody>
-                    <a:bodyPr/>
-                    <a:lstStyle/>
-                    <a:p>
-                      <a:pPr marL="0" indent="0" algn="l">
-                        <a:buNone/>
-                      </a:pPr>
-                      <a:r>
-                        <a:rPr lang="ru-RU" sz="1400" b="0" i="0">
-                          <a:solidFill>
-                            <a:srgbClr val="262626"/>
-                          </a:solidFill>
-                          <a:latin typeface="Arial" panose="020B0604020202020204" pitchFamily="34" charset="0"/>
-                          <a:cs typeface="Arial"/>
-                        </a:rPr>
-                        <a:t>Метод опорных векторов (</a:t>
-                      </a:r>
-                      <a:r>
-                        <a:rPr lang="en-US" sz="1400" b="0" i="0">
-                          <a:solidFill>
-                            <a:srgbClr val="262626"/>
-                          </a:solidFill>
-                          <a:latin typeface="Arial" panose="020B0604020202020204" pitchFamily="34" charset="0"/>
-                          <a:cs typeface="Arial"/>
-                        </a:rPr>
-                        <a:t>SVR)</a:t>
-                      </a:r>
-                      <a:endParaRPr sz="1400" b="0" i="0">
-                        <a:solidFill>
-                          <a:srgbClr val="262626"/>
-                        </a:solidFill>
-                        <a:latin typeface="Arial" panose="020B0604020202020204" pitchFamily="34" charset="0"/>
-                        <a:cs typeface="Arial"/>
-                      </a:endParaRPr>
-                    </a:p>
-                  </a:txBody>
-                  <a:tcPr marT="27432" marB="27432" anchor="ctr">
-                    <a:noFill/>
-                  </a:tcPr>
-                </a:tc>
-                <a:tc>
-                  <a:txBody>
-                    <a:bodyPr/>
-                    <a:lstStyle/>
-                    <a:p>
-                      <a:pPr marL="0" indent="0" algn="r">
-                        <a:buNone/>
-                      </a:pPr>
-                      <a:r>
-                        <a:rPr lang="ru-RU" sz="1400" b="0" i="0">
-                          <a:solidFill>
-                            <a:srgbClr val="262626"/>
-                          </a:solidFill>
-                          <a:latin typeface="Arial" panose="020B0604020202020204" pitchFamily="34" charset="0"/>
-                          <a:cs typeface="Arial"/>
-                        </a:rPr>
-                        <a:t>Гладкая линейная или нелинейная зависимость</a:t>
-                      </a:r>
-                      <a:endParaRPr sz="1400" b="0" i="0">
-                        <a:solidFill>
-                          <a:srgbClr val="595959"/>
-                        </a:solidFill>
-                        <a:latin typeface="Arial" panose="020B0604020202020204" pitchFamily="34" charset="0"/>
-                        <a:cs typeface="Arial"/>
-                      </a:endParaRPr>
-                    </a:p>
-                  </a:txBody>
-                  <a:tcPr marT="27432" marB="27432" anchor="ctr">
-                    <a:noFill/>
-                  </a:tcPr>
-                </a:tc>
-                <a:tc>
-                  <a:txBody>
-                    <a:bodyPr/>
-                    <a:lstStyle/>
-                    <a:p>
-                      <a:pPr marL="0" indent="0" algn="r">
-                        <a:buNone/>
-                      </a:pPr>
-                      <a:r>
-                        <a:rPr lang="ru-RU" sz="1400" b="0" i="0">
-                          <a:solidFill>
-                            <a:srgbClr val="262626"/>
-                          </a:solidFill>
-                          <a:latin typeface="Arial" panose="020B0604020202020204" pitchFamily="34" charset="0"/>
-                          <a:cs typeface="Arial"/>
-                        </a:rPr>
-                        <a:t>кандидат</a:t>
-                      </a:r>
-                      <a:endParaRPr sz="1400" b="0" i="0">
-                        <a:solidFill>
-                          <a:srgbClr val="595959"/>
-                        </a:solidFill>
-                        <a:latin typeface="Arial" panose="020B0604020202020204" pitchFamily="34" charset="0"/>
-                        <a:cs typeface="Arial"/>
-                      </a:endParaRPr>
-                    </a:p>
-                  </a:txBody>
-                  <a:tcPr marT="27432" marB="27432" anchor="ctr">
-                    <a:noFill/>
-                  </a:tcPr>
-                </a:tc>
-                <a:extLst>
-                  <a:ext uri="{0D108BD9-81ED-4DB2-BD59-A6C34878D82A}">
-                    <a16:rowId xmlns:a16="http://schemas.microsoft.com/office/drawing/2014/main" val="10005"/>
-                  </a:ext>
-                </a:extLst>
-              </a:tr>
-            </a:tbl>
-          </a:graphicData>
-        </a:graphic>
-      </p:graphicFrame>
-      <p:sp>
-        <p:nvSpPr>
-          <p:cNvPr id="73" name="TextBox 72"/>
-          <p:cNvSpPr txBox="1"/>
-          <p:nvPr/>
-        </p:nvSpPr>
-        <p:spPr>
-          <a:xfrm>
-            <a:off x="557784" y="5806440"/>
-            <a:ext cx="7315200" cy="411480"/>
-          </a:xfrm>
-          <a:prstGeom prst="rect">
-            <a:avLst/>
-          </a:prstGeom>
-          <a:noFill/>
-        </p:spPr>
-        <p:txBody>
-          <a:bodyPr wrap="square" lIns="0" tIns="0" rIns="0" bIns="0" anchor="t"/>
-          <a:lstStyle/>
-          <a:p>
-            <a:pPr marL="0" indent="0" algn="l">
-              <a:buNone/>
-            </a:pPr>
-            <a:r>
-              <a:rPr lang="ru-RU" sz="1500" i="0">
-                <a:solidFill>
-                  <a:srgbClr val="595959"/>
-                </a:solidFill>
-                <a:latin typeface="Arial" panose="020B0604020202020204" pitchFamily="34" charset="0"/>
-                <a:cs typeface="Arial"/>
-              </a:rPr>
-              <a:t>Результаты сравнения: РПЗ, таблица 6</a:t>
-            </a:r>
-            <a:endParaRPr sz="1500" i="0">
-              <a:solidFill>
-                <a:srgbClr val="595959"/>
-              </a:solidFill>
-              <a:latin typeface="Arial" panose="020B0604020202020204" pitchFamily="34" charset="0"/>
-              <a:cs typeface="Arial"/>
-            </a:endParaRPr>
-          </a:p>
-        </p:txBody>
-      </p:sp>
-      <p:sp>
-        <p:nvSpPr>
-          <p:cNvPr id="74" name="TextBox 73"/>
-          <p:cNvSpPr txBox="1"/>
-          <p:nvPr/>
-        </p:nvSpPr>
-        <p:spPr>
-          <a:xfrm>
-            <a:off x="8321040" y="1481328"/>
-            <a:ext cx="3447288" cy="731520"/>
-          </a:xfrm>
-          <a:prstGeom prst="rect">
-            <a:avLst/>
-          </a:prstGeom>
-          <a:noFill/>
-        </p:spPr>
-        <p:txBody>
-          <a:bodyPr wrap="square" lIns="0" tIns="0" rIns="0" bIns="0" anchor="t"/>
-          <a:lstStyle/>
-          <a:p>
-            <a:pPr marL="0" indent="0" algn="l">
-              <a:lnSpc>
-                <a:spcPct val="100000"/>
-              </a:lnSpc>
-              <a:buNone/>
-            </a:pPr>
-            <a:r>
-              <a:rPr lang="ru-RU" sz="1700" b="1" i="0">
-                <a:solidFill>
-                  <a:srgbClr val="F1BE29"/>
-                </a:solidFill>
-                <a:latin typeface="Arial" panose="020B0604020202020204" pitchFamily="34" charset="0"/>
-                <a:cs typeface="Arial"/>
-              </a:rPr>
-              <a:t>Отдельный метод
-Многослойный перцептрон (MLP) – нейросеть для задачи отношения</a:t>
-            </a:r>
-            <a:endParaRPr sz="1700" b="1" i="0">
-              <a:solidFill>
-                <a:srgbClr val="F1BE29"/>
-              </a:solidFill>
-              <a:latin typeface="Arial" panose="020B0604020202020204" pitchFamily="34" charset="0"/>
-              <a:cs typeface="Arial"/>
-            </a:endParaRPr>
-          </a:p>
-        </p:txBody>
-      </p:sp>
-      <p:sp>
-        <p:nvSpPr>
           <p:cNvPr id="83" name="Источник"/>
           <p:cNvSpPr txBox="1"/>
           <p:nvPr/>
@@ -19923,26 +18356,16 @@
               <a:buNone/>
             </a:pPr>
             <a:r>
-              <a:rPr lang="ru-RU" sz="1600" b="0" i="0">
+              <a:rPr lang="ru-RU" sz="1300" i="0">
                 <a:solidFill>
                   <a:srgbClr val="595959"/>
                 </a:solidFill>
                 <a:latin typeface="Arial" panose="020B0604020202020204" pitchFamily="34" charset="0"/>
                 <a:cs typeface="Arial"/>
               </a:rPr>
-              <a:t>Источник: РПЗ, табл. 6; </a:t>
+              <a:t>Источник: РПЗ, разделы 1.1, 1.2 и 2.1</a:t>
             </a:r>
-            <a:r>
-              <a:rPr lang="en-US" sz="1600" b="0" i="0">
-                <a:solidFill>
-                  <a:srgbClr val="595959"/>
-                </a:solidFill>
-                <a:latin typeface="Arial" panose="020B0604020202020204" pitchFamily="34" charset="0"/>
-                <a:cs typeface="Arial"/>
-              </a:rPr>
-              <a:t>reports/modeling/cv_summary.csv</a:t>
-            </a:r>
-            <a:endParaRPr sz="1600" b="0" i="0">
+            <a:endParaRPr sz="1300" i="0">
               <a:solidFill>
                 <a:srgbClr val="595959"/>
               </a:solidFill>
@@ -19984,15 +18407,250 @@
             </a:pPr>
             <a:fld id="{00000000-1234-1234-1234-123412341234}" type="slidenum">
               <a:rPr lang="ru-RU" smtClean="0">
-                <a:latin typeface="Arial" panose="020B0604020202020204" pitchFamily="34" charset="0"/>
                 <a:cs typeface="Arial"/>
               </a:rPr>
               <a:t>5</a:t>
             </a:fld>
             <a:endParaRPr lang="ru-RU" dirty="0">
-              <a:latin typeface="Arial" panose="020B0604020202020204" pitchFamily="34" charset="0"/>
               <a:cs typeface="Arial"/>
             </a:endParaRPr>
+          </a:p>
+        </p:txBody>
+      </p:sp>
+      <p:sp>
+        <p:nvSpPr>
+          <p:cNvPr id="2" name="TrainBox">
+            <a:extLst>
+              <a:ext uri="{FF2B5EF4-FFF2-40B4-BE49-F238E27FC236}">
+                <a16:creationId xmlns:a16="http://schemas.microsoft.com/office/drawing/2014/main" id="{6236AC01-CA22-42C7-8C10-0DCEEACF3ECF}"/>
+              </a:ext>
+            </a:extLst>
+          </p:cNvPr>
+          <p:cNvSpPr/>
+          <p:nvPr/>
+        </p:nvSpPr>
+        <p:spPr>
+          <a:xfrm>
+            <a:off x="558800" y="1714500"/>
+            <a:ext cx="7112000" cy="1955800"/>
+          </a:xfrm>
+          <a:prstGeom prst="roundRect">
+            <a:avLst/>
+          </a:prstGeom>
+          <a:solidFill>
+            <a:srgbClr val="DCE9F6"/>
+          </a:solidFill>
+          <a:ln w="17780">
+            <a:solidFill>
+              <a:srgbClr val="0E5DAB"/>
+            </a:solidFill>
+          </a:ln>
+        </p:spPr>
+        <p:style>
+          <a:lnRef idx="2">
+            <a:schemeClr val="accent1">
+              <a:shade val="50000"/>
+            </a:schemeClr>
+          </a:lnRef>
+          <a:fillRef idx="1">
+            <a:schemeClr val="accent1"/>
+          </a:fillRef>
+          <a:effectRef idx="0">
+            <a:schemeClr val="accent1"/>
+          </a:effectRef>
+          <a:fontRef idx="minor">
+            <a:schemeClr val="lt1"/>
+          </a:fontRef>
+        </p:style>
+        <p:txBody>
+          <a:bodyPr wrap="square" lIns="101600" tIns="76200" rIns="101600" bIns="76200" rtlCol="0" anchor="ctr"/>
+          <a:lstStyle/>
+          <a:p>
+            <a:pPr algn="ctr"/>
+            <a:r>
+              <a:rPr lang="ru-RU" sz="2400" b="1">
+                <a:solidFill>
+                  <a:srgbClr val="262626"/>
+                </a:solidFill>
+                <a:latin typeface="Arial" panose="020B0604020202020204" pitchFamily="34" charset="0"/>
+              </a:rPr>
+              <a:t>716 строк
+данные для обучения
+70 %</a:t>
+            </a:r>
+          </a:p>
+        </p:txBody>
+      </p:sp>
+      <p:sp>
+        <p:nvSpPr>
+          <p:cNvPr id="3" name="TestBox">
+            <a:extLst>
+              <a:ext uri="{FF2B5EF4-FFF2-40B4-BE49-F238E27FC236}">
+                <a16:creationId xmlns:a16="http://schemas.microsoft.com/office/drawing/2014/main" id="{B8968BF2-7A07-4D18-9A6C-FA6493F76C0F}"/>
+              </a:ext>
+            </a:extLst>
+          </p:cNvPr>
+          <p:cNvSpPr/>
+          <p:nvPr/>
+        </p:nvSpPr>
+        <p:spPr>
+          <a:xfrm>
+            <a:off x="8064500" y="1714500"/>
+            <a:ext cx="3695700" cy="1955800"/>
+          </a:xfrm>
+          <a:prstGeom prst="roundRect">
+            <a:avLst/>
+          </a:prstGeom>
+          <a:solidFill>
+            <a:srgbClr val="FFC000"/>
+          </a:solidFill>
+          <a:ln w="17780">
+            <a:solidFill>
+              <a:srgbClr val="0E5DAB"/>
+            </a:solidFill>
+          </a:ln>
+        </p:spPr>
+        <p:style>
+          <a:lnRef idx="2">
+            <a:schemeClr val="accent1">
+              <a:shade val="50000"/>
+            </a:schemeClr>
+          </a:lnRef>
+          <a:fillRef idx="1">
+            <a:schemeClr val="accent1"/>
+          </a:fillRef>
+          <a:effectRef idx="0">
+            <a:schemeClr val="accent1"/>
+          </a:effectRef>
+          <a:fontRef idx="minor">
+            <a:schemeClr val="lt1"/>
+          </a:fontRef>
+        </p:style>
+        <p:txBody>
+          <a:bodyPr wrap="square" lIns="101600" tIns="76200" rIns="101600" bIns="76200" rtlCol="0" anchor="ctr"/>
+          <a:lstStyle/>
+          <a:p>
+            <a:pPr algn="ctr"/>
+            <a:r>
+              <a:rPr lang="ru-RU" sz="2200" b="1">
+                <a:solidFill>
+                  <a:srgbClr val="262626"/>
+                </a:solidFill>
+                <a:latin typeface="Arial" panose="020B0604020202020204" pitchFamily="34" charset="0"/>
+              </a:rPr>
+              <a:t>307 строк
+данные для итоговой проверки
+30 %</a:t>
+            </a:r>
+          </a:p>
+        </p:txBody>
+      </p:sp>
+      <p:sp>
+        <p:nvSpPr>
+          <p:cNvPr id="5" name="SplitRule">
+            <a:extLst>
+              <a:ext uri="{FF2B5EF4-FFF2-40B4-BE49-F238E27FC236}">
+                <a16:creationId xmlns:a16="http://schemas.microsoft.com/office/drawing/2014/main" id="{2A411A4F-0551-4606-B07A-F272E5C2C4C4}"/>
+              </a:ext>
+            </a:extLst>
+          </p:cNvPr>
+          <p:cNvSpPr txBox="1"/>
+          <p:nvPr/>
+        </p:nvSpPr>
+        <p:spPr>
+          <a:xfrm>
+            <a:off x="558800" y="3848100"/>
+            <a:ext cx="11201400" cy="369332"/>
+          </a:xfrm>
+          <a:prstGeom prst="rect">
+            <a:avLst/>
+          </a:prstGeom>
+          <a:noFill/>
+        </p:spPr>
+        <p:txBody>
+          <a:bodyPr vert="horz" wrap="square" rtlCol="0" anchor="ctr">
+            <a:noAutofit/>
+          </a:bodyPr>
+          <a:lstStyle/>
+          <a:p>
+            <a:pPr algn="ctr"/>
+            <a:r>
+              <a:rPr lang="ru-RU" sz="1800" b="1">
+                <a:solidFill>
+                  <a:srgbClr val="0E5DAB"/>
+                </a:solidFill>
+                <a:latin typeface="Arial" panose="020B0604020202020204" pitchFamily="34" charset="0"/>
+              </a:rPr>
+              <a:t>307 строк не используются при изучении данных и выборе модели</a:t>
+            </a:r>
+            <a:endParaRPr lang="ru-RU" sz="1800" b="1" dirty="0">
+              <a:solidFill>
+                <a:srgbClr val="0E5DAB"/>
+              </a:solidFill>
+              <a:latin typeface="Arial" panose="020B0604020202020204" pitchFamily="34" charset="0"/>
+            </a:endParaRPr>
+          </a:p>
+        </p:txBody>
+      </p:sp>
+      <p:sp>
+        <p:nvSpPr>
+          <p:cNvPr id="6" name="InputsBox">
+            <a:extLst>
+              <a:ext uri="{FF2B5EF4-FFF2-40B4-BE49-F238E27FC236}">
+                <a16:creationId xmlns:a16="http://schemas.microsoft.com/office/drawing/2014/main" id="{52AA13C9-165A-480B-8646-11BEABA348CC}"/>
+              </a:ext>
+            </a:extLst>
+          </p:cNvPr>
+          <p:cNvSpPr/>
+          <p:nvPr/>
+        </p:nvSpPr>
+        <p:spPr>
+          <a:xfrm>
+            <a:off x="1587500" y="4724400"/>
+            <a:ext cx="9017000" cy="1041400"/>
+          </a:xfrm>
+          <a:prstGeom prst="roundRect">
+            <a:avLst/>
+          </a:prstGeom>
+          <a:solidFill>
+            <a:srgbClr val="FFFFFF"/>
+          </a:solidFill>
+          <a:ln w="17780">
+            <a:solidFill>
+              <a:srgbClr val="0E5DAB"/>
+            </a:solidFill>
+          </a:ln>
+        </p:spPr>
+        <p:style>
+          <a:lnRef idx="2">
+            <a:schemeClr val="accent1">
+              <a:shade val="50000"/>
+            </a:schemeClr>
+          </a:lnRef>
+          <a:fillRef idx="1">
+            <a:schemeClr val="accent1"/>
+          </a:fillRef>
+          <a:effectRef idx="0">
+            <a:schemeClr val="accent1"/>
+          </a:effectRef>
+          <a:fontRef idx="minor">
+            <a:schemeClr val="lt1"/>
+          </a:fontRef>
+        </p:style>
+        <p:txBody>
+          <a:bodyPr wrap="square" lIns="101600" tIns="76200" rIns="101600" bIns="76200" rtlCol="0" anchor="ctr"/>
+          <a:lstStyle/>
+          <a:p>
+            <a:pPr algn="ctr"/>
+            <a:r>
+              <a:rPr lang="ru-RU" sz="2200" b="1">
+                <a:solidFill>
+                  <a:srgbClr val="262626"/>
+                </a:solidFill>
+                <a:latin typeface="Arial" panose="020B0604020202020204" pitchFamily="34" charset="0"/>
+              </a:rPr>
+              <a:t>13 показателей − 2 прогнозируемых свойства = 11 входных характеристик</a:t>
+            </a:r>
           </a:p>
         </p:txBody>
       </p:sp>
@@ -20099,7 +18757,7 @@
                   <a:latin typeface="Arial" panose="020B0604020202020204" pitchFamily="34" charset="0"/>
                   <a:cs typeface="Arial" pitchFamily="2" charset="0"/>
                 </a:rPr>
-                <a:t>Разведочный анализ обучающей выборки</a:t>
+                <a:t>Что показал анализ данных для обучения</a:t>
               </a:r>
               <a:endParaRPr lang="ru-RU" sz="2600" b="1" spc="0" dirty="0">
                 <a:solidFill>
@@ -20452,7 +19110,7 @@
                 <a:latin typeface="Arial" panose="020B0604020202020204" pitchFamily="34" charset="0"/>
                 <a:cs typeface="Arial"/>
               </a:rPr>
-              <a:t>Показаны распределение, диаграмма размаха и связь двух показателей</a:t>
+              <a:t>Изучены распределения, необычные значения и связи между показателями</a:t>
             </a:r>
             <a:endParaRPr sz="1600" i="0">
               <a:solidFill>
@@ -20495,7 +19153,7 @@
                 <a:latin typeface="Arial" panose="020B0604020202020204" pitchFamily="34" charset="0"/>
                 <a:cs typeface="Arial"/>
               </a:rPr>
-              <a:t>Анализ: только 716 обучающих строк</a:t>
+              <a:t>Только 716 строк для обучения</a:t>
             </a:r>
             <a:endParaRPr sz="1700" b="1" i="0">
               <a:solidFill>
@@ -20531,16 +19189,16 @@
               <a:buNone/>
             </a:pPr>
             <a:r>
-              <a:rPr lang="ru-RU" sz="1600" i="0">
+              <a:rPr lang="ru-RU" sz="1500" i="0">
                 <a:solidFill>
                   <a:srgbClr val="595959"/>
                 </a:solidFill>
                 <a:latin typeface="Arial" panose="020B0604020202020204" pitchFamily="34" charset="0"/>
                 <a:cs typeface="Arial"/>
               </a:rPr>
-              <a:t>Наибольшая парная корреляция</a:t>
+              <a:t>Самая сильная парная связь</a:t>
             </a:r>
-            <a:endParaRPr sz="1600" i="0">
+            <a:endParaRPr sz="1500" i="0">
               <a:solidFill>
                 <a:srgbClr val="595959"/>
               </a:solidFill>
@@ -20781,16 +19439,17 @@
               <a:buNone/>
             </a:pPr>
             <a:r>
-              <a:rPr lang="ru-RU" sz="1600" i="0">
+              <a:rPr lang="ru-RU" sz="1600" b="1" i="0">
                 <a:solidFill>
                   <a:srgbClr val="262626"/>
                 </a:solidFill>
                 <a:latin typeface="Arial" panose="020B0604020202020204" pitchFamily="34" charset="0"/>
                 <a:cs typeface="Arial"/>
               </a:rPr>
-              <a:t>Слабая парная связь не исключает более сложной зависимости</a:t>
+              <a:t>0,119 близко к нулю:
+отдельные линейные связи слабые</a:t>
             </a:r>
-            <a:endParaRPr sz="1600" i="0">
+            <a:endParaRPr sz="1600" b="1" i="0">
               <a:solidFill>
                 <a:srgbClr val="262626"/>
               </a:solidFill>
@@ -20824,16 +19483,16 @@
               <a:buNone/>
             </a:pPr>
             <a:r>
-              <a:rPr lang="ru-RU" sz="1600" b="0" i="0">
+              <a:rPr lang="ru-RU" sz="1300" i="0">
                 <a:solidFill>
                   <a:srgbClr val="595959"/>
                 </a:solidFill>
                 <a:latin typeface="Arial" panose="020B0604020202020204" pitchFamily="34" charset="0"/>
                 <a:cs typeface="Arial"/>
               </a:rPr>
-              <a:t>Источник: РПЗ, рис. 1</a:t>
+              <a:t>Источник: РПЗ, раздел разведочного анализа и рисунок с распределениями</a:t>
             </a:r>
-            <a:endParaRPr sz="1600" b="0" i="0">
+            <a:endParaRPr sz="1300" i="0">
               <a:solidFill>
                 <a:srgbClr val="595959"/>
               </a:solidFill>
@@ -20875,13 +19534,11 @@
             </a:pPr>
             <a:fld id="{00000000-1234-1234-1234-123412341234}" type="slidenum">
               <a:rPr lang="ru-RU" smtClean="0">
-                <a:latin typeface="Arial" panose="020B0604020202020204" pitchFamily="34" charset="0"/>
                 <a:cs typeface="Arial"/>
               </a:rPr>
               <a:t>6</a:t>
             </a:fld>
             <a:endParaRPr lang="ru-RU" dirty="0">
-              <a:latin typeface="Arial" panose="020B0604020202020204" pitchFamily="34" charset="0"/>
               <a:cs typeface="Arial"/>
             </a:endParaRPr>
           </a:p>
@@ -20990,7 +19647,7 @@
                   <a:latin typeface="Arial" panose="020B0604020202020204" pitchFamily="34" charset="0"/>
                   <a:cs typeface="Arial" pitchFamily="2" charset="0"/>
                 </a:rPr>
-                <a:t>Предобработка данных</a:t>
+                <a:t>Подготовка данных перед обучением</a:t>
               </a:r>
               <a:endParaRPr lang="ru-RU" sz="2600" b="1" spc="0" dirty="0">
                 <a:solidFill>
@@ -21370,16 +20027,16 @@
               <a:buNone/>
             </a:pPr>
             <a:r>
-              <a:rPr lang="ru-RU" sz="1600" i="0">
+              <a:rPr lang="ru-RU" sz="1500" i="0">
                 <a:solidFill>
                   <a:srgbClr val="595959"/>
                 </a:solidFill>
                 <a:latin typeface="Arial" panose="020B0604020202020204" pitchFamily="34" charset="0"/>
                 <a:cs typeface="Arial"/>
               </a:rPr>
-              <a:t>Кандидаты в выбросы: прямые задачи</a:t>
+              <a:t>Необычные строки: прямые задачи</a:t>
             </a:r>
-            <a:endParaRPr sz="1600" i="0">
+            <a:endParaRPr sz="1500" i="0">
               <a:solidFill>
                 <a:srgbClr val="595959"/>
               </a:solidFill>
@@ -21413,16 +20070,17 @@
               <a:buNone/>
             </a:pPr>
             <a:r>
-              <a:rPr lang="ru-RU" sz="2000" b="1" i="0">
+              <a:rPr lang="ru-RU" sz="1800" b="1" i="0">
                 <a:solidFill>
                   <a:srgbClr val="595959"/>
                 </a:solidFill>
                 <a:latin typeface="Arial" panose="020B0604020202020204" pitchFamily="34" charset="0"/>
                 <a:cs typeface="Arial"/>
               </a:rPr>
-              <a:t>53 из 716 отмечены</a:t>
+              <a:t>53 отмечены
+663 остаются в опыте</a:t>
             </a:r>
-            <a:endParaRPr sz="2000" b="1" i="0">
+            <a:endParaRPr sz="1800" b="1" i="0">
               <a:solidFill>
                 <a:srgbClr val="262626"/>
               </a:solidFill>
@@ -21522,16 +20180,16 @@
               <a:buNone/>
             </a:pPr>
             <a:r>
-              <a:rPr lang="ru-RU" sz="1600" i="0">
+              <a:rPr lang="ru-RU" sz="1500" i="0">
                 <a:solidFill>
                   <a:srgbClr val="595959"/>
                 </a:solidFill>
                 <a:latin typeface="Arial" panose="020B0604020202020204" pitchFamily="34" charset="0"/>
                 <a:cs typeface="Arial"/>
               </a:rPr>
-              <a:t>Кандидаты в выбросы: задача отношения</a:t>
+              <a:t>Необычные строки: задача отношения</a:t>
             </a:r>
-            <a:endParaRPr sz="1600" i="0">
+            <a:endParaRPr sz="1500" i="0">
               <a:solidFill>
                 <a:srgbClr val="595959"/>
               </a:solidFill>
@@ -21565,16 +20223,17 @@
               <a:buNone/>
             </a:pPr>
             <a:r>
-              <a:rPr lang="ru-RU" sz="2000" b="1" i="0">
+              <a:rPr lang="ru-RU" sz="1800" b="1" i="0">
                 <a:solidFill>
                   <a:srgbClr val="595959"/>
                 </a:solidFill>
                 <a:latin typeface="Arial" panose="020B0604020202020204" pitchFamily="34" charset="0"/>
                 <a:cs typeface="Arial"/>
               </a:rPr>
-              <a:t>61 из 716 отмечены</a:t>
+              <a:t>61 отмечена
+655 остаются в опыте</a:t>
             </a:r>
-            <a:endParaRPr sz="2000" b="1" i="0">
+            <a:endParaRPr sz="1800" b="1" i="0">
               <a:solidFill>
                 <a:srgbClr val="262626"/>
               </a:solidFill>
@@ -21648,8 +20307,8 @@
                 <a:latin typeface="Arial" panose="020B0604020202020204" pitchFamily="34" charset="0"/>
                 <a:cs typeface="Arial"/>
               </a:rPr>
-              <a:t>Итоговый вариант
-все 716 строк сохранены</a:t>
+              <a:t>Итог
+вариант без удаления строк</a:t>
             </a:r>
             <a:endParaRPr sz="2000" b="1" i="0">
               <a:solidFill>
@@ -21695,7 +20354,7 @@
                 <a:latin typeface="Arial" panose="020B0604020202020204" pitchFamily="34" charset="0"/>
                 <a:cs typeface="Arial"/>
               </a:rPr>
-              <a:t>Квартильное правило проверено как вариант предобработки. Перекрёстная проверка выбрала обучение без удаления строк.</a:t>
+              <a:t>Десять проверок показали: удаление отмеченных строк не улучшает результат.</a:t>
             </a:r>
             <a:endParaRPr sz="1500" i="0">
               <a:solidFill>
@@ -21764,7 +20423,7 @@
               <a:buNone/>
             </a:pPr>
             <a:r>
-              <a:rPr lang="ru-RU" sz="1500" i="0">
+              <a:rPr lang="ru-RU" i="0">
                 <a:solidFill>
                   <a:srgbClr val="065CAB"/>
                 </a:solidFill>
@@ -21772,9 +20431,9 @@
                 <a:cs typeface="Arial"/>
               </a:rPr>
               <a:t>Угол 0° / 90°
-закодирован как 0 / 1</a:t>
+два направления записаны как 0 / 1</a:t>
             </a:r>
-            <a:endParaRPr sz="1500" i="0">
+            <a:endParaRPr i="0">
               <a:solidFill>
                 <a:srgbClr val="262626"/>
               </a:solidFill>
@@ -21848,8 +20507,8 @@
                 <a:latin typeface="Arial" panose="020B0604020202020204" pitchFamily="34" charset="0"/>
                 <a:cs typeface="Arial"/>
               </a:rPr>
-              <a:t>Масштабирование
-приводит признаки к сопоставимому масштабу</a:t>
+              <a:t>Единый масштаб
+помогает чувствительным методам</a:t>
             </a:r>
             <a:endParaRPr i="0">
               <a:solidFill>
@@ -21925,8 +20584,8 @@
                 <a:latin typeface="Arial" panose="020B0604020202020204" pitchFamily="34" charset="0"/>
                 <a:cs typeface="Arial"/>
               </a:rPr>
-              <a:t>Применено внутри каждой проверки
-для Ridge, SVR и нейросети</a:t>
+              <a:t>Масштаб рассчитывается заново
+внутри каждой проверки</a:t>
             </a:r>
             <a:endParaRPr i="0">
               <a:solidFill>
@@ -21962,16 +20621,26 @@
               <a:buNone/>
             </a:pPr>
             <a:r>
-              <a:rPr lang="ru-RU" sz="1600" b="0" i="0">
+              <a:rPr lang="ru-RU" sz="1300" i="0">
                 <a:solidFill>
                   <a:srgbClr val="595959"/>
                 </a:solidFill>
                 <a:latin typeface="Arial" panose="020B0604020202020204" pitchFamily="34" charset="0"/>
                 <a:cs typeface="Arial"/>
               </a:rPr>
-              <a:t>Источник: РПЗ, разд. 2.1.3</a:t>
+              <a:t>Источник: РПЗ, раздел предобработки; </a:t>
             </a:r>
-            <a:endParaRPr sz="1600" b="0" i="0">
+            <a:r>
+              <a:rPr lang="en-US" sz="1300" i="0">
+                <a:solidFill>
+                  <a:srgbClr val="595959"/>
+                </a:solidFill>
+                <a:latin typeface="Arial" panose="020B0604020202020204" pitchFamily="34" charset="0"/>
+                <a:cs typeface="Arial"/>
+              </a:rPr>
+              <a:t>reports/modeling/preprocessing_audit.json</a:t>
+            </a:r>
+            <a:endParaRPr sz="1300" i="0">
               <a:solidFill>
                 <a:srgbClr val="595959"/>
               </a:solidFill>
@@ -22013,13 +20682,11 @@
             </a:pPr>
             <a:fld id="{00000000-1234-1234-1234-123412341234}" type="slidenum">
               <a:rPr lang="ru-RU" smtClean="0">
-                <a:latin typeface="Arial" panose="020B0604020202020204" pitchFamily="34" charset="0"/>
                 <a:cs typeface="Arial"/>
               </a:rPr>
               <a:t>7</a:t>
             </a:fld>
             <a:endParaRPr lang="ru-RU" dirty="0">
-              <a:latin typeface="Arial" panose="020B0604020202020204" pitchFamily="34" charset="0"/>
               <a:cs typeface="Arial"/>
             </a:endParaRPr>
           </a:p>
@@ -22128,7 +20795,7 @@
                   <a:latin typeface="Arial" panose="020B0604020202020204" pitchFamily="34" charset="0"/>
                   <a:cs typeface="Arial" pitchFamily="2" charset="0"/>
                 </a:rPr>
-                <a:t>Разработка, обучение и выбор моделей</a:t>
+                <a:t>Для двух свойств: пять подходов и две модели</a:t>
               </a:r>
               <a:endParaRPr lang="ru-RU" sz="2600" b="1" spc="0" dirty="0">
                 <a:solidFill>
@@ -22442,26 +21109,16 @@
               <a:buNone/>
             </a:pPr>
             <a:r>
-              <a:rPr lang="ru-RU" sz="1600" i="0">
+              <a:rPr lang="ru-RU" sz="1300" i="0">
                 <a:solidFill>
                   <a:srgbClr val="595959"/>
                 </a:solidFill>
                 <a:latin typeface="Arial" panose="020B0604020202020204" pitchFamily="34" charset="0"/>
                 <a:cs typeface="Arial"/>
               </a:rPr>
-              <a:t>Источник: РПЗ, рис. 7; </a:t>
+              <a:t>Источник: РПЗ, разделы о методах и проверке моделей; reports/modeling/cv_summary.csv</a:t>
             </a:r>
-            <a:r>
-              <a:rPr lang="en-US" sz="1600" i="0">
-                <a:solidFill>
-                  <a:srgbClr val="595959"/>
-                </a:solidFill>
-                <a:latin typeface="Arial" panose="020B0604020202020204" pitchFamily="34" charset="0"/>
-                <a:cs typeface="Arial"/>
-              </a:rPr>
-              <a:t>docs/validation_protocol.md</a:t>
-            </a:r>
-            <a:endParaRPr sz="1600" i="0">
+            <a:endParaRPr sz="1300" i="0">
               <a:solidFill>
                 <a:srgbClr val="595959"/>
               </a:solidFill>
@@ -22503,24 +21160,804 @@
             </a:pPr>
             <a:fld id="{00000000-1234-1234-1234-123412341234}" type="slidenum">
               <a:rPr lang="ru-RU" smtClean="0">
-                <a:latin typeface="Arial" panose="020B0604020202020204" pitchFamily="34" charset="0"/>
                 <a:cs typeface="Arial"/>
               </a:rPr>
               <a:t>8</a:t>
             </a:fld>
             <a:endParaRPr lang="ru-RU" dirty="0">
-              <a:latin typeface="Arial" panose="020B0604020202020204" pitchFamily="34" charset="0"/>
               <a:cs typeface="Arial"/>
             </a:endParaRPr>
           </a:p>
         </p:txBody>
       </p:sp>
+      <p:graphicFrame>
+        <p:nvGraphicFramePr>
+          <p:cNvPr id="21" name="MethodsTable">
+            <a:extLst>
+              <a:ext uri="{FF2B5EF4-FFF2-40B4-BE49-F238E27FC236}">
+                <a16:creationId xmlns:a16="http://schemas.microsoft.com/office/drawing/2014/main" id="{CBD47BF3-A79C-4A51-A322-78B04A679A38}"/>
+              </a:ext>
+            </a:extLst>
+          </p:cNvPr>
+          <p:cNvGraphicFramePr>
+            <a:graphicFrameLocks noGrp="1"/>
+          </p:cNvGraphicFramePr>
+          <p:nvPr>
+            <p:extLst>
+              <p:ext uri="{D42A27DB-BD31-4B8C-83A1-F6EECF244321}">
+                <p14:modId xmlns:p14="http://schemas.microsoft.com/office/powerpoint/2010/main" val="1286250782"/>
+              </p:ext>
+            </p:extLst>
+          </p:nvPr>
+        </p:nvGraphicFramePr>
+        <p:xfrm>
+          <a:off x="558800" y="1600200"/>
+          <a:ext cx="7493000" cy="4191000"/>
+        </p:xfrm>
+        <a:graphic>
+          <a:graphicData uri="http://schemas.openxmlformats.org/drawingml/2006/table">
+            <a:tbl>
+              <a:tblPr>
+                <a:tableStyleId>{2D5ABB26-0587-4C30-8999-92F81FD0307C}</a:tableStyleId>
+              </a:tblPr>
+              <a:tblGrid>
+                <a:gridCol w="2159000">
+                  <a:extLst>
+                    <a:ext uri="{9D8B030D-6E8A-4147-A177-3AD203B41FA5}">
+                      <a16:colId xmlns:a16="http://schemas.microsoft.com/office/drawing/2014/main" val="20000"/>
+                    </a:ext>
+                  </a:extLst>
+                </a:gridCol>
+                <a:gridCol w="3873500">
+                  <a:extLst>
+                    <a:ext uri="{9D8B030D-6E8A-4147-A177-3AD203B41FA5}">
+                      <a16:colId xmlns:a16="http://schemas.microsoft.com/office/drawing/2014/main" val="20001"/>
+                    </a:ext>
+                  </a:extLst>
+                </a:gridCol>
+                <a:gridCol w="1460500">
+                  <a:extLst>
+                    <a:ext uri="{9D8B030D-6E8A-4147-A177-3AD203B41FA5}">
+                      <a16:colId xmlns:a16="http://schemas.microsoft.com/office/drawing/2014/main" val="20002"/>
+                    </a:ext>
+                  </a:extLst>
+                </a:gridCol>
+              </a:tblGrid>
+              <a:tr h="698500">
+                <a:tc>
+                  <a:txBody>
+                    <a:bodyPr/>
+                    <a:lstStyle/>
+                    <a:p>
+                      <a:pPr marL="0" indent="0" algn="l">
+                        <a:buNone/>
+                      </a:pPr>
+                      <a:r>
+                        <a:rPr lang="ru-RU" sz="1400" b="1" i="0">
+                          <a:solidFill>
+                            <a:srgbClr val="262626"/>
+                          </a:solidFill>
+                          <a:latin typeface="Arial" panose="020B0604020202020204" pitchFamily="34" charset="0"/>
+                          <a:cs typeface="Arial"/>
+                        </a:rPr>
+                        <a:t>Метод</a:t>
+                      </a:r>
+                      <a:endParaRPr sz="1400" b="1" i="0">
+                        <a:solidFill>
+                          <a:srgbClr val="262626"/>
+                        </a:solidFill>
+                        <a:latin typeface="Arial" panose="020B0604020202020204" pitchFamily="34" charset="0"/>
+                        <a:cs typeface="Arial"/>
+                      </a:endParaRPr>
+                    </a:p>
+                  </a:txBody>
+                  <a:tcPr marT="27432" marB="27432" anchor="ctr">
+                    <a:lnL w="0">
+                      <a:noFill/>
+                    </a:lnL>
+                    <a:lnR w="0">
+                      <a:noFill/>
+                    </a:lnR>
+                    <a:lnT w="0">
+                      <a:noFill/>
+                    </a:lnT>
+                    <a:lnB w="19050">
+                      <a:solidFill>
+                        <a:srgbClr val="065CAB"/>
+                      </a:solidFill>
+                    </a:lnB>
+                    <a:solidFill>
+                      <a:srgbClr val="DCE9F6"/>
+                    </a:solidFill>
+                  </a:tcPr>
+                </a:tc>
+                <a:tc>
+                  <a:txBody>
+                    <a:bodyPr/>
+                    <a:lstStyle/>
+                    <a:p>
+                      <a:pPr marL="0" indent="0" algn="l">
+                        <a:buNone/>
+                      </a:pPr>
+                      <a:r>
+                        <a:rPr lang="ru-RU" sz="1400" b="1" i="0">
+                          <a:solidFill>
+                            <a:srgbClr val="262626"/>
+                          </a:solidFill>
+                          <a:latin typeface="Arial" panose="020B0604020202020204" pitchFamily="34" charset="0"/>
+                          <a:cs typeface="Arial"/>
+                        </a:rPr>
+                        <a:t>Как получает прогноз</a:t>
+                      </a:r>
+                      <a:endParaRPr sz="1400" b="1" i="0">
+                        <a:solidFill>
+                          <a:srgbClr val="262626"/>
+                        </a:solidFill>
+                        <a:latin typeface="Arial" panose="020B0604020202020204" pitchFamily="34" charset="0"/>
+                        <a:cs typeface="Arial"/>
+                      </a:endParaRPr>
+                    </a:p>
+                  </a:txBody>
+                  <a:tcPr marT="27432" marB="27432" anchor="ctr">
+                    <a:lnL w="0">
+                      <a:noFill/>
+                    </a:lnL>
+                    <a:lnR w="0">
+                      <a:noFill/>
+                    </a:lnR>
+                    <a:lnT w="0">
+                      <a:noFill/>
+                    </a:lnT>
+                    <a:lnB w="19050">
+                      <a:solidFill>
+                        <a:srgbClr val="065CAB"/>
+                      </a:solidFill>
+                    </a:lnB>
+                    <a:solidFill>
+                      <a:srgbClr val="DCE9F6"/>
+                    </a:solidFill>
+                  </a:tcPr>
+                </a:tc>
+                <a:tc>
+                  <a:txBody>
+                    <a:bodyPr/>
+                    <a:lstStyle/>
+                    <a:p>
+                      <a:pPr marL="0" indent="0" algn="l">
+                        <a:buNone/>
+                      </a:pPr>
+                      <a:r>
+                        <a:rPr lang="ru-RU" sz="1400" b="1" i="0">
+                          <a:solidFill>
+                            <a:srgbClr val="262626"/>
+                          </a:solidFill>
+                          <a:latin typeface="Arial" panose="020B0604020202020204" pitchFamily="34" charset="0"/>
+                          <a:cs typeface="Arial"/>
+                        </a:rPr>
+                        <a:t>Роль</a:t>
+                      </a:r>
+                      <a:endParaRPr sz="1400" b="1" i="0">
+                        <a:solidFill>
+                          <a:srgbClr val="262626"/>
+                        </a:solidFill>
+                        <a:latin typeface="Arial" panose="020B0604020202020204" pitchFamily="34" charset="0"/>
+                        <a:cs typeface="Arial"/>
+                      </a:endParaRPr>
+                    </a:p>
+                  </a:txBody>
+                  <a:tcPr marT="27432" marB="27432" anchor="ctr">
+                    <a:lnL w="0">
+                      <a:noFill/>
+                    </a:lnL>
+                    <a:lnR w="0">
+                      <a:noFill/>
+                    </a:lnR>
+                    <a:lnT w="0">
+                      <a:noFill/>
+                    </a:lnT>
+                    <a:lnB w="19050">
+                      <a:solidFill>
+                        <a:srgbClr val="065CAB"/>
+                      </a:solidFill>
+                    </a:lnB>
+                    <a:solidFill>
+                      <a:srgbClr val="DCE9F6"/>
+                    </a:solidFill>
+                  </a:tcPr>
+                </a:tc>
+                <a:extLst>
+                  <a:ext uri="{0D108BD9-81ED-4DB2-BD59-A6C34878D82A}">
+                    <a16:rowId xmlns:a16="http://schemas.microsoft.com/office/drawing/2014/main" val="10000"/>
+                  </a:ext>
+                </a:extLst>
+              </a:tr>
+              <a:tr h="698500">
+                <a:tc>
+                  <a:txBody>
+                    <a:bodyPr/>
+                    <a:lstStyle/>
+                    <a:p>
+                      <a:pPr marL="0" indent="0" algn="l">
+                        <a:buNone/>
+                      </a:pPr>
+                      <a:r>
+                        <a:rPr lang="ru-RU" sz="1300" b="0" i="0">
+                          <a:solidFill>
+                            <a:srgbClr val="262626"/>
+                          </a:solidFill>
+                          <a:latin typeface="Arial" panose="020B0604020202020204" pitchFamily="34" charset="0"/>
+                          <a:cs typeface="Arial"/>
+                        </a:rPr>
+                        <a:t>Прогноз среднего</a:t>
+                      </a:r>
+                      <a:endParaRPr sz="1300" b="0" i="0">
+                        <a:solidFill>
+                          <a:srgbClr val="262626"/>
+                        </a:solidFill>
+                        <a:latin typeface="Arial" panose="020B0604020202020204" pitchFamily="34" charset="0"/>
+                        <a:cs typeface="Arial"/>
+                      </a:endParaRPr>
+                    </a:p>
+                  </a:txBody>
+                  <a:tcPr marT="27432" marB="27432" anchor="ctr">
+                    <a:lnT w="19050" cap="flat" cmpd="sng" algn="ctr">
+                      <a:solidFill>
+                        <a:srgbClr val="065CAB"/>
+                      </a:solidFill>
+                      <a:prstDash val="solid"/>
+                      <a:round/>
+                      <a:headEnd type="none" w="med" len="med"/>
+                      <a:tailEnd type="none" w="med" len="med"/>
+                    </a:lnT>
+                    <a:solidFill>
+                      <a:srgbClr val="FFFFFF"/>
+                    </a:solidFill>
+                  </a:tcPr>
+                </a:tc>
+                <a:tc>
+                  <a:txBody>
+                    <a:bodyPr/>
+                    <a:lstStyle/>
+                    <a:p>
+                      <a:pPr marL="0" indent="0" algn="l">
+                        <a:buNone/>
+                      </a:pPr>
+                      <a:r>
+                        <a:rPr lang="ru-RU" sz="1300" b="0" i="0">
+                          <a:solidFill>
+                            <a:srgbClr val="262626"/>
+                          </a:solidFill>
+                          <a:latin typeface="Arial" panose="020B0604020202020204" pitchFamily="34" charset="0"/>
+                          <a:cs typeface="Arial"/>
+                        </a:rPr>
+                        <a:t>Одно среднее для всех строк</a:t>
+                      </a:r>
+                      <a:endParaRPr sz="1300" b="0" i="0">
+                        <a:solidFill>
+                          <a:srgbClr val="262626"/>
+                        </a:solidFill>
+                        <a:latin typeface="Arial" panose="020B0604020202020204" pitchFamily="34" charset="0"/>
+                        <a:cs typeface="Arial"/>
+                      </a:endParaRPr>
+                    </a:p>
+                  </a:txBody>
+                  <a:tcPr marT="27432" marB="27432" anchor="ctr">
+                    <a:lnT w="19050" cap="flat" cmpd="sng" algn="ctr">
+                      <a:solidFill>
+                        <a:srgbClr val="065CAB"/>
+                      </a:solidFill>
+                      <a:prstDash val="solid"/>
+                      <a:round/>
+                      <a:headEnd type="none" w="med" len="med"/>
+                      <a:tailEnd type="none" w="med" len="med"/>
+                    </a:lnT>
+                    <a:solidFill>
+                      <a:srgbClr val="FFFFFF"/>
+                    </a:solidFill>
+                  </a:tcPr>
+                </a:tc>
+                <a:tc>
+                  <a:txBody>
+                    <a:bodyPr/>
+                    <a:lstStyle/>
+                    <a:p>
+                      <a:pPr marL="0" indent="0" algn="l">
+                        <a:buNone/>
+                      </a:pPr>
+                      <a:r>
+                        <a:rPr lang="ru-RU" sz="1300" b="0" i="0">
+                          <a:solidFill>
+                            <a:srgbClr val="262626"/>
+                          </a:solidFill>
+                          <a:latin typeface="Arial" panose="020B0604020202020204" pitchFamily="34" charset="0"/>
+                          <a:cs typeface="Arial"/>
+                        </a:rPr>
+                        <a:t>ориентир</a:t>
+                      </a:r>
+                      <a:endParaRPr sz="1300" b="0" i="0">
+                        <a:solidFill>
+                          <a:srgbClr val="262626"/>
+                        </a:solidFill>
+                        <a:latin typeface="Arial" panose="020B0604020202020204" pitchFamily="34" charset="0"/>
+                        <a:cs typeface="Arial"/>
+                      </a:endParaRPr>
+                    </a:p>
+                  </a:txBody>
+                  <a:tcPr marT="27432" marB="27432" anchor="ctr">
+                    <a:lnT w="19050" cap="flat" cmpd="sng" algn="ctr">
+                      <a:solidFill>
+                        <a:srgbClr val="065CAB"/>
+                      </a:solidFill>
+                      <a:prstDash val="solid"/>
+                      <a:round/>
+                      <a:headEnd type="none" w="med" len="med"/>
+                      <a:tailEnd type="none" w="med" len="med"/>
+                    </a:lnT>
+                    <a:solidFill>
+                      <a:srgbClr val="FFFFFF"/>
+                    </a:solidFill>
+                  </a:tcPr>
+                </a:tc>
+                <a:extLst>
+                  <a:ext uri="{0D108BD9-81ED-4DB2-BD59-A6C34878D82A}">
+                    <a16:rowId xmlns:a16="http://schemas.microsoft.com/office/drawing/2014/main" val="10001"/>
+                  </a:ext>
+                </a:extLst>
+              </a:tr>
+              <a:tr h="698500">
+                <a:tc>
+                  <a:txBody>
+                    <a:bodyPr/>
+                    <a:lstStyle/>
+                    <a:p>
+                      <a:pPr marL="0" indent="0" algn="l">
+                        <a:buNone/>
+                      </a:pPr>
+                      <a:r>
+                        <a:rPr lang="ru-RU" sz="1300" b="0" i="0">
+                          <a:solidFill>
+                            <a:srgbClr val="262626"/>
+                          </a:solidFill>
+                          <a:latin typeface="Arial" panose="020B0604020202020204" pitchFamily="34" charset="0"/>
+                          <a:cs typeface="Arial"/>
+                        </a:rPr>
+                        <a:t>Гребневая регрессия (</a:t>
+                      </a:r>
+                      <a:r>
+                        <a:rPr lang="en-US" sz="1300" b="0" i="0">
+                          <a:solidFill>
+                            <a:srgbClr val="262626"/>
+                          </a:solidFill>
+                          <a:latin typeface="Arial" panose="020B0604020202020204" pitchFamily="34" charset="0"/>
+                          <a:cs typeface="Arial"/>
+                        </a:rPr>
+                        <a:t>Ridge)</a:t>
+                      </a:r>
+                      <a:endParaRPr sz="1300" b="0" i="0">
+                        <a:solidFill>
+                          <a:srgbClr val="262626"/>
+                        </a:solidFill>
+                        <a:latin typeface="Arial" panose="020B0604020202020204" pitchFamily="34" charset="0"/>
+                        <a:cs typeface="Arial"/>
+                      </a:endParaRPr>
+                    </a:p>
+                  </a:txBody>
+                  <a:tcPr marT="27432" marB="27432" anchor="ctr">
+                    <a:solidFill>
+                      <a:srgbClr val="FFFFFF"/>
+                    </a:solidFill>
+                  </a:tcPr>
+                </a:tc>
+                <a:tc>
+                  <a:txBody>
+                    <a:bodyPr/>
+                    <a:lstStyle/>
+                    <a:p>
+                      <a:pPr marL="0" indent="0" algn="l">
+                        <a:buNone/>
+                      </a:pPr>
+                      <a:r>
+                        <a:rPr lang="ru-RU" sz="1300" b="0" i="0">
+                          <a:solidFill>
+                            <a:srgbClr val="262626"/>
+                          </a:solidFill>
+                          <a:latin typeface="Arial" panose="020B0604020202020204" pitchFamily="34" charset="0"/>
+                          <a:cs typeface="Arial"/>
+                        </a:rPr>
+                        <a:t>Складывает линейные вклады</a:t>
+                      </a:r>
+                      <a:endParaRPr sz="1300" b="0" i="0">
+                        <a:solidFill>
+                          <a:srgbClr val="262626"/>
+                        </a:solidFill>
+                        <a:latin typeface="Arial" panose="020B0604020202020204" pitchFamily="34" charset="0"/>
+                        <a:cs typeface="Arial"/>
+                      </a:endParaRPr>
+                    </a:p>
+                  </a:txBody>
+                  <a:tcPr marT="27432" marB="27432" anchor="ctr">
+                    <a:solidFill>
+                      <a:srgbClr val="FFFFFF"/>
+                    </a:solidFill>
+                  </a:tcPr>
+                </a:tc>
+                <a:tc>
+                  <a:txBody>
+                    <a:bodyPr/>
+                    <a:lstStyle/>
+                    <a:p>
+                      <a:pPr marL="0" indent="0" algn="l">
+                        <a:buNone/>
+                      </a:pPr>
+                      <a:r>
+                        <a:rPr lang="ru-RU" sz="1300" b="0" i="0">
+                          <a:solidFill>
+                            <a:srgbClr val="262626"/>
+                          </a:solidFill>
+                          <a:latin typeface="Arial" panose="020B0604020202020204" pitchFamily="34" charset="0"/>
+                          <a:cs typeface="Arial"/>
+                        </a:rPr>
+                        <a:t>кандидат</a:t>
+                      </a:r>
+                      <a:endParaRPr sz="1300" b="0" i="0">
+                        <a:solidFill>
+                          <a:srgbClr val="262626"/>
+                        </a:solidFill>
+                        <a:latin typeface="Arial" panose="020B0604020202020204" pitchFamily="34" charset="0"/>
+                        <a:cs typeface="Arial"/>
+                      </a:endParaRPr>
+                    </a:p>
+                  </a:txBody>
+                  <a:tcPr marT="27432" marB="27432" anchor="ctr">
+                    <a:solidFill>
+                      <a:srgbClr val="FFFFFF"/>
+                    </a:solidFill>
+                  </a:tcPr>
+                </a:tc>
+                <a:extLst>
+                  <a:ext uri="{0D108BD9-81ED-4DB2-BD59-A6C34878D82A}">
+                    <a16:rowId xmlns:a16="http://schemas.microsoft.com/office/drawing/2014/main" val="10002"/>
+                  </a:ext>
+                </a:extLst>
+              </a:tr>
+              <a:tr h="698500">
+                <a:tc>
+                  <a:txBody>
+                    <a:bodyPr/>
+                    <a:lstStyle/>
+                    <a:p>
+                      <a:pPr marL="0" indent="0" algn="l">
+                        <a:buNone/>
+                      </a:pPr>
+                      <a:r>
+                        <a:rPr lang="ru-RU" sz="1300" b="0" i="0">
+                          <a:solidFill>
+                            <a:srgbClr val="262626"/>
+                          </a:solidFill>
+                          <a:latin typeface="Arial" panose="020B0604020202020204" pitchFamily="34" charset="0"/>
+                          <a:cs typeface="Arial"/>
+                        </a:rPr>
+                        <a:t>Случайный лес</a:t>
+                      </a:r>
+                      <a:endParaRPr sz="1300" b="0" i="0">
+                        <a:solidFill>
+                          <a:srgbClr val="262626"/>
+                        </a:solidFill>
+                        <a:latin typeface="Arial" panose="020B0604020202020204" pitchFamily="34" charset="0"/>
+                        <a:cs typeface="Arial"/>
+                      </a:endParaRPr>
+                    </a:p>
+                  </a:txBody>
+                  <a:tcPr marT="27432" marB="27432" anchor="ctr">
+                    <a:solidFill>
+                      <a:srgbClr val="FFFFFF"/>
+                    </a:solidFill>
+                  </a:tcPr>
+                </a:tc>
+                <a:tc>
+                  <a:txBody>
+                    <a:bodyPr/>
+                    <a:lstStyle/>
+                    <a:p>
+                      <a:pPr marL="0" indent="0" algn="l">
+                        <a:buNone/>
+                      </a:pPr>
+                      <a:r>
+                        <a:rPr lang="ru-RU" sz="1300" b="0" i="0">
+                          <a:solidFill>
+                            <a:srgbClr val="262626"/>
+                          </a:solidFill>
+                          <a:latin typeface="Arial" panose="020B0604020202020204" pitchFamily="34" charset="0"/>
+                          <a:cs typeface="Arial"/>
+                        </a:rPr>
+                        <a:t>Усредняет много деревьев</a:t>
+                      </a:r>
+                      <a:endParaRPr sz="1300" b="0" i="0">
+                        <a:solidFill>
+                          <a:srgbClr val="262626"/>
+                        </a:solidFill>
+                        <a:latin typeface="Arial" panose="020B0604020202020204" pitchFamily="34" charset="0"/>
+                        <a:cs typeface="Arial"/>
+                      </a:endParaRPr>
+                    </a:p>
+                  </a:txBody>
+                  <a:tcPr marT="27432" marB="27432" anchor="ctr">
+                    <a:solidFill>
+                      <a:srgbClr val="FFFFFF"/>
+                    </a:solidFill>
+                  </a:tcPr>
+                </a:tc>
+                <a:tc>
+                  <a:txBody>
+                    <a:bodyPr/>
+                    <a:lstStyle/>
+                    <a:p>
+                      <a:pPr marL="0" indent="0" algn="l">
+                        <a:buNone/>
+                      </a:pPr>
+                      <a:r>
+                        <a:rPr lang="ru-RU" sz="1300" b="0" i="0">
+                          <a:solidFill>
+                            <a:srgbClr val="262626"/>
+                          </a:solidFill>
+                          <a:latin typeface="Arial" panose="020B0604020202020204" pitchFamily="34" charset="0"/>
+                          <a:cs typeface="Arial"/>
+                        </a:rPr>
+                        <a:t>кандидат</a:t>
+                      </a:r>
+                      <a:endParaRPr sz="1300" b="0" i="0">
+                        <a:solidFill>
+                          <a:srgbClr val="262626"/>
+                        </a:solidFill>
+                        <a:latin typeface="Arial" panose="020B0604020202020204" pitchFamily="34" charset="0"/>
+                        <a:cs typeface="Arial"/>
+                      </a:endParaRPr>
+                    </a:p>
+                  </a:txBody>
+                  <a:tcPr marT="27432" marB="27432" anchor="ctr">
+                    <a:solidFill>
+                      <a:srgbClr val="FFFFFF"/>
+                    </a:solidFill>
+                  </a:tcPr>
+                </a:tc>
+                <a:extLst>
+                  <a:ext uri="{0D108BD9-81ED-4DB2-BD59-A6C34878D82A}">
+                    <a16:rowId xmlns:a16="http://schemas.microsoft.com/office/drawing/2014/main" val="10003"/>
+                  </a:ext>
+                </a:extLst>
+              </a:tr>
+              <a:tr h="698500">
+                <a:tc>
+                  <a:txBody>
+                    <a:bodyPr/>
+                    <a:lstStyle/>
+                    <a:p>
+                      <a:pPr marL="0" indent="0" algn="l">
+                        <a:buNone/>
+                      </a:pPr>
+                      <a:r>
+                        <a:rPr lang="ru-RU" sz="1300" b="0" i="0">
+                          <a:solidFill>
+                            <a:srgbClr val="262626"/>
+                          </a:solidFill>
+                          <a:latin typeface="Arial" panose="020B0604020202020204" pitchFamily="34" charset="0"/>
+                          <a:cs typeface="Arial"/>
+                        </a:rPr>
+                        <a:t>Градиентный бустинг</a:t>
+                      </a:r>
+                      <a:endParaRPr sz="1300" b="0" i="0">
+                        <a:solidFill>
+                          <a:srgbClr val="262626"/>
+                        </a:solidFill>
+                        <a:latin typeface="Arial" panose="020B0604020202020204" pitchFamily="34" charset="0"/>
+                        <a:cs typeface="Arial"/>
+                      </a:endParaRPr>
+                    </a:p>
+                  </a:txBody>
+                  <a:tcPr marT="27432" marB="27432" anchor="ctr">
+                    <a:solidFill>
+                      <a:srgbClr val="FFFFFF"/>
+                    </a:solidFill>
+                  </a:tcPr>
+                </a:tc>
+                <a:tc>
+                  <a:txBody>
+                    <a:bodyPr/>
+                    <a:lstStyle/>
+                    <a:p>
+                      <a:pPr marL="0" indent="0" algn="l">
+                        <a:buNone/>
+                      </a:pPr>
+                      <a:r>
+                        <a:rPr lang="ru-RU" sz="1300" b="0" i="0">
+                          <a:solidFill>
+                            <a:srgbClr val="262626"/>
+                          </a:solidFill>
+                          <a:latin typeface="Arial" panose="020B0604020202020204" pitchFamily="34" charset="0"/>
+                          <a:cs typeface="Arial"/>
+                        </a:rPr>
+                        <a:t>Деревья исправляют ошибки по очереди</a:t>
+                      </a:r>
+                      <a:endParaRPr sz="1300" b="0" i="0">
+                        <a:solidFill>
+                          <a:srgbClr val="262626"/>
+                        </a:solidFill>
+                        <a:latin typeface="Arial" panose="020B0604020202020204" pitchFamily="34" charset="0"/>
+                        <a:cs typeface="Arial"/>
+                      </a:endParaRPr>
+                    </a:p>
+                  </a:txBody>
+                  <a:tcPr marT="27432" marB="27432" anchor="ctr">
+                    <a:solidFill>
+                      <a:srgbClr val="FFFFFF"/>
+                    </a:solidFill>
+                  </a:tcPr>
+                </a:tc>
+                <a:tc>
+                  <a:txBody>
+                    <a:bodyPr/>
+                    <a:lstStyle/>
+                    <a:p>
+                      <a:pPr marL="0" indent="0" algn="l">
+                        <a:buNone/>
+                      </a:pPr>
+                      <a:r>
+                        <a:rPr lang="ru-RU" sz="1300" b="0" i="0">
+                          <a:solidFill>
+                            <a:srgbClr val="262626"/>
+                          </a:solidFill>
+                          <a:latin typeface="Arial" panose="020B0604020202020204" pitchFamily="34" charset="0"/>
+                          <a:cs typeface="Arial"/>
+                        </a:rPr>
+                        <a:t>кандидат</a:t>
+                      </a:r>
+                      <a:endParaRPr sz="1300" b="0" i="0">
+                        <a:solidFill>
+                          <a:srgbClr val="262626"/>
+                        </a:solidFill>
+                        <a:latin typeface="Arial" panose="020B0604020202020204" pitchFamily="34" charset="0"/>
+                        <a:cs typeface="Arial"/>
+                      </a:endParaRPr>
+                    </a:p>
+                  </a:txBody>
+                  <a:tcPr marT="27432" marB="27432" anchor="ctr">
+                    <a:solidFill>
+                      <a:srgbClr val="FFFFFF"/>
+                    </a:solidFill>
+                  </a:tcPr>
+                </a:tc>
+                <a:extLst>
+                  <a:ext uri="{0D108BD9-81ED-4DB2-BD59-A6C34878D82A}">
+                    <a16:rowId xmlns:a16="http://schemas.microsoft.com/office/drawing/2014/main" val="10004"/>
+                  </a:ext>
+                </a:extLst>
+              </a:tr>
+              <a:tr h="698500">
+                <a:tc>
+                  <a:txBody>
+                    <a:bodyPr/>
+                    <a:lstStyle/>
+                    <a:p>
+                      <a:pPr marL="0" indent="0" algn="l">
+                        <a:buNone/>
+                      </a:pPr>
+                      <a:r>
+                        <a:rPr lang="ru-RU" sz="1300" b="0" i="0">
+                          <a:solidFill>
+                            <a:srgbClr val="262626"/>
+                          </a:solidFill>
+                          <a:latin typeface="Arial" panose="020B0604020202020204" pitchFamily="34" charset="0"/>
+                          <a:cs typeface="Arial"/>
+                        </a:rPr>
+                        <a:t>Метод опорных векторов (</a:t>
+                      </a:r>
+                      <a:r>
+                        <a:rPr lang="en-US" sz="1300" b="0" i="0">
+                          <a:solidFill>
+                            <a:srgbClr val="262626"/>
+                          </a:solidFill>
+                          <a:latin typeface="Arial" panose="020B0604020202020204" pitchFamily="34" charset="0"/>
+                          <a:cs typeface="Arial"/>
+                        </a:rPr>
+                        <a:t>SVR)</a:t>
+                      </a:r>
+                      <a:endParaRPr sz="1300" b="0" i="0">
+                        <a:solidFill>
+                          <a:srgbClr val="262626"/>
+                        </a:solidFill>
+                        <a:latin typeface="Arial" panose="020B0604020202020204" pitchFamily="34" charset="0"/>
+                        <a:cs typeface="Arial"/>
+                      </a:endParaRPr>
+                    </a:p>
+                  </a:txBody>
+                  <a:tcPr marT="27432" marB="27432" anchor="ctr">
+                    <a:solidFill>
+                      <a:srgbClr val="FFFFFF"/>
+                    </a:solidFill>
+                  </a:tcPr>
+                </a:tc>
+                <a:tc>
+                  <a:txBody>
+                    <a:bodyPr/>
+                    <a:lstStyle/>
+                    <a:p>
+                      <a:pPr marL="0" indent="0" algn="l">
+                        <a:buNone/>
+                      </a:pPr>
+                      <a:r>
+                        <a:rPr lang="ru-RU" sz="1300" b="0" i="0">
+                          <a:solidFill>
+                            <a:srgbClr val="262626"/>
+                          </a:solidFill>
+                          <a:latin typeface="Arial" panose="020B0604020202020204" pitchFamily="34" charset="0"/>
+                          <a:cs typeface="Arial"/>
+                        </a:rPr>
+                        <a:t>Ищет гладкую зависимость</a:t>
+                      </a:r>
+                      <a:endParaRPr sz="1300" b="0" i="0">
+                        <a:solidFill>
+                          <a:srgbClr val="262626"/>
+                        </a:solidFill>
+                        <a:latin typeface="Arial" panose="020B0604020202020204" pitchFamily="34" charset="0"/>
+                        <a:cs typeface="Arial"/>
+                      </a:endParaRPr>
+                    </a:p>
+                  </a:txBody>
+                  <a:tcPr marT="27432" marB="27432" anchor="ctr">
+                    <a:solidFill>
+                      <a:srgbClr val="FFFFFF"/>
+                    </a:solidFill>
+                  </a:tcPr>
+                </a:tc>
+                <a:tc>
+                  <a:txBody>
+                    <a:bodyPr/>
+                    <a:lstStyle/>
+                    <a:p>
+                      <a:pPr marL="0" indent="0" algn="l">
+                        <a:buNone/>
+                      </a:pPr>
+                      <a:r>
+                        <a:rPr lang="ru-RU" sz="1300" b="0" i="0">
+                          <a:solidFill>
+                            <a:srgbClr val="262626"/>
+                          </a:solidFill>
+                          <a:latin typeface="Arial" panose="020B0604020202020204" pitchFamily="34" charset="0"/>
+                          <a:cs typeface="Arial"/>
+                        </a:rPr>
+                        <a:t>кандидат</a:t>
+                      </a:r>
+                      <a:endParaRPr sz="1300" b="0" i="0">
+                        <a:solidFill>
+                          <a:srgbClr val="262626"/>
+                        </a:solidFill>
+                        <a:latin typeface="Arial" panose="020B0604020202020204" pitchFamily="34" charset="0"/>
+                        <a:cs typeface="Arial"/>
+                      </a:endParaRPr>
+                    </a:p>
+                  </a:txBody>
+                  <a:tcPr marT="27432" marB="27432" anchor="ctr">
+                    <a:solidFill>
+                      <a:srgbClr val="FFFFFF"/>
+                    </a:solidFill>
+                  </a:tcPr>
+                </a:tc>
+                <a:extLst>
+                  <a:ext uri="{0D108BD9-81ED-4DB2-BD59-A6C34878D82A}">
+                    <a16:rowId xmlns:a16="http://schemas.microsoft.com/office/drawing/2014/main" val="10005"/>
+                  </a:ext>
+                </a:extLst>
+              </a:tr>
+            </a:tbl>
+          </a:graphicData>
+        </a:graphic>
+      </p:graphicFrame>
       <p:sp>
         <p:nvSpPr>
-          <p:cNvPr id="2" name="ProtocolStep1">
+          <p:cNvPr id="16" name="TenChecks">
             <a:extLst>
               <a:ext uri="{FF2B5EF4-FFF2-40B4-BE49-F238E27FC236}">
-                <a16:creationId xmlns:a16="http://schemas.microsoft.com/office/drawing/2014/main" id="{9FBA58AF-956C-48ED-A159-04361E526A47}"/>
+                <a16:creationId xmlns:a16="http://schemas.microsoft.com/office/drawing/2014/main" id="{D83B49D7-1DA9-4EDF-8CEA-7A80676C78CB}"/>
               </a:ext>
             </a:extLst>
           </p:cNvPr>
@@ -22529,8 +21966,8 @@
         </p:nvSpPr>
         <p:spPr>
           <a:xfrm>
-            <a:off x="571500" y="2095500"/>
-            <a:ext cx="1587500" cy="1422400"/>
+            <a:off x="8382000" y="1600200"/>
+            <a:ext cx="3378200" cy="1905000"/>
           </a:xfrm>
           <a:prstGeom prst="roundRect">
             <a:avLst/>
@@ -22538,7 +21975,7 @@
           <a:solidFill>
             <a:srgbClr val="DCE9F6"/>
           </a:solidFill>
-          <a:ln w="19050">
+          <a:ln w="17780">
             <a:solidFill>
               <a:srgbClr val="0E5DAB"/>
             </a:solidFill>
@@ -22561,72 +21998,31 @@
           </a:fontRef>
         </p:style>
         <p:txBody>
-          <a:bodyPr rtlCol="0" anchor="ctr"/>
+          <a:bodyPr wrap="square" lIns="101600" tIns="76200" rIns="101600" bIns="76200" rtlCol="0" anchor="ctr"/>
           <a:lstStyle/>
           <a:p>
             <a:pPr algn="ctr"/>
             <a:r>
-              <a:rPr lang="ru-RU" sz="1300">
+              <a:rPr lang="ru-RU" sz="1700" b="1">
                 <a:solidFill>
                   <a:srgbClr val="262626"/>
                 </a:solidFill>
                 <a:latin typeface="Arial" panose="020B0604020202020204" pitchFamily="34" charset="0"/>
               </a:rPr>
-              <a:t>Шаг 1
-Исходные данные
-1023 строки</a:t>
+              <a:t>10 проверок
+внутри 716 строк
+9 частей для обучения
+1 часть для проверки</a:t>
             </a:r>
           </a:p>
         </p:txBody>
       </p:sp>
-      <p:cxnSp>
-        <p:nvCxnSpPr>
-          <p:cNvPr id="3" name="ProtocolArrow1">
+      <p:sp>
+        <p:nvSpPr>
+          <p:cNvPr id="17" name="SelectionRule">
             <a:extLst>
               <a:ext uri="{FF2B5EF4-FFF2-40B4-BE49-F238E27FC236}">
-                <a16:creationId xmlns:a16="http://schemas.microsoft.com/office/drawing/2014/main" id="{EA998185-B7EB-4623-AA94-E39214B63C8A}"/>
-              </a:ext>
-            </a:extLst>
-          </p:cNvPr>
-          <p:cNvCxnSpPr/>
-          <p:nvPr/>
-        </p:nvCxnSpPr>
-        <p:spPr>
-          <a:xfrm>
-            <a:off x="2159000" y="2806700"/>
-            <a:ext cx="317500" cy="0"/>
-          </a:xfrm>
-          <a:prstGeom prst="straightConnector1">
-            <a:avLst/>
-          </a:prstGeom>
-          <a:ln w="25400">
-            <a:solidFill>
-              <a:srgbClr val="0E5DAB"/>
-            </a:solidFill>
-            <a:tailEnd type="arrow"/>
-          </a:ln>
-        </p:spPr>
-        <p:style>
-          <a:lnRef idx="1">
-            <a:schemeClr val="accent1"/>
-          </a:lnRef>
-          <a:fillRef idx="0">
-            <a:schemeClr val="accent1"/>
-          </a:fillRef>
-          <a:effectRef idx="0">
-            <a:schemeClr val="accent1"/>
-          </a:effectRef>
-          <a:fontRef idx="minor">
-            <a:schemeClr val="tx1"/>
-          </a:fontRef>
-        </p:style>
-      </p:cxnSp>
-      <p:sp>
-        <p:nvSpPr>
-          <p:cNvPr id="5" name="ProtocolStep2">
-            <a:extLst>
-              <a:ext uri="{FF2B5EF4-FFF2-40B4-BE49-F238E27FC236}">
-                <a16:creationId xmlns:a16="http://schemas.microsoft.com/office/drawing/2014/main" id="{45FCEF45-3809-4CDC-A8CE-204C9A5976C5}"/>
+                <a16:creationId xmlns:a16="http://schemas.microsoft.com/office/drawing/2014/main" id="{F9D1049D-372D-4071-BBF2-C0662F72EC5A}"/>
               </a:ext>
             </a:extLst>
           </p:cNvPr>
@@ -22635,16 +22031,16 @@
         </p:nvSpPr>
         <p:spPr>
           <a:xfrm>
-            <a:off x="2476500" y="2095500"/>
-            <a:ext cx="1587500" cy="1422400"/>
+            <a:off x="8382000" y="3708400"/>
+            <a:ext cx="3378200" cy="2209800"/>
           </a:xfrm>
           <a:prstGeom prst="roundRect">
             <a:avLst/>
           </a:prstGeom>
           <a:solidFill>
-            <a:srgbClr val="DCE9F6"/>
+            <a:srgbClr val="FFC000"/>
           </a:solidFill>
-          <a:ln w="19050">
+          <a:ln w="17780">
             <a:solidFill>
               <a:srgbClr val="0E5DAB"/>
             </a:solidFill>
@@ -22667,535 +22063,21 @@
           </a:fontRef>
         </p:style>
         <p:txBody>
-          <a:bodyPr rtlCol="0" anchor="ctr"/>
+          <a:bodyPr wrap="square" lIns="101600" tIns="76200" rIns="101600" bIns="76200" rtlCol="0" anchor="ctr"/>
           <a:lstStyle/>
           <a:p>
             <a:pPr algn="ctr"/>
             <a:r>
-              <a:rPr lang="ru-RU" sz="1300">
+              <a:rPr lang="ru-RU" sz="1600" b="1">
                 <a:solidFill>
                   <a:srgbClr val="262626"/>
                 </a:solidFill>
                 <a:latin typeface="Arial" panose="020B0604020202020204" pitchFamily="34" charset="0"/>
               </a:rPr>
-              <a:t>Шаг 2
-Разделение 70 / 30
-716 – обучающая
-307 – тестовая</a:t>
+              <a:t>Выбор до итоговой проверки
+RMSE – среднеквадратичная ошибка
+Меньше – лучше</a:t>
             </a:r>
-          </a:p>
-        </p:txBody>
-      </p:sp>
-      <p:cxnSp>
-        <p:nvCxnSpPr>
-          <p:cNvPr id="6" name="ProtocolArrow2">
-            <a:extLst>
-              <a:ext uri="{FF2B5EF4-FFF2-40B4-BE49-F238E27FC236}">
-                <a16:creationId xmlns:a16="http://schemas.microsoft.com/office/drawing/2014/main" id="{F4534B64-DAA5-4520-A816-E4E1E8684E58}"/>
-              </a:ext>
-            </a:extLst>
-          </p:cNvPr>
-          <p:cNvCxnSpPr/>
-          <p:nvPr/>
-        </p:nvCxnSpPr>
-        <p:spPr>
-          <a:xfrm>
-            <a:off x="4064000" y="2806700"/>
-            <a:ext cx="317500" cy="0"/>
-          </a:xfrm>
-          <a:prstGeom prst="straightConnector1">
-            <a:avLst/>
-          </a:prstGeom>
-          <a:ln w="25400">
-            <a:solidFill>
-              <a:srgbClr val="0E5DAB"/>
-            </a:solidFill>
-            <a:tailEnd type="arrow"/>
-          </a:ln>
-        </p:spPr>
-        <p:style>
-          <a:lnRef idx="1">
-            <a:schemeClr val="accent1"/>
-          </a:lnRef>
-          <a:fillRef idx="0">
-            <a:schemeClr val="accent1"/>
-          </a:fillRef>
-          <a:effectRef idx="0">
-            <a:schemeClr val="accent1"/>
-          </a:effectRef>
-          <a:fontRef idx="minor">
-            <a:schemeClr val="tx1"/>
-          </a:fontRef>
-        </p:style>
-      </p:cxnSp>
-      <p:sp>
-        <p:nvSpPr>
-          <p:cNvPr id="7" name="ProtocolStep3">
-            <a:extLst>
-              <a:ext uri="{FF2B5EF4-FFF2-40B4-BE49-F238E27FC236}">
-                <a16:creationId xmlns:a16="http://schemas.microsoft.com/office/drawing/2014/main" id="{E28D10C8-A293-407B-8574-1A237A4FD148}"/>
-              </a:ext>
-            </a:extLst>
-          </p:cNvPr>
-          <p:cNvSpPr/>
-          <p:nvPr/>
-        </p:nvSpPr>
-        <p:spPr>
-          <a:xfrm>
-            <a:off x="4381500" y="2095500"/>
-            <a:ext cx="1587500" cy="1422400"/>
-          </a:xfrm>
-          <a:prstGeom prst="roundRect">
-            <a:avLst/>
-          </a:prstGeom>
-          <a:solidFill>
-            <a:srgbClr val="DCE9F6"/>
-          </a:solidFill>
-          <a:ln w="19050">
-            <a:solidFill>
-              <a:srgbClr val="0E5DAB"/>
-            </a:solidFill>
-          </a:ln>
-        </p:spPr>
-        <p:style>
-          <a:lnRef idx="2">
-            <a:schemeClr val="accent1">
-              <a:shade val="50000"/>
-            </a:schemeClr>
-          </a:lnRef>
-          <a:fillRef idx="1">
-            <a:schemeClr val="accent1"/>
-          </a:fillRef>
-          <a:effectRef idx="0">
-            <a:schemeClr val="accent1"/>
-          </a:effectRef>
-          <a:fontRef idx="minor">
-            <a:schemeClr val="lt1"/>
-          </a:fontRef>
-        </p:style>
-        <p:txBody>
-          <a:bodyPr rtlCol="0" anchor="ctr"/>
-          <a:lstStyle/>
-          <a:p>
-            <a:pPr algn="ctr"/>
-            <a:r>
-              <a:rPr lang="ru-RU" sz="1300">
-                <a:solidFill>
-                  <a:srgbClr val="262626"/>
-                </a:solidFill>
-                <a:latin typeface="Arial" panose="020B0604020202020204" pitchFamily="34" charset="0"/>
-              </a:rPr>
-              <a:t>Шаг 3
-10 блоков
-9 частей учатся
-1 часть проверяется</a:t>
-            </a:r>
-          </a:p>
-        </p:txBody>
-      </p:sp>
-      <p:cxnSp>
-        <p:nvCxnSpPr>
-          <p:cNvPr id="8" name="ProtocolArrow3">
-            <a:extLst>
-              <a:ext uri="{FF2B5EF4-FFF2-40B4-BE49-F238E27FC236}">
-                <a16:creationId xmlns:a16="http://schemas.microsoft.com/office/drawing/2014/main" id="{D63EFA29-62D2-4998-867B-0521D7618B81}"/>
-              </a:ext>
-            </a:extLst>
-          </p:cNvPr>
-          <p:cNvCxnSpPr/>
-          <p:nvPr/>
-        </p:nvCxnSpPr>
-        <p:spPr>
-          <a:xfrm>
-            <a:off x="5969000" y="2806700"/>
-            <a:ext cx="317500" cy="0"/>
-          </a:xfrm>
-          <a:prstGeom prst="straightConnector1">
-            <a:avLst/>
-          </a:prstGeom>
-          <a:ln w="25400">
-            <a:solidFill>
-              <a:srgbClr val="0E5DAB"/>
-            </a:solidFill>
-            <a:tailEnd type="arrow"/>
-          </a:ln>
-        </p:spPr>
-        <p:style>
-          <a:lnRef idx="1">
-            <a:schemeClr val="accent1"/>
-          </a:lnRef>
-          <a:fillRef idx="0">
-            <a:schemeClr val="accent1"/>
-          </a:fillRef>
-          <a:effectRef idx="0">
-            <a:schemeClr val="accent1"/>
-          </a:effectRef>
-          <a:fontRef idx="minor">
-            <a:schemeClr val="tx1"/>
-          </a:fontRef>
-        </p:style>
-      </p:cxnSp>
-      <p:sp>
-        <p:nvSpPr>
-          <p:cNvPr id="9" name="ProtocolStep4">
-            <a:extLst>
-              <a:ext uri="{FF2B5EF4-FFF2-40B4-BE49-F238E27FC236}">
-                <a16:creationId xmlns:a16="http://schemas.microsoft.com/office/drawing/2014/main" id="{CAC1052B-9958-4434-B8D5-E5A88D2C895A}"/>
-              </a:ext>
-            </a:extLst>
-          </p:cNvPr>
-          <p:cNvSpPr/>
-          <p:nvPr/>
-        </p:nvSpPr>
-        <p:spPr>
-          <a:xfrm>
-            <a:off x="6286500" y="2095500"/>
-            <a:ext cx="1587500" cy="1422400"/>
-          </a:xfrm>
-          <a:prstGeom prst="roundRect">
-            <a:avLst/>
-          </a:prstGeom>
-          <a:solidFill>
-            <a:srgbClr val="DCE9F6"/>
-          </a:solidFill>
-          <a:ln w="19050">
-            <a:solidFill>
-              <a:srgbClr val="0E5DAB"/>
-            </a:solidFill>
-          </a:ln>
-        </p:spPr>
-        <p:style>
-          <a:lnRef idx="2">
-            <a:schemeClr val="accent1">
-              <a:shade val="50000"/>
-            </a:schemeClr>
-          </a:lnRef>
-          <a:fillRef idx="1">
-            <a:schemeClr val="accent1"/>
-          </a:fillRef>
-          <a:effectRef idx="0">
-            <a:schemeClr val="accent1"/>
-          </a:effectRef>
-          <a:fontRef idx="minor">
-            <a:schemeClr val="lt1"/>
-          </a:fontRef>
-        </p:style>
-        <p:txBody>
-          <a:bodyPr rtlCol="0" anchor="ctr"/>
-          <a:lstStyle/>
-          <a:p>
-            <a:pPr algn="ctr"/>
-            <a:r>
-              <a:rPr lang="ru-RU" sz="1300">
-                <a:solidFill>
-                  <a:srgbClr val="262626"/>
-                </a:solidFill>
-                <a:latin typeface="Arial" panose="020B0604020202020204" pitchFamily="34" charset="0"/>
-              </a:rPr>
-              <a:t>Шаг 4
-Настройка модели
-по сетке</a:t>
-            </a:r>
-          </a:p>
-        </p:txBody>
-      </p:sp>
-      <p:cxnSp>
-        <p:nvCxnSpPr>
-          <p:cNvPr id="10" name="ProtocolArrow4">
-            <a:extLst>
-              <a:ext uri="{FF2B5EF4-FFF2-40B4-BE49-F238E27FC236}">
-                <a16:creationId xmlns:a16="http://schemas.microsoft.com/office/drawing/2014/main" id="{9E77D747-5578-4393-B957-0E7156AF554B}"/>
-              </a:ext>
-            </a:extLst>
-          </p:cNvPr>
-          <p:cNvCxnSpPr/>
-          <p:nvPr/>
-        </p:nvCxnSpPr>
-        <p:spPr>
-          <a:xfrm>
-            <a:off x="7874000" y="2806700"/>
-            <a:ext cx="317500" cy="0"/>
-          </a:xfrm>
-          <a:prstGeom prst="straightConnector1">
-            <a:avLst/>
-          </a:prstGeom>
-          <a:ln w="25400">
-            <a:solidFill>
-              <a:srgbClr val="0E5DAB"/>
-            </a:solidFill>
-            <a:tailEnd type="arrow"/>
-          </a:ln>
-        </p:spPr>
-        <p:style>
-          <a:lnRef idx="1">
-            <a:schemeClr val="accent1"/>
-          </a:lnRef>
-          <a:fillRef idx="0">
-            <a:schemeClr val="accent1"/>
-          </a:fillRef>
-          <a:effectRef idx="0">
-            <a:schemeClr val="accent1"/>
-          </a:effectRef>
-          <a:fontRef idx="minor">
-            <a:schemeClr val="tx1"/>
-          </a:fontRef>
-        </p:style>
-      </p:cxnSp>
-      <p:sp>
-        <p:nvSpPr>
-          <p:cNvPr id="11" name="ProtocolStep5">
-            <a:extLst>
-              <a:ext uri="{FF2B5EF4-FFF2-40B4-BE49-F238E27FC236}">
-                <a16:creationId xmlns:a16="http://schemas.microsoft.com/office/drawing/2014/main" id="{CD1DF90D-3100-43E6-86E4-A8AAFB23661D}"/>
-              </a:ext>
-            </a:extLst>
-          </p:cNvPr>
-          <p:cNvSpPr/>
-          <p:nvPr/>
-        </p:nvSpPr>
-        <p:spPr>
-          <a:xfrm>
-            <a:off x="8191500" y="2095500"/>
-            <a:ext cx="1587500" cy="1422400"/>
-          </a:xfrm>
-          <a:prstGeom prst="roundRect">
-            <a:avLst/>
-          </a:prstGeom>
-          <a:solidFill>
-            <a:srgbClr val="DCE9F6"/>
-          </a:solidFill>
-          <a:ln w="19050">
-            <a:solidFill>
-              <a:srgbClr val="0E5DAB"/>
-            </a:solidFill>
-          </a:ln>
-        </p:spPr>
-        <p:style>
-          <a:lnRef idx="2">
-            <a:schemeClr val="accent1">
-              <a:shade val="50000"/>
-            </a:schemeClr>
-          </a:lnRef>
-          <a:fillRef idx="1">
-            <a:schemeClr val="accent1"/>
-          </a:fillRef>
-          <a:effectRef idx="0">
-            <a:schemeClr val="accent1"/>
-          </a:effectRef>
-          <a:fontRef idx="minor">
-            <a:schemeClr val="lt1"/>
-          </a:fontRef>
-        </p:style>
-        <p:txBody>
-          <a:bodyPr rtlCol="0" anchor="ctr"/>
-          <a:lstStyle/>
-          <a:p>
-            <a:pPr algn="ctr"/>
-            <a:r>
-              <a:rPr lang="ru-RU" sz="1300">
-                <a:solidFill>
-                  <a:srgbClr val="262626"/>
-                </a:solidFill>
-                <a:latin typeface="Arial" panose="020B0604020202020204" pitchFamily="34" charset="0"/>
-              </a:rPr>
-              <a:t>Шаг 5
-Выбранная модель
-обучается на 716 строках</a:t>
-            </a:r>
-          </a:p>
-        </p:txBody>
-      </p:sp>
-      <p:cxnSp>
-        <p:nvCxnSpPr>
-          <p:cNvPr id="12" name="ProtocolArrow5">
-            <a:extLst>
-              <a:ext uri="{FF2B5EF4-FFF2-40B4-BE49-F238E27FC236}">
-                <a16:creationId xmlns:a16="http://schemas.microsoft.com/office/drawing/2014/main" id="{C13A9BF7-E43D-4D3A-901F-93E942D7D8F2}"/>
-              </a:ext>
-            </a:extLst>
-          </p:cNvPr>
-          <p:cNvCxnSpPr/>
-          <p:nvPr/>
-        </p:nvCxnSpPr>
-        <p:spPr>
-          <a:xfrm>
-            <a:off x="9779000" y="2806700"/>
-            <a:ext cx="317500" cy="0"/>
-          </a:xfrm>
-          <a:prstGeom prst="straightConnector1">
-            <a:avLst/>
-          </a:prstGeom>
-          <a:ln w="25400">
-            <a:solidFill>
-              <a:srgbClr val="0E5DAB"/>
-            </a:solidFill>
-            <a:tailEnd type="arrow"/>
-          </a:ln>
-        </p:spPr>
-        <p:style>
-          <a:lnRef idx="1">
-            <a:schemeClr val="accent1"/>
-          </a:lnRef>
-          <a:fillRef idx="0">
-            <a:schemeClr val="accent1"/>
-          </a:fillRef>
-          <a:effectRef idx="0">
-            <a:schemeClr val="accent1"/>
-          </a:effectRef>
-          <a:fontRef idx="minor">
-            <a:schemeClr val="tx1"/>
-          </a:fontRef>
-        </p:style>
-      </p:cxnSp>
-      <p:sp>
-        <p:nvSpPr>
-          <p:cNvPr id="13" name="ProtocolStep6">
-            <a:extLst>
-              <a:ext uri="{FF2B5EF4-FFF2-40B4-BE49-F238E27FC236}">
-                <a16:creationId xmlns:a16="http://schemas.microsoft.com/office/drawing/2014/main" id="{223F862C-189C-4EC8-B58D-7EB3646DFD8D}"/>
-              </a:ext>
-            </a:extLst>
-          </p:cNvPr>
-          <p:cNvSpPr/>
-          <p:nvPr/>
-        </p:nvSpPr>
-        <p:spPr>
-          <a:xfrm>
-            <a:off x="10096500" y="2095500"/>
-            <a:ext cx="1587500" cy="1422400"/>
-          </a:xfrm>
-          <a:prstGeom prst="roundRect">
-            <a:avLst/>
-          </a:prstGeom>
-          <a:solidFill>
-            <a:srgbClr val="FFC000"/>
-          </a:solidFill>
-          <a:ln w="19050">
-            <a:solidFill>
-              <a:srgbClr val="0E5DAB"/>
-            </a:solidFill>
-          </a:ln>
-        </p:spPr>
-        <p:style>
-          <a:lnRef idx="2">
-            <a:schemeClr val="accent1">
-              <a:shade val="50000"/>
-            </a:schemeClr>
-          </a:lnRef>
-          <a:fillRef idx="1">
-            <a:schemeClr val="accent1"/>
-          </a:fillRef>
-          <a:effectRef idx="0">
-            <a:schemeClr val="accent1"/>
-          </a:effectRef>
-          <a:fontRef idx="minor">
-            <a:schemeClr val="lt1"/>
-          </a:fontRef>
-        </p:style>
-        <p:txBody>
-          <a:bodyPr rtlCol="0" anchor="ctr"/>
-          <a:lstStyle/>
-          <a:p>
-            <a:pPr algn="ctr"/>
-            <a:r>
-              <a:rPr lang="ru-RU" sz="1300">
-                <a:solidFill>
-                  <a:srgbClr val="262626"/>
-                </a:solidFill>
-                <a:latin typeface="Arial" panose="020B0604020202020204" pitchFamily="34" charset="0"/>
-              </a:rPr>
-              <a:t>Шаг 6
-Одна итоговая проверка
-на 307 строках</a:t>
-            </a:r>
-          </a:p>
-        </p:txBody>
-      </p:sp>
-      <p:sp>
-        <p:nvSpPr>
-          <p:cNvPr id="14" name="ProtocolRule">
-            <a:extLst>
-              <a:ext uri="{FF2B5EF4-FFF2-40B4-BE49-F238E27FC236}">
-                <a16:creationId xmlns:a16="http://schemas.microsoft.com/office/drawing/2014/main" id="{E5336EF0-7172-4304-AFAB-6BEA2328F67B}"/>
-              </a:ext>
-            </a:extLst>
-          </p:cNvPr>
-          <p:cNvSpPr txBox="1"/>
-          <p:nvPr/>
-        </p:nvSpPr>
-        <p:spPr>
-          <a:xfrm>
-            <a:off x="825500" y="4000500"/>
-            <a:ext cx="10541000" cy="646331"/>
-          </a:xfrm>
-          <a:prstGeom prst="rect">
-            <a:avLst/>
-          </a:prstGeom>
-          <a:noFill/>
-        </p:spPr>
-        <p:txBody>
-          <a:bodyPr vert="horz" wrap="square" rtlCol="0">
-            <a:spAutoFit/>
-          </a:bodyPr>
-          <a:lstStyle/>
-          <a:p>
-            <a:pPr algn="l"/>
-            <a:r>
-              <a:rPr lang="ru-RU" sz="1800" b="1">
-                <a:solidFill>
-                  <a:srgbClr val="0E5DAB"/>
-                </a:solidFill>
-                <a:latin typeface="Arial" panose="020B0604020202020204" pitchFamily="34" charset="0"/>
-              </a:rPr>
-              <a:t>В каждом цикле предобработка и модель обучаются заново. Тестовая выборка не участвует в выборе.</a:t>
-            </a:r>
-            <a:endParaRPr lang="ru-RU" sz="1800" b="1" dirty="0">
-              <a:solidFill>
-                <a:srgbClr val="0E5DAB"/>
-              </a:solidFill>
-              <a:latin typeface="Arial" panose="020B0604020202020204" pitchFamily="34" charset="0"/>
-            </a:endParaRPr>
-          </a:p>
-        </p:txBody>
-      </p:sp>
-      <p:sp>
-        <p:nvSpPr>
-          <p:cNvPr id="15" name="ProtocolMetric">
-            <a:extLst>
-              <a:ext uri="{FF2B5EF4-FFF2-40B4-BE49-F238E27FC236}">
-                <a16:creationId xmlns:a16="http://schemas.microsoft.com/office/drawing/2014/main" id="{9E91C863-2DD8-4CA7-B746-1494FB1C5CD5}"/>
-              </a:ext>
-            </a:extLst>
-          </p:cNvPr>
-          <p:cNvSpPr txBox="1"/>
-          <p:nvPr/>
-        </p:nvSpPr>
-        <p:spPr>
-          <a:xfrm>
-            <a:off x="825500" y="5080000"/>
-            <a:ext cx="10541000" cy="615553"/>
-          </a:xfrm>
-          <a:prstGeom prst="rect">
-            <a:avLst/>
-          </a:prstGeom>
-          <a:noFill/>
-        </p:spPr>
-        <p:txBody>
-          <a:bodyPr vert="horz" wrap="square" rtlCol="0">
-            <a:spAutoFit/>
-          </a:bodyPr>
-          <a:lstStyle/>
-          <a:p>
-            <a:pPr algn="l"/>
-            <a:r>
-              <a:rPr lang="ru-RU" sz="1700">
-                <a:latin typeface="Arial" panose="020B0604020202020204" pitchFamily="34" charset="0"/>
-              </a:rPr>
-              <a:t>Критерий выбора: средняя RMSE – ошибка в единицах свойства, которая сильнее учитывает крупные промахи.</a:t>
-            </a:r>
-            <a:endParaRPr lang="ru-RU" sz="1700" dirty="0">
-              <a:latin typeface="Arial" panose="020B0604020202020204" pitchFamily="34" charset="0"/>
-            </a:endParaRPr>
           </a:p>
         </p:txBody>
       </p:sp>
@@ -23302,7 +22184,7 @@
                   <a:latin typeface="Arial" panose="020B0604020202020204" pitchFamily="34" charset="0"/>
                   <a:cs typeface="Arial" pitchFamily="2" charset="0"/>
                 </a:rPr>
-                <a:t>Тестирование модуля упругости при растяжении</a:t>
+                <a:t>Модуль упругости: прогноз среднего оказался лучшим</a:t>
               </a:r>
               <a:endParaRPr lang="ru-RU" sz="2600" b="1" spc="0" dirty="0">
                 <a:solidFill>
@@ -23630,7 +22512,7 @@
         <p:spPr>
           <a:xfrm>
             <a:off x="557784" y="1481328"/>
-            <a:ext cx="5120640" cy="822960"/>
+            <a:ext cx="5270500" cy="1155700"/>
           </a:xfrm>
           <a:prstGeom prst="rect">
             <a:avLst/>
@@ -23648,17 +22530,18 @@
               <a:buNone/>
             </a:pPr>
             <a:r>
-              <a:rPr lang="ru-RU" b="1" i="0">
+              <a:rPr lang="ru-RU" sz="1300" b="1" i="0">
                 <a:solidFill>
                   <a:srgbClr val="F1BE29"/>
                 </a:solidFill>
                 <a:latin typeface="Arial" panose="020B0604020202020204" pitchFamily="34" charset="0"/>
                 <a:cs typeface="Arial"/>
               </a:rPr>
-              <a:t>Выбор по перекрёстной проверке: прогноз среднего, RMSE 3,087 ГПа
-MAE – средняя абсолютная ошибка; R² сравнивает модель с прогнозом среднего и не является процентом точности</a:t>
+              <a:t>RMSE – среднеквадратичная ошибка; большие промахи увеличивают её сильнее
+MAE – средний размер ошибки
+R² – сравнение с прогнозом среднего, не процент точности</a:t>
             </a:r>
-            <a:endParaRPr b="1" i="0">
+            <a:endParaRPr sz="1300" b="1" i="0">
               <a:solidFill>
                 <a:srgbClr val="F1BE29"/>
               </a:solidFill>
@@ -23677,14 +22560,14 @@
           <p:nvPr>
             <p:extLst>
               <p:ext uri="{D42A27DB-BD31-4B8C-83A1-F6EECF244321}">
-                <p14:modId xmlns:p14="http://schemas.microsoft.com/office/powerpoint/2010/main" val="73827123"/>
+                <p14:modId xmlns:p14="http://schemas.microsoft.com/office/powerpoint/2010/main" val="3676934964"/>
               </p:ext>
             </p:extLst>
           </p:nvPr>
         </p:nvGraphicFramePr>
         <p:xfrm>
-          <a:off x="557784" y="2377440"/>
-          <a:ext cx="5120640" cy="2194560"/>
+          <a:off x="557784" y="2730500"/>
+          <a:ext cx="5120640" cy="1905000"/>
         </p:xfrm>
         <a:graphic>
           <a:graphicData uri="http://schemas.openxmlformats.org/drawingml/2006/table">
@@ -23715,7 +22598,7 @@
                   </a:extLst>
                 </a:gridCol>
               </a:tblGrid>
-              <a:tr h="548640">
+              <a:tr h="476250">
                 <a:tc>
                   <a:txBody>
                     <a:bodyPr/>
@@ -23761,30 +22644,20 @@
                     <a:bodyPr/>
                     <a:lstStyle/>
                     <a:p>
-                      <a:pPr marL="0" indent="0" algn="r">
+                      <a:pPr marL="0" indent="0" algn="l">
                         <a:buNone/>
                       </a:pPr>
                       <a:r>
-                        <a:rPr lang="ru-RU" sz="1300" b="1" i="0">
+                        <a:rPr lang="ru-RU" sz="1200" b="1" i="0">
                           <a:solidFill>
                             <a:srgbClr val="FFFFFF"/>
                           </a:solidFill>
                           <a:latin typeface="Arial" panose="020B0604020202020204" pitchFamily="34" charset="0"/>
                           <a:cs typeface="Arial"/>
                         </a:rPr>
-                        <a:t>обучение, </a:t>
+                        <a:t>716 строк</a:t>
                       </a:r>
-                      <a:r>
-                        <a:rPr lang="en-US" sz="1300" b="1" i="0">
-                          <a:solidFill>
-                            <a:srgbClr val="FFFFFF"/>
-                          </a:solidFill>
-                          <a:latin typeface="Arial" panose="020B0604020202020204" pitchFamily="34" charset="0"/>
-                          <a:cs typeface="Arial"/>
-                        </a:rPr>
-                        <a:t>n = 716</a:t>
-                      </a:r>
-                      <a:endParaRPr sz="1300" b="1" i="0">
+                      <a:endParaRPr sz="1200" b="1" i="0">
                         <a:solidFill>
                           <a:srgbClr val="FFFFFF"/>
                         </a:solidFill>
@@ -23809,7 +22682,7 @@
                       </a:solidFill>
                     </a:lnB>
                     <a:solidFill>
-                      <a:srgbClr val="065CAB"/>
+                      <a:srgbClr val="0E5DAB"/>
                     </a:solidFill>
                   </a:tcPr>
                 </a:tc>
@@ -23818,30 +22691,20 @@
                     <a:bodyPr/>
                     <a:lstStyle/>
                     <a:p>
-                      <a:pPr marL="0" indent="0" algn="r">
+                      <a:pPr marL="0" indent="0" algn="l">
                         <a:buNone/>
                       </a:pPr>
                       <a:r>
-                        <a:rPr lang="ru-RU" sz="1300" b="1" i="0">
+                        <a:rPr lang="ru-RU" sz="1200" b="1" i="0">
                           <a:solidFill>
                             <a:srgbClr val="FFFFFF"/>
                           </a:solidFill>
                           <a:latin typeface="Arial" panose="020B0604020202020204" pitchFamily="34" charset="0"/>
                           <a:cs typeface="Arial"/>
                         </a:rPr>
-                        <a:t>тест, </a:t>
+                        <a:t>307 строк</a:t>
                       </a:r>
-                      <a:r>
-                        <a:rPr lang="en-US" sz="1300" b="1" i="0">
-                          <a:solidFill>
-                            <a:srgbClr val="FFFFFF"/>
-                          </a:solidFill>
-                          <a:latin typeface="Arial" panose="020B0604020202020204" pitchFamily="34" charset="0"/>
-                          <a:cs typeface="Arial"/>
-                        </a:rPr>
-                        <a:t>n = 307</a:t>
-                      </a:r>
-                      <a:endParaRPr sz="1300" b="1" i="0">
+                      <a:endParaRPr sz="1200" b="1" i="0">
                         <a:solidFill>
                           <a:srgbClr val="FFFFFF"/>
                         </a:solidFill>
@@ -23866,7 +22729,7 @@
                       </a:solidFill>
                     </a:lnB>
                     <a:solidFill>
-                      <a:srgbClr val="065CAB"/>
+                      <a:srgbClr val="0E5DAB"/>
                     </a:solidFill>
                   </a:tcPr>
                 </a:tc>
@@ -23876,7 +22739,7 @@
                   </a:ext>
                 </a:extLst>
               </a:tr>
-              <a:tr h="548640">
+              <a:tr h="476250">
                 <a:tc>
                   <a:txBody>
                     <a:bodyPr/>
@@ -23982,7 +22845,7 @@
                   </a:ext>
                 </a:extLst>
               </a:tr>
-              <a:tr h="548640">
+              <a:tr h="476250">
                 <a:tc>
                   <a:txBody>
                     <a:bodyPr/>
@@ -24061,7 +22924,7 @@
                   </a:ext>
                 </a:extLst>
               </a:tr>
-              <a:tr h="548640">
+              <a:tr h="476250">
                 <a:tc>
                   <a:txBody>
                     <a:bodyPr/>
@@ -24231,17 +23094,18 @@
               <a:buNone/>
             </a:pPr>
             <a:r>
-              <a:rPr lang="ru-RU" sz="1500" i="0">
+              <a:rPr lang="ru-RU" i="0">
                 <a:solidFill>
                   <a:srgbClr val="262626"/>
                 </a:solidFill>
                 <a:latin typeface="Arial" panose="020B0604020202020204" pitchFamily="34" charset="0"/>
                 <a:cs typeface="Arial"/>
               </a:rPr>
-              <a:t>Горизонталь – фактическое значение, вертикаль – прогноз
-Диагональ означает идеальный прогноз; горизонтальная полоса – постоянный прогноз</a:t>
+              <a:t>Ось X – фактическое значение, ось Y – прогноз
+Диагональ – идеальный ответ
+Горизонтальная полоса – одно среднее для всех</a:t>
             </a:r>
-            <a:endParaRPr sz="1500" i="0">
+            <a:endParaRPr i="0">
               <a:solidFill>
                 <a:srgbClr val="262626"/>
               </a:solidFill>
@@ -24275,26 +23139,16 @@
               <a:buNone/>
             </a:pPr>
             <a:r>
-              <a:rPr lang="ru-RU" sz="1600" b="0" i="0">
+              <a:rPr lang="ru-RU" sz="1300" i="0">
                 <a:solidFill>
                   <a:srgbClr val="595959"/>
                 </a:solidFill>
                 <a:latin typeface="Arial" panose="020B0604020202020204" pitchFamily="34" charset="0"/>
                 <a:cs typeface="Arial"/>
               </a:rPr>
-              <a:t>Источник: РПЗ, рис. 8; </a:t>
+              <a:t>Источник: РПЗ, рисунок с фактическими и прогнозными значениями; reports/evaluation/metrics.csv</a:t>
             </a:r>
-            <a:r>
-              <a:rPr lang="en-US" sz="1600" b="0" i="0">
-                <a:solidFill>
-                  <a:srgbClr val="595959"/>
-                </a:solidFill>
-                <a:latin typeface="Arial" panose="020B0604020202020204" pitchFamily="34" charset="0"/>
-                <a:cs typeface="Arial"/>
-              </a:rPr>
-              <a:t>reports/evaluation/metrics.csv</a:t>
-            </a:r>
-            <a:endParaRPr sz="1600" b="0" i="0">
+            <a:endParaRPr sz="1300" i="0">
               <a:solidFill>
                 <a:srgbClr val="595959"/>
               </a:solidFill>
@@ -24336,15 +23190,76 @@
             </a:pPr>
             <a:fld id="{00000000-1234-1234-1234-123412341234}" type="slidenum">
               <a:rPr lang="ru-RU" smtClean="0">
-                <a:latin typeface="Arial" panose="020B0604020202020204" pitchFamily="34" charset="0"/>
                 <a:cs typeface="Arial"/>
               </a:rPr>
               <a:t>9</a:t>
             </a:fld>
             <a:endParaRPr lang="ru-RU" dirty="0">
-              <a:latin typeface="Arial" panose="020B0604020202020204" pitchFamily="34" charset="0"/>
               <a:cs typeface="Arial"/>
             </a:endParaRPr>
+          </a:p>
+        </p:txBody>
+      </p:sp>
+      <p:sp>
+        <p:nvSpPr>
+          <p:cNvPr id="2" name="ModuleLegendCover">
+            <a:extLst>
+              <a:ext uri="{FF2B5EF4-FFF2-40B4-BE49-F238E27FC236}">
+                <a16:creationId xmlns:a16="http://schemas.microsoft.com/office/drawing/2014/main" id="{FA231F85-6837-4344-9B7C-D6A595BDA11B}"/>
+              </a:ext>
+            </a:extLst>
+          </p:cNvPr>
+          <p:cNvSpPr/>
+          <p:nvPr/>
+        </p:nvSpPr>
+        <p:spPr>
+          <a:xfrm>
+            <a:off x="6794500" y="1841500"/>
+            <a:ext cx="2095500" cy="787400"/>
+          </a:xfrm>
+          <a:prstGeom prst="roundRect">
+            <a:avLst/>
+          </a:prstGeom>
+          <a:solidFill>
+            <a:srgbClr val="FFFFFF"/>
+          </a:solidFill>
+          <a:ln w="17780">
+            <a:solidFill>
+              <a:srgbClr val="FFFFFF"/>
+            </a:solidFill>
+          </a:ln>
+        </p:spPr>
+        <p:style>
+          <a:lnRef idx="2">
+            <a:schemeClr val="accent1">
+              <a:shade val="50000"/>
+            </a:schemeClr>
+          </a:lnRef>
+          <a:fillRef idx="1">
+            <a:schemeClr val="accent1"/>
+          </a:fillRef>
+          <a:effectRef idx="0">
+            <a:schemeClr val="accent1"/>
+          </a:effectRef>
+          <a:fontRef idx="minor">
+            <a:schemeClr val="lt1"/>
+          </a:fontRef>
+        </p:style>
+        <p:txBody>
+          <a:bodyPr wrap="square" lIns="101600" tIns="76200" rIns="101600" bIns="76200" rtlCol="0" anchor="ctr"/>
+          <a:lstStyle/>
+          <a:p>
+            <a:pPr algn="ctr"/>
+            <a:r>
+              <a:rPr lang="ru-RU" sz="1000">
+                <a:solidFill>
+                  <a:srgbClr val="262626"/>
+                </a:solidFill>
+                <a:latin typeface="Arial" panose="020B0604020202020204" pitchFamily="34" charset="0"/>
+              </a:rPr>
+              <a:t>Синие точки – обучение, 716
+Оранжевые – итоговая проверка, 307</a:t>
+            </a:r>
           </a:p>
         </p:txBody>
       </p:sp>

--- a/presentation/Презентация.pptx
+++ b/presentation/Презентация.pptx
@@ -8876,49 +8876,6 @@
       </p:sp>
       <p:sp>
         <p:nvSpPr>
-          <p:cNvPr id="83" name="Источник"/>
-          <p:cNvSpPr txBox="1"/>
-          <p:nvPr/>
-        </p:nvSpPr>
-        <p:spPr>
-          <a:xfrm>
-            <a:off x="960120" y="6336792"/>
-            <a:ext cx="10808208" cy="365760"/>
-          </a:xfrm>
-          <a:prstGeom prst="rect">
-            <a:avLst/>
-          </a:prstGeom>
-          <a:noFill/>
-        </p:spPr>
-        <p:txBody>
-          <a:bodyPr wrap="square" lIns="0" tIns="0" rIns="0" bIns="0" anchor="ctr"/>
-          <a:lstStyle/>
-          <a:p>
-            <a:pPr marL="0" indent="0" algn="l">
-              <a:buNone/>
-            </a:pPr>
-            <a:r>
-              <a:rPr lang="ru-RU" sz="1300" i="0">
-                <a:solidFill>
-                  <a:srgbClr val="595959"/>
-                </a:solidFill>
-                <a:latin typeface="Arial" panose="020B0604020202020204" pitchFamily="34" charset="0"/>
-                <a:cs typeface="Arial"/>
-              </a:rPr>
-              <a:t>Источник: РПЗ, рисунок с фактическими и прогнозными значениями; reports/evaluation/metrics.csv</a:t>
-            </a:r>
-            <a:endParaRPr sz="1300" i="0">
-              <a:solidFill>
-                <a:srgbClr val="595959"/>
-              </a:solidFill>
-              <a:latin typeface="Arial" panose="020B0604020202020204" pitchFamily="34" charset="0"/>
-              <a:cs typeface="Arial"/>
-            </a:endParaRPr>
-          </a:p>
-        </p:txBody>
-      </p:sp>
-      <p:sp>
-        <p:nvSpPr>
           <p:cNvPr id="4" name="Номер слайда 3">
             <a:extLst>
               <a:ext uri="{FF2B5EF4-FFF2-40B4-BE49-F238E27FC236}">
@@ -9848,49 +9805,6 @@
       </p:cxnSp>
       <p:sp>
         <p:nvSpPr>
-          <p:cNvPr id="91" name="Источник"/>
-          <p:cNvSpPr txBox="1"/>
-          <p:nvPr/>
-        </p:nvSpPr>
-        <p:spPr>
-          <a:xfrm>
-            <a:off x="960120" y="6336792"/>
-            <a:ext cx="10808208" cy="365760"/>
-          </a:xfrm>
-          <a:prstGeom prst="rect">
-            <a:avLst/>
-          </a:prstGeom>
-          <a:noFill/>
-        </p:spPr>
-        <p:txBody>
-          <a:bodyPr wrap="square" lIns="0" tIns="0" rIns="0" bIns="0" anchor="ctr"/>
-          <a:lstStyle/>
-          <a:p>
-            <a:pPr marL="0" indent="0" algn="l">
-              <a:buNone/>
-            </a:pPr>
-            <a:r>
-              <a:rPr lang="ru-RU" sz="1300" i="0">
-                <a:solidFill>
-                  <a:srgbClr val="595959"/>
-                </a:solidFill>
-                <a:latin typeface="Arial" panose="020B0604020202020204" pitchFamily="34" charset="0"/>
-                <a:cs typeface="Arial"/>
-              </a:rPr>
-              <a:t>Источник: РПЗ, раздел о нейросети</a:t>
-            </a:r>
-            <a:endParaRPr sz="1300" i="0">
-              <a:solidFill>
-                <a:srgbClr val="595959"/>
-              </a:solidFill>
-              <a:latin typeface="Arial" panose="020B0604020202020204" pitchFamily="34" charset="0"/>
-              <a:cs typeface="Arial"/>
-            </a:endParaRPr>
-          </a:p>
-        </p:txBody>
-      </p:sp>
-      <p:sp>
-        <p:nvSpPr>
           <p:cNvPr id="4" name="Номер слайда 3">
             <a:extLst>
               <a:ext uri="{FF2B5EF4-FFF2-40B4-BE49-F238E27FC236}">
@@ -10497,59 +10411,6 @@
           </p:txBody>
         </p:sp>
       </p:grpSp>
-      <p:sp>
-        <p:nvSpPr>
-          <p:cNvPr id="73" name="Источник"/>
-          <p:cNvSpPr txBox="1"/>
-          <p:nvPr/>
-        </p:nvSpPr>
-        <p:spPr>
-          <a:xfrm>
-            <a:off x="960120" y="6336792"/>
-            <a:ext cx="10808208" cy="365760"/>
-          </a:xfrm>
-          <a:prstGeom prst="rect">
-            <a:avLst/>
-          </a:prstGeom>
-          <a:noFill/>
-        </p:spPr>
-        <p:txBody>
-          <a:bodyPr wrap="square" lIns="0" tIns="0" rIns="0" bIns="0" anchor="ctr"/>
-          <a:lstStyle/>
-          <a:p>
-            <a:pPr marL="0" indent="0" algn="l">
-              <a:buNone/>
-            </a:pPr>
-            <a:r>
-              <a:rPr lang="ru-RU" sz="1300" i="0">
-                <a:solidFill>
-                  <a:srgbClr val="595959"/>
-                </a:solidFill>
-                <a:latin typeface="Arial" panose="020B0604020202020204" pitchFamily="34" charset="0"/>
-                <a:cs typeface="Arial"/>
-              </a:rPr>
-              <a:t>Источник: РПЗ, таблица результатов нейросети; </a:t>
-            </a:r>
-            <a:r>
-              <a:rPr lang="en-US" sz="1300" i="0">
-                <a:solidFill>
-                  <a:srgbClr val="595959"/>
-                </a:solidFill>
-                <a:latin typeface="Arial" panose="020B0604020202020204" pitchFamily="34" charset="0"/>
-                <a:cs typeface="Arial"/>
-              </a:rPr>
-              <a:t>reports/evaluation/metrics.csv</a:t>
-            </a:r>
-            <a:endParaRPr sz="1300" i="0">
-              <a:solidFill>
-                <a:srgbClr val="595959"/>
-              </a:solidFill>
-              <a:latin typeface="Arial" panose="020B0604020202020204" pitchFamily="34" charset="0"/>
-              <a:cs typeface="Arial"/>
-            </a:endParaRPr>
-          </a:p>
-        </p:txBody>
-      </p:sp>
       <p:sp>
         <p:nvSpPr>
           <p:cNvPr id="4" name="Номер слайда 3">
@@ -11645,59 +11506,6 @@
       </p:sp>
       <p:sp>
         <p:nvSpPr>
-          <p:cNvPr id="78" name="Источник"/>
-          <p:cNvSpPr txBox="1"/>
-          <p:nvPr/>
-        </p:nvSpPr>
-        <p:spPr>
-          <a:xfrm>
-            <a:off x="960120" y="6336792"/>
-            <a:ext cx="10808208" cy="365760"/>
-          </a:xfrm>
-          <a:prstGeom prst="rect">
-            <a:avLst/>
-          </a:prstGeom>
-          <a:noFill/>
-        </p:spPr>
-        <p:txBody>
-          <a:bodyPr wrap="square" lIns="0" tIns="0" rIns="0" bIns="0" anchor="ctr"/>
-          <a:lstStyle/>
-          <a:p>
-            <a:pPr marL="0" indent="0" algn="l">
-              <a:buNone/>
-            </a:pPr>
-            <a:r>
-              <a:rPr lang="ru-RU" sz="1300" i="0">
-                <a:solidFill>
-                  <a:srgbClr val="595959"/>
-                </a:solidFill>
-                <a:latin typeface="Arial" panose="020B0604020202020204" pitchFamily="34" charset="0"/>
-                <a:cs typeface="Arial"/>
-              </a:rPr>
-              <a:t>Источник: РПЗ, рисунок с важностью характеристик; </a:t>
-            </a:r>
-            <a:r>
-              <a:rPr lang="en-US" sz="1300" i="0">
-                <a:solidFill>
-                  <a:srgbClr val="595959"/>
-                </a:solidFill>
-                <a:latin typeface="Arial" panose="020B0604020202020204" pitchFamily="34" charset="0"/>
-                <a:cs typeface="Arial"/>
-              </a:rPr>
-              <a:t>reports/evaluation/permutation_importance.csv</a:t>
-            </a:r>
-            <a:endParaRPr sz="1300" i="0">
-              <a:solidFill>
-                <a:srgbClr val="595959"/>
-              </a:solidFill>
-              <a:latin typeface="Arial" panose="020B0604020202020204" pitchFamily="34" charset="0"/>
-              <a:cs typeface="Arial"/>
-            </a:endParaRPr>
-          </a:p>
-        </p:txBody>
-      </p:sp>
-      <p:sp>
-        <p:nvSpPr>
           <p:cNvPr id="4" name="Номер слайда 3">
             <a:extLst>
               <a:ext uri="{FF2B5EF4-FFF2-40B4-BE49-F238E27FC236}">
@@ -13007,49 +12815,6 @@
       </p:sp>
       <p:sp>
         <p:nvSpPr>
-          <p:cNvPr id="91" name="Источник"/>
-          <p:cNvSpPr txBox="1"/>
-          <p:nvPr/>
-        </p:nvSpPr>
-        <p:spPr>
-          <a:xfrm>
-            <a:off x="960120" y="6336792"/>
-            <a:ext cx="10808208" cy="365760"/>
-          </a:xfrm>
-          <a:prstGeom prst="rect">
-            <a:avLst/>
-          </a:prstGeom>
-          <a:noFill/>
-        </p:spPr>
-        <p:txBody>
-          <a:bodyPr wrap="square" lIns="0" tIns="0" rIns="0" bIns="0" anchor="ctr"/>
-          <a:lstStyle/>
-          <a:p>
-            <a:pPr marL="0" indent="0" algn="l">
-              <a:buNone/>
-            </a:pPr>
-            <a:r>
-              <a:rPr lang="ru-RU" sz="1300" i="0">
-                <a:solidFill>
-                  <a:srgbClr val="595959"/>
-                </a:solidFill>
-                <a:latin typeface="Arial" panose="020B0604020202020204" pitchFamily="34" charset="0"/>
-                <a:cs typeface="Arial"/>
-              </a:rPr>
-              <a:t>Источник: РПЗ, раздел о приложении и репозитории; docs/application.md</a:t>
-            </a:r>
-            <a:endParaRPr sz="1300" i="0">
-              <a:solidFill>
-                <a:srgbClr val="595959"/>
-              </a:solidFill>
-              <a:latin typeface="Arial" panose="020B0604020202020204" pitchFamily="34" charset="0"/>
-              <a:cs typeface="Arial"/>
-            </a:endParaRPr>
-          </a:p>
-        </p:txBody>
-      </p:sp>
-      <p:sp>
-        <p:nvSpPr>
           <p:cNvPr id="2" name="Номер слайда 3">
             <a:extLst>
               <a:ext uri="{FF2B5EF4-FFF2-40B4-BE49-F238E27FC236}">
@@ -14206,69 +13971,6 @@
       </p:sp>
       <p:sp>
         <p:nvSpPr>
-          <p:cNvPr id="92" name="Источник"/>
-          <p:cNvSpPr txBox="1"/>
-          <p:nvPr/>
-        </p:nvSpPr>
-        <p:spPr>
-          <a:xfrm>
-            <a:off x="960120" y="6336792"/>
-            <a:ext cx="10808208" cy="365760"/>
-          </a:xfrm>
-          <a:prstGeom prst="rect">
-            <a:avLst/>
-          </a:prstGeom>
-          <a:noFill/>
-        </p:spPr>
-        <p:txBody>
-          <a:bodyPr wrap="square" lIns="0" tIns="0" rIns="0" bIns="0" anchor="ctr"/>
-          <a:lstStyle/>
-          <a:p>
-            <a:pPr marL="0" indent="0" algn="l">
-              <a:buNone/>
-            </a:pPr>
-            <a:r>
-              <a:rPr lang="ru-RU" sz="1300" i="0">
-                <a:solidFill>
-                  <a:srgbClr val="595959"/>
-                </a:solidFill>
-                <a:latin typeface="Arial" panose="020B0604020202020204" pitchFamily="34" charset="0"/>
-                <a:cs typeface="Arial"/>
-              </a:rPr>
-              <a:t>Источник: </a:t>
-            </a:r>
-            <a:r>
-              <a:rPr lang="en-US" sz="1300" i="0">
-                <a:solidFill>
-                  <a:srgbClr val="595959"/>
-                </a:solidFill>
-                <a:latin typeface="Arial" panose="020B0604020202020204" pitchFamily="34" charset="0"/>
-                <a:cs typeface="Arial"/>
-              </a:rPr>
-              <a:t>reports/evaluation/metrics.csv; </a:t>
-            </a:r>
-            <a:r>
-              <a:rPr lang="ru-RU" sz="1300" i="0">
-                <a:solidFill>
-                  <a:srgbClr val="595959"/>
-                </a:solidFill>
-                <a:latin typeface="Arial" panose="020B0604020202020204" pitchFamily="34" charset="0"/>
-                <a:cs typeface="Arial"/>
-              </a:rPr>
-              <a:t>РПЗ, заключение</a:t>
-            </a:r>
-            <a:endParaRPr sz="1300" i="0">
-              <a:solidFill>
-                <a:srgbClr val="595959"/>
-              </a:solidFill>
-              <a:latin typeface="Arial" panose="020B0604020202020204" pitchFamily="34" charset="0"/>
-              <a:cs typeface="Arial"/>
-            </a:endParaRPr>
-          </a:p>
-        </p:txBody>
-      </p:sp>
-      <p:sp>
-        <p:nvSpPr>
           <p:cNvPr id="4" name="Номер слайда 3">
             <a:extLst>
               <a:ext uri="{FF2B5EF4-FFF2-40B4-BE49-F238E27FC236}">
@@ -15256,49 +14958,6 @@
             <a:endParaRPr sz="1700" i="0">
               <a:solidFill>
                 <a:srgbClr val="262626"/>
-              </a:solidFill>
-              <a:latin typeface="Arial" panose="020B0604020202020204" pitchFamily="34" charset="0"/>
-              <a:cs typeface="Arial"/>
-            </a:endParaRPr>
-          </a:p>
-        </p:txBody>
-      </p:sp>
-      <p:sp>
-        <p:nvSpPr>
-          <p:cNvPr id="88" name="Источник"/>
-          <p:cNvSpPr txBox="1"/>
-          <p:nvPr/>
-        </p:nvSpPr>
-        <p:spPr>
-          <a:xfrm>
-            <a:off x="960120" y="6336792"/>
-            <a:ext cx="10808208" cy="365760"/>
-          </a:xfrm>
-          <a:prstGeom prst="rect">
-            <a:avLst/>
-          </a:prstGeom>
-          <a:noFill/>
-        </p:spPr>
-        <p:txBody>
-          <a:bodyPr wrap="square" lIns="0" tIns="0" rIns="0" bIns="0" anchor="ctr"/>
-          <a:lstStyle/>
-          <a:p>
-            <a:pPr marL="0" indent="0" algn="l">
-              <a:buNone/>
-            </a:pPr>
-            <a:r>
-              <a:rPr lang="ru-RU" i="0">
-                <a:solidFill>
-                  <a:srgbClr val="595959"/>
-                </a:solidFill>
-                <a:latin typeface="Arial" panose="020B0604020202020204" pitchFamily="34" charset="0"/>
-                <a:cs typeface="Arial"/>
-              </a:rPr>
-              <a:t>Источник: РПЗ, введение</a:t>
-            </a:r>
-            <a:endParaRPr i="0">
-              <a:solidFill>
-                <a:srgbClr val="595959"/>
               </a:solidFill>
               <a:latin typeface="Arial" panose="020B0604020202020204" pitchFamily="34" charset="0"/>
               <a:cs typeface="Arial"/>
@@ -16697,49 +16356,6 @@
       </p:sp>
       <p:sp>
         <p:nvSpPr>
-          <p:cNvPr id="87" name="Источник"/>
-          <p:cNvSpPr txBox="1"/>
-          <p:nvPr/>
-        </p:nvSpPr>
-        <p:spPr>
-          <a:xfrm>
-            <a:off x="960120" y="6336792"/>
-            <a:ext cx="10808208" cy="365760"/>
-          </a:xfrm>
-          <a:prstGeom prst="rect">
-            <a:avLst/>
-          </a:prstGeom>
-          <a:noFill/>
-        </p:spPr>
-        <p:txBody>
-          <a:bodyPr wrap="square" lIns="0" tIns="0" rIns="0" bIns="0" anchor="ctr"/>
-          <a:lstStyle/>
-          <a:p>
-            <a:pPr marL="0" indent="0" algn="l">
-              <a:buNone/>
-            </a:pPr>
-            <a:r>
-              <a:rPr lang="ru-RU" sz="1300" i="0">
-                <a:solidFill>
-                  <a:srgbClr val="595959"/>
-                </a:solidFill>
-                <a:latin typeface="Arial" panose="020B0604020202020204" pitchFamily="34" charset="0"/>
-                <a:cs typeface="Arial"/>
-              </a:rPr>
-              <a:t>Источник: РПЗ, раздел 1.1 и таблица исходных данных; словарь данных репозитория</a:t>
-            </a:r>
-            <a:endParaRPr sz="1300" i="0">
-              <a:solidFill>
-                <a:srgbClr val="595959"/>
-              </a:solidFill>
-              <a:latin typeface="Arial" panose="020B0604020202020204" pitchFamily="34" charset="0"/>
-              <a:cs typeface="Arial"/>
-            </a:endParaRPr>
-          </a:p>
-        </p:txBody>
-      </p:sp>
-      <p:sp>
-        <p:nvSpPr>
           <p:cNvPr id="4" name="Номер слайда 3">
             <a:extLst>
               <a:ext uri="{FF2B5EF4-FFF2-40B4-BE49-F238E27FC236}">
@@ -17175,49 +16791,6 @@
       </p:grpSp>
       <p:sp>
         <p:nvSpPr>
-          <p:cNvPr id="76" name="Источник"/>
-          <p:cNvSpPr txBox="1"/>
-          <p:nvPr/>
-        </p:nvSpPr>
-        <p:spPr>
-          <a:xfrm>
-            <a:off x="960120" y="6336792"/>
-            <a:ext cx="10808208" cy="365760"/>
-          </a:xfrm>
-          <a:prstGeom prst="rect">
-            <a:avLst/>
-          </a:prstGeom>
-          <a:noFill/>
-        </p:spPr>
-        <p:txBody>
-          <a:bodyPr wrap="square" lIns="0" tIns="0" rIns="0" bIns="0" anchor="ctr"/>
-          <a:lstStyle/>
-          <a:p>
-            <a:pPr marL="0" indent="0" algn="l">
-              <a:buNone/>
-            </a:pPr>
-            <a:r>
-              <a:rPr lang="ru-RU" sz="1300" i="0">
-                <a:solidFill>
-                  <a:srgbClr val="595959"/>
-                </a:solidFill>
-                <a:latin typeface="Arial" panose="020B0604020202020204" pitchFamily="34" charset="0"/>
-                <a:cs typeface="Arial"/>
-              </a:rPr>
-              <a:t>Источник: РПЗ, разделы 1.2 и 2.1–2.6</a:t>
-            </a:r>
-            <a:endParaRPr sz="1300" i="0">
-              <a:solidFill>
-                <a:srgbClr val="595959"/>
-              </a:solidFill>
-              <a:latin typeface="Arial" panose="020B0604020202020204" pitchFamily="34" charset="0"/>
-              <a:cs typeface="Arial"/>
-            </a:endParaRPr>
-          </a:p>
-        </p:txBody>
-      </p:sp>
-      <p:sp>
-        <p:nvSpPr>
           <p:cNvPr id="5" name="Номер слайда 3">
             <a:extLst>
               <a:ext uri="{FF2B5EF4-FFF2-40B4-BE49-F238E27FC236}">
@@ -17255,81 +16828,6 @@
             <a:endParaRPr lang="ru-RU" dirty="0">
               <a:cs typeface="Arial"/>
             </a:endParaRPr>
-          </a:p>
-        </p:txBody>
-      </p:sp>
-      <p:sp>
-        <p:nvSpPr>
-          <p:cNvPr id="7" name="Текст 6">
-            <a:extLst>
-              <a:ext uri="{FF2B5EF4-FFF2-40B4-BE49-F238E27FC236}">
-                <a16:creationId xmlns:a16="http://schemas.microsoft.com/office/drawing/2014/main" id="{C819DC7D-B729-474D-92A8-9E837866C3EF}"/>
-              </a:ext>
-            </a:extLst>
-          </p:cNvPr>
-          <p:cNvSpPr>
-            <a:spLocks noGrp="1"/>
-          </p:cNvSpPr>
-          <p:nvPr>
-            <p:ph type="body" idx="14"/>
-          </p:nvPr>
-        </p:nvSpPr>
-        <p:spPr/>
-        <p:txBody>
-          <a:bodyPr/>
-          <a:lstStyle/>
-          <a:p>
-            <a:endParaRPr lang="ru-RU"/>
-          </a:p>
-        </p:txBody>
-      </p:sp>
-      <p:sp>
-        <p:nvSpPr>
-          <p:cNvPr id="9" name="Текст 8">
-            <a:extLst>
-              <a:ext uri="{FF2B5EF4-FFF2-40B4-BE49-F238E27FC236}">
-                <a16:creationId xmlns:a16="http://schemas.microsoft.com/office/drawing/2014/main" id="{7ED6C69E-38D1-4DED-9DAC-27FB7BBABA46}"/>
-              </a:ext>
-            </a:extLst>
-          </p:cNvPr>
-          <p:cNvSpPr>
-            <a:spLocks noGrp="1"/>
-          </p:cNvSpPr>
-          <p:nvPr>
-            <p:ph type="body" idx="2"/>
-          </p:nvPr>
-        </p:nvSpPr>
-        <p:spPr/>
-        <p:txBody>
-          <a:bodyPr/>
-          <a:lstStyle/>
-          <a:p>
-            <a:endParaRPr lang="ru-RU"/>
-          </a:p>
-        </p:txBody>
-      </p:sp>
-      <p:sp>
-        <p:nvSpPr>
-          <p:cNvPr id="11" name="Текст 10">
-            <a:extLst>
-              <a:ext uri="{FF2B5EF4-FFF2-40B4-BE49-F238E27FC236}">
-                <a16:creationId xmlns:a16="http://schemas.microsoft.com/office/drawing/2014/main" id="{1C545EA9-F8A6-44B3-B6BB-7EAE56AE6AAB}"/>
-              </a:ext>
-            </a:extLst>
-          </p:cNvPr>
-          <p:cNvSpPr>
-            <a:spLocks noGrp="1"/>
-          </p:cNvSpPr>
-          <p:nvPr>
-            <p:ph type="body" idx="13"/>
-          </p:nvPr>
-        </p:nvSpPr>
-        <p:spPr/>
-        <p:txBody>
-          <a:bodyPr/>
-          <a:lstStyle/>
-          <a:p>
-            <a:endParaRPr lang="ru-RU"/>
           </a:p>
         </p:txBody>
       </p:sp>
@@ -18332,49 +17830,6 @@
           </p:txBody>
         </p:sp>
       </p:grpSp>
-      <p:sp>
-        <p:nvSpPr>
-          <p:cNvPr id="83" name="Источник"/>
-          <p:cNvSpPr txBox="1"/>
-          <p:nvPr/>
-        </p:nvSpPr>
-        <p:spPr>
-          <a:xfrm>
-            <a:off x="960120" y="6336792"/>
-            <a:ext cx="10808208" cy="365760"/>
-          </a:xfrm>
-          <a:prstGeom prst="rect">
-            <a:avLst/>
-          </a:prstGeom>
-          <a:noFill/>
-        </p:spPr>
-        <p:txBody>
-          <a:bodyPr wrap="square" lIns="0" tIns="0" rIns="0" bIns="0" anchor="ctr"/>
-          <a:lstStyle/>
-          <a:p>
-            <a:pPr marL="0" indent="0" algn="l">
-              <a:buNone/>
-            </a:pPr>
-            <a:r>
-              <a:rPr lang="ru-RU" sz="1300" i="0">
-                <a:solidFill>
-                  <a:srgbClr val="595959"/>
-                </a:solidFill>
-                <a:latin typeface="Arial" panose="020B0604020202020204" pitchFamily="34" charset="0"/>
-                <a:cs typeface="Arial"/>
-              </a:rPr>
-              <a:t>Источник: РПЗ, разделы 1.1, 1.2 и 2.1</a:t>
-            </a:r>
-            <a:endParaRPr sz="1300" i="0">
-              <a:solidFill>
-                <a:srgbClr val="595959"/>
-              </a:solidFill>
-              <a:latin typeface="Arial" panose="020B0604020202020204" pitchFamily="34" charset="0"/>
-              <a:cs typeface="Arial"/>
-            </a:endParaRPr>
-          </a:p>
-        </p:txBody>
-      </p:sp>
       <p:sp>
         <p:nvSpPr>
           <p:cNvPr id="4" name="Номер слайда 3">
@@ -19461,49 +18916,6 @@
       </p:sp>
       <p:sp>
         <p:nvSpPr>
-          <p:cNvPr id="82" name="Источник"/>
-          <p:cNvSpPr txBox="1"/>
-          <p:nvPr/>
-        </p:nvSpPr>
-        <p:spPr>
-          <a:xfrm>
-            <a:off x="960120" y="6336792"/>
-            <a:ext cx="10808208" cy="365760"/>
-          </a:xfrm>
-          <a:prstGeom prst="rect">
-            <a:avLst/>
-          </a:prstGeom>
-          <a:noFill/>
-        </p:spPr>
-        <p:txBody>
-          <a:bodyPr wrap="square" lIns="0" tIns="0" rIns="0" bIns="0" anchor="ctr"/>
-          <a:lstStyle/>
-          <a:p>
-            <a:pPr marL="0" indent="0" algn="l">
-              <a:buNone/>
-            </a:pPr>
-            <a:r>
-              <a:rPr lang="ru-RU" sz="1300" i="0">
-                <a:solidFill>
-                  <a:srgbClr val="595959"/>
-                </a:solidFill>
-                <a:latin typeface="Arial" panose="020B0604020202020204" pitchFamily="34" charset="0"/>
-                <a:cs typeface="Arial"/>
-              </a:rPr>
-              <a:t>Источник: РПЗ, раздел разведочного анализа и рисунок с распределениями</a:t>
-            </a:r>
-            <a:endParaRPr sz="1300" i="0">
-              <a:solidFill>
-                <a:srgbClr val="595959"/>
-              </a:solidFill>
-              <a:latin typeface="Arial" panose="020B0604020202020204" pitchFamily="34" charset="0"/>
-              <a:cs typeface="Arial"/>
-            </a:endParaRPr>
-          </a:p>
-        </p:txBody>
-      </p:sp>
-      <p:sp>
-        <p:nvSpPr>
           <p:cNvPr id="4" name="Номер слайда 3">
             <a:extLst>
               <a:ext uri="{FF2B5EF4-FFF2-40B4-BE49-F238E27FC236}">
@@ -20599,59 +20011,6 @@
       </p:sp>
       <p:sp>
         <p:nvSpPr>
-          <p:cNvPr id="90" name="Источник"/>
-          <p:cNvSpPr txBox="1"/>
-          <p:nvPr/>
-        </p:nvSpPr>
-        <p:spPr>
-          <a:xfrm>
-            <a:off x="960120" y="6336792"/>
-            <a:ext cx="10808208" cy="365760"/>
-          </a:xfrm>
-          <a:prstGeom prst="rect">
-            <a:avLst/>
-          </a:prstGeom>
-          <a:noFill/>
-        </p:spPr>
-        <p:txBody>
-          <a:bodyPr wrap="square" lIns="0" tIns="0" rIns="0" bIns="0" anchor="ctr"/>
-          <a:lstStyle/>
-          <a:p>
-            <a:pPr marL="0" indent="0" algn="l">
-              <a:buNone/>
-            </a:pPr>
-            <a:r>
-              <a:rPr lang="ru-RU" sz="1300" i="0">
-                <a:solidFill>
-                  <a:srgbClr val="595959"/>
-                </a:solidFill>
-                <a:latin typeface="Arial" panose="020B0604020202020204" pitchFamily="34" charset="0"/>
-                <a:cs typeface="Arial"/>
-              </a:rPr>
-              <a:t>Источник: РПЗ, раздел предобработки; </a:t>
-            </a:r>
-            <a:r>
-              <a:rPr lang="en-US" sz="1300" i="0">
-                <a:solidFill>
-                  <a:srgbClr val="595959"/>
-                </a:solidFill>
-                <a:latin typeface="Arial" panose="020B0604020202020204" pitchFamily="34" charset="0"/>
-                <a:cs typeface="Arial"/>
-              </a:rPr>
-              <a:t>reports/modeling/preprocessing_audit.json</a:t>
-            </a:r>
-            <a:endParaRPr sz="1300" i="0">
-              <a:solidFill>
-                <a:srgbClr val="595959"/>
-              </a:solidFill>
-              <a:latin typeface="Arial" panose="020B0604020202020204" pitchFamily="34" charset="0"/>
-              <a:cs typeface="Arial"/>
-            </a:endParaRPr>
-          </a:p>
-        </p:txBody>
-      </p:sp>
-      <p:sp>
-        <p:nvSpPr>
           <p:cNvPr id="4" name="Номер слайда 3">
             <a:extLst>
               <a:ext uri="{FF2B5EF4-FFF2-40B4-BE49-F238E27FC236}">
@@ -21085,49 +20444,6 @@
           </p:txBody>
         </p:sp>
       </p:grpSp>
-      <p:sp>
-        <p:nvSpPr>
-          <p:cNvPr id="79" name="Источник"/>
-          <p:cNvSpPr txBox="1"/>
-          <p:nvPr/>
-        </p:nvSpPr>
-        <p:spPr>
-          <a:xfrm>
-            <a:off x="960120" y="6336792"/>
-            <a:ext cx="10808208" cy="365760"/>
-          </a:xfrm>
-          <a:prstGeom prst="rect">
-            <a:avLst/>
-          </a:prstGeom>
-          <a:noFill/>
-        </p:spPr>
-        <p:txBody>
-          <a:bodyPr wrap="square" lIns="0" tIns="0" rIns="0" bIns="0" anchor="ctr"/>
-          <a:lstStyle/>
-          <a:p>
-            <a:pPr marL="0" indent="0" algn="l">
-              <a:buNone/>
-            </a:pPr>
-            <a:r>
-              <a:rPr lang="ru-RU" sz="1300" i="0">
-                <a:solidFill>
-                  <a:srgbClr val="595959"/>
-                </a:solidFill>
-                <a:latin typeface="Arial" panose="020B0604020202020204" pitchFamily="34" charset="0"/>
-                <a:cs typeface="Arial"/>
-              </a:rPr>
-              <a:t>Источник: РПЗ, разделы о методах и проверке моделей; reports/modeling/cv_summary.csv</a:t>
-            </a:r>
-            <a:endParaRPr sz="1300" i="0">
-              <a:solidFill>
-                <a:srgbClr val="595959"/>
-              </a:solidFill>
-              <a:latin typeface="Arial" panose="020B0604020202020204" pitchFamily="34" charset="0"/>
-              <a:cs typeface="Arial"/>
-            </a:endParaRPr>
-          </a:p>
-        </p:txBody>
-      </p:sp>
       <p:sp>
         <p:nvSpPr>
           <p:cNvPr id="4" name="Номер слайда 3">
@@ -23117,49 +22433,6 @@
       </p:sp>
       <p:sp>
         <p:nvSpPr>
-          <p:cNvPr id="78" name="Источник"/>
-          <p:cNvSpPr txBox="1"/>
-          <p:nvPr/>
-        </p:nvSpPr>
-        <p:spPr>
-          <a:xfrm>
-            <a:off x="960120" y="6336792"/>
-            <a:ext cx="10808208" cy="365760"/>
-          </a:xfrm>
-          <a:prstGeom prst="rect">
-            <a:avLst/>
-          </a:prstGeom>
-          <a:noFill/>
-        </p:spPr>
-        <p:txBody>
-          <a:bodyPr wrap="square" lIns="0" tIns="0" rIns="0" bIns="0" anchor="ctr"/>
-          <a:lstStyle/>
-          <a:p>
-            <a:pPr marL="0" indent="0" algn="l">
-              <a:buNone/>
-            </a:pPr>
-            <a:r>
-              <a:rPr lang="ru-RU" sz="1300" i="0">
-                <a:solidFill>
-                  <a:srgbClr val="595959"/>
-                </a:solidFill>
-                <a:latin typeface="Arial" panose="020B0604020202020204" pitchFamily="34" charset="0"/>
-                <a:cs typeface="Arial"/>
-              </a:rPr>
-              <a:t>Источник: РПЗ, рисунок с фактическими и прогнозными значениями; reports/evaluation/metrics.csv</a:t>
-            </a:r>
-            <a:endParaRPr sz="1300" i="0">
-              <a:solidFill>
-                <a:srgbClr val="595959"/>
-              </a:solidFill>
-              <a:latin typeface="Arial" panose="020B0604020202020204" pitchFamily="34" charset="0"/>
-              <a:cs typeface="Arial"/>
-            </a:endParaRPr>
-          </a:p>
-        </p:txBody>
-      </p:sp>
-      <p:sp>
-        <p:nvSpPr>
           <p:cNvPr id="4" name="Номер слайда 3">
             <a:extLst>
               <a:ext uri="{FF2B5EF4-FFF2-40B4-BE49-F238E27FC236}">
